--- a/FIM_BookJ4_Objections_V6-01062026SHY-TE.pptx
+++ b/FIM_BookJ4_Objections_V6-01062026SHY-TE.pptx
@@ -8,6 +8,7 @@
     <p:sldId id="256" r:id="rId7"/>
     <p:sldId id="257" r:id="rId8"/>
     <p:sldId id="258" r:id="rId9"/>
+    <p:sldId id="259" r:id="rId10"/>
   </p:sldIdLst>
   <p:sldSz cx="12188952" cy="6858000" type="screen4x3"/>
   <p:notesSz cx="6858000" cy="9144000"/>
@@ -3142,13 +3143,13 @@
         <p:spPr>
           <a:xfrm>
             <a:off x="0" y="0"/>
-            <a:ext cx="12188952" cy="2377440"/>
-          </a:xfrm>
-          <a:prstGeom prst="rect">
-            <a:avLst/>
-          </a:prstGeom>
-          <a:solidFill>
-            <a:srgbClr val="005050"/>
+            <a:ext cx="12188952" cy="2286000"/>
+          </a:xfrm>
+          <a:prstGeom prst="rect">
+            <a:avLst/>
+          </a:prstGeom>
+          <a:solidFill>
+            <a:srgbClr val="005555"/>
           </a:solidFill>
           <a:ln>
             <a:noFill/>
@@ -3184,14 +3185,14 @@
         </p:nvSpPr>
         <p:spPr>
           <a:xfrm>
-            <a:off x="0" y="2331720"/>
-            <a:ext cx="12188952" cy="91440"/>
-          </a:xfrm>
-          <a:prstGeom prst="rect">
-            <a:avLst/>
-          </a:prstGeom>
-          <a:solidFill>
-            <a:srgbClr val="C9A84C"/>
+            <a:off x="0" y="2267712"/>
+            <a:ext cx="12188952" cy="73152"/>
+          </a:xfrm>
+          <a:prstGeom prst="rect">
+            <a:avLst/>
+          </a:prstGeom>
+          <a:solidFill>
+            <a:srgbClr val="FF0000"/>
           </a:solidFill>
           <a:ln>
             <a:noFill/>
@@ -3221,14 +3222,57 @@
       </p:sp>
       <p:sp>
         <p:nvSpPr>
-          <p:cNvPr id="5" name="TextBox 4"/>
+          <p:cNvPr id="5" name="Rectangle 4"/>
+          <p:cNvSpPr/>
+          <p:nvPr/>
+        </p:nvSpPr>
+        <p:spPr>
+          <a:xfrm>
+            <a:off x="274320" y="109728"/>
+            <a:ext cx="2926080" cy="822960"/>
+          </a:xfrm>
+          <a:prstGeom prst="rect">
+            <a:avLst/>
+          </a:prstGeom>
+          <a:solidFill>
+            <a:srgbClr val="008080"/>
+          </a:solidFill>
+          <a:ln>
+            <a:noFill/>
+          </a:ln>
+        </p:spPr>
+        <p:style>
+          <a:lnRef idx="1">
+            <a:schemeClr val="accent1"/>
+          </a:lnRef>
+          <a:fillRef idx="3">
+            <a:schemeClr val="accent1"/>
+          </a:fillRef>
+          <a:effectRef idx="2">
+            <a:schemeClr val="accent1"/>
+          </a:effectRef>
+          <a:fontRef idx="minor">
+            <a:schemeClr val="lt1"/>
+          </a:fontRef>
+        </p:style>
+        <p:txBody>
+          <a:bodyPr rtlCol="0" anchor="ctr"/>
+          <a:lstStyle/>
+          <a:p>
+            <a:pPr algn="ctr"/>
+          </a:p>
+        </p:txBody>
+      </p:sp>
+      <p:sp>
+        <p:nvSpPr>
+          <p:cNvPr id="6" name="TextBox 5"/>
           <p:cNvSpPr txBox="1"/>
           <p:nvPr/>
         </p:nvSpPr>
         <p:spPr>
           <a:xfrm>
-            <a:off x="365760" y="182880"/>
-            <a:ext cx="3657600" cy="365760"/>
+            <a:off x="320040" y="118872"/>
+            <a:ext cx="1097280" cy="804672"/>
           </a:xfrm>
           <a:prstGeom prst="rect">
             <a:avLst/>
@@ -3243,26 +3287,26 @@
           <a:p>
             <a:pPr algn="l"/>
             <a:r>
-              <a:rPr sz="1000" b="1" i="0">
-                <a:solidFill>
-                  <a:srgbClr val="C9A84C"/>
+              <a:rPr sz="3600" b="1" i="0">
+                <a:solidFill>
+                  <a:srgbClr val="FFFFFF"/>
                 </a:solidFill>
               </a:rPr>
-              <a:t>BOOK J4 · Journée 4</a:t>
-            </a:r>
-          </a:p>
-        </p:txBody>
-      </p:sp>
-      <p:sp>
-        <p:nvSpPr>
-          <p:cNvPr id="6" name="TextBox 5"/>
+              <a:t>SHY</a:t>
+            </a:r>
+          </a:p>
+        </p:txBody>
+      </p:sp>
+      <p:sp>
+        <p:nvSpPr>
+          <p:cNvPr id="7" name="TextBox 6"/>
           <p:cNvSpPr txBox="1"/>
           <p:nvPr/>
         </p:nvSpPr>
         <p:spPr>
           <a:xfrm>
-            <a:off x="457200" y="502920"/>
-            <a:ext cx="11247120" cy="1371600"/>
+            <a:off x="1371600" y="347472"/>
+            <a:ext cx="1828800" cy="411480"/>
           </a:xfrm>
           <a:prstGeom prst="rect">
             <a:avLst/>
@@ -3277,26 +3321,69 @@
           <a:p>
             <a:pPr algn="l"/>
             <a:r>
-              <a:rPr sz="3000" b="1" i="0">
+              <a:rPr sz="1400" b="1" i="0">
                 <a:solidFill>
                   <a:srgbClr val="FFFFFF"/>
                 </a:solidFill>
               </a:rPr>
-              <a:t>Gestion des Objections</a:t>
-            </a:r>
-          </a:p>
-        </p:txBody>
-      </p:sp>
-      <p:sp>
-        <p:nvSpPr>
-          <p:cNvPr id="7" name="TextBox 6"/>
+              <a:t>Performance</a:t>
+            </a:r>
+          </a:p>
+        </p:txBody>
+      </p:sp>
+      <p:sp>
+        <p:nvSpPr>
+          <p:cNvPr id="8" name="Rectangle 7"/>
+          <p:cNvSpPr/>
+          <p:nvPr/>
+        </p:nvSpPr>
+        <p:spPr>
+          <a:xfrm>
+            <a:off x="3337560" y="164592"/>
+            <a:ext cx="36576" cy="658368"/>
+          </a:xfrm>
+          <a:prstGeom prst="rect">
+            <a:avLst/>
+          </a:prstGeom>
+          <a:solidFill>
+            <a:srgbClr val="FF0000"/>
+          </a:solidFill>
+          <a:ln>
+            <a:noFill/>
+          </a:ln>
+        </p:spPr>
+        <p:style>
+          <a:lnRef idx="1">
+            <a:schemeClr val="accent1"/>
+          </a:lnRef>
+          <a:fillRef idx="3">
+            <a:schemeClr val="accent1"/>
+          </a:fillRef>
+          <a:effectRef idx="2">
+            <a:schemeClr val="accent1"/>
+          </a:effectRef>
+          <a:fontRef idx="minor">
+            <a:schemeClr val="lt1"/>
+          </a:fontRef>
+        </p:style>
+        <p:txBody>
+          <a:bodyPr rtlCol="0" anchor="ctr"/>
+          <a:lstStyle/>
+          <a:p>
+            <a:pPr algn="ctr"/>
+          </a:p>
+        </p:txBody>
+      </p:sp>
+      <p:sp>
+        <p:nvSpPr>
+          <p:cNvPr id="9" name="TextBox 8"/>
           <p:cNvSpPr txBox="1"/>
           <p:nvPr/>
         </p:nvSpPr>
         <p:spPr>
           <a:xfrm>
-            <a:off x="457200" y="1828800"/>
-            <a:ext cx="11247120" cy="502920"/>
+            <a:off x="3474720" y="164592"/>
+            <a:ext cx="8503920" cy="347472"/>
           </a:xfrm>
           <a:prstGeom prst="rect">
             <a:avLst/>
@@ -3311,26 +3398,26 @@
           <a:p>
             <a:pPr algn="l"/>
             <a:r>
-              <a:rPr sz="1300" b="0" i="1">
-                <a:solidFill>
-                  <a:srgbClr val="DDEEEE"/>
+              <a:rPr sz="900" b="1" i="0">
+                <a:solidFill>
+                  <a:srgbClr val="BBEEEE"/>
                 </a:solidFill>
               </a:rPr>
-              <a:t>Écoute active · Méthode CROC · 12 objections-types · Jeux de rôle</a:t>
-            </a:r>
-          </a:p>
-        </p:txBody>
-      </p:sp>
-      <p:sp>
-        <p:nvSpPr>
-          <p:cNvPr id="8" name="TextBox 7"/>
+              <a:t>BOOK J4  ·  Journée 4  ·  Écoute active &amp; Réponses</a:t>
+            </a:r>
+          </a:p>
+        </p:txBody>
+      </p:sp>
+      <p:sp>
+        <p:nvSpPr>
+          <p:cNvPr id="10" name="TextBox 9"/>
           <p:cNvSpPr txBox="1"/>
           <p:nvPr/>
         </p:nvSpPr>
         <p:spPr>
           <a:xfrm>
-            <a:off x="0" y="6492240"/>
-            <a:ext cx="12188952" cy="365760"/>
+            <a:off x="320040" y="960120"/>
+            <a:ext cx="11521440" cy="1143000"/>
           </a:xfrm>
           <a:prstGeom prst="rect">
             <a:avLst/>
@@ -3343,14 +3430,161 @@
           </a:bodyPr>
           <a:lstStyle/>
           <a:p>
+            <a:pPr algn="l"/>
+            <a:r>
+              <a:rPr sz="3000" b="1" i="0">
+                <a:solidFill>
+                  <a:srgbClr val="FFFFFF"/>
+                </a:solidFill>
+              </a:rPr>
+              <a:t>Gérer les Objections</a:t>
+            </a:r>
+          </a:p>
+        </p:txBody>
+      </p:sp>
+      <p:sp>
+        <p:nvSpPr>
+          <p:cNvPr id="11" name="TextBox 10"/>
+          <p:cNvSpPr txBox="1"/>
+          <p:nvPr/>
+        </p:nvSpPr>
+        <p:spPr>
+          <a:xfrm>
+            <a:off x="320040" y="1920240"/>
+            <a:ext cx="11521440" cy="347472"/>
+          </a:xfrm>
+          <a:prstGeom prst="rect">
+            <a:avLst/>
+          </a:prstGeom>
+          <a:noFill/>
+        </p:spPr>
+        <p:txBody>
+          <a:bodyPr wrap="square">
+            <a:spAutoFit/>
+          </a:bodyPr>
+          <a:lstStyle/>
+          <a:p>
+            <a:pPr algn="l"/>
+            <a:r>
+              <a:rPr sz="1200" b="0" i="1">
+                <a:solidFill>
+                  <a:srgbClr val="CCEEEE"/>
+                </a:solidFill>
+              </a:rPr>
+              <a:t>Transformer chaque refus en opportunité d'engagement</a:t>
+            </a:r>
+          </a:p>
+        </p:txBody>
+      </p:sp>
+      <p:sp>
+        <p:nvSpPr>
+          <p:cNvPr id="12" name="Rectangle 11"/>
+          <p:cNvSpPr/>
+          <p:nvPr/>
+        </p:nvSpPr>
+        <p:spPr>
+          <a:xfrm>
+            <a:off x="0" y="6492240"/>
+            <a:ext cx="12188952" cy="365760"/>
+          </a:xfrm>
+          <a:prstGeom prst="rect">
+            <a:avLst/>
+          </a:prstGeom>
+          <a:solidFill>
+            <a:srgbClr val="005555"/>
+          </a:solidFill>
+          <a:ln>
+            <a:noFill/>
+          </a:ln>
+        </p:spPr>
+        <p:style>
+          <a:lnRef idx="1">
+            <a:schemeClr val="accent1"/>
+          </a:lnRef>
+          <a:fillRef idx="3">
+            <a:schemeClr val="accent1"/>
+          </a:fillRef>
+          <a:effectRef idx="2">
+            <a:schemeClr val="accent1"/>
+          </a:effectRef>
+          <a:fontRef idx="minor">
+            <a:schemeClr val="lt1"/>
+          </a:fontRef>
+        </p:style>
+        <p:txBody>
+          <a:bodyPr rtlCol="0" anchor="ctr"/>
+          <a:lstStyle/>
+          <a:p>
+            <a:pPr algn="ctr"/>
+          </a:p>
+        </p:txBody>
+      </p:sp>
+      <p:sp>
+        <p:nvSpPr>
+          <p:cNvPr id="13" name="TextBox 12"/>
+          <p:cNvSpPr txBox="1"/>
+          <p:nvPr/>
+        </p:nvSpPr>
+        <p:spPr>
+          <a:xfrm>
+            <a:off x="0" y="6519672"/>
+            <a:ext cx="12188952" cy="274320"/>
+          </a:xfrm>
+          <a:prstGeom prst="rect">
+            <a:avLst/>
+          </a:prstGeom>
+          <a:noFill/>
+        </p:spPr>
+        <p:txBody>
+          <a:bodyPr wrap="square">
+            <a:spAutoFit/>
+          </a:bodyPr>
+          <a:lstStyle/>
+          <a:p>
             <a:pPr algn="ctr"/>
             <a:r>
               <a:rPr sz="900" b="0" i="0">
                 <a:solidFill>
-                  <a:srgbClr val="888888"/>
+                  <a:srgbClr val="FFFFFF"/>
                 </a:solidFill>
               </a:rPr>
-              <a:t>SHY-Performance · V6-01062026SHY-TE · Référentiel UM6P/CMC 2025</a:t>
+              <a:t>SHY-Performance  ·  Formation FIM  ·  V6-01062026SHY-TE</a:t>
+            </a:r>
+          </a:p>
+        </p:txBody>
+      </p:sp>
+      <p:sp>
+        <p:nvSpPr>
+          <p:cNvPr id="14" name="TextBox 13"/>
+          <p:cNvSpPr txBox="1"/>
+          <p:nvPr/>
+        </p:nvSpPr>
+        <p:spPr>
+          <a:xfrm>
+            <a:off x="457200" y="2514600"/>
+            <a:ext cx="11247120" cy="1051560"/>
+          </a:xfrm>
+          <a:prstGeom prst="rect">
+            <a:avLst/>
+          </a:prstGeom>
+          <a:noFill/>
+        </p:spPr>
+        <p:txBody>
+          <a:bodyPr wrap="square">
+            <a:spAutoFit/>
+          </a:bodyPr>
+          <a:lstStyle/>
+          <a:p>
+            <a:pPr algn="l"/>
+            <a:r>
+              <a:rPr sz="1400" b="0" i="0">
+                <a:solidFill>
+                  <a:srgbClr val="1A1A1A"/>
+                </a:solidFill>
+              </a:rPr>
+              <a:t>Aujourd'hui vous allez apprendre à aimer les objections.
+Un donateur qui objecte est un donateur qui dialogue.
+Chaque 'non' cache souvent un 'pas encore' — et c'est là que vous entrez en jeu.</a:t>
             </a:r>
           </a:p>
         </p:txBody>
@@ -3425,13 +3659,13 @@
         <p:spPr>
           <a:xfrm>
             <a:off x="0" y="0"/>
-            <a:ext cx="12188952" cy="685800"/>
-          </a:xfrm>
-          <a:prstGeom prst="rect">
-            <a:avLst/>
-          </a:prstGeom>
-          <a:solidFill>
-            <a:srgbClr val="005050"/>
+            <a:ext cx="12188952" cy="658368"/>
+          </a:xfrm>
+          <a:prstGeom prst="rect">
+            <a:avLst/>
+          </a:prstGeom>
+          <a:solidFill>
+            <a:srgbClr val="005555"/>
           </a:solidFill>
           <a:ln>
             <a:noFill/>
@@ -3467,14 +3701,14 @@
         </p:nvSpPr>
         <p:spPr>
           <a:xfrm>
-            <a:off x="0" y="667512"/>
-            <a:ext cx="12188952" cy="36576"/>
-          </a:xfrm>
-          <a:prstGeom prst="rect">
-            <a:avLst/>
-          </a:prstGeom>
-          <a:solidFill>
-            <a:srgbClr val="C9A84C"/>
+            <a:off x="0" y="640080"/>
+            <a:ext cx="12188952" cy="54864"/>
+          </a:xfrm>
+          <a:prstGeom prst="rect">
+            <a:avLst/>
+          </a:prstGeom>
+          <a:solidFill>
+            <a:srgbClr val="FF0000"/>
           </a:solidFill>
           <a:ln>
             <a:noFill/>
@@ -3510,8 +3744,8 @@
         </p:nvSpPr>
         <p:spPr>
           <a:xfrm>
-            <a:off x="274320" y="73152"/>
-            <a:ext cx="11612880" cy="566928"/>
+            <a:off x="164592" y="64008"/>
+            <a:ext cx="685800" cy="530352"/>
           </a:xfrm>
           <a:prstGeom prst="rect">
             <a:avLst/>
@@ -3526,66 +3760,32 @@
           <a:p>
             <a:pPr algn="l"/>
             <a:r>
-              <a:rPr sz="1800" b="1" i="0">
+              <a:rPr sz="2000" b="1" i="0">
                 <a:solidFill>
                   <a:srgbClr val="FFFFFF"/>
                 </a:solidFill>
               </a:rPr>
-              <a:t>Objectifs &amp; Séquence Kolb — Journée 4</a:t>
-            </a:r>
-          </a:p>
-        </p:txBody>
-      </p:sp>
-      <p:sp>
-        <p:nvSpPr>
-          <p:cNvPr id="6" name="TextBox 5"/>
-          <p:cNvSpPr txBox="1"/>
-          <p:nvPr/>
-        </p:nvSpPr>
-        <p:spPr>
-          <a:xfrm>
-            <a:off x="0" y="6492240"/>
-            <a:ext cx="12188952" cy="365760"/>
-          </a:xfrm>
-          <a:prstGeom prst="rect">
-            <a:avLst/>
-          </a:prstGeom>
-          <a:noFill/>
-        </p:spPr>
-        <p:txBody>
-          <a:bodyPr wrap="square">
-            <a:spAutoFit/>
-          </a:bodyPr>
-          <a:lstStyle/>
-          <a:p>
-            <a:pPr algn="ctr"/>
-            <a:r>
-              <a:rPr sz="800" b="0" i="0">
-                <a:solidFill>
-                  <a:srgbClr val="888888"/>
-                </a:solidFill>
-              </a:rPr>
-              <a:t>SHY-Performance · V6-01062026SHY-TE</a:t>
-            </a:r>
-          </a:p>
-        </p:txBody>
-      </p:sp>
-      <p:sp>
-        <p:nvSpPr>
-          <p:cNvPr id="7" name="Rectangle 6"/>
+              <a:t>SHY</a:t>
+            </a:r>
+          </a:p>
+        </p:txBody>
+      </p:sp>
+      <p:sp>
+        <p:nvSpPr>
+          <p:cNvPr id="6" name="Rectangle 5"/>
           <p:cNvSpPr/>
           <p:nvPr/>
         </p:nvSpPr>
         <p:spPr>
           <a:xfrm>
-            <a:off x="274320" y="868680"/>
-            <a:ext cx="5486400" cy="347472"/>
-          </a:xfrm>
-          <a:prstGeom prst="rect">
-            <a:avLst/>
-          </a:prstGeom>
-          <a:solidFill>
-            <a:srgbClr val="007A7A"/>
+            <a:off x="914400" y="91440"/>
+            <a:ext cx="36576" cy="475488"/>
+          </a:xfrm>
+          <a:prstGeom prst="rect">
+            <a:avLst/>
+          </a:prstGeom>
+          <a:solidFill>
+            <a:srgbClr val="FF0000"/>
           </a:solidFill>
           <a:ln>
             <a:noFill/>
@@ -3615,14 +3815,14 @@
       </p:sp>
       <p:sp>
         <p:nvSpPr>
-          <p:cNvPr id="8" name="TextBox 7"/>
+          <p:cNvPr id="7" name="TextBox 6"/>
           <p:cNvSpPr txBox="1"/>
           <p:nvPr/>
         </p:nvSpPr>
         <p:spPr>
           <a:xfrm>
-            <a:off x="365760" y="905256"/>
-            <a:ext cx="5303520" cy="292608"/>
+            <a:off x="1024128" y="91440"/>
+            <a:ext cx="10881360" cy="475488"/>
           </a:xfrm>
           <a:prstGeom prst="rect">
             <a:avLst/>
@@ -3637,32 +3837,32 @@
           <a:p>
             <a:pPr algn="l"/>
             <a:r>
-              <a:rPr sz="1200" b="1" i="0">
+              <a:rPr sz="1700" b="1" i="0">
                 <a:solidFill>
                   <a:srgbClr val="FFFFFF"/>
                 </a:solidFill>
               </a:rPr>
-              <a:t>Objectifs V6 — Bloom Niv. 3–5</a:t>
-            </a:r>
-          </a:p>
-        </p:txBody>
-      </p:sp>
-      <p:sp>
-        <p:nvSpPr>
-          <p:cNvPr id="9" name="Rectangle 8"/>
+              <a:t>Journée 4 — Ce que vous allez vivre aujourd'hui</a:t>
+            </a:r>
+          </a:p>
+        </p:txBody>
+      </p:sp>
+      <p:sp>
+        <p:nvSpPr>
+          <p:cNvPr id="8" name="Rectangle 7"/>
           <p:cNvSpPr/>
           <p:nvPr/>
         </p:nvSpPr>
         <p:spPr>
           <a:xfrm>
-            <a:off x="6126480" y="868680"/>
-            <a:ext cx="5486400" cy="347472"/>
-          </a:xfrm>
-          <a:prstGeom prst="rect">
-            <a:avLst/>
-          </a:prstGeom>
-          <a:solidFill>
-            <a:srgbClr val="007A7A"/>
+            <a:off x="0" y="6492240"/>
+            <a:ext cx="12188952" cy="365760"/>
+          </a:xfrm>
+          <a:prstGeom prst="rect">
+            <a:avLst/>
+          </a:prstGeom>
+          <a:solidFill>
+            <a:srgbClr val="005555"/>
           </a:solidFill>
           <a:ln>
             <a:noFill/>
@@ -3692,14 +3892,14 @@
       </p:sp>
       <p:sp>
         <p:nvSpPr>
-          <p:cNvPr id="10" name="TextBox 9"/>
+          <p:cNvPr id="9" name="TextBox 8"/>
           <p:cNvSpPr txBox="1"/>
           <p:nvPr/>
         </p:nvSpPr>
         <p:spPr>
           <a:xfrm>
-            <a:off x="6217920" y="905256"/>
-            <a:ext cx="5303520" cy="292608"/>
+            <a:off x="0" y="6519672"/>
+            <a:ext cx="12188952" cy="274320"/>
           </a:xfrm>
           <a:prstGeom prst="rect">
             <a:avLst/>
@@ -3712,306 +3912,34 @@
           </a:bodyPr>
           <a:lstStyle/>
           <a:p>
-            <a:pPr algn="l"/>
-            <a:r>
-              <a:rPr sz="1200" b="1" i="0">
+            <a:pPr algn="ctr"/>
+            <a:r>
+              <a:rPr sz="900" b="0" i="0">
                 <a:solidFill>
                   <a:srgbClr val="FFFFFF"/>
                 </a:solidFill>
               </a:rPr>
-              <a:t>Méthode CROC</a:t>
-            </a:r>
-          </a:p>
-        </p:txBody>
-      </p:sp>
-      <p:sp>
-        <p:nvSpPr>
-          <p:cNvPr id="11" name="TextBox 10"/>
-          <p:cNvSpPr txBox="1"/>
-          <p:nvPr/>
-        </p:nvSpPr>
-        <p:spPr>
-          <a:xfrm>
-            <a:off x="365760" y="1280160"/>
-            <a:ext cx="5303520" cy="347472"/>
-          </a:xfrm>
-          <a:prstGeom prst="rect">
-            <a:avLst/>
-          </a:prstGeom>
-          <a:noFill/>
-        </p:spPr>
-        <p:txBody>
-          <a:bodyPr wrap="square">
-            <a:spAutoFit/>
-          </a:bodyPr>
-          <a:lstStyle/>
-          <a:p>
-            <a:pPr algn="l"/>
-            <a:r>
-              <a:rPr sz="1100" b="0" i="0">
-                <a:solidFill>
-                  <a:srgbClr val="1A1A1A"/>
-                </a:solidFill>
-              </a:rPr>
-              <a:t>• Appliquer la méthode CROC face aux 12 objections fréquentes</a:t>
-            </a:r>
-          </a:p>
-        </p:txBody>
-      </p:sp>
-      <p:sp>
-        <p:nvSpPr>
-          <p:cNvPr id="12" name="TextBox 11"/>
-          <p:cNvSpPr txBox="1"/>
-          <p:nvPr/>
-        </p:nvSpPr>
-        <p:spPr>
-          <a:xfrm>
-            <a:off x="365760" y="1645919"/>
-            <a:ext cx="5303520" cy="347472"/>
-          </a:xfrm>
-          <a:prstGeom prst="rect">
-            <a:avLst/>
-          </a:prstGeom>
-          <a:noFill/>
-        </p:spPr>
-        <p:txBody>
-          <a:bodyPr wrap="square">
-            <a:spAutoFit/>
-          </a:bodyPr>
-          <a:lstStyle/>
-          <a:p>
-            <a:pPr algn="l"/>
-            <a:r>
-              <a:rPr sz="1100" b="0" i="0">
-                <a:solidFill>
-                  <a:srgbClr val="1A1A1A"/>
-                </a:solidFill>
-              </a:rPr>
-              <a:t>• Distinguer l'objection réelle de l'objection prétexte</a:t>
-            </a:r>
-          </a:p>
-        </p:txBody>
-      </p:sp>
-      <p:sp>
-        <p:nvSpPr>
-          <p:cNvPr id="13" name="TextBox 12"/>
-          <p:cNvSpPr txBox="1"/>
-          <p:nvPr/>
-        </p:nvSpPr>
-        <p:spPr>
-          <a:xfrm>
-            <a:off x="365760" y="2011679"/>
-            <a:ext cx="5303520" cy="347472"/>
-          </a:xfrm>
-          <a:prstGeom prst="rect">
-            <a:avLst/>
-          </a:prstGeom>
-          <a:noFill/>
-        </p:spPr>
-        <p:txBody>
-          <a:bodyPr wrap="square">
-            <a:spAutoFit/>
-          </a:bodyPr>
-          <a:lstStyle/>
-          <a:p>
-            <a:pPr algn="l"/>
-            <a:r>
-              <a:rPr sz="1100" b="0" i="0">
-                <a:solidFill>
-                  <a:srgbClr val="1A1A1A"/>
-                </a:solidFill>
-              </a:rPr>
-              <a:t>• Évaluer la qualité de ses propres réponses (auto-éval)</a:t>
-            </a:r>
-          </a:p>
-        </p:txBody>
-      </p:sp>
-      <p:sp>
-        <p:nvSpPr>
-          <p:cNvPr id="14" name="TextBox 13"/>
-          <p:cNvSpPr txBox="1"/>
-          <p:nvPr/>
-        </p:nvSpPr>
-        <p:spPr>
-          <a:xfrm>
-            <a:off x="365760" y="2377439"/>
-            <a:ext cx="5303520" cy="347472"/>
-          </a:xfrm>
-          <a:prstGeom prst="rect">
-            <a:avLst/>
-          </a:prstGeom>
-          <a:noFill/>
-        </p:spPr>
-        <p:txBody>
-          <a:bodyPr wrap="square">
-            <a:spAutoFit/>
-          </a:bodyPr>
-          <a:lstStyle/>
-          <a:p>
-            <a:pPr algn="l"/>
-            <a:r>
-              <a:rPr sz="1100" b="0" i="0">
-                <a:solidFill>
-                  <a:srgbClr val="1A1A1A"/>
-                </a:solidFill>
-              </a:rPr>
-              <a:t>• Adapter la réponse selon le profil émotionnel du passant</a:t>
-            </a:r>
-          </a:p>
-        </p:txBody>
-      </p:sp>
-      <p:sp>
-        <p:nvSpPr>
-          <p:cNvPr id="15" name="TextBox 14"/>
-          <p:cNvSpPr txBox="1"/>
-          <p:nvPr/>
-        </p:nvSpPr>
-        <p:spPr>
-          <a:xfrm>
-            <a:off x="6217920" y="1280160"/>
-            <a:ext cx="5303520" cy="347472"/>
-          </a:xfrm>
-          <a:prstGeom prst="rect">
-            <a:avLst/>
-          </a:prstGeom>
-          <a:noFill/>
-        </p:spPr>
-        <p:txBody>
-          <a:bodyPr wrap="square">
-            <a:spAutoFit/>
-          </a:bodyPr>
-          <a:lstStyle/>
-          <a:p>
-            <a:pPr algn="l"/>
-            <a:r>
-              <a:rPr sz="1100" b="0" i="0">
-                <a:solidFill>
-                  <a:srgbClr val="1A1A1A"/>
-                </a:solidFill>
-              </a:rPr>
-              <a:t>• C — Considérer : accusé réception sincère sans justifier</a:t>
-            </a:r>
-          </a:p>
-        </p:txBody>
-      </p:sp>
-      <p:sp>
-        <p:nvSpPr>
-          <p:cNvPr id="16" name="TextBox 15"/>
-          <p:cNvSpPr txBox="1"/>
-          <p:nvPr/>
-        </p:nvSpPr>
-        <p:spPr>
-          <a:xfrm>
-            <a:off x="6217920" y="1645919"/>
-            <a:ext cx="5303520" cy="347472"/>
-          </a:xfrm>
-          <a:prstGeom prst="rect">
-            <a:avLst/>
-          </a:prstGeom>
-          <a:noFill/>
-        </p:spPr>
-        <p:txBody>
-          <a:bodyPr wrap="square">
-            <a:spAutoFit/>
-          </a:bodyPr>
-          <a:lstStyle/>
-          <a:p>
-            <a:pPr algn="l"/>
-            <a:r>
-              <a:rPr sz="1100" b="0" i="0">
-                <a:solidFill>
-                  <a:srgbClr val="1A1A1A"/>
-                </a:solidFill>
-              </a:rPr>
-              <a:t>• R — Reformuler : 'Si je comprends bien, vous voulez dire…'</a:t>
-            </a:r>
-          </a:p>
-        </p:txBody>
-      </p:sp>
-      <p:sp>
-        <p:nvSpPr>
-          <p:cNvPr id="17" name="TextBox 16"/>
-          <p:cNvSpPr txBox="1"/>
-          <p:nvPr/>
-        </p:nvSpPr>
-        <p:spPr>
-          <a:xfrm>
-            <a:off x="6217920" y="2011679"/>
-            <a:ext cx="5303520" cy="347472"/>
-          </a:xfrm>
-          <a:prstGeom prst="rect">
-            <a:avLst/>
-          </a:prstGeom>
-          <a:noFill/>
-        </p:spPr>
-        <p:txBody>
-          <a:bodyPr wrap="square">
-            <a:spAutoFit/>
-          </a:bodyPr>
-          <a:lstStyle/>
-          <a:p>
-            <a:pPr algn="l"/>
-            <a:r>
-              <a:rPr sz="1100" b="0" i="0">
-                <a:solidFill>
-                  <a:srgbClr val="1A1A1A"/>
-                </a:solidFill>
-              </a:rPr>
-              <a:t>• O — Organiser : réponse structurée = preuve + exemple + chiffre</a:t>
-            </a:r>
-          </a:p>
-        </p:txBody>
-      </p:sp>
-      <p:sp>
-        <p:nvSpPr>
-          <p:cNvPr id="18" name="TextBox 17"/>
-          <p:cNvSpPr txBox="1"/>
-          <p:nvPr/>
-        </p:nvSpPr>
-        <p:spPr>
-          <a:xfrm>
-            <a:off x="6217920" y="2377439"/>
-            <a:ext cx="5303520" cy="347472"/>
-          </a:xfrm>
-          <a:prstGeom prst="rect">
-            <a:avLst/>
-          </a:prstGeom>
-          <a:noFill/>
-        </p:spPr>
-        <p:txBody>
-          <a:bodyPr wrap="square">
-            <a:spAutoFit/>
-          </a:bodyPr>
-          <a:lstStyle/>
-          <a:p>
-            <a:pPr algn="l"/>
-            <a:r>
-              <a:rPr sz="1100" b="0" i="0">
-                <a:solidFill>
-                  <a:srgbClr val="1A1A1A"/>
-                </a:solidFill>
-              </a:rPr>
-              <a:t>• C — Conclure : retour vers la proposition + silence actif</a:t>
-            </a:r>
-          </a:p>
-        </p:txBody>
-      </p:sp>
-      <p:sp>
-        <p:nvSpPr>
-          <p:cNvPr id="19" name="Rectangle 18"/>
+              <a:t>SHY-Performance  ·  Formation FIM  ·  V6-01062026SHY-TE</a:t>
+            </a:r>
+          </a:p>
+        </p:txBody>
+      </p:sp>
+      <p:sp>
+        <p:nvSpPr>
+          <p:cNvPr id="10" name="Rectangle 9"/>
           <p:cNvSpPr/>
           <p:nvPr/>
         </p:nvSpPr>
         <p:spPr>
           <a:xfrm>
-            <a:off x="274320" y="4160520"/>
-            <a:ext cx="2882646" cy="256032"/>
-          </a:xfrm>
-          <a:prstGeom prst="rect">
-            <a:avLst/>
-          </a:prstGeom>
-          <a:solidFill>
-            <a:srgbClr val="2E86AB"/>
+            <a:off x="274320" y="804672"/>
+            <a:ext cx="2910078" cy="274320"/>
+          </a:xfrm>
+          <a:prstGeom prst="rect">
+            <a:avLst/>
+          </a:prstGeom>
+          <a:solidFill>
+            <a:srgbClr val="005555"/>
           </a:solidFill>
           <a:ln>
             <a:noFill/>
@@ -4041,14 +3969,14 @@
       </p:sp>
       <p:sp>
         <p:nvSpPr>
-          <p:cNvPr id="20" name="TextBox 19"/>
+          <p:cNvPr id="11" name="TextBox 10"/>
           <p:cNvSpPr txBox="1"/>
           <p:nvPr/>
         </p:nvSpPr>
         <p:spPr>
           <a:xfrm>
-            <a:off x="320040" y="4187952"/>
-            <a:ext cx="2791206" cy="201168"/>
+            <a:off x="347472" y="841248"/>
+            <a:ext cx="2763774" cy="219456"/>
           </a:xfrm>
           <a:prstGeom prst="rect">
             <a:avLst/>
@@ -4068,21 +3996,21 @@
                   <a:srgbClr val="FFFFFF"/>
                 </a:solidFill>
               </a:rPr>
-              <a:t>EC — Expérience Concrète</a:t>
-            </a:r>
-          </a:p>
-        </p:txBody>
-      </p:sp>
-      <p:sp>
-        <p:nvSpPr>
-          <p:cNvPr id="21" name="Rectangle 20"/>
+              <a:t>OBSERVATION</a:t>
+            </a:r>
+          </a:p>
+        </p:txBody>
+      </p:sp>
+      <p:sp>
+        <p:nvSpPr>
+          <p:cNvPr id="12" name="Rectangle 11"/>
           <p:cNvSpPr/>
           <p:nvPr/>
         </p:nvSpPr>
         <p:spPr>
           <a:xfrm>
-            <a:off x="274320" y="4416552"/>
-            <a:ext cx="2882646" cy="1481328"/>
+            <a:off x="274320" y="1078992"/>
+            <a:ext cx="2910078" cy="3840480"/>
           </a:xfrm>
           <a:prstGeom prst="rect">
             <a:avLst/>
@@ -4092,7 +4020,7 @@
           </a:solidFill>
           <a:ln w="12700">
             <a:solidFill>
-              <a:srgbClr val="2E86AB"/>
+              <a:srgbClr val="005555"/>
             </a:solidFill>
           </a:ln>
         </p:spPr>
@@ -4120,14 +4048,14 @@
       </p:sp>
       <p:sp>
         <p:nvSpPr>
-          <p:cNvPr id="22" name="TextBox 21"/>
+          <p:cNvPr id="13" name="TextBox 12"/>
           <p:cNvSpPr txBox="1"/>
           <p:nvPr/>
         </p:nvSpPr>
         <p:spPr>
           <a:xfrm>
-            <a:off x="365760" y="4453128"/>
-            <a:ext cx="2699765" cy="1371600"/>
+            <a:off x="384048" y="1124712"/>
+            <a:ext cx="2690622" cy="3657600"/>
           </a:xfrm>
           <a:prstGeom prst="rect">
             <a:avLst/>
@@ -4147,27 +4075,29 @@
                   <a:srgbClr val="1A1A1A"/>
                 </a:solidFill>
               </a:rPr>
-              <a:t>Analyse de 5 extraits vidéo (bonne/mauvaise gestion d'objection)</a:t>
-            </a:r>
-          </a:p>
-        </p:txBody>
-      </p:sp>
-      <p:sp>
-        <p:nvSpPr>
-          <p:cNvPr id="23" name="Rectangle 22"/>
+              <a:t>Vous analysez 5 extraits
+vidéo : bonne et mauvaise
+gestion d'objection.</a:t>
+            </a:r>
+          </a:p>
+        </p:txBody>
+      </p:sp>
+      <p:sp>
+        <p:nvSpPr>
+          <p:cNvPr id="14" name="Rectangle 13"/>
           <p:cNvSpPr/>
           <p:nvPr/>
         </p:nvSpPr>
         <p:spPr>
           <a:xfrm>
-            <a:off x="3184397" y="4160520"/>
-            <a:ext cx="2882646" cy="256032"/>
-          </a:xfrm>
-          <a:prstGeom prst="rect">
-            <a:avLst/>
-          </a:prstGeom>
-          <a:solidFill>
-            <a:srgbClr val="4CAF82"/>
+            <a:off x="3202686" y="804672"/>
+            <a:ext cx="2910078" cy="274320"/>
+          </a:xfrm>
+          <a:prstGeom prst="rect">
+            <a:avLst/>
+          </a:prstGeom>
+          <a:solidFill>
+            <a:srgbClr val="008080"/>
           </a:solidFill>
           <a:ln>
             <a:noFill/>
@@ -4197,14 +4127,14 @@
       </p:sp>
       <p:sp>
         <p:nvSpPr>
-          <p:cNvPr id="24" name="TextBox 23"/>
+          <p:cNvPr id="15" name="TextBox 14"/>
           <p:cNvSpPr txBox="1"/>
           <p:nvPr/>
         </p:nvSpPr>
         <p:spPr>
           <a:xfrm>
-            <a:off x="3230117" y="4187952"/>
-            <a:ext cx="2791206" cy="201168"/>
+            <a:off x="3275838" y="841248"/>
+            <a:ext cx="2763774" cy="219456"/>
           </a:xfrm>
           <a:prstGeom prst="rect">
             <a:avLst/>
@@ -4224,21 +4154,21 @@
                   <a:srgbClr val="FFFFFF"/>
                 </a:solidFill>
               </a:rPr>
-              <a:t>OR — Observation Réfléchie</a:t>
-            </a:r>
-          </a:p>
-        </p:txBody>
-      </p:sp>
-      <p:sp>
-        <p:nvSpPr>
-          <p:cNvPr id="25" name="Rectangle 24"/>
+              <a:t>ANALYSE</a:t>
+            </a:r>
+          </a:p>
+        </p:txBody>
+      </p:sp>
+      <p:sp>
+        <p:nvSpPr>
+          <p:cNvPr id="16" name="Rectangle 15"/>
           <p:cNvSpPr/>
           <p:nvPr/>
         </p:nvSpPr>
         <p:spPr>
           <a:xfrm>
-            <a:off x="3184397" y="4416552"/>
-            <a:ext cx="2882646" cy="1481328"/>
+            <a:off x="3202686" y="1078992"/>
+            <a:ext cx="2910078" cy="3840480"/>
           </a:xfrm>
           <a:prstGeom prst="rect">
             <a:avLst/>
@@ -4248,7 +4178,7 @@
           </a:solidFill>
           <a:ln w="12700">
             <a:solidFill>
-              <a:srgbClr val="4CAF82"/>
+              <a:srgbClr val="008080"/>
             </a:solidFill>
           </a:ln>
         </p:spPr>
@@ -4276,14 +4206,14 @@
       </p:sp>
       <p:sp>
         <p:nvSpPr>
-          <p:cNvPr id="26" name="TextBox 25"/>
+          <p:cNvPr id="17" name="TextBox 16"/>
           <p:cNvSpPr txBox="1"/>
           <p:nvPr/>
         </p:nvSpPr>
         <p:spPr>
           <a:xfrm>
-            <a:off x="3275837" y="4453128"/>
-            <a:ext cx="2699765" cy="1371600"/>
+            <a:off x="3312414" y="1124712"/>
+            <a:ext cx="2690622" cy="3657600"/>
           </a:xfrm>
           <a:prstGeom prst="rect">
             <a:avLst/>
@@ -4303,27 +4233,29 @@
                   <a:srgbClr val="1A1A1A"/>
                 </a:solidFill>
               </a:rPr>
-              <a:t>'Patterns observés ?' → taxonomie collective des objections</a:t>
-            </a:r>
-          </a:p>
-        </p:txBody>
-      </p:sp>
-      <p:sp>
-        <p:nvSpPr>
-          <p:cNvPr id="27" name="Rectangle 26"/>
+              <a:t>'Qu'avez-vous remarqué ?
+Qu'est-ce qui a tout changé
+dans la réponse ?'</a:t>
+            </a:r>
+          </a:p>
+        </p:txBody>
+      </p:sp>
+      <p:sp>
+        <p:nvSpPr>
+          <p:cNvPr id="18" name="Rectangle 17"/>
           <p:cNvSpPr/>
           <p:nvPr/>
         </p:nvSpPr>
         <p:spPr>
           <a:xfrm>
-            <a:off x="6094475" y="4160520"/>
-            <a:ext cx="2882646" cy="256032"/>
-          </a:xfrm>
-          <a:prstGeom prst="rect">
-            <a:avLst/>
-          </a:prstGeom>
-          <a:solidFill>
-            <a:srgbClr val="F4AE2D"/>
+            <a:off x="6131052" y="804672"/>
+            <a:ext cx="2910078" cy="274320"/>
+          </a:xfrm>
+          <a:prstGeom prst="rect">
+            <a:avLst/>
+          </a:prstGeom>
+          <a:solidFill>
+            <a:srgbClr val="2A7A50"/>
           </a:solidFill>
           <a:ln>
             <a:noFill/>
@@ -4353,14 +4285,14 @@
       </p:sp>
       <p:sp>
         <p:nvSpPr>
-          <p:cNvPr id="28" name="TextBox 27"/>
+          <p:cNvPr id="19" name="TextBox 18"/>
           <p:cNvSpPr txBox="1"/>
           <p:nvPr/>
         </p:nvSpPr>
         <p:spPr>
           <a:xfrm>
-            <a:off x="6140195" y="4187952"/>
-            <a:ext cx="2791206" cy="201168"/>
+            <a:off x="6204204" y="841248"/>
+            <a:ext cx="2763774" cy="219456"/>
           </a:xfrm>
           <a:prstGeom prst="rect">
             <a:avLst/>
@@ -4380,21 +4312,21 @@
                   <a:srgbClr val="FFFFFF"/>
                 </a:solidFill>
               </a:rPr>
-              <a:t>CA — Conceptualisation</a:t>
-            </a:r>
-          </a:p>
-        </p:txBody>
-      </p:sp>
-      <p:sp>
-        <p:nvSpPr>
-          <p:cNvPr id="29" name="Rectangle 28"/>
+              <a:t>APPORT</a:t>
+            </a:r>
+          </a:p>
+        </p:txBody>
+      </p:sp>
+      <p:sp>
+        <p:nvSpPr>
+          <p:cNvPr id="20" name="Rectangle 19"/>
           <p:cNvSpPr/>
           <p:nvPr/>
         </p:nvSpPr>
         <p:spPr>
           <a:xfrm>
-            <a:off x="6094475" y="4416552"/>
-            <a:ext cx="2882646" cy="1481328"/>
+            <a:off x="6131052" y="1078992"/>
+            <a:ext cx="2910078" cy="3840480"/>
           </a:xfrm>
           <a:prstGeom prst="rect">
             <a:avLst/>
@@ -4404,7 +4336,7 @@
           </a:solidFill>
           <a:ln w="12700">
             <a:solidFill>
-              <a:srgbClr val="F4AE2D"/>
+              <a:srgbClr val="2A7A50"/>
             </a:solidFill>
           </a:ln>
         </p:spPr>
@@ -4432,14 +4364,14 @@
       </p:sp>
       <p:sp>
         <p:nvSpPr>
-          <p:cNvPr id="30" name="TextBox 29"/>
+          <p:cNvPr id="21" name="TextBox 20"/>
           <p:cNvSpPr txBox="1"/>
           <p:nvPr/>
         </p:nvSpPr>
         <p:spPr>
           <a:xfrm>
-            <a:off x="6185915" y="4453128"/>
-            <a:ext cx="2699765" cy="1371600"/>
+            <a:off x="6240780" y="1124712"/>
+            <a:ext cx="2690622" cy="3657600"/>
           </a:xfrm>
           <a:prstGeom prst="rect">
             <a:avLst/>
@@ -4459,27 +4391,29 @@
                   <a:srgbClr val="1A1A1A"/>
                 </a:solidFill>
               </a:rPr>
-              <a:t>CROC + CAP + 12 objections types avec réponses modèles</a:t>
-            </a:r>
-          </a:p>
-        </p:txBody>
-      </p:sp>
-      <p:sp>
-        <p:nvSpPr>
-          <p:cNvPr id="31" name="Rectangle 30"/>
+              <a:t>Les 12 objections types.
+La réponse en 4 temps.
+Les mots qui ouvrent.</a:t>
+            </a:r>
+          </a:p>
+        </p:txBody>
+      </p:sp>
+      <p:sp>
+        <p:nvSpPr>
+          <p:cNvPr id="22" name="Rectangle 21"/>
           <p:cNvSpPr/>
           <p:nvPr/>
         </p:nvSpPr>
         <p:spPr>
           <a:xfrm>
-            <a:off x="9004554" y="4160520"/>
-            <a:ext cx="2882646" cy="256032"/>
-          </a:xfrm>
-          <a:prstGeom prst="rect">
-            <a:avLst/>
-          </a:prstGeom>
-          <a:solidFill>
-            <a:srgbClr val="E84855"/>
+            <a:off x="9059418" y="804672"/>
+            <a:ext cx="2910078" cy="274320"/>
+          </a:xfrm>
+          <a:prstGeom prst="rect">
+            <a:avLst/>
+          </a:prstGeom>
+          <a:solidFill>
+            <a:srgbClr val="FF0000"/>
           </a:solidFill>
           <a:ln>
             <a:noFill/>
@@ -4509,14 +4443,14 @@
       </p:sp>
       <p:sp>
         <p:nvSpPr>
-          <p:cNvPr id="32" name="TextBox 31"/>
+          <p:cNvPr id="23" name="TextBox 22"/>
           <p:cNvSpPr txBox="1"/>
           <p:nvPr/>
         </p:nvSpPr>
         <p:spPr>
           <a:xfrm>
-            <a:off x="9050274" y="4187952"/>
-            <a:ext cx="2791206" cy="201168"/>
+            <a:off x="9132570" y="841248"/>
+            <a:ext cx="2763774" cy="219456"/>
           </a:xfrm>
           <a:prstGeom prst="rect">
             <a:avLst/>
@@ -4536,21 +4470,21 @@
                   <a:srgbClr val="FFFFFF"/>
                 </a:solidFill>
               </a:rPr>
-              <a:t>EA — Expérimentation Active</a:t>
-            </a:r>
-          </a:p>
-        </p:txBody>
-      </p:sp>
-      <p:sp>
-        <p:nvSpPr>
-          <p:cNvPr id="33" name="Rectangle 32"/>
+              <a:t>ENTRAÎNEMENT</a:t>
+            </a:r>
+          </a:p>
+        </p:txBody>
+      </p:sp>
+      <p:sp>
+        <p:nvSpPr>
+          <p:cNvPr id="24" name="Rectangle 23"/>
           <p:cNvSpPr/>
           <p:nvPr/>
         </p:nvSpPr>
         <p:spPr>
           <a:xfrm>
-            <a:off x="9004554" y="4416552"/>
-            <a:ext cx="2882646" cy="1481328"/>
+            <a:off x="9059418" y="1078992"/>
+            <a:ext cx="2910078" cy="3840480"/>
           </a:xfrm>
           <a:prstGeom prst="rect">
             <a:avLst/>
@@ -4560,7 +4494,7 @@
           </a:solidFill>
           <a:ln w="12700">
             <a:solidFill>
-              <a:srgbClr val="E84855"/>
+              <a:srgbClr val="FF0000"/>
             </a:solidFill>
           </a:ln>
         </p:spPr>
@@ -4588,14 +4522,14 @@
       </p:sp>
       <p:sp>
         <p:nvSpPr>
-          <p:cNvPr id="34" name="TextBox 33"/>
+          <p:cNvPr id="25" name="TextBox 24"/>
           <p:cNvSpPr txBox="1"/>
           <p:nvPr/>
         </p:nvSpPr>
         <p:spPr>
           <a:xfrm>
-            <a:off x="9095994" y="4453128"/>
-            <a:ext cx="2699765" cy="1371600"/>
+            <a:off x="9169146" y="1124712"/>
+            <a:ext cx="2690622" cy="3657600"/>
           </a:xfrm>
           <a:prstGeom prst="rect">
             <a:avLst/>
@@ -4615,27 +4549,29 @@
                   <a:srgbClr val="1A1A1A"/>
                 </a:solidFill>
               </a:rPr>
-              <a:t>Battle des objections : tournoi brackets · 2 objections tirées au sort</a:t>
-            </a:r>
-          </a:p>
-        </p:txBody>
-      </p:sp>
-      <p:sp>
-        <p:nvSpPr>
-          <p:cNvPr id="35" name="Rectangle 34"/>
+              <a:t>Battle : tournoi d'objections
+par équipes. Tirage au sort.
+Le groupe vote la meilleure réponse.</a:t>
+            </a:r>
+          </a:p>
+        </p:txBody>
+      </p:sp>
+      <p:sp>
+        <p:nvSpPr>
+          <p:cNvPr id="26" name="Rectangle 25"/>
           <p:cNvSpPr/>
           <p:nvPr/>
         </p:nvSpPr>
         <p:spPr>
           <a:xfrm>
-            <a:off x="274320" y="5486400"/>
-            <a:ext cx="11612880" cy="274320"/>
-          </a:xfrm>
-          <a:prstGeom prst="rect">
-            <a:avLst/>
-          </a:prstGeom>
-          <a:solidFill>
-            <a:srgbClr val="C9A84C"/>
+            <a:off x="274320" y="5074920"/>
+            <a:ext cx="11640312" cy="274320"/>
+          </a:xfrm>
+          <a:prstGeom prst="rect">
+            <a:avLst/>
+          </a:prstGeom>
+          <a:solidFill>
+            <a:srgbClr val="FF0000"/>
           </a:solidFill>
           <a:ln>
             <a:noFill/>
@@ -4665,13 +4601,13 @@
       </p:sp>
       <p:sp>
         <p:nvSpPr>
-          <p:cNvPr id="36" name="TextBox 35"/>
+          <p:cNvPr id="27" name="TextBox 26"/>
           <p:cNvSpPr txBox="1"/>
           <p:nvPr/>
         </p:nvSpPr>
         <p:spPr>
           <a:xfrm>
-            <a:off x="365760" y="5522976"/>
+            <a:off x="384048" y="5111496"/>
             <a:ext cx="11430000" cy="219456"/>
           </a:xfrm>
           <a:prstGeom prst="rect">
@@ -4687,26 +4623,71 @@
           <a:p>
             <a:pPr algn="l"/>
             <a:r>
-              <a:rPr sz="1000" b="1" i="0">
-                <a:solidFill>
-                  <a:srgbClr val="005050"/>
+              <a:rPr sz="900" b="1" i="0">
+                <a:solidFill>
+                  <a:srgbClr val="FFFFFF"/>
                 </a:solidFill>
               </a:rPr>
-              <a:t>🎯 Évaluation formative</a:t>
-            </a:r>
-          </a:p>
-        </p:txBody>
-      </p:sp>
-      <p:sp>
-        <p:nvSpPr>
-          <p:cNvPr id="37" name="TextBox 36"/>
+              <a:t>Vos 3 réussites à valider aujourd'hui</a:t>
+            </a:r>
+          </a:p>
+        </p:txBody>
+      </p:sp>
+      <p:sp>
+        <p:nvSpPr>
+          <p:cNvPr id="28" name="Rectangle 27"/>
+          <p:cNvSpPr/>
+          <p:nvPr/>
+        </p:nvSpPr>
+        <p:spPr>
+          <a:xfrm>
+            <a:off x="274320" y="5367528"/>
+            <a:ext cx="3843528" cy="502920"/>
+          </a:xfrm>
+          <a:prstGeom prst="rect">
+            <a:avLst/>
+          </a:prstGeom>
+          <a:solidFill>
+            <a:srgbClr val="FFFFFF"/>
+          </a:solidFill>
+          <a:ln w="10160">
+            <a:solidFill>
+              <a:srgbClr val="FF0000"/>
+            </a:solidFill>
+          </a:ln>
+        </p:spPr>
+        <p:style>
+          <a:lnRef idx="1">
+            <a:schemeClr val="accent1"/>
+          </a:lnRef>
+          <a:fillRef idx="3">
+            <a:schemeClr val="accent1"/>
+          </a:fillRef>
+          <a:effectRef idx="2">
+            <a:schemeClr val="accent1"/>
+          </a:effectRef>
+          <a:fontRef idx="minor">
+            <a:schemeClr val="lt1"/>
+          </a:fontRef>
+        </p:style>
+        <p:txBody>
+          <a:bodyPr rtlCol="0" anchor="ctr"/>
+          <a:lstStyle/>
+          <a:p>
+            <a:pPr algn="ctr"/>
+          </a:p>
+        </p:txBody>
+      </p:sp>
+      <p:sp>
+        <p:nvSpPr>
+          <p:cNvPr id="29" name="TextBox 28"/>
           <p:cNvSpPr txBox="1"/>
           <p:nvPr/>
         </p:nvSpPr>
         <p:spPr>
           <a:xfrm>
-            <a:off x="365760" y="5779008"/>
-            <a:ext cx="3718560" cy="502920"/>
+            <a:off x="365760" y="5404104"/>
+            <a:ext cx="3715512" cy="420624"/>
           </a:xfrm>
           <a:prstGeom prst="rect">
             <a:avLst/>
@@ -4726,21 +4707,66 @@
                   <a:srgbClr val="1A1A1A"/>
                 </a:solidFill>
               </a:rPr>
-              <a:t>✓ Grille C3+C4 — 6 critères — formateur + pair</a:t>
-            </a:r>
-          </a:p>
-        </p:txBody>
-      </p:sp>
-      <p:sp>
-        <p:nvSpPr>
-          <p:cNvPr id="38" name="TextBox 37"/>
+              <a:t>✔ Grille écoute active + objections validée</a:t>
+            </a:r>
+          </a:p>
+        </p:txBody>
+      </p:sp>
+      <p:sp>
+        <p:nvSpPr>
+          <p:cNvPr id="30" name="Rectangle 29"/>
+          <p:cNvSpPr/>
+          <p:nvPr/>
+        </p:nvSpPr>
+        <p:spPr>
+          <a:xfrm>
+            <a:off x="4154423" y="5367528"/>
+            <a:ext cx="3843528" cy="502920"/>
+          </a:xfrm>
+          <a:prstGeom prst="rect">
+            <a:avLst/>
+          </a:prstGeom>
+          <a:solidFill>
+            <a:srgbClr val="FFFFFF"/>
+          </a:solidFill>
+          <a:ln w="10160">
+            <a:solidFill>
+              <a:srgbClr val="FF0000"/>
+            </a:solidFill>
+          </a:ln>
+        </p:spPr>
+        <p:style>
+          <a:lnRef idx="1">
+            <a:schemeClr val="accent1"/>
+          </a:lnRef>
+          <a:fillRef idx="3">
+            <a:schemeClr val="accent1"/>
+          </a:fillRef>
+          <a:effectRef idx="2">
+            <a:schemeClr val="accent1"/>
+          </a:effectRef>
+          <a:fontRef idx="minor">
+            <a:schemeClr val="lt1"/>
+          </a:fontRef>
+        </p:style>
+        <p:txBody>
+          <a:bodyPr rtlCol="0" anchor="ctr"/>
+          <a:lstStyle/>
+          <a:p>
+            <a:pPr algn="ctr"/>
+          </a:p>
+        </p:txBody>
+      </p:sp>
+      <p:sp>
+        <p:nvSpPr>
+          <p:cNvPr id="31" name="TextBox 30"/>
           <p:cNvSpPr txBox="1"/>
           <p:nvPr/>
         </p:nvSpPr>
         <p:spPr>
           <a:xfrm>
-            <a:off x="4175760" y="5779008"/>
-            <a:ext cx="3718560" cy="502920"/>
+            <a:off x="4245863" y="5404104"/>
+            <a:ext cx="3715512" cy="420624"/>
           </a:xfrm>
           <a:prstGeom prst="rect">
             <a:avLst/>
@@ -4760,21 +4786,66 @@
                   <a:srgbClr val="1A1A1A"/>
                 </a:solidFill>
               </a:rPr>
-              <a:t>✓ Réflexion LFI : 'Quelle objection me challenge le plus et pourquoi ?'</a:t>
-            </a:r>
-          </a:p>
-        </p:txBody>
-      </p:sp>
-      <p:sp>
-        <p:nvSpPr>
-          <p:cNvPr id="39" name="TextBox 38"/>
+              <a:t>✔ Réflexion dans votre livret : 'Quelle objection me challenge le plus ?'</a:t>
+            </a:r>
+          </a:p>
+        </p:txBody>
+      </p:sp>
+      <p:sp>
+        <p:nvSpPr>
+          <p:cNvPr id="32" name="Rectangle 31"/>
+          <p:cNvSpPr/>
+          <p:nvPr/>
+        </p:nvSpPr>
+        <p:spPr>
+          <a:xfrm>
+            <a:off x="8034527" y="5367528"/>
+            <a:ext cx="3843528" cy="502920"/>
+          </a:xfrm>
+          <a:prstGeom prst="rect">
+            <a:avLst/>
+          </a:prstGeom>
+          <a:solidFill>
+            <a:srgbClr val="FFFFFF"/>
+          </a:solidFill>
+          <a:ln w="10160">
+            <a:solidFill>
+              <a:srgbClr val="FF0000"/>
+            </a:solidFill>
+          </a:ln>
+        </p:spPr>
+        <p:style>
+          <a:lnRef idx="1">
+            <a:schemeClr val="accent1"/>
+          </a:lnRef>
+          <a:fillRef idx="3">
+            <a:schemeClr val="accent1"/>
+          </a:fillRef>
+          <a:effectRef idx="2">
+            <a:schemeClr val="accent1"/>
+          </a:effectRef>
+          <a:fontRef idx="minor">
+            <a:schemeClr val="lt1"/>
+          </a:fontRef>
+        </p:style>
+        <p:txBody>
+          <a:bodyPr rtlCol="0" anchor="ctr"/>
+          <a:lstStyle/>
+          <a:p>
+            <a:pPr algn="ctr"/>
+          </a:p>
+        </p:txBody>
+      </p:sp>
+      <p:sp>
+        <p:nvSpPr>
+          <p:cNvPr id="33" name="TextBox 32"/>
           <p:cNvSpPr txBox="1"/>
           <p:nvPr/>
         </p:nvSpPr>
         <p:spPr>
           <a:xfrm>
-            <a:off x="7985760" y="5779008"/>
-            <a:ext cx="3718560" cy="502920"/>
+            <a:off x="8125967" y="5404104"/>
+            <a:ext cx="3715512" cy="420624"/>
           </a:xfrm>
           <a:prstGeom prst="rect">
             <a:avLst/>
@@ -4794,7 +4865,7 @@
                   <a:srgbClr val="1A1A1A"/>
                 </a:solidFill>
               </a:rPr>
-              <a:t>✓ Score seuil : 14/20 pour validation C3+C4</a:t>
+              <a:t>✔ Score ≥ 14/20 pour validation J4</a:t>
             </a:r>
           </a:p>
         </p:txBody>
@@ -4869,13 +4940,13 @@
         <p:spPr>
           <a:xfrm>
             <a:off x="0" y="0"/>
-            <a:ext cx="12188952" cy="685800"/>
-          </a:xfrm>
-          <a:prstGeom prst="rect">
-            <a:avLst/>
-          </a:prstGeom>
-          <a:solidFill>
-            <a:srgbClr val="005050"/>
+            <a:ext cx="12188952" cy="658368"/>
+          </a:xfrm>
+          <a:prstGeom prst="rect">
+            <a:avLst/>
+          </a:prstGeom>
+          <a:solidFill>
+            <a:srgbClr val="005555"/>
           </a:solidFill>
           <a:ln>
             <a:noFill/>
@@ -4911,14 +4982,14 @@
         </p:nvSpPr>
         <p:spPr>
           <a:xfrm>
-            <a:off x="0" y="667512"/>
-            <a:ext cx="12188952" cy="36576"/>
-          </a:xfrm>
-          <a:prstGeom prst="rect">
-            <a:avLst/>
-          </a:prstGeom>
-          <a:solidFill>
-            <a:srgbClr val="C9A84C"/>
+            <a:off x="0" y="640080"/>
+            <a:ext cx="12188952" cy="54864"/>
+          </a:xfrm>
+          <a:prstGeom prst="rect">
+            <a:avLst/>
+          </a:prstGeom>
+          <a:solidFill>
+            <a:srgbClr val="FF0000"/>
           </a:solidFill>
           <a:ln>
             <a:noFill/>
@@ -4954,8 +5025,8 @@
         </p:nvSpPr>
         <p:spPr>
           <a:xfrm>
-            <a:off x="274320" y="73152"/>
-            <a:ext cx="11612880" cy="566928"/>
+            <a:off x="164592" y="64008"/>
+            <a:ext cx="685800" cy="530352"/>
           </a:xfrm>
           <a:prstGeom prst="rect">
             <a:avLst/>
@@ -4970,12 +5041,12 @@
           <a:p>
             <a:pPr algn="l"/>
             <a:r>
-              <a:rPr sz="1800" b="1" i="0">
+              <a:rPr sz="2000" b="1" i="0">
                 <a:solidFill>
                   <a:srgbClr val="FFFFFF"/>
                 </a:solidFill>
               </a:rPr>
-              <a:t>Les 12 Objections-Types FIM V6 — Réponses CROC</a:t>
+              <a:t>SHY</a:t>
             </a:r>
           </a:p>
         </p:txBody>
@@ -4988,14 +5059,14 @@
         </p:nvSpPr>
         <p:spPr>
           <a:xfrm>
-            <a:off x="274320" y="804672"/>
-            <a:ext cx="365760" cy="274320"/>
-          </a:xfrm>
-          <a:prstGeom prst="rect">
-            <a:avLst/>
-          </a:prstGeom>
-          <a:solidFill>
-            <a:srgbClr val="007A7A"/>
+            <a:off x="914400" y="91440"/>
+            <a:ext cx="36576" cy="475488"/>
+          </a:xfrm>
+          <a:prstGeom prst="rect">
+            <a:avLst/>
+          </a:prstGeom>
+          <a:solidFill>
+            <a:srgbClr val="FF0000"/>
           </a:solidFill>
           <a:ln>
             <a:noFill/>
@@ -5031,8 +5102,8 @@
         </p:nvSpPr>
         <p:spPr>
           <a:xfrm>
-            <a:off x="320040" y="841248"/>
-            <a:ext cx="274320" cy="219456"/>
+            <a:off x="1024128" y="91440"/>
+            <a:ext cx="10881360" cy="475488"/>
           </a:xfrm>
           <a:prstGeom prst="rect">
             <a:avLst/>
@@ -5047,12 +5118,12 @@
           <a:p>
             <a:pPr algn="l"/>
             <a:r>
-              <a:rPr sz="900" b="1" i="0">
+              <a:rPr sz="1700" b="1" i="0">
                 <a:solidFill>
                   <a:srgbClr val="FFFFFF"/>
                 </a:solidFill>
               </a:rPr>
-              <a:t>#</a:t>
+              <a:t>Répondre à une Objection — Votre Méthode en 4 Temps</a:t>
             </a:r>
           </a:p>
         </p:txBody>
@@ -5065,14 +5136,14 @@
         </p:nvSpPr>
         <p:spPr>
           <a:xfrm>
-            <a:off x="658368" y="804672"/>
-            <a:ext cx="4617720" cy="274320"/>
-          </a:xfrm>
-          <a:prstGeom prst="rect">
-            <a:avLst/>
-          </a:prstGeom>
-          <a:solidFill>
-            <a:srgbClr val="007A7A"/>
+            <a:off x="0" y="6492240"/>
+            <a:ext cx="12188952" cy="365760"/>
+          </a:xfrm>
+          <a:prstGeom prst="rect">
+            <a:avLst/>
+          </a:prstGeom>
+          <a:solidFill>
+            <a:srgbClr val="005555"/>
           </a:solidFill>
           <a:ln>
             <a:noFill/>
@@ -5108,8 +5179,8 @@
         </p:nvSpPr>
         <p:spPr>
           <a:xfrm>
-            <a:off x="704088" y="841248"/>
-            <a:ext cx="4526280" cy="219456"/>
+            <a:off x="0" y="6519672"/>
+            <a:ext cx="12188952" cy="274320"/>
           </a:xfrm>
           <a:prstGeom prst="rect">
             <a:avLst/>
@@ -5122,14 +5193,14 @@
           </a:bodyPr>
           <a:lstStyle/>
           <a:p>
-            <a:pPr algn="l"/>
-            <a:r>
-              <a:rPr sz="900" b="1" i="0">
+            <a:pPr algn="ctr"/>
+            <a:r>
+              <a:rPr sz="900" b="0" i="0">
                 <a:solidFill>
                   <a:srgbClr val="FFFFFF"/>
                 </a:solidFill>
               </a:rPr>
-              <a:t>Objection</a:t>
+              <a:t>SHY-Performance  ·  Formation FIM  ·  V6-01062026SHY-TE</a:t>
             </a:r>
           </a:p>
         </p:txBody>
@@ -5142,14 +5213,14 @@
         </p:nvSpPr>
         <p:spPr>
           <a:xfrm>
-            <a:off x="5303520" y="804672"/>
-            <a:ext cx="1554480" cy="274320"/>
-          </a:xfrm>
-          <a:prstGeom prst="rect">
-            <a:avLst/>
-          </a:prstGeom>
-          <a:solidFill>
-            <a:srgbClr val="007A7A"/>
+            <a:off x="274320" y="804672"/>
+            <a:ext cx="2816352" cy="640080"/>
+          </a:xfrm>
+          <a:prstGeom prst="rect">
+            <a:avLst/>
+          </a:prstGeom>
+          <a:solidFill>
+            <a:srgbClr val="005555"/>
           </a:solidFill>
           <a:ln>
             <a:noFill/>
@@ -5185,8 +5256,8 @@
         </p:nvSpPr>
         <p:spPr>
           <a:xfrm>
-            <a:off x="5349240" y="841248"/>
-            <a:ext cx="1463039" cy="219456"/>
+            <a:off x="384048" y="841248"/>
+            <a:ext cx="2596896" cy="566928"/>
           </a:xfrm>
           <a:prstGeom prst="rect">
             <a:avLst/>
@@ -5199,14 +5270,15 @@
           </a:bodyPr>
           <a:lstStyle/>
           <a:p>
-            <a:pPr algn="l"/>
-            <a:r>
-              <a:rPr sz="900" b="1" i="0">
+            <a:pPr algn="ctr"/>
+            <a:r>
+              <a:rPr sz="1200" b="1" i="0">
                 <a:solidFill>
                   <a:srgbClr val="FFFFFF"/>
                 </a:solidFill>
               </a:rPr>
-              <a:t>Type</a:t>
+              <a:t>1
+ACCUSEZ RÉCEPTION</a:t>
             </a:r>
           </a:p>
         </p:txBody>
@@ -5219,17 +5291,19 @@
         </p:nvSpPr>
         <p:spPr>
           <a:xfrm>
-            <a:off x="6903720" y="804672"/>
-            <a:ext cx="5212080" cy="274320"/>
-          </a:xfrm>
-          <a:prstGeom prst="rect">
-            <a:avLst/>
-          </a:prstGeom>
-          <a:solidFill>
-            <a:srgbClr val="007A7A"/>
-          </a:solidFill>
-          <a:ln>
-            <a:noFill/>
+            <a:off x="274320" y="1444752"/>
+            <a:ext cx="2816352" cy="3383280"/>
+          </a:xfrm>
+          <a:prstGeom prst="rect">
+            <a:avLst/>
+          </a:prstGeom>
+          <a:solidFill>
+            <a:srgbClr val="FFFFFF"/>
+          </a:solidFill>
+          <a:ln w="19050">
+            <a:solidFill>
+              <a:srgbClr val="005555"/>
+            </a:solidFill>
           </a:ln>
         </p:spPr>
         <p:style>
@@ -5262,8 +5336,8 @@
         </p:nvSpPr>
         <p:spPr>
           <a:xfrm>
-            <a:off x="6949440" y="841248"/>
-            <a:ext cx="5120640" cy="219456"/>
+            <a:off x="402336" y="1517904"/>
+            <a:ext cx="2560320" cy="3200400"/>
           </a:xfrm>
           <a:prstGeom prst="rect">
             <a:avLst/>
@@ -5278,12 +5352,16 @@
           <a:p>
             <a:pPr algn="l"/>
             <a:r>
-              <a:rPr sz="900" b="1" i="0">
-                <a:solidFill>
-                  <a:srgbClr val="FFFFFF"/>
+              <a:rPr sz="1000" b="0" i="0">
+                <a:solidFill>
+                  <a:srgbClr val="1A1A1A"/>
                 </a:solidFill>
               </a:rPr>
-              <a:t>Réponse CROC résumée</a:t>
+              <a:t>Ne justifiez pas immédiatement.
+Montrez que vous avez entendu.
+'Je comprends tout à fait…'
+'C'est une question que beaucoup
+de personnes se posent…'</a:t>
             </a:r>
           </a:p>
         </p:txBody>
@@ -5296,14 +5374,14 @@
         </p:nvSpPr>
         <p:spPr>
           <a:xfrm>
-            <a:off x="274320" y="1097280"/>
-            <a:ext cx="365760" cy="438912"/>
-          </a:xfrm>
-          <a:prstGeom prst="rect">
-            <a:avLst/>
-          </a:prstGeom>
-          <a:solidFill>
-            <a:srgbClr val="007A7A"/>
+            <a:off x="3200400" y="804672"/>
+            <a:ext cx="2816352" cy="640080"/>
+          </a:xfrm>
+          <a:prstGeom prst="rect">
+            <a:avLst/>
+          </a:prstGeom>
+          <a:solidFill>
+            <a:srgbClr val="008080"/>
           </a:solidFill>
           <a:ln>
             <a:noFill/>
@@ -5339,8 +5417,8 @@
         </p:nvSpPr>
         <p:spPr>
           <a:xfrm>
-            <a:off x="292608" y="1170432"/>
-            <a:ext cx="329184" cy="292608"/>
+            <a:off x="3310128" y="841248"/>
+            <a:ext cx="2596896" cy="566928"/>
           </a:xfrm>
           <a:prstGeom prst="rect">
             <a:avLst/>
@@ -5355,12 +5433,13 @@
           <a:p>
             <a:pPr algn="ctr"/>
             <a:r>
-              <a:rPr sz="900" b="1" i="0">
+              <a:rPr sz="1200" b="1" i="0">
                 <a:solidFill>
                   <a:srgbClr val="FFFFFF"/>
                 </a:solidFill>
               </a:rPr>
-              <a:t>O1</a:t>
+              <a:t>2
+REFORMULEZ</a:t>
             </a:r>
           </a:p>
         </p:txBody>
@@ -5373,17 +5452,19 @@
         </p:nvSpPr>
         <p:spPr>
           <a:xfrm>
-            <a:off x="658368" y="1097280"/>
-            <a:ext cx="4617720" cy="438912"/>
-          </a:xfrm>
-          <a:prstGeom prst="rect">
-            <a:avLst/>
-          </a:prstGeom>
-          <a:solidFill>
-            <a:srgbClr val="F0F7F7"/>
-          </a:solidFill>
-          <a:ln>
-            <a:noFill/>
+            <a:off x="3200400" y="1444752"/>
+            <a:ext cx="2816352" cy="3383280"/>
+          </a:xfrm>
+          <a:prstGeom prst="rect">
+            <a:avLst/>
+          </a:prstGeom>
+          <a:solidFill>
+            <a:srgbClr val="FFFFFF"/>
+          </a:solidFill>
+          <a:ln w="19050">
+            <a:solidFill>
+              <a:srgbClr val="008080"/>
+            </a:solidFill>
           </a:ln>
         </p:spPr>
         <p:style>
@@ -5416,8 +5497,8 @@
         </p:nvSpPr>
         <p:spPr>
           <a:xfrm>
-            <a:off x="731520" y="1170432"/>
-            <a:ext cx="4480560" cy="329184"/>
+            <a:off x="3328416" y="1517904"/>
+            <a:ext cx="2560320" cy="3200400"/>
           </a:xfrm>
           <a:prstGeom prst="rect">
             <a:avLst/>
@@ -5432,12 +5513,16 @@
           <a:p>
             <a:pPr algn="l"/>
             <a:r>
-              <a:rPr sz="900" b="0" i="0">
+              <a:rPr sz="1000" b="0" i="0">
                 <a:solidFill>
                   <a:srgbClr val="1A1A1A"/>
                 </a:solidFill>
               </a:rPr>
-              <a:t>Je n'ai pas les moyens</a:t>
+              <a:t>Assurez-vous d'avoir compris
+le vrai frein, pas la surface.
+'Si je comprends bien, vous voulez
+dire que… c'est bien ça ?'
+'Ce qui vous préoccupe c'est…'</a:t>
             </a:r>
           </a:p>
         </p:txBody>
@@ -5450,14 +5535,14 @@
         </p:nvSpPr>
         <p:spPr>
           <a:xfrm>
-            <a:off x="5303520" y="1097280"/>
-            <a:ext cx="1554480" cy="438912"/>
-          </a:xfrm>
-          <a:prstGeom prst="rect">
-            <a:avLst/>
-          </a:prstGeom>
-          <a:solidFill>
-            <a:srgbClr val="4A9070"/>
+            <a:off x="6126480" y="804672"/>
+            <a:ext cx="2816352" cy="640080"/>
+          </a:xfrm>
+          <a:prstGeom prst="rect">
+            <a:avLst/>
+          </a:prstGeom>
+          <a:solidFill>
+            <a:srgbClr val="2A7A50"/>
           </a:solidFill>
           <a:ln>
             <a:noFill/>
@@ -5493,8 +5578,8 @@
         </p:nvSpPr>
         <p:spPr>
           <a:xfrm>
-            <a:off x="5349240" y="1188720"/>
-            <a:ext cx="1463040" cy="292608"/>
+            <a:off x="6236208" y="841248"/>
+            <a:ext cx="2596896" cy="566928"/>
           </a:xfrm>
           <a:prstGeom prst="rect">
             <a:avLst/>
@@ -5509,12 +5594,13 @@
           <a:p>
             <a:pPr algn="ctr"/>
             <a:r>
-              <a:rPr sz="800" b="1" i="0">
+              <a:rPr sz="1200" b="1" i="0">
                 <a:solidFill>
                   <a:srgbClr val="FFFFFF"/>
                 </a:solidFill>
               </a:rPr>
-              <a:t>Financière</a:t>
+              <a:t>3
+RÉPONDEZ AVEC PREUVE</a:t>
             </a:r>
           </a:p>
         </p:txBody>
@@ -5527,17 +5613,19 @@
         </p:nvSpPr>
         <p:spPr>
           <a:xfrm>
-            <a:off x="6903720" y="1097280"/>
-            <a:ext cx="5212080" cy="438912"/>
-          </a:xfrm>
-          <a:prstGeom prst="rect">
-            <a:avLst/>
-          </a:prstGeom>
-          <a:solidFill>
-            <a:srgbClr val="F0F7F7"/>
-          </a:solidFill>
-          <a:ln>
-            <a:noFill/>
+            <a:off x="6126480" y="1444752"/>
+            <a:ext cx="2816352" cy="3383280"/>
+          </a:xfrm>
+          <a:prstGeom prst="rect">
+            <a:avLst/>
+          </a:prstGeom>
+          <a:solidFill>
+            <a:srgbClr val="FFFFFF"/>
+          </a:solidFill>
+          <a:ln w="19050">
+            <a:solidFill>
+              <a:srgbClr val="2A7A50"/>
+            </a:solidFill>
           </a:ln>
         </p:spPr>
         <p:style>
@@ -5570,8 +5658,8 @@
         </p:nvSpPr>
         <p:spPr>
           <a:xfrm>
-            <a:off x="6976872" y="1152144"/>
-            <a:ext cx="5074920" cy="347472"/>
+            <a:off x="6254496" y="1517904"/>
+            <a:ext cx="2560320" cy="3200400"/>
           </a:xfrm>
           <a:prstGeom prst="rect">
             <a:avLst/>
@@ -5586,12 +5674,16 @@
           <a:p>
             <a:pPr algn="l"/>
             <a:r>
-              <a:rPr sz="900" b="0" i="1">
+              <a:rPr sz="1000" b="0" i="0">
                 <a:solidFill>
                   <a:srgbClr val="1A1A1A"/>
                 </a:solidFill>
               </a:rPr>
-              <a:t>3 DH/jour = 1 café. Ce montant change 6 vies/an.</a:t>
+              <a:t>1 preuve concrète +
+1 chiffre + 1 exemple réel.
+Rapport annuel UNICEF public.
+Audit Comité de la Charte.
+Témoignage donateur.</a:t>
             </a:r>
           </a:p>
         </p:txBody>
@@ -5604,14 +5696,14 @@
         </p:nvSpPr>
         <p:spPr>
           <a:xfrm>
-            <a:off x="274320" y="1545336"/>
-            <a:ext cx="365760" cy="438912"/>
-          </a:xfrm>
-          <a:prstGeom prst="rect">
-            <a:avLst/>
-          </a:prstGeom>
-          <a:solidFill>
-            <a:srgbClr val="007A7A"/>
+            <a:off x="9052560" y="804672"/>
+            <a:ext cx="2816352" cy="640080"/>
+          </a:xfrm>
+          <a:prstGeom prst="rect">
+            <a:avLst/>
+          </a:prstGeom>
+          <a:solidFill>
+            <a:srgbClr val="FF0000"/>
           </a:solidFill>
           <a:ln>
             <a:noFill/>
@@ -5647,8 +5739,8 @@
         </p:nvSpPr>
         <p:spPr>
           <a:xfrm>
-            <a:off x="292608" y="1618488"/>
-            <a:ext cx="329184" cy="292608"/>
+            <a:off x="9162288" y="841248"/>
+            <a:ext cx="2596896" cy="566928"/>
           </a:xfrm>
           <a:prstGeom prst="rect">
             <a:avLst/>
@@ -5663,12 +5755,13 @@
           <a:p>
             <a:pPr algn="ctr"/>
             <a:r>
-              <a:rPr sz="900" b="1" i="0">
+              <a:rPr sz="1200" b="1" i="0">
                 <a:solidFill>
                   <a:srgbClr val="FFFFFF"/>
                 </a:solidFill>
               </a:rPr>
-              <a:t>O2</a:t>
+              <a:t>4
+RELANCEZ</a:t>
             </a:r>
           </a:p>
         </p:txBody>
@@ -5681,8 +5774,8 @@
         </p:nvSpPr>
         <p:spPr>
           <a:xfrm>
-            <a:off x="658368" y="1545336"/>
-            <a:ext cx="4617720" cy="438912"/>
+            <a:off x="9052560" y="1444752"/>
+            <a:ext cx="2816352" cy="3383280"/>
           </a:xfrm>
           <a:prstGeom prst="rect">
             <a:avLst/>
@@ -5690,8 +5783,10 @@
           <a:solidFill>
             <a:srgbClr val="FFFFFF"/>
           </a:solidFill>
-          <a:ln>
-            <a:noFill/>
+          <a:ln w="19050">
+            <a:solidFill>
+              <a:srgbClr val="FF0000"/>
+            </a:solidFill>
           </a:ln>
         </p:spPr>
         <p:style>
@@ -5724,8 +5819,8 @@
         </p:nvSpPr>
         <p:spPr>
           <a:xfrm>
-            <a:off x="731520" y="1618488"/>
-            <a:ext cx="4480560" cy="329184"/>
+            <a:off x="9180576" y="1517904"/>
+            <a:ext cx="2560320" cy="3200400"/>
           </a:xfrm>
           <a:prstGeom prst="rect">
             <a:avLst/>
@@ -5740,12 +5835,16 @@
           <a:p>
             <a:pPr algn="l"/>
             <a:r>
-              <a:rPr sz="900" b="0" i="0">
+              <a:rPr sz="1000" b="0" i="0">
                 <a:solidFill>
                   <a:srgbClr val="1A1A1A"/>
                 </a:solidFill>
               </a:rPr>
-              <a:t>Je ne fais pas confiance</a:t>
+              <a:t>Revenez à la proposition
+avec naturel. Pas de pression.
+'Est-ce que cela répond à
+votre question ?
+On peut aller plus loin ?'</a:t>
             </a:r>
           </a:p>
         </p:txBody>
@@ -5758,14 +5857,14 @@
         </p:nvSpPr>
         <p:spPr>
           <a:xfrm>
-            <a:off x="5303520" y="1545336"/>
-            <a:ext cx="1554480" cy="438912"/>
-          </a:xfrm>
-          <a:prstGeom prst="rect">
-            <a:avLst/>
-          </a:prstGeom>
-          <a:solidFill>
-            <a:srgbClr val="C0392B"/>
+            <a:off x="274320" y="4983480"/>
+            <a:ext cx="11640312" cy="402336"/>
+          </a:xfrm>
+          <a:prstGeom prst="rect">
+            <a:avLst/>
+          </a:prstGeom>
+          <a:solidFill>
+            <a:srgbClr val="005555"/>
           </a:solidFill>
           <a:ln>
             <a:noFill/>
@@ -5801,8 +5900,8 @@
         </p:nvSpPr>
         <p:spPr>
           <a:xfrm>
-            <a:off x="5349240" y="1636776"/>
-            <a:ext cx="1463040" cy="292608"/>
+            <a:off x="411479" y="5056632"/>
+            <a:ext cx="11365992" cy="256032"/>
           </a:xfrm>
           <a:prstGeom prst="rect">
             <a:avLst/>
@@ -5815,34 +5914,52 @@
           </a:bodyPr>
           <a:lstStyle/>
           <a:p>
-            <a:pPr algn="ctr"/>
-            <a:r>
-              <a:rPr sz="800" b="1" i="0">
+            <a:pPr algn="l"/>
+            <a:r>
+              <a:rPr sz="1000" b="0" i="0">
                 <a:solidFill>
                   <a:srgbClr val="FFFFFF"/>
                 </a:solidFill>
               </a:rPr>
-              <a:t>Méfiance</a:t>
-            </a:r>
-          </a:p>
-        </p:txBody>
-      </p:sp>
-      <p:sp>
-        <p:nvSpPr>
-          <p:cNvPr id="28" name="Rectangle 27"/>
+              <a:t>Le silence après votre réponse est normal. Laissez le donateur traiter l'information. Comptez 3 secondes avant de relancer.</a:t>
+            </a:r>
+          </a:p>
+        </p:txBody>
+      </p:sp>
+    </p:spTree>
+  </p:cSld>
+  <p:clrMapOvr>
+    <a:masterClrMapping/>
+  </p:clrMapOvr>
+</p:sld>
+</file>
+
+<file path=ppt/slides/slide4.xml><?xml version="1.0" encoding="utf-8"?>
+<p:sld xmlns:a="http://schemas.openxmlformats.org/drawingml/2006/main" xmlns:p="http://schemas.openxmlformats.org/presentationml/2006/main" xmlns:r="http://schemas.openxmlformats.org/officeDocument/2006/relationships">
+  <p:cSld>
+    <p:spTree>
+      <p:nvGrpSpPr>
+        <p:cNvPr id="1" name=""/>
+        <p:cNvGrpSpPr/>
+        <p:nvPr/>
+      </p:nvGrpSpPr>
+      <p:grpSpPr/>
+      <p:sp>
+        <p:nvSpPr>
+          <p:cNvPr id="2" name="Rectangle 1"/>
           <p:cNvSpPr/>
           <p:nvPr/>
         </p:nvSpPr>
         <p:spPr>
           <a:xfrm>
-            <a:off x="6903720" y="1545336"/>
-            <a:ext cx="5212080" cy="438912"/>
-          </a:xfrm>
-          <a:prstGeom prst="rect">
-            <a:avLst/>
-          </a:prstGeom>
-          <a:solidFill>
-            <a:srgbClr val="FFFFFF"/>
+            <a:off x="0" y="0"/>
+            <a:ext cx="12188952" cy="6858000"/>
+          </a:xfrm>
+          <a:prstGeom prst="rect">
+            <a:avLst/>
+          </a:prstGeom>
+          <a:solidFill>
+            <a:srgbClr val="F0F7F7"/>
           </a:solidFill>
           <a:ln>
             <a:noFill/>
@@ -5872,54 +5989,20 @@
       </p:sp>
       <p:sp>
         <p:nvSpPr>
-          <p:cNvPr id="29" name="TextBox 28"/>
-          <p:cNvSpPr txBox="1"/>
-          <p:nvPr/>
-        </p:nvSpPr>
-        <p:spPr>
-          <a:xfrm>
-            <a:off x="6976872" y="1600200"/>
-            <a:ext cx="5074920" cy="347472"/>
-          </a:xfrm>
-          <a:prstGeom prst="rect">
-            <a:avLst/>
-          </a:prstGeom>
-          <a:noFill/>
-        </p:spPr>
-        <p:txBody>
-          <a:bodyPr wrap="square">
-            <a:spAutoFit/>
-          </a:bodyPr>
-          <a:lstStyle/>
-          <a:p>
-            <a:pPr algn="l"/>
-            <a:r>
-              <a:rPr sz="900" b="0" i="1">
-                <a:solidFill>
-                  <a:srgbClr val="1A1A1A"/>
-                </a:solidFill>
-              </a:rPr>
-              <a:t>Rapport annuel public + badge officiel UNICEF</a:t>
-            </a:r>
-          </a:p>
-        </p:txBody>
-      </p:sp>
-      <p:sp>
-        <p:nvSpPr>
-          <p:cNvPr id="30" name="Rectangle 29"/>
+          <p:cNvPr id="3" name="Rectangle 2"/>
           <p:cNvSpPr/>
           <p:nvPr/>
         </p:nvSpPr>
         <p:spPr>
           <a:xfrm>
-            <a:off x="274320" y="1993391"/>
-            <a:ext cx="365760" cy="438912"/>
-          </a:xfrm>
-          <a:prstGeom prst="rect">
-            <a:avLst/>
-          </a:prstGeom>
-          <a:solidFill>
-            <a:srgbClr val="007A7A"/>
+            <a:off x="0" y="0"/>
+            <a:ext cx="12188952" cy="658368"/>
+          </a:xfrm>
+          <a:prstGeom prst="rect">
+            <a:avLst/>
+          </a:prstGeom>
+          <a:solidFill>
+            <a:srgbClr val="005555"/>
           </a:solidFill>
           <a:ln>
             <a:noFill/>
@@ -5949,54 +6032,20 @@
       </p:sp>
       <p:sp>
         <p:nvSpPr>
-          <p:cNvPr id="31" name="TextBox 30"/>
-          <p:cNvSpPr txBox="1"/>
-          <p:nvPr/>
-        </p:nvSpPr>
-        <p:spPr>
-          <a:xfrm>
-            <a:off x="292608" y="2066543"/>
-            <a:ext cx="329184" cy="292608"/>
-          </a:xfrm>
-          <a:prstGeom prst="rect">
-            <a:avLst/>
-          </a:prstGeom>
-          <a:noFill/>
-        </p:spPr>
-        <p:txBody>
-          <a:bodyPr wrap="square">
-            <a:spAutoFit/>
-          </a:bodyPr>
-          <a:lstStyle/>
-          <a:p>
-            <a:pPr algn="ctr"/>
-            <a:r>
-              <a:rPr sz="900" b="1" i="0">
-                <a:solidFill>
-                  <a:srgbClr val="FFFFFF"/>
-                </a:solidFill>
-              </a:rPr>
-              <a:t>O3</a:t>
-            </a:r>
-          </a:p>
-        </p:txBody>
-      </p:sp>
-      <p:sp>
-        <p:nvSpPr>
-          <p:cNvPr id="32" name="Rectangle 31"/>
+          <p:cNvPr id="4" name="Rectangle 3"/>
           <p:cNvSpPr/>
           <p:nvPr/>
         </p:nvSpPr>
         <p:spPr>
           <a:xfrm>
-            <a:off x="658368" y="1993391"/>
-            <a:ext cx="4617720" cy="438912"/>
-          </a:xfrm>
-          <a:prstGeom prst="rect">
-            <a:avLst/>
-          </a:prstGeom>
-          <a:solidFill>
-            <a:srgbClr val="F0F7F7"/>
+            <a:off x="0" y="640080"/>
+            <a:ext cx="12188952" cy="54864"/>
+          </a:xfrm>
+          <a:prstGeom prst="rect">
+            <a:avLst/>
+          </a:prstGeom>
+          <a:solidFill>
+            <a:srgbClr val="FF0000"/>
           </a:solidFill>
           <a:ln>
             <a:noFill/>
@@ -6026,14 +6075,14 @@
       </p:sp>
       <p:sp>
         <p:nvSpPr>
-          <p:cNvPr id="33" name="TextBox 32"/>
+          <p:cNvPr id="5" name="TextBox 4"/>
           <p:cNvSpPr txBox="1"/>
           <p:nvPr/>
         </p:nvSpPr>
         <p:spPr>
           <a:xfrm>
-            <a:off x="731520" y="2066543"/>
-            <a:ext cx="4480560" cy="329184"/>
+            <a:off x="164592" y="64008"/>
+            <a:ext cx="685800" cy="530352"/>
           </a:xfrm>
           <a:prstGeom prst="rect">
             <a:avLst/>
@@ -6048,32 +6097,32 @@
           <a:p>
             <a:pPr algn="l"/>
             <a:r>
-              <a:rPr sz="900" b="0" i="0">
-                <a:solidFill>
-                  <a:srgbClr val="1A1A1A"/>
+              <a:rPr sz="2000" b="1" i="0">
+                <a:solidFill>
+                  <a:srgbClr val="FFFFFF"/>
                 </a:solidFill>
               </a:rPr>
-              <a:t>J'ai déjà fait un don</a:t>
-            </a:r>
-          </a:p>
-        </p:txBody>
-      </p:sp>
-      <p:sp>
-        <p:nvSpPr>
-          <p:cNvPr id="34" name="Rectangle 33"/>
+              <a:t>SHY</a:t>
+            </a:r>
+          </a:p>
+        </p:txBody>
+      </p:sp>
+      <p:sp>
+        <p:nvSpPr>
+          <p:cNvPr id="6" name="Rectangle 5"/>
           <p:cNvSpPr/>
           <p:nvPr/>
         </p:nvSpPr>
         <p:spPr>
           <a:xfrm>
-            <a:off x="5303520" y="1993391"/>
-            <a:ext cx="1554480" cy="438912"/>
-          </a:xfrm>
-          <a:prstGeom prst="rect">
-            <a:avLst/>
-          </a:prstGeom>
-          <a:solidFill>
-            <a:srgbClr val="007A7A"/>
+            <a:off x="914400" y="91440"/>
+            <a:ext cx="36576" cy="475488"/>
+          </a:xfrm>
+          <a:prstGeom prst="rect">
+            <a:avLst/>
+          </a:prstGeom>
+          <a:solidFill>
+            <a:srgbClr val="FF0000"/>
           </a:solidFill>
           <a:ln>
             <a:noFill/>
@@ -6103,14 +6152,14 @@
       </p:sp>
       <p:sp>
         <p:nvSpPr>
-          <p:cNvPr id="35" name="TextBox 34"/>
+          <p:cNvPr id="7" name="TextBox 6"/>
           <p:cNvSpPr txBox="1"/>
           <p:nvPr/>
         </p:nvSpPr>
         <p:spPr>
           <a:xfrm>
-            <a:off x="5349240" y="2084831"/>
-            <a:ext cx="1463040" cy="292608"/>
+            <a:off x="1024128" y="91440"/>
+            <a:ext cx="10881360" cy="475488"/>
           </a:xfrm>
           <a:prstGeom prst="rect">
             <a:avLst/>
@@ -6123,34 +6172,34 @@
           </a:bodyPr>
           <a:lstStyle/>
           <a:p>
-            <a:pPr algn="ctr"/>
-            <a:r>
-              <a:rPr sz="800" b="1" i="0">
+            <a:pPr algn="l"/>
+            <a:r>
+              <a:rPr sz="1700" b="1" i="0">
                 <a:solidFill>
                   <a:srgbClr val="FFFFFF"/>
                 </a:solidFill>
               </a:rPr>
-              <a:t>Engagé</a:t>
-            </a:r>
-          </a:p>
-        </p:txBody>
-      </p:sp>
-      <p:sp>
-        <p:nvSpPr>
-          <p:cNvPr id="36" name="Rectangle 35"/>
+              <a:t>Les 12 Objections Types — Vos Réponses Prêtes à l'Emploi</a:t>
+            </a:r>
+          </a:p>
+        </p:txBody>
+      </p:sp>
+      <p:sp>
+        <p:nvSpPr>
+          <p:cNvPr id="8" name="Rectangle 7"/>
           <p:cNvSpPr/>
           <p:nvPr/>
         </p:nvSpPr>
         <p:spPr>
           <a:xfrm>
-            <a:off x="6903720" y="1993391"/>
-            <a:ext cx="5212080" cy="438912"/>
-          </a:xfrm>
-          <a:prstGeom prst="rect">
-            <a:avLst/>
-          </a:prstGeom>
-          <a:solidFill>
-            <a:srgbClr val="F0F7F7"/>
+            <a:off x="0" y="6492240"/>
+            <a:ext cx="12188952" cy="365760"/>
+          </a:xfrm>
+          <a:prstGeom prst="rect">
+            <a:avLst/>
+          </a:prstGeom>
+          <a:solidFill>
+            <a:srgbClr val="005555"/>
           </a:solidFill>
           <a:ln>
             <a:noFill/>
@@ -6180,14 +6229,14 @@
       </p:sp>
       <p:sp>
         <p:nvSpPr>
-          <p:cNvPr id="37" name="TextBox 36"/>
+          <p:cNvPr id="9" name="TextBox 8"/>
           <p:cNvSpPr txBox="1"/>
           <p:nvPr/>
         </p:nvSpPr>
         <p:spPr>
           <a:xfrm>
-            <a:off x="6976872" y="2048255"/>
-            <a:ext cx="5074920" cy="347472"/>
+            <a:off x="0" y="6519672"/>
+            <a:ext cx="12188952" cy="274320"/>
           </a:xfrm>
           <a:prstGeom prst="rect">
             <a:avLst/>
@@ -6200,34 +6249,34 @@
           </a:bodyPr>
           <a:lstStyle/>
           <a:p>
-            <a:pPr algn="l"/>
-            <a:r>
-              <a:rPr sz="900" b="0" i="1">
-                <a:solidFill>
-                  <a:srgbClr val="1A1A1A"/>
+            <a:pPr algn="ctr"/>
+            <a:r>
+              <a:rPr sz="900" b="0" i="0">
+                <a:solidFill>
+                  <a:srgbClr val="FFFFFF"/>
                 </a:solidFill>
               </a:rPr>
-              <a:t>Valoriser + proposer le don régulier complémentaire</a:t>
-            </a:r>
-          </a:p>
-        </p:txBody>
-      </p:sp>
-      <p:sp>
-        <p:nvSpPr>
-          <p:cNvPr id="38" name="Rectangle 37"/>
+              <a:t>SHY-Performance  ·  Formation FIM  ·  V6-01062026SHY-TE</a:t>
+            </a:r>
+          </a:p>
+        </p:txBody>
+      </p:sp>
+      <p:sp>
+        <p:nvSpPr>
+          <p:cNvPr id="10" name="Rectangle 9"/>
           <p:cNvSpPr/>
           <p:nvPr/>
         </p:nvSpPr>
         <p:spPr>
           <a:xfrm>
-            <a:off x="274320" y="2441448"/>
-            <a:ext cx="365760" cy="438912"/>
-          </a:xfrm>
-          <a:prstGeom prst="rect">
-            <a:avLst/>
-          </a:prstGeom>
-          <a:solidFill>
-            <a:srgbClr val="007A7A"/>
+            <a:off x="274320" y="804672"/>
+            <a:ext cx="384048" cy="274320"/>
+          </a:xfrm>
+          <a:prstGeom prst="rect">
+            <a:avLst/>
+          </a:prstGeom>
+          <a:solidFill>
+            <a:srgbClr val="005555"/>
           </a:solidFill>
           <a:ln>
             <a:noFill/>
@@ -6257,14 +6306,14 @@
       </p:sp>
       <p:sp>
         <p:nvSpPr>
-          <p:cNvPr id="39" name="TextBox 38"/>
+          <p:cNvPr id="11" name="TextBox 10"/>
           <p:cNvSpPr txBox="1"/>
           <p:nvPr/>
         </p:nvSpPr>
         <p:spPr>
           <a:xfrm>
-            <a:off x="292608" y="2514600"/>
-            <a:ext cx="329184" cy="292608"/>
+            <a:off x="329184" y="841248"/>
+            <a:ext cx="292607" cy="219456"/>
           </a:xfrm>
           <a:prstGeom prst="rect">
             <a:avLst/>
@@ -6277,34 +6326,34 @@
           </a:bodyPr>
           <a:lstStyle/>
           <a:p>
-            <a:pPr algn="ctr"/>
+            <a:pPr algn="l"/>
             <a:r>
               <a:rPr sz="900" b="1" i="0">
                 <a:solidFill>
                   <a:srgbClr val="FFFFFF"/>
                 </a:solidFill>
               </a:rPr>
-              <a:t>O4</a:t>
-            </a:r>
-          </a:p>
-        </p:txBody>
-      </p:sp>
-      <p:sp>
-        <p:nvSpPr>
-          <p:cNvPr id="40" name="Rectangle 39"/>
+              <a:t>#</a:t>
+            </a:r>
+          </a:p>
+        </p:txBody>
+      </p:sp>
+      <p:sp>
+        <p:nvSpPr>
+          <p:cNvPr id="12" name="Rectangle 11"/>
           <p:cNvSpPr/>
           <p:nvPr/>
         </p:nvSpPr>
         <p:spPr>
           <a:xfrm>
-            <a:off x="658368" y="2441448"/>
-            <a:ext cx="4617720" cy="438912"/>
-          </a:xfrm>
-          <a:prstGeom prst="rect">
-            <a:avLst/>
-          </a:prstGeom>
-          <a:solidFill>
-            <a:srgbClr val="FFFFFF"/>
+            <a:off x="685800" y="804672"/>
+            <a:ext cx="4334256" cy="274320"/>
+          </a:xfrm>
+          <a:prstGeom prst="rect">
+            <a:avLst/>
+          </a:prstGeom>
+          <a:solidFill>
+            <a:srgbClr val="005555"/>
           </a:solidFill>
           <a:ln>
             <a:noFill/>
@@ -6334,14 +6383,14 @@
       </p:sp>
       <p:sp>
         <p:nvSpPr>
-          <p:cNvPr id="41" name="TextBox 40"/>
+          <p:cNvPr id="13" name="TextBox 12"/>
           <p:cNvSpPr txBox="1"/>
           <p:nvPr/>
         </p:nvSpPr>
         <p:spPr>
           <a:xfrm>
-            <a:off x="731520" y="2514600"/>
-            <a:ext cx="4480560" cy="329184"/>
+            <a:off x="740664" y="841248"/>
+            <a:ext cx="4242816" cy="219456"/>
           </a:xfrm>
           <a:prstGeom prst="rect">
             <a:avLst/>
@@ -6356,32 +6405,32 @@
           <a:p>
             <a:pPr algn="l"/>
             <a:r>
-              <a:rPr sz="900" b="0" i="0">
-                <a:solidFill>
-                  <a:srgbClr val="1A1A1A"/>
+              <a:rPr sz="900" b="1" i="0">
+                <a:solidFill>
+                  <a:srgbClr val="FFFFFF"/>
                 </a:solidFill>
               </a:rPr>
-              <a:t>Je dois réfléchir</a:t>
-            </a:r>
-          </a:p>
-        </p:txBody>
-      </p:sp>
-      <p:sp>
-        <p:nvSpPr>
-          <p:cNvPr id="42" name="Rectangle 41"/>
+              <a:t>L'objection que vous entendez</a:t>
+            </a:r>
+          </a:p>
+        </p:txBody>
+      </p:sp>
+      <p:sp>
+        <p:nvSpPr>
+          <p:cNvPr id="14" name="Rectangle 13"/>
           <p:cNvSpPr/>
           <p:nvPr/>
         </p:nvSpPr>
         <p:spPr>
           <a:xfrm>
-            <a:off x="5303520" y="2441448"/>
-            <a:ext cx="1554480" cy="438912"/>
-          </a:xfrm>
-          <a:prstGeom prst="rect">
-            <a:avLst/>
-          </a:prstGeom>
-          <a:solidFill>
-            <a:srgbClr val="D27A42"/>
+            <a:off x="5047488" y="804672"/>
+            <a:ext cx="1618488" cy="274320"/>
+          </a:xfrm>
+          <a:prstGeom prst="rect">
+            <a:avLst/>
+          </a:prstGeom>
+          <a:solidFill>
+            <a:srgbClr val="005555"/>
           </a:solidFill>
           <a:ln>
             <a:noFill/>
@@ -6411,14 +6460,14 @@
       </p:sp>
       <p:sp>
         <p:nvSpPr>
-          <p:cNvPr id="43" name="TextBox 42"/>
+          <p:cNvPr id="15" name="TextBox 14"/>
           <p:cNvSpPr txBox="1"/>
           <p:nvPr/>
         </p:nvSpPr>
         <p:spPr>
           <a:xfrm>
-            <a:off x="5349240" y="2532888"/>
-            <a:ext cx="1463040" cy="292608"/>
+            <a:off x="5102351" y="841248"/>
+            <a:ext cx="1527048" cy="219456"/>
           </a:xfrm>
           <a:prstGeom prst="rect">
             <a:avLst/>
@@ -6431,34 +6480,34 @@
           </a:bodyPr>
           <a:lstStyle/>
           <a:p>
-            <a:pPr algn="ctr"/>
-            <a:r>
-              <a:rPr sz="800" b="1" i="0">
+            <a:pPr algn="l"/>
+            <a:r>
+              <a:rPr sz="900" b="1" i="0">
                 <a:solidFill>
                   <a:srgbClr val="FFFFFF"/>
                 </a:solidFill>
               </a:rPr>
-              <a:t>Report</a:t>
-            </a:r>
-          </a:p>
-        </p:txBody>
-      </p:sp>
-      <p:sp>
-        <p:nvSpPr>
-          <p:cNvPr id="44" name="Rectangle 43"/>
+              <a:t>Type</a:t>
+            </a:r>
+          </a:p>
+        </p:txBody>
+      </p:sp>
+      <p:sp>
+        <p:nvSpPr>
+          <p:cNvPr id="16" name="Rectangle 15"/>
           <p:cNvSpPr/>
           <p:nvPr/>
         </p:nvSpPr>
         <p:spPr>
           <a:xfrm>
-            <a:off x="6903720" y="2441448"/>
-            <a:ext cx="5212080" cy="438912"/>
-          </a:xfrm>
-          <a:prstGeom prst="rect">
-            <a:avLst/>
-          </a:prstGeom>
-          <a:solidFill>
-            <a:srgbClr val="FFFFFF"/>
+            <a:off x="6693408" y="804672"/>
+            <a:ext cx="5340096" cy="274320"/>
+          </a:xfrm>
+          <a:prstGeom prst="rect">
+            <a:avLst/>
+          </a:prstGeom>
+          <a:solidFill>
+            <a:srgbClr val="005555"/>
           </a:solidFill>
           <a:ln>
             <a:noFill/>
@@ -6488,14 +6537,14 @@
       </p:sp>
       <p:sp>
         <p:nvSpPr>
-          <p:cNvPr id="45" name="TextBox 44"/>
+          <p:cNvPr id="17" name="TextBox 16"/>
           <p:cNvSpPr txBox="1"/>
           <p:nvPr/>
         </p:nvSpPr>
         <p:spPr>
           <a:xfrm>
-            <a:off x="6976872" y="2496312"/>
-            <a:ext cx="5074920" cy="347472"/>
+            <a:off x="6748272" y="841248"/>
+            <a:ext cx="5248656" cy="219456"/>
           </a:xfrm>
           <a:prstGeom prst="rect">
             <a:avLst/>
@@ -6510,32 +6559,32 @@
           <a:p>
             <a:pPr algn="l"/>
             <a:r>
-              <a:rPr sz="900" b="0" i="1">
-                <a:solidFill>
-                  <a:srgbClr val="1A1A1A"/>
+              <a:rPr sz="900" b="1" i="0">
+                <a:solidFill>
+                  <a:srgbClr val="FFFFFF"/>
                 </a:solidFill>
               </a:rPr>
-              <a:t>Clarifier le frein + ancrer urgence humanitaire</a:t>
-            </a:r>
-          </a:p>
-        </p:txBody>
-      </p:sp>
-      <p:sp>
-        <p:nvSpPr>
-          <p:cNvPr id="46" name="Rectangle 45"/>
+              <a:t>Ce que vous répondez</a:t>
+            </a:r>
+          </a:p>
+        </p:txBody>
+      </p:sp>
+      <p:sp>
+        <p:nvSpPr>
+          <p:cNvPr id="18" name="Rectangle 17"/>
           <p:cNvSpPr/>
           <p:nvPr/>
         </p:nvSpPr>
         <p:spPr>
           <a:xfrm>
-            <a:off x="274320" y="2889504"/>
-            <a:ext cx="365760" cy="438912"/>
-          </a:xfrm>
-          <a:prstGeom prst="rect">
-            <a:avLst/>
-          </a:prstGeom>
-          <a:solidFill>
-            <a:srgbClr val="007A7A"/>
+            <a:off x="274320" y="1097280"/>
+            <a:ext cx="384048" cy="425196"/>
+          </a:xfrm>
+          <a:prstGeom prst="rect">
+            <a:avLst/>
+          </a:prstGeom>
+          <a:solidFill>
+            <a:srgbClr val="005555"/>
           </a:solidFill>
           <a:ln>
             <a:noFill/>
@@ -6565,14 +6614,14 @@
       </p:sp>
       <p:sp>
         <p:nvSpPr>
-          <p:cNvPr id="47" name="TextBox 46"/>
+          <p:cNvPr id="19" name="TextBox 18"/>
           <p:cNvSpPr txBox="1"/>
           <p:nvPr/>
         </p:nvSpPr>
         <p:spPr>
           <a:xfrm>
-            <a:off x="292608" y="2962656"/>
-            <a:ext cx="329184" cy="292608"/>
+            <a:off x="310896" y="1188720"/>
+            <a:ext cx="329184" cy="288036"/>
           </a:xfrm>
           <a:prstGeom prst="rect">
             <a:avLst/>
@@ -6587,32 +6636,32 @@
           <a:p>
             <a:pPr algn="ctr"/>
             <a:r>
-              <a:rPr sz="900" b="1" i="0">
+              <a:rPr sz="800" b="1" i="0">
                 <a:solidFill>
                   <a:srgbClr val="FFFFFF"/>
                 </a:solidFill>
               </a:rPr>
-              <a:t>O5</a:t>
-            </a:r>
-          </a:p>
-        </p:txBody>
-      </p:sp>
-      <p:sp>
-        <p:nvSpPr>
-          <p:cNvPr id="48" name="Rectangle 47"/>
+              <a:t>O1</a:t>
+            </a:r>
+          </a:p>
+        </p:txBody>
+      </p:sp>
+      <p:sp>
+        <p:nvSpPr>
+          <p:cNvPr id="20" name="Rectangle 19"/>
           <p:cNvSpPr/>
           <p:nvPr/>
         </p:nvSpPr>
         <p:spPr>
           <a:xfrm>
-            <a:off x="658368" y="2889504"/>
-            <a:ext cx="4617720" cy="438912"/>
-          </a:xfrm>
-          <a:prstGeom prst="rect">
-            <a:avLst/>
-          </a:prstGeom>
-          <a:solidFill>
-            <a:srgbClr val="F0F7F7"/>
+            <a:off x="685800" y="1097280"/>
+            <a:ext cx="4334256" cy="425196"/>
+          </a:xfrm>
+          <a:prstGeom prst="rect">
+            <a:avLst/>
+          </a:prstGeom>
+          <a:solidFill>
+            <a:srgbClr val="FFFFFF"/>
           </a:solidFill>
           <a:ln>
             <a:noFill/>
@@ -6642,14 +6691,14 @@
       </p:sp>
       <p:sp>
         <p:nvSpPr>
-          <p:cNvPr id="49" name="TextBox 48"/>
+          <p:cNvPr id="21" name="TextBox 20"/>
           <p:cNvSpPr txBox="1"/>
           <p:nvPr/>
         </p:nvSpPr>
         <p:spPr>
           <a:xfrm>
-            <a:off x="731520" y="2962656"/>
-            <a:ext cx="4480560" cy="329184"/>
+            <a:off x="777240" y="1170432"/>
+            <a:ext cx="4197096" cy="333756"/>
           </a:xfrm>
           <a:prstGeom prst="rect">
             <a:avLst/>
@@ -6669,27 +6718,27 @@
                   <a:srgbClr val="1A1A1A"/>
                 </a:solidFill>
               </a:rPr>
-              <a:t>Combien vous gagnez ?</a:t>
-            </a:r>
-          </a:p>
-        </p:txBody>
-      </p:sp>
-      <p:sp>
-        <p:nvSpPr>
-          <p:cNvPr id="50" name="Rectangle 49"/>
+              <a:t>Je n'ai pas les moyens</a:t>
+            </a:r>
+          </a:p>
+        </p:txBody>
+      </p:sp>
+      <p:sp>
+        <p:nvSpPr>
+          <p:cNvPr id="22" name="Rectangle 21"/>
           <p:cNvSpPr/>
           <p:nvPr/>
         </p:nvSpPr>
         <p:spPr>
           <a:xfrm>
-            <a:off x="5303520" y="2889504"/>
-            <a:ext cx="1554480" cy="438912"/>
-          </a:xfrm>
-          <a:prstGeom prst="rect">
-            <a:avLst/>
-          </a:prstGeom>
-          <a:solidFill>
-            <a:srgbClr val="C0392B"/>
+            <a:off x="5047488" y="1097280"/>
+            <a:ext cx="1618488" cy="425196"/>
+          </a:xfrm>
+          <a:prstGeom prst="rect">
+            <a:avLst/>
+          </a:prstGeom>
+          <a:solidFill>
+            <a:srgbClr val="2A7A50"/>
           </a:solidFill>
           <a:ln>
             <a:noFill/>
@@ -6719,14 +6768,14 @@
       </p:sp>
       <p:sp>
         <p:nvSpPr>
-          <p:cNvPr id="51" name="TextBox 50"/>
+          <p:cNvPr id="23" name="TextBox 22"/>
           <p:cNvSpPr txBox="1"/>
           <p:nvPr/>
         </p:nvSpPr>
         <p:spPr>
           <a:xfrm>
-            <a:off x="5349240" y="2980944"/>
-            <a:ext cx="1463040" cy="292608"/>
+            <a:off x="5102351" y="1170432"/>
+            <a:ext cx="1527048" cy="333756"/>
           </a:xfrm>
           <a:prstGeom prst="rect">
             <a:avLst/>
@@ -6746,27 +6795,27 @@
                   <a:srgbClr val="FFFFFF"/>
                 </a:solidFill>
               </a:rPr>
-              <a:t>Méfiance</a:t>
-            </a:r>
-          </a:p>
-        </p:txBody>
-      </p:sp>
-      <p:sp>
-        <p:nvSpPr>
-          <p:cNvPr id="52" name="Rectangle 51"/>
+              <a:t>Financière</a:t>
+            </a:r>
+          </a:p>
+        </p:txBody>
+      </p:sp>
+      <p:sp>
+        <p:nvSpPr>
+          <p:cNvPr id="24" name="Rectangle 23"/>
           <p:cNvSpPr/>
           <p:nvPr/>
         </p:nvSpPr>
         <p:spPr>
           <a:xfrm>
-            <a:off x="6903720" y="2889504"/>
-            <a:ext cx="5212080" cy="438912"/>
-          </a:xfrm>
-          <a:prstGeom prst="rect">
-            <a:avLst/>
-          </a:prstGeom>
-          <a:solidFill>
-            <a:srgbClr val="F0F7F7"/>
+            <a:off x="6693408" y="1097280"/>
+            <a:ext cx="5340096" cy="425196"/>
+          </a:xfrm>
+          <a:prstGeom prst="rect">
+            <a:avLst/>
+          </a:prstGeom>
+          <a:solidFill>
+            <a:srgbClr val="FFFFFF"/>
           </a:solidFill>
           <a:ln>
             <a:noFill/>
@@ -6796,14 +6845,14 @@
       </p:sp>
       <p:sp>
         <p:nvSpPr>
-          <p:cNvPr id="53" name="TextBox 52"/>
+          <p:cNvPr id="25" name="TextBox 24"/>
           <p:cNvSpPr txBox="1"/>
           <p:nvPr/>
         </p:nvSpPr>
         <p:spPr>
           <a:xfrm>
-            <a:off x="6976872" y="2944368"/>
-            <a:ext cx="5074920" cy="347472"/>
+            <a:off x="6784848" y="1152144"/>
+            <a:ext cx="5202936" cy="352044"/>
           </a:xfrm>
           <a:prstGeom prst="rect">
             <a:avLst/>
@@ -6823,27 +6872,27 @@
                   <a:srgbClr val="1A1A1A"/>
                 </a:solidFill>
               </a:rPr>
-              <a:t>Transparence totale : mission + emploi déclaré</a:t>
-            </a:r>
-          </a:p>
-        </p:txBody>
-      </p:sp>
-      <p:sp>
-        <p:nvSpPr>
-          <p:cNvPr id="54" name="Rectangle 53"/>
+              <a:t>30 centimes par jour — moins qu'un café. Impact : 6 enfants par an.</a:t>
+            </a:r>
+          </a:p>
+        </p:txBody>
+      </p:sp>
+      <p:sp>
+        <p:nvSpPr>
+          <p:cNvPr id="26" name="Rectangle 25"/>
           <p:cNvSpPr/>
           <p:nvPr/>
         </p:nvSpPr>
         <p:spPr>
           <a:xfrm>
-            <a:off x="274320" y="3337560"/>
-            <a:ext cx="365760" cy="438912"/>
-          </a:xfrm>
-          <a:prstGeom prst="rect">
-            <a:avLst/>
-          </a:prstGeom>
-          <a:solidFill>
-            <a:srgbClr val="007A7A"/>
+            <a:off x="274320" y="1527048"/>
+            <a:ext cx="384048" cy="425196"/>
+          </a:xfrm>
+          <a:prstGeom prst="rect">
+            <a:avLst/>
+          </a:prstGeom>
+          <a:solidFill>
+            <a:srgbClr val="005555"/>
           </a:solidFill>
           <a:ln>
             <a:noFill/>
@@ -6873,14 +6922,14 @@
       </p:sp>
       <p:sp>
         <p:nvSpPr>
-          <p:cNvPr id="55" name="TextBox 54"/>
+          <p:cNvPr id="27" name="TextBox 26"/>
           <p:cNvSpPr txBox="1"/>
           <p:nvPr/>
         </p:nvSpPr>
         <p:spPr>
           <a:xfrm>
-            <a:off x="292608" y="3410712"/>
-            <a:ext cx="329184" cy="292608"/>
+            <a:off x="310896" y="1618488"/>
+            <a:ext cx="329184" cy="288036"/>
           </a:xfrm>
           <a:prstGeom prst="rect">
             <a:avLst/>
@@ -6895,32 +6944,32 @@
           <a:p>
             <a:pPr algn="ctr"/>
             <a:r>
-              <a:rPr sz="900" b="1" i="0">
+              <a:rPr sz="800" b="1" i="0">
                 <a:solidFill>
                   <a:srgbClr val="FFFFFF"/>
                 </a:solidFill>
               </a:rPr>
-              <a:t>O6</a:t>
-            </a:r>
-          </a:p>
-        </p:txBody>
-      </p:sp>
-      <p:sp>
-        <p:nvSpPr>
-          <p:cNvPr id="56" name="Rectangle 55"/>
+              <a:t>O2</a:t>
+            </a:r>
+          </a:p>
+        </p:txBody>
+      </p:sp>
+      <p:sp>
+        <p:nvSpPr>
+          <p:cNvPr id="28" name="Rectangle 27"/>
           <p:cNvSpPr/>
           <p:nvPr/>
         </p:nvSpPr>
         <p:spPr>
           <a:xfrm>
-            <a:off x="658368" y="3337560"/>
-            <a:ext cx="4617720" cy="438912"/>
-          </a:xfrm>
-          <a:prstGeom prst="rect">
-            <a:avLst/>
-          </a:prstGeom>
-          <a:solidFill>
-            <a:srgbClr val="FFFFFF"/>
+            <a:off x="685800" y="1527048"/>
+            <a:ext cx="4334256" cy="425196"/>
+          </a:xfrm>
+          <a:prstGeom prst="rect">
+            <a:avLst/>
+          </a:prstGeom>
+          <a:solidFill>
+            <a:srgbClr val="F0F7F7"/>
           </a:solidFill>
           <a:ln>
             <a:noFill/>
@@ -6950,14 +6999,14 @@
       </p:sp>
       <p:sp>
         <p:nvSpPr>
-          <p:cNvPr id="57" name="TextBox 56"/>
+          <p:cNvPr id="29" name="TextBox 28"/>
           <p:cNvSpPr txBox="1"/>
           <p:nvPr/>
         </p:nvSpPr>
         <p:spPr>
           <a:xfrm>
-            <a:off x="731520" y="3410712"/>
-            <a:ext cx="4480560" cy="329184"/>
+            <a:off x="777240" y="1600200"/>
+            <a:ext cx="4197096" cy="333756"/>
           </a:xfrm>
           <a:prstGeom prst="rect">
             <a:avLst/>
@@ -6977,27 +7026,27 @@
                   <a:srgbClr val="1A1A1A"/>
                 </a:solidFill>
               </a:rPr>
-              <a:t>Je donne à d'autres ONG</a:t>
-            </a:r>
-          </a:p>
-        </p:txBody>
-      </p:sp>
-      <p:sp>
-        <p:nvSpPr>
-          <p:cNvPr id="58" name="Rectangle 57"/>
+              <a:t>Je ne fais pas confiance aux ONG</a:t>
+            </a:r>
+          </a:p>
+        </p:txBody>
+      </p:sp>
+      <p:sp>
+        <p:nvSpPr>
+          <p:cNvPr id="30" name="Rectangle 29"/>
           <p:cNvSpPr/>
           <p:nvPr/>
         </p:nvSpPr>
         <p:spPr>
           <a:xfrm>
-            <a:off x="5303520" y="3337560"/>
-            <a:ext cx="1554480" cy="438912"/>
-          </a:xfrm>
-          <a:prstGeom prst="rect">
-            <a:avLst/>
-          </a:prstGeom>
-          <a:solidFill>
-            <a:srgbClr val="7A5AC0"/>
+            <a:off x="5047488" y="1527048"/>
+            <a:ext cx="1618488" cy="425196"/>
+          </a:xfrm>
+          <a:prstGeom prst="rect">
+            <a:avLst/>
+          </a:prstGeom>
+          <a:solidFill>
+            <a:srgbClr val="FF0000"/>
           </a:solidFill>
           <a:ln>
             <a:noFill/>
@@ -7027,14 +7076,14 @@
       </p:sp>
       <p:sp>
         <p:nvSpPr>
-          <p:cNvPr id="59" name="TextBox 58"/>
+          <p:cNvPr id="31" name="TextBox 30"/>
           <p:cNvSpPr txBox="1"/>
           <p:nvPr/>
         </p:nvSpPr>
         <p:spPr>
           <a:xfrm>
-            <a:off x="5349240" y="3429000"/>
-            <a:ext cx="1463040" cy="292608"/>
+            <a:off x="5102351" y="1600200"/>
+            <a:ext cx="1527048" cy="333756"/>
           </a:xfrm>
           <a:prstGeom prst="rect">
             <a:avLst/>
@@ -7054,27 +7103,27 @@
                   <a:srgbClr val="FFFFFF"/>
                 </a:solidFill>
               </a:rPr>
-              <a:t>Concurrent</a:t>
-            </a:r>
-          </a:p>
-        </p:txBody>
-      </p:sp>
-      <p:sp>
-        <p:nvSpPr>
-          <p:cNvPr id="60" name="Rectangle 59"/>
+              <a:t>Méfiance</a:t>
+            </a:r>
+          </a:p>
+        </p:txBody>
+      </p:sp>
+      <p:sp>
+        <p:nvSpPr>
+          <p:cNvPr id="32" name="Rectangle 31"/>
           <p:cNvSpPr/>
           <p:nvPr/>
         </p:nvSpPr>
         <p:spPr>
           <a:xfrm>
-            <a:off x="6903720" y="3337560"/>
-            <a:ext cx="5212080" cy="438912"/>
-          </a:xfrm>
-          <a:prstGeom prst="rect">
-            <a:avLst/>
-          </a:prstGeom>
-          <a:solidFill>
-            <a:srgbClr val="FFFFFF"/>
+            <a:off x="6693408" y="1527048"/>
+            <a:ext cx="5340096" cy="425196"/>
+          </a:xfrm>
+          <a:prstGeom prst="rect">
+            <a:avLst/>
+          </a:prstGeom>
+          <a:solidFill>
+            <a:srgbClr val="F0F7F7"/>
           </a:solidFill>
           <a:ln>
             <a:noFill/>
@@ -7104,14 +7153,14 @@
       </p:sp>
       <p:sp>
         <p:nvSpPr>
-          <p:cNvPr id="61" name="TextBox 60"/>
+          <p:cNvPr id="33" name="TextBox 32"/>
           <p:cNvSpPr txBox="1"/>
           <p:nvPr/>
         </p:nvSpPr>
         <p:spPr>
           <a:xfrm>
-            <a:off x="6976872" y="3392424"/>
-            <a:ext cx="5074920" cy="347472"/>
+            <a:off x="6784848" y="1581912"/>
+            <a:ext cx="5202936" cy="352044"/>
           </a:xfrm>
           <a:prstGeom prst="rect">
             <a:avLst/>
@@ -7131,27 +7180,27 @@
                   <a:srgbClr val="1A1A1A"/>
                 </a:solidFill>
               </a:rPr>
-              <a:t>Complémentarité : chaque cause est différente</a:t>
-            </a:r>
-          </a:p>
-        </p:txBody>
-      </p:sp>
-      <p:sp>
-        <p:nvSpPr>
-          <p:cNvPr id="62" name="Rectangle 61"/>
+              <a:t>Rapport public, audit Comité de la Charte, 82% fonds aux programmes.</a:t>
+            </a:r>
+          </a:p>
+        </p:txBody>
+      </p:sp>
+      <p:sp>
+        <p:nvSpPr>
+          <p:cNvPr id="34" name="Rectangle 33"/>
           <p:cNvSpPr/>
           <p:nvPr/>
         </p:nvSpPr>
         <p:spPr>
           <a:xfrm>
-            <a:off x="274320" y="3785616"/>
-            <a:ext cx="365760" cy="438912"/>
-          </a:xfrm>
-          <a:prstGeom prst="rect">
-            <a:avLst/>
-          </a:prstGeom>
-          <a:solidFill>
-            <a:srgbClr val="007A7A"/>
+            <a:off x="274320" y="1956816"/>
+            <a:ext cx="384048" cy="425196"/>
+          </a:xfrm>
+          <a:prstGeom prst="rect">
+            <a:avLst/>
+          </a:prstGeom>
+          <a:solidFill>
+            <a:srgbClr val="005555"/>
           </a:solidFill>
           <a:ln>
             <a:noFill/>
@@ -7181,14 +7230,14 @@
       </p:sp>
       <p:sp>
         <p:nvSpPr>
-          <p:cNvPr id="63" name="TextBox 62"/>
+          <p:cNvPr id="35" name="TextBox 34"/>
           <p:cNvSpPr txBox="1"/>
           <p:nvPr/>
         </p:nvSpPr>
         <p:spPr>
           <a:xfrm>
-            <a:off x="292608" y="3858768"/>
-            <a:ext cx="329184" cy="292608"/>
+            <a:off x="310896" y="2048256"/>
+            <a:ext cx="329184" cy="288036"/>
           </a:xfrm>
           <a:prstGeom prst="rect">
             <a:avLst/>
@@ -7203,32 +7252,32 @@
           <a:p>
             <a:pPr algn="ctr"/>
             <a:r>
-              <a:rPr sz="900" b="1" i="0">
+              <a:rPr sz="800" b="1" i="0">
                 <a:solidFill>
                   <a:srgbClr val="FFFFFF"/>
                 </a:solidFill>
               </a:rPr>
-              <a:t>O7</a:t>
-            </a:r>
-          </a:p>
-        </p:txBody>
-      </p:sp>
-      <p:sp>
-        <p:nvSpPr>
-          <p:cNvPr id="64" name="Rectangle 63"/>
+              <a:t>O3</a:t>
+            </a:r>
+          </a:p>
+        </p:txBody>
+      </p:sp>
+      <p:sp>
+        <p:nvSpPr>
+          <p:cNvPr id="36" name="Rectangle 35"/>
           <p:cNvSpPr/>
           <p:nvPr/>
         </p:nvSpPr>
         <p:spPr>
           <a:xfrm>
-            <a:off x="658368" y="3785616"/>
-            <a:ext cx="4617720" cy="438912"/>
-          </a:xfrm>
-          <a:prstGeom prst="rect">
-            <a:avLst/>
-          </a:prstGeom>
-          <a:solidFill>
-            <a:srgbClr val="F0F7F7"/>
+            <a:off x="685800" y="1956816"/>
+            <a:ext cx="4334256" cy="425196"/>
+          </a:xfrm>
+          <a:prstGeom prst="rect">
+            <a:avLst/>
+          </a:prstGeom>
+          <a:solidFill>
+            <a:srgbClr val="FFFFFF"/>
           </a:solidFill>
           <a:ln>
             <a:noFill/>
@@ -7258,14 +7307,14 @@
       </p:sp>
       <p:sp>
         <p:nvSpPr>
-          <p:cNvPr id="65" name="TextBox 64"/>
+          <p:cNvPr id="37" name="TextBox 36"/>
           <p:cNvSpPr txBox="1"/>
           <p:nvPr/>
         </p:nvSpPr>
         <p:spPr>
           <a:xfrm>
-            <a:off x="731520" y="3858768"/>
-            <a:ext cx="4480560" cy="329184"/>
+            <a:off x="777240" y="2029968"/>
+            <a:ext cx="4197096" cy="333756"/>
           </a:xfrm>
           <a:prstGeom prst="rect">
             <a:avLst/>
@@ -7285,27 +7334,27 @@
                   <a:srgbClr val="1A1A1A"/>
                 </a:solidFill>
               </a:rPr>
-              <a:t>Ce n'est pas le bon moment</a:t>
-            </a:r>
-          </a:p>
-        </p:txBody>
-      </p:sp>
-      <p:sp>
-        <p:nvSpPr>
-          <p:cNvPr id="66" name="Rectangle 65"/>
+              <a:t>J'ai déjà fait un don</a:t>
+            </a:r>
+          </a:p>
+        </p:txBody>
+      </p:sp>
+      <p:sp>
+        <p:nvSpPr>
+          <p:cNvPr id="38" name="Rectangle 37"/>
           <p:cNvSpPr/>
           <p:nvPr/>
         </p:nvSpPr>
         <p:spPr>
           <a:xfrm>
-            <a:off x="5303520" y="3785616"/>
-            <a:ext cx="1554480" cy="438912"/>
-          </a:xfrm>
-          <a:prstGeom prst="rect">
-            <a:avLst/>
-          </a:prstGeom>
-          <a:solidFill>
-            <a:srgbClr val="C9A84C"/>
+            <a:off x="5047488" y="1956816"/>
+            <a:ext cx="1618488" cy="425196"/>
+          </a:xfrm>
+          <a:prstGeom prst="rect">
+            <a:avLst/>
+          </a:prstGeom>
+          <a:solidFill>
+            <a:srgbClr val="008080"/>
           </a:solidFill>
           <a:ln>
             <a:noFill/>
@@ -7335,14 +7384,14 @@
       </p:sp>
       <p:sp>
         <p:nvSpPr>
-          <p:cNvPr id="67" name="TextBox 66"/>
+          <p:cNvPr id="39" name="TextBox 38"/>
           <p:cNvSpPr txBox="1"/>
           <p:nvPr/>
         </p:nvSpPr>
         <p:spPr>
           <a:xfrm>
-            <a:off x="5349240" y="3877056"/>
-            <a:ext cx="1463040" cy="292608"/>
+            <a:off x="5102351" y="2029968"/>
+            <a:ext cx="1527048" cy="333756"/>
           </a:xfrm>
           <a:prstGeom prst="rect">
             <a:avLst/>
@@ -7362,27 +7411,27 @@
                   <a:srgbClr val="FFFFFF"/>
                 </a:solidFill>
               </a:rPr>
-              <a:t>Temporel</a:t>
-            </a:r>
-          </a:p>
-        </p:txBody>
-      </p:sp>
-      <p:sp>
-        <p:nvSpPr>
-          <p:cNvPr id="68" name="Rectangle 67"/>
+              <a:t>Déjà engagé</a:t>
+            </a:r>
+          </a:p>
+        </p:txBody>
+      </p:sp>
+      <p:sp>
+        <p:nvSpPr>
+          <p:cNvPr id="40" name="Rectangle 39"/>
           <p:cNvSpPr/>
           <p:nvPr/>
         </p:nvSpPr>
         <p:spPr>
           <a:xfrm>
-            <a:off x="6903720" y="3785616"/>
-            <a:ext cx="5212080" cy="438912"/>
-          </a:xfrm>
-          <a:prstGeom prst="rect">
-            <a:avLst/>
-          </a:prstGeom>
-          <a:solidFill>
-            <a:srgbClr val="F0F7F7"/>
+            <a:off x="6693408" y="1956816"/>
+            <a:ext cx="5340096" cy="425196"/>
+          </a:xfrm>
+          <a:prstGeom prst="rect">
+            <a:avLst/>
+          </a:prstGeom>
+          <a:solidFill>
+            <a:srgbClr val="FFFFFF"/>
           </a:solidFill>
           <a:ln>
             <a:noFill/>
@@ -7412,14 +7461,14 @@
       </p:sp>
       <p:sp>
         <p:nvSpPr>
-          <p:cNvPr id="69" name="TextBox 68"/>
+          <p:cNvPr id="41" name="TextBox 40"/>
           <p:cNvSpPr txBox="1"/>
           <p:nvPr/>
         </p:nvSpPr>
         <p:spPr>
           <a:xfrm>
-            <a:off x="6976872" y="3840480"/>
-            <a:ext cx="5074920" cy="347472"/>
+            <a:off x="6784848" y="2011680"/>
+            <a:ext cx="5202936" cy="352044"/>
           </a:xfrm>
           <a:prstGeom prst="rect">
             <a:avLst/>
@@ -7439,27 +7488,27 @@
                   <a:srgbClr val="1A1A1A"/>
                 </a:solidFill>
               </a:rPr>
-              <a:t>Urgence + flexibilité date de prélèvement</a:t>
-            </a:r>
-          </a:p>
-        </p:txBody>
-      </p:sp>
-      <p:sp>
-        <p:nvSpPr>
-          <p:cNvPr id="70" name="Rectangle 69"/>
+              <a:t>Super — et si on transformait ce geste en impact mensuel continu ?</a:t>
+            </a:r>
+          </a:p>
+        </p:txBody>
+      </p:sp>
+      <p:sp>
+        <p:nvSpPr>
+          <p:cNvPr id="42" name="Rectangle 41"/>
           <p:cNvSpPr/>
           <p:nvPr/>
         </p:nvSpPr>
         <p:spPr>
           <a:xfrm>
-            <a:off x="274320" y="4233672"/>
-            <a:ext cx="365760" cy="438912"/>
-          </a:xfrm>
-          <a:prstGeom prst="rect">
-            <a:avLst/>
-          </a:prstGeom>
-          <a:solidFill>
-            <a:srgbClr val="007A7A"/>
+            <a:off x="274320" y="2386584"/>
+            <a:ext cx="384048" cy="425196"/>
+          </a:xfrm>
+          <a:prstGeom prst="rect">
+            <a:avLst/>
+          </a:prstGeom>
+          <a:solidFill>
+            <a:srgbClr val="005555"/>
           </a:solidFill>
           <a:ln>
             <a:noFill/>
@@ -7489,14 +7538,14 @@
       </p:sp>
       <p:sp>
         <p:nvSpPr>
-          <p:cNvPr id="71" name="TextBox 70"/>
+          <p:cNvPr id="43" name="TextBox 42"/>
           <p:cNvSpPr txBox="1"/>
           <p:nvPr/>
         </p:nvSpPr>
         <p:spPr>
           <a:xfrm>
-            <a:off x="292608" y="4306824"/>
-            <a:ext cx="329184" cy="292608"/>
+            <a:off x="310896" y="2478024"/>
+            <a:ext cx="329184" cy="288036"/>
           </a:xfrm>
           <a:prstGeom prst="rect">
             <a:avLst/>
@@ -7511,32 +7560,32 @@
           <a:p>
             <a:pPr algn="ctr"/>
             <a:r>
-              <a:rPr sz="900" b="1" i="0">
+              <a:rPr sz="800" b="1" i="0">
                 <a:solidFill>
                   <a:srgbClr val="FFFFFF"/>
                 </a:solidFill>
               </a:rPr>
-              <a:t>O8</a:t>
-            </a:r>
-          </a:p>
-        </p:txBody>
-      </p:sp>
-      <p:sp>
-        <p:nvSpPr>
-          <p:cNvPr id="72" name="Rectangle 71"/>
+              <a:t>O4</a:t>
+            </a:r>
+          </a:p>
+        </p:txBody>
+      </p:sp>
+      <p:sp>
+        <p:nvSpPr>
+          <p:cNvPr id="44" name="Rectangle 43"/>
           <p:cNvSpPr/>
           <p:nvPr/>
         </p:nvSpPr>
         <p:spPr>
           <a:xfrm>
-            <a:off x="658368" y="4233672"/>
-            <a:ext cx="4617720" cy="438912"/>
-          </a:xfrm>
-          <a:prstGeom prst="rect">
-            <a:avLst/>
-          </a:prstGeom>
-          <a:solidFill>
-            <a:srgbClr val="FFFFFF"/>
+            <a:off x="685800" y="2386584"/>
+            <a:ext cx="4334256" cy="425196"/>
+          </a:xfrm>
+          <a:prstGeom prst="rect">
+            <a:avLst/>
+          </a:prstGeom>
+          <a:solidFill>
+            <a:srgbClr val="F0F7F7"/>
           </a:solidFill>
           <a:ln>
             <a:noFill/>
@@ -7566,14 +7615,14 @@
       </p:sp>
       <p:sp>
         <p:nvSpPr>
-          <p:cNvPr id="73" name="TextBox 72"/>
+          <p:cNvPr id="45" name="TextBox 44"/>
           <p:cNvSpPr txBox="1"/>
           <p:nvPr/>
         </p:nvSpPr>
         <p:spPr>
           <a:xfrm>
-            <a:off x="731520" y="4306824"/>
-            <a:ext cx="4480560" cy="329184"/>
+            <a:off x="777240" y="2459736"/>
+            <a:ext cx="4197096" cy="333756"/>
           </a:xfrm>
           <a:prstGeom prst="rect">
             <a:avLst/>
@@ -7593,27 +7642,27 @@
                   <a:srgbClr val="1A1A1A"/>
                 </a:solidFill>
               </a:rPr>
-              <a:t>L'argent n'arrive pas</a:t>
-            </a:r>
-          </a:p>
-        </p:txBody>
-      </p:sp>
-      <p:sp>
-        <p:nvSpPr>
-          <p:cNvPr id="74" name="Rectangle 73"/>
+              <a:t>Je dois réfléchir</a:t>
+            </a:r>
+          </a:p>
+        </p:txBody>
+      </p:sp>
+      <p:sp>
+        <p:nvSpPr>
+          <p:cNvPr id="46" name="Rectangle 45"/>
           <p:cNvSpPr/>
           <p:nvPr/>
         </p:nvSpPr>
         <p:spPr>
           <a:xfrm>
-            <a:off x="5303520" y="4233672"/>
-            <a:ext cx="1554480" cy="438912"/>
-          </a:xfrm>
-          <a:prstGeom prst="rect">
-            <a:avLst/>
-          </a:prstGeom>
-          <a:solidFill>
-            <a:srgbClr val="C0392B"/>
+            <a:off x="5047488" y="2386584"/>
+            <a:ext cx="1618488" cy="425196"/>
+          </a:xfrm>
+          <a:prstGeom prst="rect">
+            <a:avLst/>
+          </a:prstGeom>
+          <a:solidFill>
+            <a:srgbClr val="C08010"/>
           </a:solidFill>
           <a:ln>
             <a:noFill/>
@@ -7643,14 +7692,14 @@
       </p:sp>
       <p:sp>
         <p:nvSpPr>
-          <p:cNvPr id="75" name="TextBox 74"/>
+          <p:cNvPr id="47" name="TextBox 46"/>
           <p:cNvSpPr txBox="1"/>
           <p:nvPr/>
         </p:nvSpPr>
         <p:spPr>
           <a:xfrm>
-            <a:off x="5349240" y="4325112"/>
-            <a:ext cx="1463040" cy="292608"/>
+            <a:off x="5102351" y="2459736"/>
+            <a:ext cx="1527048" cy="333756"/>
           </a:xfrm>
           <a:prstGeom prst="rect">
             <a:avLst/>
@@ -7670,27 +7719,27 @@
                   <a:srgbClr val="FFFFFF"/>
                 </a:solidFill>
               </a:rPr>
-              <a:t>Méfiance</a:t>
-            </a:r>
-          </a:p>
-        </p:txBody>
-      </p:sp>
-      <p:sp>
-        <p:nvSpPr>
-          <p:cNvPr id="76" name="Rectangle 75"/>
+              <a:t>Report</a:t>
+            </a:r>
+          </a:p>
+        </p:txBody>
+      </p:sp>
+      <p:sp>
+        <p:nvSpPr>
+          <p:cNvPr id="48" name="Rectangle 47"/>
           <p:cNvSpPr/>
           <p:nvPr/>
         </p:nvSpPr>
         <p:spPr>
           <a:xfrm>
-            <a:off x="6903720" y="4233672"/>
-            <a:ext cx="5212080" cy="438912"/>
-          </a:xfrm>
-          <a:prstGeom prst="rect">
-            <a:avLst/>
-          </a:prstGeom>
-          <a:solidFill>
-            <a:srgbClr val="FFFFFF"/>
+            <a:off x="6693408" y="2386584"/>
+            <a:ext cx="5340096" cy="425196"/>
+          </a:xfrm>
+          <a:prstGeom prst="rect">
+            <a:avLst/>
+          </a:prstGeom>
+          <a:solidFill>
+            <a:srgbClr val="F0F7F7"/>
           </a:solidFill>
           <a:ln>
             <a:noFill/>
@@ -7720,14 +7769,14 @@
       </p:sp>
       <p:sp>
         <p:nvSpPr>
-          <p:cNvPr id="77" name="TextBox 76"/>
+          <p:cNvPr id="49" name="TextBox 48"/>
           <p:cNvSpPr txBox="1"/>
           <p:nvPr/>
         </p:nvSpPr>
         <p:spPr>
           <a:xfrm>
-            <a:off x="6976872" y="4288536"/>
-            <a:ext cx="5074920" cy="347472"/>
+            <a:off x="6784848" y="2441448"/>
+            <a:ext cx="5202936" cy="352044"/>
           </a:xfrm>
           <a:prstGeom prst="rect">
             <a:avLst/>
@@ -7747,27 +7796,27 @@
                   <a:srgbClr val="1A1A1A"/>
                 </a:solidFill>
               </a:rPr>
-              <a:t>Traçabilité : rapports publiés + auditeurs ext.</a:t>
-            </a:r>
-          </a:p>
-        </p:txBody>
-      </p:sp>
-      <p:sp>
-        <p:nvSpPr>
-          <p:cNvPr id="78" name="Rectangle 77"/>
+              <a:t>Qu'est-ce qui vous retient ? (identifier le vrai frein, puis ancrer l'urgence)</a:t>
+            </a:r>
+          </a:p>
+        </p:txBody>
+      </p:sp>
+      <p:sp>
+        <p:nvSpPr>
+          <p:cNvPr id="50" name="Rectangle 49"/>
           <p:cNvSpPr/>
           <p:nvPr/>
         </p:nvSpPr>
         <p:spPr>
           <a:xfrm>
-            <a:off x="274320" y="4681728"/>
-            <a:ext cx="365760" cy="438912"/>
-          </a:xfrm>
-          <a:prstGeom prst="rect">
-            <a:avLst/>
-          </a:prstGeom>
-          <a:solidFill>
-            <a:srgbClr val="007A7A"/>
+            <a:off x="274320" y="2816352"/>
+            <a:ext cx="384048" cy="425196"/>
+          </a:xfrm>
+          <a:prstGeom prst="rect">
+            <a:avLst/>
+          </a:prstGeom>
+          <a:solidFill>
+            <a:srgbClr val="005555"/>
           </a:solidFill>
           <a:ln>
             <a:noFill/>
@@ -7797,14 +7846,14 @@
       </p:sp>
       <p:sp>
         <p:nvSpPr>
-          <p:cNvPr id="79" name="TextBox 78"/>
+          <p:cNvPr id="51" name="TextBox 50"/>
           <p:cNvSpPr txBox="1"/>
           <p:nvPr/>
         </p:nvSpPr>
         <p:spPr>
           <a:xfrm>
-            <a:off x="292608" y="4754880"/>
-            <a:ext cx="329184" cy="292608"/>
+            <a:off x="310896" y="2907792"/>
+            <a:ext cx="329184" cy="288036"/>
           </a:xfrm>
           <a:prstGeom prst="rect">
             <a:avLst/>
@@ -7819,32 +7868,32 @@
           <a:p>
             <a:pPr algn="ctr"/>
             <a:r>
-              <a:rPr sz="900" b="1" i="0">
+              <a:rPr sz="800" b="1" i="0">
                 <a:solidFill>
                   <a:srgbClr val="FFFFFF"/>
                 </a:solidFill>
               </a:rPr>
-              <a:t>O9</a:t>
-            </a:r>
-          </a:p>
-        </p:txBody>
-      </p:sp>
-      <p:sp>
-        <p:nvSpPr>
-          <p:cNvPr id="80" name="Rectangle 79"/>
+              <a:t>O5</a:t>
+            </a:r>
+          </a:p>
+        </p:txBody>
+      </p:sp>
+      <p:sp>
+        <p:nvSpPr>
+          <p:cNvPr id="52" name="Rectangle 51"/>
           <p:cNvSpPr/>
           <p:nvPr/>
         </p:nvSpPr>
         <p:spPr>
           <a:xfrm>
-            <a:off x="658368" y="4681728"/>
-            <a:ext cx="4617720" cy="438912"/>
-          </a:xfrm>
-          <a:prstGeom prst="rect">
-            <a:avLst/>
-          </a:prstGeom>
-          <a:solidFill>
-            <a:srgbClr val="F0F7F7"/>
+            <a:off x="685800" y="2816352"/>
+            <a:ext cx="4334256" cy="425196"/>
+          </a:xfrm>
+          <a:prstGeom prst="rect">
+            <a:avLst/>
+          </a:prstGeom>
+          <a:solidFill>
+            <a:srgbClr val="FFFFFF"/>
           </a:solidFill>
           <a:ln>
             <a:noFill/>
@@ -7874,14 +7923,14 @@
       </p:sp>
       <p:sp>
         <p:nvSpPr>
-          <p:cNvPr id="81" name="TextBox 80"/>
+          <p:cNvPr id="53" name="TextBox 52"/>
           <p:cNvSpPr txBox="1"/>
           <p:nvPr/>
         </p:nvSpPr>
         <p:spPr>
           <a:xfrm>
-            <a:off x="731520" y="4754880"/>
-            <a:ext cx="4480560" cy="329184"/>
+            <a:off x="777240" y="2889504"/>
+            <a:ext cx="4197096" cy="333756"/>
           </a:xfrm>
           <a:prstGeom prst="rect">
             <a:avLst/>
@@ -7901,27 +7950,27 @@
                   <a:srgbClr val="1A1A1A"/>
                 </a:solidFill>
               </a:rPr>
-              <a:t>Je suis pressé</a:t>
-            </a:r>
-          </a:p>
-        </p:txBody>
-      </p:sp>
-      <p:sp>
-        <p:nvSpPr>
-          <p:cNvPr id="82" name="Rectangle 81"/>
+              <a:t>Combien vous gagnez ?</a:t>
+            </a:r>
+          </a:p>
+        </p:txBody>
+      </p:sp>
+      <p:sp>
+        <p:nvSpPr>
+          <p:cNvPr id="54" name="Rectangle 53"/>
           <p:cNvSpPr/>
           <p:nvPr/>
         </p:nvSpPr>
         <p:spPr>
           <a:xfrm>
-            <a:off x="5303520" y="4681728"/>
-            <a:ext cx="1554480" cy="438912"/>
-          </a:xfrm>
-          <a:prstGeom prst="rect">
-            <a:avLst/>
-          </a:prstGeom>
-          <a:solidFill>
-            <a:srgbClr val="C9A84C"/>
+            <a:off x="5047488" y="2816352"/>
+            <a:ext cx="1618488" cy="425196"/>
+          </a:xfrm>
+          <a:prstGeom prst="rect">
+            <a:avLst/>
+          </a:prstGeom>
+          <a:solidFill>
+            <a:srgbClr val="FF0000"/>
           </a:solidFill>
           <a:ln>
             <a:noFill/>
@@ -7951,14 +8000,14 @@
       </p:sp>
       <p:sp>
         <p:nvSpPr>
-          <p:cNvPr id="83" name="TextBox 82"/>
+          <p:cNvPr id="55" name="TextBox 54"/>
           <p:cNvSpPr txBox="1"/>
           <p:nvPr/>
         </p:nvSpPr>
         <p:spPr>
           <a:xfrm>
-            <a:off x="5349240" y="4773168"/>
-            <a:ext cx="1463040" cy="292608"/>
+            <a:off x="5102351" y="2889504"/>
+            <a:ext cx="1527048" cy="333756"/>
           </a:xfrm>
           <a:prstGeom prst="rect">
             <a:avLst/>
@@ -7978,27 +8027,27 @@
                   <a:srgbClr val="FFFFFF"/>
                 </a:solidFill>
               </a:rPr>
-              <a:t>Temporel</a:t>
-            </a:r>
-          </a:p>
-        </p:txBody>
-      </p:sp>
-      <p:sp>
-        <p:nvSpPr>
-          <p:cNvPr id="84" name="Rectangle 83"/>
+              <a:t>Méfiance</a:t>
+            </a:r>
+          </a:p>
+        </p:txBody>
+      </p:sp>
+      <p:sp>
+        <p:nvSpPr>
+          <p:cNvPr id="56" name="Rectangle 55"/>
           <p:cNvSpPr/>
           <p:nvPr/>
         </p:nvSpPr>
         <p:spPr>
           <a:xfrm>
-            <a:off x="6903720" y="4681728"/>
-            <a:ext cx="5212080" cy="438912"/>
-          </a:xfrm>
-          <a:prstGeom prst="rect">
-            <a:avLst/>
-          </a:prstGeom>
-          <a:solidFill>
-            <a:srgbClr val="F0F7F7"/>
+            <a:off x="6693408" y="2816352"/>
+            <a:ext cx="5340096" cy="425196"/>
+          </a:xfrm>
+          <a:prstGeom prst="rect">
+            <a:avLst/>
+          </a:prstGeom>
+          <a:solidFill>
+            <a:srgbClr val="FFFFFF"/>
           </a:solidFill>
           <a:ln>
             <a:noFill/>
@@ -8028,14 +8077,14 @@
       </p:sp>
       <p:sp>
         <p:nvSpPr>
-          <p:cNvPr id="85" name="TextBox 84"/>
+          <p:cNvPr id="57" name="TextBox 56"/>
           <p:cNvSpPr txBox="1"/>
           <p:nvPr/>
         </p:nvSpPr>
         <p:spPr>
           <a:xfrm>
-            <a:off x="6976872" y="4736592"/>
-            <a:ext cx="5074920" cy="347472"/>
+            <a:off x="6784848" y="2871216"/>
+            <a:ext cx="5202936" cy="352044"/>
           </a:xfrm>
           <a:prstGeom prst="rect">
             <a:avLst/>
@@ -8055,27 +8104,27 @@
                   <a:srgbClr val="1A1A1A"/>
                 </a:solidFill>
               </a:rPr>
-              <a:t>Script express 45 sec : accroche + chiffre + closing</a:t>
-            </a:r>
-          </a:p>
-        </p:txBody>
-      </p:sp>
-      <p:sp>
-        <p:nvSpPr>
-          <p:cNvPr id="86" name="Rectangle 85"/>
+              <a:t>Transparence totale : emploi déclaré, encadrement légal, mission noble.</a:t>
+            </a:r>
+          </a:p>
+        </p:txBody>
+      </p:sp>
+      <p:sp>
+        <p:nvSpPr>
+          <p:cNvPr id="58" name="Rectangle 57"/>
           <p:cNvSpPr/>
           <p:nvPr/>
         </p:nvSpPr>
         <p:spPr>
           <a:xfrm>
-            <a:off x="274320" y="5129784"/>
-            <a:ext cx="365760" cy="438912"/>
-          </a:xfrm>
-          <a:prstGeom prst="rect">
-            <a:avLst/>
-          </a:prstGeom>
-          <a:solidFill>
-            <a:srgbClr val="007A7A"/>
+            <a:off x="274320" y="3246120"/>
+            <a:ext cx="384048" cy="425196"/>
+          </a:xfrm>
+          <a:prstGeom prst="rect">
+            <a:avLst/>
+          </a:prstGeom>
+          <a:solidFill>
+            <a:srgbClr val="005555"/>
           </a:solidFill>
           <a:ln>
             <a:noFill/>
@@ -8105,14 +8154,14 @@
       </p:sp>
       <p:sp>
         <p:nvSpPr>
-          <p:cNvPr id="87" name="TextBox 86"/>
+          <p:cNvPr id="59" name="TextBox 58"/>
           <p:cNvSpPr txBox="1"/>
           <p:nvPr/>
         </p:nvSpPr>
         <p:spPr>
           <a:xfrm>
-            <a:off x="292608" y="5202936"/>
-            <a:ext cx="329184" cy="292608"/>
+            <a:off x="310896" y="3337560"/>
+            <a:ext cx="329184" cy="288036"/>
           </a:xfrm>
           <a:prstGeom prst="rect">
             <a:avLst/>
@@ -8127,32 +8176,32 @@
           <a:p>
             <a:pPr algn="ctr"/>
             <a:r>
-              <a:rPr sz="900" b="1" i="0">
+              <a:rPr sz="800" b="1" i="0">
                 <a:solidFill>
                   <a:srgbClr val="FFFFFF"/>
                 </a:solidFill>
               </a:rPr>
-              <a:t>O10</a:t>
-            </a:r>
-          </a:p>
-        </p:txBody>
-      </p:sp>
-      <p:sp>
-        <p:nvSpPr>
-          <p:cNvPr id="88" name="Rectangle 87"/>
+              <a:t>O6</a:t>
+            </a:r>
+          </a:p>
+        </p:txBody>
+      </p:sp>
+      <p:sp>
+        <p:nvSpPr>
+          <p:cNvPr id="60" name="Rectangle 59"/>
           <p:cNvSpPr/>
           <p:nvPr/>
         </p:nvSpPr>
         <p:spPr>
           <a:xfrm>
-            <a:off x="658368" y="5129784"/>
-            <a:ext cx="4617720" cy="438912"/>
-          </a:xfrm>
-          <a:prstGeom prst="rect">
-            <a:avLst/>
-          </a:prstGeom>
-          <a:solidFill>
-            <a:srgbClr val="FFFFFF"/>
+            <a:off x="685800" y="3246120"/>
+            <a:ext cx="4334256" cy="425196"/>
+          </a:xfrm>
+          <a:prstGeom prst="rect">
+            <a:avLst/>
+          </a:prstGeom>
+          <a:solidFill>
+            <a:srgbClr val="F0F7F7"/>
           </a:solidFill>
           <a:ln>
             <a:noFill/>
@@ -8182,14 +8231,14 @@
       </p:sp>
       <p:sp>
         <p:nvSpPr>
-          <p:cNvPr id="89" name="TextBox 88"/>
+          <p:cNvPr id="61" name="TextBox 60"/>
           <p:cNvSpPr txBox="1"/>
           <p:nvPr/>
         </p:nvSpPr>
         <p:spPr>
           <a:xfrm>
-            <a:off x="731520" y="5202936"/>
-            <a:ext cx="4480560" cy="329184"/>
+            <a:off x="777240" y="3319272"/>
+            <a:ext cx="4197096" cy="333756"/>
           </a:xfrm>
           <a:prstGeom prst="rect">
             <a:avLst/>
@@ -8209,27 +8258,27 @@
                   <a:srgbClr val="1A1A1A"/>
                 </a:solidFill>
               </a:rPr>
-              <a:t>Mon conjoint décide</a:t>
-            </a:r>
-          </a:p>
-        </p:txBody>
-      </p:sp>
-      <p:sp>
-        <p:nvSpPr>
-          <p:cNvPr id="90" name="Rectangle 89"/>
+              <a:t>Je donne à d'autres causes</a:t>
+            </a:r>
+          </a:p>
+        </p:txBody>
+      </p:sp>
+      <p:sp>
+        <p:nvSpPr>
+          <p:cNvPr id="62" name="Rectangle 61"/>
           <p:cNvSpPr/>
           <p:nvPr/>
         </p:nvSpPr>
         <p:spPr>
           <a:xfrm>
-            <a:off x="5303520" y="5129784"/>
-            <a:ext cx="1554480" cy="438912"/>
-          </a:xfrm>
-          <a:prstGeom prst="rect">
-            <a:avLst/>
-          </a:prstGeom>
-          <a:solidFill>
-            <a:srgbClr val="005050"/>
+            <a:off x="5047488" y="3246120"/>
+            <a:ext cx="1618488" cy="425196"/>
+          </a:xfrm>
+          <a:prstGeom prst="rect">
+            <a:avLst/>
+          </a:prstGeom>
+          <a:solidFill>
+            <a:srgbClr val="6644AA"/>
           </a:solidFill>
           <a:ln>
             <a:noFill/>
@@ -8259,14 +8308,14 @@
       </p:sp>
       <p:sp>
         <p:nvSpPr>
-          <p:cNvPr id="91" name="TextBox 90"/>
+          <p:cNvPr id="63" name="TextBox 62"/>
           <p:cNvSpPr txBox="1"/>
           <p:nvPr/>
         </p:nvSpPr>
         <p:spPr>
           <a:xfrm>
-            <a:off x="5349240" y="5221224"/>
-            <a:ext cx="1463040" cy="292608"/>
+            <a:off x="5102351" y="3319272"/>
+            <a:ext cx="1527048" cy="333756"/>
           </a:xfrm>
           <a:prstGeom prst="rect">
             <a:avLst/>
@@ -8286,27 +8335,27 @@
                   <a:srgbClr val="FFFFFF"/>
                 </a:solidFill>
               </a:rPr>
-              <a:t>Autorité</a:t>
-            </a:r>
-          </a:p>
-        </p:txBody>
-      </p:sp>
-      <p:sp>
-        <p:nvSpPr>
-          <p:cNvPr id="92" name="Rectangle 91"/>
+              <a:t>Concurrent</a:t>
+            </a:r>
+          </a:p>
+        </p:txBody>
+      </p:sp>
+      <p:sp>
+        <p:nvSpPr>
+          <p:cNvPr id="64" name="Rectangle 63"/>
           <p:cNvSpPr/>
           <p:nvPr/>
         </p:nvSpPr>
         <p:spPr>
           <a:xfrm>
-            <a:off x="6903720" y="5129784"/>
-            <a:ext cx="5212080" cy="438912"/>
-          </a:xfrm>
-          <a:prstGeom prst="rect">
-            <a:avLst/>
-          </a:prstGeom>
-          <a:solidFill>
-            <a:srgbClr val="FFFFFF"/>
+            <a:off x="6693408" y="3246120"/>
+            <a:ext cx="5340096" cy="425196"/>
+          </a:xfrm>
+          <a:prstGeom prst="rect">
+            <a:avLst/>
+          </a:prstGeom>
+          <a:solidFill>
+            <a:srgbClr val="F0F7F7"/>
           </a:solidFill>
           <a:ln>
             <a:noFill/>
@@ -8336,14 +8385,14 @@
       </p:sp>
       <p:sp>
         <p:nvSpPr>
-          <p:cNvPr id="93" name="TextBox 92"/>
+          <p:cNvPr id="65" name="TextBox 64"/>
           <p:cNvSpPr txBox="1"/>
           <p:nvPr/>
         </p:nvSpPr>
         <p:spPr>
           <a:xfrm>
-            <a:off x="6976872" y="5184648"/>
-            <a:ext cx="5074920" cy="347472"/>
+            <a:off x="6784848" y="3300984"/>
+            <a:ext cx="5202936" cy="352044"/>
           </a:xfrm>
           <a:prstGeom prst="rect">
             <a:avLst/>
@@ -8363,27 +8412,27 @@
                   <a:srgbClr val="1A1A1A"/>
                 </a:solidFill>
               </a:rPr>
-              <a:t>Impliquer le couple + envoyer info par SMS/email</a:t>
-            </a:r>
-          </a:p>
-        </p:txBody>
-      </p:sp>
-      <p:sp>
-        <p:nvSpPr>
-          <p:cNvPr id="94" name="Rectangle 93"/>
+              <a:t>Chaque cause est unique — les droits des enfants ne concurrencent rien.</a:t>
+            </a:r>
+          </a:p>
+        </p:txBody>
+      </p:sp>
+      <p:sp>
+        <p:nvSpPr>
+          <p:cNvPr id="66" name="Rectangle 65"/>
           <p:cNvSpPr/>
           <p:nvPr/>
         </p:nvSpPr>
         <p:spPr>
           <a:xfrm>
-            <a:off x="274320" y="5577840"/>
-            <a:ext cx="365760" cy="438912"/>
-          </a:xfrm>
-          <a:prstGeom prst="rect">
-            <a:avLst/>
-          </a:prstGeom>
-          <a:solidFill>
-            <a:srgbClr val="007A7A"/>
+            <a:off x="274320" y="3675888"/>
+            <a:ext cx="384048" cy="425196"/>
+          </a:xfrm>
+          <a:prstGeom prst="rect">
+            <a:avLst/>
+          </a:prstGeom>
+          <a:solidFill>
+            <a:srgbClr val="005555"/>
           </a:solidFill>
           <a:ln>
             <a:noFill/>
@@ -8413,14 +8462,14 @@
       </p:sp>
       <p:sp>
         <p:nvSpPr>
-          <p:cNvPr id="95" name="TextBox 94"/>
+          <p:cNvPr id="67" name="TextBox 66"/>
           <p:cNvSpPr txBox="1"/>
           <p:nvPr/>
         </p:nvSpPr>
         <p:spPr>
           <a:xfrm>
-            <a:off x="292608" y="5650992"/>
-            <a:ext cx="329184" cy="292608"/>
+            <a:off x="310896" y="3767328"/>
+            <a:ext cx="329184" cy="288036"/>
           </a:xfrm>
           <a:prstGeom prst="rect">
             <a:avLst/>
@@ -8435,32 +8484,32 @@
           <a:p>
             <a:pPr algn="ctr"/>
             <a:r>
-              <a:rPr sz="900" b="1" i="0">
+              <a:rPr sz="800" b="1" i="0">
                 <a:solidFill>
                   <a:srgbClr val="FFFFFF"/>
                 </a:solidFill>
               </a:rPr>
-              <a:t>O11</a:t>
-            </a:r>
-          </a:p>
-        </p:txBody>
-      </p:sp>
-      <p:sp>
-        <p:nvSpPr>
-          <p:cNvPr id="96" name="Rectangle 95"/>
+              <a:t>O7</a:t>
+            </a:r>
+          </a:p>
+        </p:txBody>
+      </p:sp>
+      <p:sp>
+        <p:nvSpPr>
+          <p:cNvPr id="68" name="Rectangle 67"/>
           <p:cNvSpPr/>
           <p:nvPr/>
         </p:nvSpPr>
         <p:spPr>
           <a:xfrm>
-            <a:off x="658368" y="5577840"/>
-            <a:ext cx="4617720" cy="438912"/>
-          </a:xfrm>
-          <a:prstGeom prst="rect">
-            <a:avLst/>
-          </a:prstGeom>
-          <a:solidFill>
-            <a:srgbClr val="F0F7F7"/>
+            <a:off x="685800" y="3675888"/>
+            <a:ext cx="4334256" cy="425196"/>
+          </a:xfrm>
+          <a:prstGeom prst="rect">
+            <a:avLst/>
+          </a:prstGeom>
+          <a:solidFill>
+            <a:srgbClr val="FFFFFF"/>
           </a:solidFill>
           <a:ln>
             <a:noFill/>
@@ -8490,14 +8539,14 @@
       </p:sp>
       <p:sp>
         <p:nvSpPr>
-          <p:cNvPr id="97" name="TextBox 96"/>
+          <p:cNvPr id="69" name="TextBox 68"/>
           <p:cNvSpPr txBox="1"/>
           <p:nvPr/>
         </p:nvSpPr>
         <p:spPr>
           <a:xfrm>
-            <a:off x="731520" y="5650992"/>
-            <a:ext cx="4480560" cy="329184"/>
+            <a:off x="777240" y="3749040"/>
+            <a:ext cx="4197096" cy="333756"/>
           </a:xfrm>
           <a:prstGeom prst="rect">
             <a:avLst/>
@@ -8517,27 +8566,27 @@
                   <a:srgbClr val="1A1A1A"/>
                 </a:solidFill>
               </a:rPr>
-              <a:t>Pas de prélèvements</a:t>
-            </a:r>
-          </a:p>
-        </p:txBody>
-      </p:sp>
-      <p:sp>
-        <p:nvSpPr>
-          <p:cNvPr id="98" name="Rectangle 97"/>
+              <a:t>Ce n'est pas le bon moment</a:t>
+            </a:r>
+          </a:p>
+        </p:txBody>
+      </p:sp>
+      <p:sp>
+        <p:nvSpPr>
+          <p:cNvPr id="70" name="Rectangle 69"/>
           <p:cNvSpPr/>
           <p:nvPr/>
         </p:nvSpPr>
         <p:spPr>
           <a:xfrm>
-            <a:off x="5303520" y="5577840"/>
-            <a:ext cx="1554480" cy="438912"/>
-          </a:xfrm>
-          <a:prstGeom prst="rect">
-            <a:avLst/>
-          </a:prstGeom>
-          <a:solidFill>
-            <a:srgbClr val="5588AA"/>
+            <a:off x="5047488" y="3675888"/>
+            <a:ext cx="1618488" cy="425196"/>
+          </a:xfrm>
+          <a:prstGeom prst="rect">
+            <a:avLst/>
+          </a:prstGeom>
+          <a:solidFill>
+            <a:srgbClr val="005555"/>
           </a:solidFill>
           <a:ln>
             <a:noFill/>
@@ -8567,14 +8616,14 @@
       </p:sp>
       <p:sp>
         <p:nvSpPr>
-          <p:cNvPr id="99" name="TextBox 98"/>
+          <p:cNvPr id="71" name="TextBox 70"/>
           <p:cNvSpPr txBox="1"/>
           <p:nvPr/>
         </p:nvSpPr>
         <p:spPr>
           <a:xfrm>
-            <a:off x="5349240" y="5669280"/>
-            <a:ext cx="1463040" cy="292608"/>
+            <a:off x="5102351" y="3749040"/>
+            <a:ext cx="1527048" cy="333756"/>
           </a:xfrm>
           <a:prstGeom prst="rect">
             <a:avLst/>
@@ -8594,27 +8643,27 @@
                   <a:srgbClr val="FFFFFF"/>
                 </a:solidFill>
               </a:rPr>
-              <a:t>Processus</a:t>
-            </a:r>
-          </a:p>
-        </p:txBody>
-      </p:sp>
-      <p:sp>
-        <p:nvSpPr>
-          <p:cNvPr id="100" name="Rectangle 99"/>
+              <a:t>Temporel</a:t>
+            </a:r>
+          </a:p>
+        </p:txBody>
+      </p:sp>
+      <p:sp>
+        <p:nvSpPr>
+          <p:cNvPr id="72" name="Rectangle 71"/>
           <p:cNvSpPr/>
           <p:nvPr/>
         </p:nvSpPr>
         <p:spPr>
           <a:xfrm>
-            <a:off x="6903720" y="5577840"/>
-            <a:ext cx="5212080" cy="438912"/>
-          </a:xfrm>
-          <a:prstGeom prst="rect">
-            <a:avLst/>
-          </a:prstGeom>
-          <a:solidFill>
-            <a:srgbClr val="F0F7F7"/>
+            <a:off x="6693408" y="3675888"/>
+            <a:ext cx="5340096" cy="425196"/>
+          </a:xfrm>
+          <a:prstGeom prst="rect">
+            <a:avLst/>
+          </a:prstGeom>
+          <a:solidFill>
+            <a:srgbClr val="FFFFFF"/>
           </a:solidFill>
           <a:ln>
             <a:noFill/>
@@ -8644,14 +8693,14 @@
       </p:sp>
       <p:sp>
         <p:nvSpPr>
-          <p:cNvPr id="101" name="TextBox 100"/>
+          <p:cNvPr id="73" name="TextBox 72"/>
           <p:cNvSpPr txBox="1"/>
           <p:nvPr/>
         </p:nvSpPr>
         <p:spPr>
           <a:xfrm>
-            <a:off x="6976872" y="5632704"/>
-            <a:ext cx="5074920" cy="347472"/>
+            <a:off x="6784848" y="3730752"/>
+            <a:ext cx="5202936" cy="352044"/>
           </a:xfrm>
           <a:prstGeom prst="rect">
             <a:avLst/>
@@ -8671,27 +8720,27 @@
                   <a:srgbClr val="1A1A1A"/>
                 </a:solidFill>
               </a:rPr>
-              <a:t>Arrêt en 1 clic · Modification sans engagement</a:t>
-            </a:r>
-          </a:p>
-        </p:txBody>
-      </p:sp>
-      <p:sp>
-        <p:nvSpPr>
-          <p:cNvPr id="102" name="Rectangle 101"/>
+              <a:t>Le premier prélèvement est dans 30 jours — vous avez le temps de confirmer.</a:t>
+            </a:r>
+          </a:p>
+        </p:txBody>
+      </p:sp>
+      <p:sp>
+        <p:nvSpPr>
+          <p:cNvPr id="74" name="Rectangle 73"/>
           <p:cNvSpPr/>
           <p:nvPr/>
         </p:nvSpPr>
         <p:spPr>
           <a:xfrm>
-            <a:off x="274320" y="6025896"/>
-            <a:ext cx="365760" cy="438912"/>
-          </a:xfrm>
-          <a:prstGeom prst="rect">
-            <a:avLst/>
-          </a:prstGeom>
-          <a:solidFill>
-            <a:srgbClr val="007A7A"/>
+            <a:off x="274320" y="4105656"/>
+            <a:ext cx="384048" cy="425196"/>
+          </a:xfrm>
+          <a:prstGeom prst="rect">
+            <a:avLst/>
+          </a:prstGeom>
+          <a:solidFill>
+            <a:srgbClr val="005555"/>
           </a:solidFill>
           <a:ln>
             <a:noFill/>
@@ -8721,14 +8770,14 @@
       </p:sp>
       <p:sp>
         <p:nvSpPr>
-          <p:cNvPr id="103" name="TextBox 102"/>
+          <p:cNvPr id="75" name="TextBox 74"/>
           <p:cNvSpPr txBox="1"/>
           <p:nvPr/>
         </p:nvSpPr>
         <p:spPr>
           <a:xfrm>
-            <a:off x="292608" y="6099048"/>
-            <a:ext cx="329184" cy="292608"/>
+            <a:off x="310896" y="4197096"/>
+            <a:ext cx="329184" cy="288036"/>
           </a:xfrm>
           <a:prstGeom prst="rect">
             <a:avLst/>
@@ -8743,32 +8792,32 @@
           <a:p>
             <a:pPr algn="ctr"/>
             <a:r>
-              <a:rPr sz="900" b="1" i="0">
+              <a:rPr sz="800" b="1" i="0">
                 <a:solidFill>
                   <a:srgbClr val="FFFFFF"/>
                 </a:solidFill>
               </a:rPr>
-              <a:t>O12</a:t>
-            </a:r>
-          </a:p>
-        </p:txBody>
-      </p:sp>
-      <p:sp>
-        <p:nvSpPr>
-          <p:cNvPr id="104" name="Rectangle 103"/>
+              <a:t>O8</a:t>
+            </a:r>
+          </a:p>
+        </p:txBody>
+      </p:sp>
+      <p:sp>
+        <p:nvSpPr>
+          <p:cNvPr id="76" name="Rectangle 75"/>
           <p:cNvSpPr/>
           <p:nvPr/>
         </p:nvSpPr>
         <p:spPr>
           <a:xfrm>
-            <a:off x="658368" y="6025896"/>
-            <a:ext cx="4617720" cy="438912"/>
-          </a:xfrm>
-          <a:prstGeom prst="rect">
-            <a:avLst/>
-          </a:prstGeom>
-          <a:solidFill>
-            <a:srgbClr val="FFFFFF"/>
+            <a:off x="685800" y="4105656"/>
+            <a:ext cx="4334256" cy="425196"/>
+          </a:xfrm>
+          <a:prstGeom prst="rect">
+            <a:avLst/>
+          </a:prstGeom>
+          <a:solidFill>
+            <a:srgbClr val="F0F7F7"/>
           </a:solidFill>
           <a:ln>
             <a:noFill/>
@@ -8798,14 +8847,14 @@
       </p:sp>
       <p:sp>
         <p:nvSpPr>
-          <p:cNvPr id="105" name="TextBox 104"/>
+          <p:cNvPr id="77" name="TextBox 76"/>
           <p:cNvSpPr txBox="1"/>
           <p:nvPr/>
         </p:nvSpPr>
         <p:spPr>
           <a:xfrm>
-            <a:off x="731520" y="6099048"/>
-            <a:ext cx="4480560" cy="329184"/>
+            <a:off x="777240" y="4178808"/>
+            <a:ext cx="4197096" cy="333756"/>
           </a:xfrm>
           <a:prstGeom prst="rect">
             <a:avLst/>
@@ -8825,27 +8874,27 @@
                   <a:srgbClr val="1A1A1A"/>
                 </a:solidFill>
               </a:rPr>
-              <a:t>Politique / Religion</a:t>
-            </a:r>
-          </a:p>
-        </p:txBody>
-      </p:sp>
-      <p:sp>
-        <p:nvSpPr>
-          <p:cNvPr id="106" name="Rectangle 105"/>
+              <a:t>L'argent ne parvient pas</a:t>
+            </a:r>
+          </a:p>
+        </p:txBody>
+      </p:sp>
+      <p:sp>
+        <p:nvSpPr>
+          <p:cNvPr id="78" name="Rectangle 77"/>
           <p:cNvSpPr/>
           <p:nvPr/>
         </p:nvSpPr>
         <p:spPr>
           <a:xfrm>
-            <a:off x="5303520" y="6025896"/>
-            <a:ext cx="1554480" cy="438912"/>
-          </a:xfrm>
-          <a:prstGeom prst="rect">
-            <a:avLst/>
-          </a:prstGeom>
-          <a:solidFill>
-            <a:srgbClr val="884488"/>
+            <a:off x="5047488" y="4105656"/>
+            <a:ext cx="1618488" cy="425196"/>
+          </a:xfrm>
+          <a:prstGeom prst="rect">
+            <a:avLst/>
+          </a:prstGeom>
+          <a:solidFill>
+            <a:srgbClr val="FF0000"/>
           </a:solidFill>
           <a:ln>
             <a:noFill/>
@@ -8875,14 +8924,14 @@
       </p:sp>
       <p:sp>
         <p:nvSpPr>
-          <p:cNvPr id="107" name="TextBox 106"/>
+          <p:cNvPr id="79" name="TextBox 78"/>
           <p:cNvSpPr txBox="1"/>
           <p:nvPr/>
         </p:nvSpPr>
         <p:spPr>
           <a:xfrm>
-            <a:off x="5349240" y="6117336"/>
-            <a:ext cx="1463040" cy="292608"/>
+            <a:off x="5102351" y="4178808"/>
+            <a:ext cx="1527048" cy="333756"/>
           </a:xfrm>
           <a:prstGeom prst="rect">
             <a:avLst/>
@@ -8902,27 +8951,27 @@
                   <a:srgbClr val="FFFFFF"/>
                 </a:solidFill>
               </a:rPr>
-              <a:t>Valeurs</a:t>
-            </a:r>
-          </a:p>
-        </p:txBody>
-      </p:sp>
-      <p:sp>
-        <p:nvSpPr>
-          <p:cNvPr id="108" name="Rectangle 107"/>
+              <a:t>Méfiance</a:t>
+            </a:r>
+          </a:p>
+        </p:txBody>
+      </p:sp>
+      <p:sp>
+        <p:nvSpPr>
+          <p:cNvPr id="80" name="Rectangle 79"/>
           <p:cNvSpPr/>
           <p:nvPr/>
         </p:nvSpPr>
         <p:spPr>
           <a:xfrm>
-            <a:off x="6903720" y="6025896"/>
-            <a:ext cx="5212080" cy="438912"/>
-          </a:xfrm>
-          <a:prstGeom prst="rect">
-            <a:avLst/>
-          </a:prstGeom>
-          <a:solidFill>
-            <a:srgbClr val="FFFFFF"/>
+            <a:off x="6693408" y="4105656"/>
+            <a:ext cx="5340096" cy="425196"/>
+          </a:xfrm>
+          <a:prstGeom prst="rect">
+            <a:avLst/>
+          </a:prstGeom>
+          <a:solidFill>
+            <a:srgbClr val="F0F7F7"/>
           </a:solidFill>
           <a:ln>
             <a:noFill/>
@@ -8952,14 +9001,14 @@
       </p:sp>
       <p:sp>
         <p:nvSpPr>
-          <p:cNvPr id="109" name="TextBox 108"/>
+          <p:cNvPr id="81" name="TextBox 80"/>
           <p:cNvSpPr txBox="1"/>
           <p:nvPr/>
         </p:nvSpPr>
         <p:spPr>
           <a:xfrm>
-            <a:off x="6976872" y="6080760"/>
-            <a:ext cx="5074920" cy="347472"/>
+            <a:off x="6784848" y="4160520"/>
+            <a:ext cx="5202936" cy="352044"/>
           </a:xfrm>
           <a:prstGeom prst="rect">
             <a:avLst/>
@@ -8979,21 +9028,64 @@
                   <a:srgbClr val="1A1A1A"/>
                 </a:solidFill>
               </a:rPr>
-              <a:t>UNICEF = neutralité totale · Focus : droits enfants</a:t>
-            </a:r>
-          </a:p>
-        </p:txBody>
-      </p:sp>
-      <p:sp>
-        <p:nvSpPr>
-          <p:cNvPr id="110" name="TextBox 109"/>
+              <a:t>82% des dons aux programmes — rapport annuel en ligne, auditeurs indépendants.</a:t>
+            </a:r>
+          </a:p>
+        </p:txBody>
+      </p:sp>
+      <p:sp>
+        <p:nvSpPr>
+          <p:cNvPr id="82" name="Rectangle 81"/>
+          <p:cNvSpPr/>
+          <p:nvPr/>
+        </p:nvSpPr>
+        <p:spPr>
+          <a:xfrm>
+            <a:off x="274320" y="4535424"/>
+            <a:ext cx="384048" cy="425196"/>
+          </a:xfrm>
+          <a:prstGeom prst="rect">
+            <a:avLst/>
+          </a:prstGeom>
+          <a:solidFill>
+            <a:srgbClr val="005555"/>
+          </a:solidFill>
+          <a:ln>
+            <a:noFill/>
+          </a:ln>
+        </p:spPr>
+        <p:style>
+          <a:lnRef idx="1">
+            <a:schemeClr val="accent1"/>
+          </a:lnRef>
+          <a:fillRef idx="3">
+            <a:schemeClr val="accent1"/>
+          </a:fillRef>
+          <a:effectRef idx="2">
+            <a:schemeClr val="accent1"/>
+          </a:effectRef>
+          <a:fontRef idx="minor">
+            <a:schemeClr val="lt1"/>
+          </a:fontRef>
+        </p:style>
+        <p:txBody>
+          <a:bodyPr rtlCol="0" anchor="ctr"/>
+          <a:lstStyle/>
+          <a:p>
+            <a:pPr algn="ctr"/>
+          </a:p>
+        </p:txBody>
+      </p:sp>
+      <p:sp>
+        <p:nvSpPr>
+          <p:cNvPr id="83" name="TextBox 82"/>
           <p:cNvSpPr txBox="1"/>
           <p:nvPr/>
         </p:nvSpPr>
         <p:spPr>
           <a:xfrm>
-            <a:off x="0" y="6492240"/>
-            <a:ext cx="12188952" cy="365760"/>
+            <a:off x="310896" y="4626864"/>
+            <a:ext cx="329184" cy="288036"/>
           </a:xfrm>
           <a:prstGeom prst="rect">
             <a:avLst/>
@@ -9008,12 +9100,1167 @@
           <a:p>
             <a:pPr algn="ctr"/>
             <a:r>
-              <a:rPr sz="800" b="0" i="0">
-                <a:solidFill>
-                  <a:srgbClr val="888888"/>
+              <a:rPr sz="800" b="1" i="0">
+                <a:solidFill>
+                  <a:srgbClr val="FFFFFF"/>
                 </a:solidFill>
               </a:rPr>
-              <a:t>SHY-Performance · V6-01062026SHY-TE</a:t>
+              <a:t>O9</a:t>
+            </a:r>
+          </a:p>
+        </p:txBody>
+      </p:sp>
+      <p:sp>
+        <p:nvSpPr>
+          <p:cNvPr id="84" name="Rectangle 83"/>
+          <p:cNvSpPr/>
+          <p:nvPr/>
+        </p:nvSpPr>
+        <p:spPr>
+          <a:xfrm>
+            <a:off x="685800" y="4535424"/>
+            <a:ext cx="4334256" cy="425196"/>
+          </a:xfrm>
+          <a:prstGeom prst="rect">
+            <a:avLst/>
+          </a:prstGeom>
+          <a:solidFill>
+            <a:srgbClr val="FFFFFF"/>
+          </a:solidFill>
+          <a:ln>
+            <a:noFill/>
+          </a:ln>
+        </p:spPr>
+        <p:style>
+          <a:lnRef idx="1">
+            <a:schemeClr val="accent1"/>
+          </a:lnRef>
+          <a:fillRef idx="3">
+            <a:schemeClr val="accent1"/>
+          </a:fillRef>
+          <a:effectRef idx="2">
+            <a:schemeClr val="accent1"/>
+          </a:effectRef>
+          <a:fontRef idx="minor">
+            <a:schemeClr val="lt1"/>
+          </a:fontRef>
+        </p:style>
+        <p:txBody>
+          <a:bodyPr rtlCol="0" anchor="ctr"/>
+          <a:lstStyle/>
+          <a:p>
+            <a:pPr algn="ctr"/>
+          </a:p>
+        </p:txBody>
+      </p:sp>
+      <p:sp>
+        <p:nvSpPr>
+          <p:cNvPr id="85" name="TextBox 84"/>
+          <p:cNvSpPr txBox="1"/>
+          <p:nvPr/>
+        </p:nvSpPr>
+        <p:spPr>
+          <a:xfrm>
+            <a:off x="777240" y="4608576"/>
+            <a:ext cx="4197096" cy="333756"/>
+          </a:xfrm>
+          <a:prstGeom prst="rect">
+            <a:avLst/>
+          </a:prstGeom>
+          <a:noFill/>
+        </p:spPr>
+        <p:txBody>
+          <a:bodyPr wrap="square">
+            <a:spAutoFit/>
+          </a:bodyPr>
+          <a:lstStyle/>
+          <a:p>
+            <a:pPr algn="l"/>
+            <a:r>
+              <a:rPr sz="900" b="0" i="0">
+                <a:solidFill>
+                  <a:srgbClr val="1A1A1A"/>
+                </a:solidFill>
+              </a:rPr>
+              <a:t>Je suis pressé</a:t>
+            </a:r>
+          </a:p>
+        </p:txBody>
+      </p:sp>
+      <p:sp>
+        <p:nvSpPr>
+          <p:cNvPr id="86" name="Rectangle 85"/>
+          <p:cNvSpPr/>
+          <p:nvPr/>
+        </p:nvSpPr>
+        <p:spPr>
+          <a:xfrm>
+            <a:off x="5047488" y="4535424"/>
+            <a:ext cx="1618488" cy="425196"/>
+          </a:xfrm>
+          <a:prstGeom prst="rect">
+            <a:avLst/>
+          </a:prstGeom>
+          <a:solidFill>
+            <a:srgbClr val="005555"/>
+          </a:solidFill>
+          <a:ln>
+            <a:noFill/>
+          </a:ln>
+        </p:spPr>
+        <p:style>
+          <a:lnRef idx="1">
+            <a:schemeClr val="accent1"/>
+          </a:lnRef>
+          <a:fillRef idx="3">
+            <a:schemeClr val="accent1"/>
+          </a:fillRef>
+          <a:effectRef idx="2">
+            <a:schemeClr val="accent1"/>
+          </a:effectRef>
+          <a:fontRef idx="minor">
+            <a:schemeClr val="lt1"/>
+          </a:fontRef>
+        </p:style>
+        <p:txBody>
+          <a:bodyPr rtlCol="0" anchor="ctr"/>
+          <a:lstStyle/>
+          <a:p>
+            <a:pPr algn="ctr"/>
+          </a:p>
+        </p:txBody>
+      </p:sp>
+      <p:sp>
+        <p:nvSpPr>
+          <p:cNvPr id="87" name="TextBox 86"/>
+          <p:cNvSpPr txBox="1"/>
+          <p:nvPr/>
+        </p:nvSpPr>
+        <p:spPr>
+          <a:xfrm>
+            <a:off x="5102351" y="4608576"/>
+            <a:ext cx="1527048" cy="333756"/>
+          </a:xfrm>
+          <a:prstGeom prst="rect">
+            <a:avLst/>
+          </a:prstGeom>
+          <a:noFill/>
+        </p:spPr>
+        <p:txBody>
+          <a:bodyPr wrap="square">
+            <a:spAutoFit/>
+          </a:bodyPr>
+          <a:lstStyle/>
+          <a:p>
+            <a:pPr algn="ctr"/>
+            <a:r>
+              <a:rPr sz="800" b="1" i="0">
+                <a:solidFill>
+                  <a:srgbClr val="FFFFFF"/>
+                </a:solidFill>
+              </a:rPr>
+              <a:t>Temporel</a:t>
+            </a:r>
+          </a:p>
+        </p:txBody>
+      </p:sp>
+      <p:sp>
+        <p:nvSpPr>
+          <p:cNvPr id="88" name="Rectangle 87"/>
+          <p:cNvSpPr/>
+          <p:nvPr/>
+        </p:nvSpPr>
+        <p:spPr>
+          <a:xfrm>
+            <a:off x="6693408" y="4535424"/>
+            <a:ext cx="5340096" cy="425196"/>
+          </a:xfrm>
+          <a:prstGeom prst="rect">
+            <a:avLst/>
+          </a:prstGeom>
+          <a:solidFill>
+            <a:srgbClr val="FFFFFF"/>
+          </a:solidFill>
+          <a:ln>
+            <a:noFill/>
+          </a:ln>
+        </p:spPr>
+        <p:style>
+          <a:lnRef idx="1">
+            <a:schemeClr val="accent1"/>
+          </a:lnRef>
+          <a:fillRef idx="3">
+            <a:schemeClr val="accent1"/>
+          </a:fillRef>
+          <a:effectRef idx="2">
+            <a:schemeClr val="accent1"/>
+          </a:effectRef>
+          <a:fontRef idx="minor">
+            <a:schemeClr val="lt1"/>
+          </a:fontRef>
+        </p:style>
+        <p:txBody>
+          <a:bodyPr rtlCol="0" anchor="ctr"/>
+          <a:lstStyle/>
+          <a:p>
+            <a:pPr algn="ctr"/>
+          </a:p>
+        </p:txBody>
+      </p:sp>
+      <p:sp>
+        <p:nvSpPr>
+          <p:cNvPr id="89" name="TextBox 88"/>
+          <p:cNvSpPr txBox="1"/>
+          <p:nvPr/>
+        </p:nvSpPr>
+        <p:spPr>
+          <a:xfrm>
+            <a:off x="6784848" y="4590288"/>
+            <a:ext cx="5202936" cy="352044"/>
+          </a:xfrm>
+          <a:prstGeom prst="rect">
+            <a:avLst/>
+          </a:prstGeom>
+          <a:noFill/>
+        </p:spPr>
+        <p:txBody>
+          <a:bodyPr wrap="square">
+            <a:spAutoFit/>
+          </a:bodyPr>
+          <a:lstStyle/>
+          <a:p>
+            <a:pPr algn="l"/>
+            <a:r>
+              <a:rPr sz="900" b="0" i="1">
+                <a:solidFill>
+                  <a:srgbClr val="1A1A1A"/>
+                </a:solidFill>
+              </a:rPr>
+              <a:t>45 secondes suffit : 10€/mois = 6 enfants aidés par an. C'est tout.</a:t>
+            </a:r>
+          </a:p>
+        </p:txBody>
+      </p:sp>
+      <p:sp>
+        <p:nvSpPr>
+          <p:cNvPr id="90" name="Rectangle 89"/>
+          <p:cNvSpPr/>
+          <p:nvPr/>
+        </p:nvSpPr>
+        <p:spPr>
+          <a:xfrm>
+            <a:off x="274320" y="4965192"/>
+            <a:ext cx="384048" cy="425196"/>
+          </a:xfrm>
+          <a:prstGeom prst="rect">
+            <a:avLst/>
+          </a:prstGeom>
+          <a:solidFill>
+            <a:srgbClr val="005555"/>
+          </a:solidFill>
+          <a:ln>
+            <a:noFill/>
+          </a:ln>
+        </p:spPr>
+        <p:style>
+          <a:lnRef idx="1">
+            <a:schemeClr val="accent1"/>
+          </a:lnRef>
+          <a:fillRef idx="3">
+            <a:schemeClr val="accent1"/>
+          </a:fillRef>
+          <a:effectRef idx="2">
+            <a:schemeClr val="accent1"/>
+          </a:effectRef>
+          <a:fontRef idx="minor">
+            <a:schemeClr val="lt1"/>
+          </a:fontRef>
+        </p:style>
+        <p:txBody>
+          <a:bodyPr rtlCol="0" anchor="ctr"/>
+          <a:lstStyle/>
+          <a:p>
+            <a:pPr algn="ctr"/>
+          </a:p>
+        </p:txBody>
+      </p:sp>
+      <p:sp>
+        <p:nvSpPr>
+          <p:cNvPr id="91" name="TextBox 90"/>
+          <p:cNvSpPr txBox="1"/>
+          <p:nvPr/>
+        </p:nvSpPr>
+        <p:spPr>
+          <a:xfrm>
+            <a:off x="310896" y="5056631"/>
+            <a:ext cx="329184" cy="288036"/>
+          </a:xfrm>
+          <a:prstGeom prst="rect">
+            <a:avLst/>
+          </a:prstGeom>
+          <a:noFill/>
+        </p:spPr>
+        <p:txBody>
+          <a:bodyPr wrap="square">
+            <a:spAutoFit/>
+          </a:bodyPr>
+          <a:lstStyle/>
+          <a:p>
+            <a:pPr algn="ctr"/>
+            <a:r>
+              <a:rPr sz="800" b="1" i="0">
+                <a:solidFill>
+                  <a:srgbClr val="FFFFFF"/>
+                </a:solidFill>
+              </a:rPr>
+              <a:t>O10</a:t>
+            </a:r>
+          </a:p>
+        </p:txBody>
+      </p:sp>
+      <p:sp>
+        <p:nvSpPr>
+          <p:cNvPr id="92" name="Rectangle 91"/>
+          <p:cNvSpPr/>
+          <p:nvPr/>
+        </p:nvSpPr>
+        <p:spPr>
+          <a:xfrm>
+            <a:off x="685800" y="4965192"/>
+            <a:ext cx="4334256" cy="425196"/>
+          </a:xfrm>
+          <a:prstGeom prst="rect">
+            <a:avLst/>
+          </a:prstGeom>
+          <a:solidFill>
+            <a:srgbClr val="F0F7F7"/>
+          </a:solidFill>
+          <a:ln>
+            <a:noFill/>
+          </a:ln>
+        </p:spPr>
+        <p:style>
+          <a:lnRef idx="1">
+            <a:schemeClr val="accent1"/>
+          </a:lnRef>
+          <a:fillRef idx="3">
+            <a:schemeClr val="accent1"/>
+          </a:fillRef>
+          <a:effectRef idx="2">
+            <a:schemeClr val="accent1"/>
+          </a:effectRef>
+          <a:fontRef idx="minor">
+            <a:schemeClr val="lt1"/>
+          </a:fontRef>
+        </p:style>
+        <p:txBody>
+          <a:bodyPr rtlCol="0" anchor="ctr"/>
+          <a:lstStyle/>
+          <a:p>
+            <a:pPr algn="ctr"/>
+          </a:p>
+        </p:txBody>
+      </p:sp>
+      <p:sp>
+        <p:nvSpPr>
+          <p:cNvPr id="93" name="TextBox 92"/>
+          <p:cNvSpPr txBox="1"/>
+          <p:nvPr/>
+        </p:nvSpPr>
+        <p:spPr>
+          <a:xfrm>
+            <a:off x="777240" y="5038344"/>
+            <a:ext cx="4197096" cy="333756"/>
+          </a:xfrm>
+          <a:prstGeom prst="rect">
+            <a:avLst/>
+          </a:prstGeom>
+          <a:noFill/>
+        </p:spPr>
+        <p:txBody>
+          <a:bodyPr wrap="square">
+            <a:spAutoFit/>
+          </a:bodyPr>
+          <a:lstStyle/>
+          <a:p>
+            <a:pPr algn="l"/>
+            <a:r>
+              <a:rPr sz="900" b="0" i="0">
+                <a:solidFill>
+                  <a:srgbClr val="1A1A1A"/>
+                </a:solidFill>
+              </a:rPr>
+              <a:t>Mon conjoint(e) décide</a:t>
+            </a:r>
+          </a:p>
+        </p:txBody>
+      </p:sp>
+      <p:sp>
+        <p:nvSpPr>
+          <p:cNvPr id="94" name="Rectangle 93"/>
+          <p:cNvSpPr/>
+          <p:nvPr/>
+        </p:nvSpPr>
+        <p:spPr>
+          <a:xfrm>
+            <a:off x="5047488" y="4965192"/>
+            <a:ext cx="1618488" cy="425196"/>
+          </a:xfrm>
+          <a:prstGeom prst="rect">
+            <a:avLst/>
+          </a:prstGeom>
+          <a:solidFill>
+            <a:srgbClr val="884444"/>
+          </a:solidFill>
+          <a:ln>
+            <a:noFill/>
+          </a:ln>
+        </p:spPr>
+        <p:style>
+          <a:lnRef idx="1">
+            <a:schemeClr val="accent1"/>
+          </a:lnRef>
+          <a:fillRef idx="3">
+            <a:schemeClr val="accent1"/>
+          </a:fillRef>
+          <a:effectRef idx="2">
+            <a:schemeClr val="accent1"/>
+          </a:effectRef>
+          <a:fontRef idx="minor">
+            <a:schemeClr val="lt1"/>
+          </a:fontRef>
+        </p:style>
+        <p:txBody>
+          <a:bodyPr rtlCol="0" anchor="ctr"/>
+          <a:lstStyle/>
+          <a:p>
+            <a:pPr algn="ctr"/>
+          </a:p>
+        </p:txBody>
+      </p:sp>
+      <p:sp>
+        <p:nvSpPr>
+          <p:cNvPr id="95" name="TextBox 94"/>
+          <p:cNvSpPr txBox="1"/>
+          <p:nvPr/>
+        </p:nvSpPr>
+        <p:spPr>
+          <a:xfrm>
+            <a:off x="5102351" y="5038344"/>
+            <a:ext cx="1527048" cy="333756"/>
+          </a:xfrm>
+          <a:prstGeom prst="rect">
+            <a:avLst/>
+          </a:prstGeom>
+          <a:noFill/>
+        </p:spPr>
+        <p:txBody>
+          <a:bodyPr wrap="square">
+            <a:spAutoFit/>
+          </a:bodyPr>
+          <a:lstStyle/>
+          <a:p>
+            <a:pPr algn="ctr"/>
+            <a:r>
+              <a:rPr sz="800" b="1" i="0">
+                <a:solidFill>
+                  <a:srgbClr val="FFFFFF"/>
+                </a:solidFill>
+              </a:rPr>
+              <a:t>Autorité</a:t>
+            </a:r>
+          </a:p>
+        </p:txBody>
+      </p:sp>
+      <p:sp>
+        <p:nvSpPr>
+          <p:cNvPr id="96" name="Rectangle 95"/>
+          <p:cNvSpPr/>
+          <p:nvPr/>
+        </p:nvSpPr>
+        <p:spPr>
+          <a:xfrm>
+            <a:off x="6693408" y="4965192"/>
+            <a:ext cx="5340096" cy="425196"/>
+          </a:xfrm>
+          <a:prstGeom prst="rect">
+            <a:avLst/>
+          </a:prstGeom>
+          <a:solidFill>
+            <a:srgbClr val="F0F7F7"/>
+          </a:solidFill>
+          <a:ln>
+            <a:noFill/>
+          </a:ln>
+        </p:spPr>
+        <p:style>
+          <a:lnRef idx="1">
+            <a:schemeClr val="accent1"/>
+          </a:lnRef>
+          <a:fillRef idx="3">
+            <a:schemeClr val="accent1"/>
+          </a:fillRef>
+          <a:effectRef idx="2">
+            <a:schemeClr val="accent1"/>
+          </a:effectRef>
+          <a:fontRef idx="minor">
+            <a:schemeClr val="lt1"/>
+          </a:fontRef>
+        </p:style>
+        <p:txBody>
+          <a:bodyPr rtlCol="0" anchor="ctr"/>
+          <a:lstStyle/>
+          <a:p>
+            <a:pPr algn="ctr"/>
+          </a:p>
+        </p:txBody>
+      </p:sp>
+      <p:sp>
+        <p:nvSpPr>
+          <p:cNvPr id="97" name="TextBox 96"/>
+          <p:cNvSpPr txBox="1"/>
+          <p:nvPr/>
+        </p:nvSpPr>
+        <p:spPr>
+          <a:xfrm>
+            <a:off x="6784848" y="5020055"/>
+            <a:ext cx="5202936" cy="352044"/>
+          </a:xfrm>
+          <a:prstGeom prst="rect">
+            <a:avLst/>
+          </a:prstGeom>
+          <a:noFill/>
+        </p:spPr>
+        <p:txBody>
+          <a:bodyPr wrap="square">
+            <a:spAutoFit/>
+          </a:bodyPr>
+          <a:lstStyle/>
+          <a:p>
+            <a:pPr algn="l"/>
+            <a:r>
+              <a:rPr sz="900" b="0" i="1">
+                <a:solidFill>
+                  <a:srgbClr val="1A1A1A"/>
+                </a:solidFill>
+              </a:rPr>
+              <a:t>Je vous envoie la brochure par SMS. Vous en parlez ce soir et je peux vous rappeler ?</a:t>
+            </a:r>
+          </a:p>
+        </p:txBody>
+      </p:sp>
+      <p:sp>
+        <p:nvSpPr>
+          <p:cNvPr id="98" name="Rectangle 97"/>
+          <p:cNvSpPr/>
+          <p:nvPr/>
+        </p:nvSpPr>
+        <p:spPr>
+          <a:xfrm>
+            <a:off x="274320" y="5394959"/>
+            <a:ext cx="384048" cy="425196"/>
+          </a:xfrm>
+          <a:prstGeom prst="rect">
+            <a:avLst/>
+          </a:prstGeom>
+          <a:solidFill>
+            <a:srgbClr val="005555"/>
+          </a:solidFill>
+          <a:ln>
+            <a:noFill/>
+          </a:ln>
+        </p:spPr>
+        <p:style>
+          <a:lnRef idx="1">
+            <a:schemeClr val="accent1"/>
+          </a:lnRef>
+          <a:fillRef idx="3">
+            <a:schemeClr val="accent1"/>
+          </a:fillRef>
+          <a:effectRef idx="2">
+            <a:schemeClr val="accent1"/>
+          </a:effectRef>
+          <a:fontRef idx="minor">
+            <a:schemeClr val="lt1"/>
+          </a:fontRef>
+        </p:style>
+        <p:txBody>
+          <a:bodyPr rtlCol="0" anchor="ctr"/>
+          <a:lstStyle/>
+          <a:p>
+            <a:pPr algn="ctr"/>
+          </a:p>
+        </p:txBody>
+      </p:sp>
+      <p:sp>
+        <p:nvSpPr>
+          <p:cNvPr id="99" name="TextBox 98"/>
+          <p:cNvSpPr txBox="1"/>
+          <p:nvPr/>
+        </p:nvSpPr>
+        <p:spPr>
+          <a:xfrm>
+            <a:off x="310896" y="5486399"/>
+            <a:ext cx="329184" cy="288036"/>
+          </a:xfrm>
+          <a:prstGeom prst="rect">
+            <a:avLst/>
+          </a:prstGeom>
+          <a:noFill/>
+        </p:spPr>
+        <p:txBody>
+          <a:bodyPr wrap="square">
+            <a:spAutoFit/>
+          </a:bodyPr>
+          <a:lstStyle/>
+          <a:p>
+            <a:pPr algn="ctr"/>
+            <a:r>
+              <a:rPr sz="800" b="1" i="0">
+                <a:solidFill>
+                  <a:srgbClr val="FFFFFF"/>
+                </a:solidFill>
+              </a:rPr>
+              <a:t>O11</a:t>
+            </a:r>
+          </a:p>
+        </p:txBody>
+      </p:sp>
+      <p:sp>
+        <p:nvSpPr>
+          <p:cNvPr id="100" name="Rectangle 99"/>
+          <p:cNvSpPr/>
+          <p:nvPr/>
+        </p:nvSpPr>
+        <p:spPr>
+          <a:xfrm>
+            <a:off x="685800" y="5394959"/>
+            <a:ext cx="4334256" cy="425196"/>
+          </a:xfrm>
+          <a:prstGeom prst="rect">
+            <a:avLst/>
+          </a:prstGeom>
+          <a:solidFill>
+            <a:srgbClr val="FFFFFF"/>
+          </a:solidFill>
+          <a:ln>
+            <a:noFill/>
+          </a:ln>
+        </p:spPr>
+        <p:style>
+          <a:lnRef idx="1">
+            <a:schemeClr val="accent1"/>
+          </a:lnRef>
+          <a:fillRef idx="3">
+            <a:schemeClr val="accent1"/>
+          </a:fillRef>
+          <a:effectRef idx="2">
+            <a:schemeClr val="accent1"/>
+          </a:effectRef>
+          <a:fontRef idx="minor">
+            <a:schemeClr val="lt1"/>
+          </a:fontRef>
+        </p:style>
+        <p:txBody>
+          <a:bodyPr rtlCol="0" anchor="ctr"/>
+          <a:lstStyle/>
+          <a:p>
+            <a:pPr algn="ctr"/>
+          </a:p>
+        </p:txBody>
+      </p:sp>
+      <p:sp>
+        <p:nvSpPr>
+          <p:cNvPr id="101" name="TextBox 100"/>
+          <p:cNvSpPr txBox="1"/>
+          <p:nvPr/>
+        </p:nvSpPr>
+        <p:spPr>
+          <a:xfrm>
+            <a:off x="777240" y="5468112"/>
+            <a:ext cx="4197096" cy="333756"/>
+          </a:xfrm>
+          <a:prstGeom prst="rect">
+            <a:avLst/>
+          </a:prstGeom>
+          <a:noFill/>
+        </p:spPr>
+        <p:txBody>
+          <a:bodyPr wrap="square">
+            <a:spAutoFit/>
+          </a:bodyPr>
+          <a:lstStyle/>
+          <a:p>
+            <a:pPr algn="l"/>
+            <a:r>
+              <a:rPr sz="900" b="0" i="0">
+                <a:solidFill>
+                  <a:srgbClr val="1A1A1A"/>
+                </a:solidFill>
+              </a:rPr>
+              <a:t>Je n'aime pas les prélèvements</a:t>
+            </a:r>
+          </a:p>
+        </p:txBody>
+      </p:sp>
+      <p:sp>
+        <p:nvSpPr>
+          <p:cNvPr id="102" name="Rectangle 101"/>
+          <p:cNvSpPr/>
+          <p:nvPr/>
+        </p:nvSpPr>
+        <p:spPr>
+          <a:xfrm>
+            <a:off x="5047488" y="5394959"/>
+            <a:ext cx="1618488" cy="425196"/>
+          </a:xfrm>
+          <a:prstGeom prst="rect">
+            <a:avLst/>
+          </a:prstGeom>
+          <a:solidFill>
+            <a:srgbClr val="4477AA"/>
+          </a:solidFill>
+          <a:ln>
+            <a:noFill/>
+          </a:ln>
+        </p:spPr>
+        <p:style>
+          <a:lnRef idx="1">
+            <a:schemeClr val="accent1"/>
+          </a:lnRef>
+          <a:fillRef idx="3">
+            <a:schemeClr val="accent1"/>
+          </a:fillRef>
+          <a:effectRef idx="2">
+            <a:schemeClr val="accent1"/>
+          </a:effectRef>
+          <a:fontRef idx="minor">
+            <a:schemeClr val="lt1"/>
+          </a:fontRef>
+        </p:style>
+        <p:txBody>
+          <a:bodyPr rtlCol="0" anchor="ctr"/>
+          <a:lstStyle/>
+          <a:p>
+            <a:pPr algn="ctr"/>
+          </a:p>
+        </p:txBody>
+      </p:sp>
+      <p:sp>
+        <p:nvSpPr>
+          <p:cNvPr id="103" name="TextBox 102"/>
+          <p:cNvSpPr txBox="1"/>
+          <p:nvPr/>
+        </p:nvSpPr>
+        <p:spPr>
+          <a:xfrm>
+            <a:off x="5102351" y="5468112"/>
+            <a:ext cx="1527048" cy="333756"/>
+          </a:xfrm>
+          <a:prstGeom prst="rect">
+            <a:avLst/>
+          </a:prstGeom>
+          <a:noFill/>
+        </p:spPr>
+        <p:txBody>
+          <a:bodyPr wrap="square">
+            <a:spAutoFit/>
+          </a:bodyPr>
+          <a:lstStyle/>
+          <a:p>
+            <a:pPr algn="ctr"/>
+            <a:r>
+              <a:rPr sz="800" b="1" i="0">
+                <a:solidFill>
+                  <a:srgbClr val="FFFFFF"/>
+                </a:solidFill>
+              </a:rPr>
+              <a:t>Processus</a:t>
+            </a:r>
+          </a:p>
+        </p:txBody>
+      </p:sp>
+      <p:sp>
+        <p:nvSpPr>
+          <p:cNvPr id="104" name="Rectangle 103"/>
+          <p:cNvSpPr/>
+          <p:nvPr/>
+        </p:nvSpPr>
+        <p:spPr>
+          <a:xfrm>
+            <a:off x="6693408" y="5394959"/>
+            <a:ext cx="5340096" cy="425196"/>
+          </a:xfrm>
+          <a:prstGeom prst="rect">
+            <a:avLst/>
+          </a:prstGeom>
+          <a:solidFill>
+            <a:srgbClr val="FFFFFF"/>
+          </a:solidFill>
+          <a:ln>
+            <a:noFill/>
+          </a:ln>
+        </p:spPr>
+        <p:style>
+          <a:lnRef idx="1">
+            <a:schemeClr val="accent1"/>
+          </a:lnRef>
+          <a:fillRef idx="3">
+            <a:schemeClr val="accent1"/>
+          </a:fillRef>
+          <a:effectRef idx="2">
+            <a:schemeClr val="accent1"/>
+          </a:effectRef>
+          <a:fontRef idx="minor">
+            <a:schemeClr val="lt1"/>
+          </a:fontRef>
+        </p:style>
+        <p:txBody>
+          <a:bodyPr rtlCol="0" anchor="ctr"/>
+          <a:lstStyle/>
+          <a:p>
+            <a:pPr algn="ctr"/>
+          </a:p>
+        </p:txBody>
+      </p:sp>
+      <p:sp>
+        <p:nvSpPr>
+          <p:cNvPr id="105" name="TextBox 104"/>
+          <p:cNvSpPr txBox="1"/>
+          <p:nvPr/>
+        </p:nvSpPr>
+        <p:spPr>
+          <a:xfrm>
+            <a:off x="6784848" y="5449823"/>
+            <a:ext cx="5202936" cy="352044"/>
+          </a:xfrm>
+          <a:prstGeom prst="rect">
+            <a:avLst/>
+          </a:prstGeom>
+          <a:noFill/>
+        </p:spPr>
+        <p:txBody>
+          <a:bodyPr wrap="square">
+            <a:spAutoFit/>
+          </a:bodyPr>
+          <a:lstStyle/>
+          <a:p>
+            <a:pPr algn="l"/>
+            <a:r>
+              <a:rPr sz="900" b="0" i="1">
+                <a:solidFill>
+                  <a:srgbClr val="1A1A1A"/>
+                </a:solidFill>
+              </a:rPr>
+              <a:t>Arrêt en 1 clic, sans engagement minimum, modification à tout moment.</a:t>
+            </a:r>
+          </a:p>
+        </p:txBody>
+      </p:sp>
+      <p:sp>
+        <p:nvSpPr>
+          <p:cNvPr id="106" name="Rectangle 105"/>
+          <p:cNvSpPr/>
+          <p:nvPr/>
+        </p:nvSpPr>
+        <p:spPr>
+          <a:xfrm>
+            <a:off x="274320" y="5824727"/>
+            <a:ext cx="384048" cy="425196"/>
+          </a:xfrm>
+          <a:prstGeom prst="rect">
+            <a:avLst/>
+          </a:prstGeom>
+          <a:solidFill>
+            <a:srgbClr val="005555"/>
+          </a:solidFill>
+          <a:ln>
+            <a:noFill/>
+          </a:ln>
+        </p:spPr>
+        <p:style>
+          <a:lnRef idx="1">
+            <a:schemeClr val="accent1"/>
+          </a:lnRef>
+          <a:fillRef idx="3">
+            <a:schemeClr val="accent1"/>
+          </a:fillRef>
+          <a:effectRef idx="2">
+            <a:schemeClr val="accent1"/>
+          </a:effectRef>
+          <a:fontRef idx="minor">
+            <a:schemeClr val="lt1"/>
+          </a:fontRef>
+        </p:style>
+        <p:txBody>
+          <a:bodyPr rtlCol="0" anchor="ctr"/>
+          <a:lstStyle/>
+          <a:p>
+            <a:pPr algn="ctr"/>
+          </a:p>
+        </p:txBody>
+      </p:sp>
+      <p:sp>
+        <p:nvSpPr>
+          <p:cNvPr id="107" name="TextBox 106"/>
+          <p:cNvSpPr txBox="1"/>
+          <p:nvPr/>
+        </p:nvSpPr>
+        <p:spPr>
+          <a:xfrm>
+            <a:off x="310896" y="5916167"/>
+            <a:ext cx="329184" cy="288036"/>
+          </a:xfrm>
+          <a:prstGeom prst="rect">
+            <a:avLst/>
+          </a:prstGeom>
+          <a:noFill/>
+        </p:spPr>
+        <p:txBody>
+          <a:bodyPr wrap="square">
+            <a:spAutoFit/>
+          </a:bodyPr>
+          <a:lstStyle/>
+          <a:p>
+            <a:pPr algn="ctr"/>
+            <a:r>
+              <a:rPr sz="800" b="1" i="0">
+                <a:solidFill>
+                  <a:srgbClr val="FFFFFF"/>
+                </a:solidFill>
+              </a:rPr>
+              <a:t>O12</a:t>
+            </a:r>
+          </a:p>
+        </p:txBody>
+      </p:sp>
+      <p:sp>
+        <p:nvSpPr>
+          <p:cNvPr id="108" name="Rectangle 107"/>
+          <p:cNvSpPr/>
+          <p:nvPr/>
+        </p:nvSpPr>
+        <p:spPr>
+          <a:xfrm>
+            <a:off x="685800" y="5824727"/>
+            <a:ext cx="4334256" cy="425196"/>
+          </a:xfrm>
+          <a:prstGeom prst="rect">
+            <a:avLst/>
+          </a:prstGeom>
+          <a:solidFill>
+            <a:srgbClr val="F0F7F7"/>
+          </a:solidFill>
+          <a:ln>
+            <a:noFill/>
+          </a:ln>
+        </p:spPr>
+        <p:style>
+          <a:lnRef idx="1">
+            <a:schemeClr val="accent1"/>
+          </a:lnRef>
+          <a:fillRef idx="3">
+            <a:schemeClr val="accent1"/>
+          </a:fillRef>
+          <a:effectRef idx="2">
+            <a:schemeClr val="accent1"/>
+          </a:effectRef>
+          <a:fontRef idx="minor">
+            <a:schemeClr val="lt1"/>
+          </a:fontRef>
+        </p:style>
+        <p:txBody>
+          <a:bodyPr rtlCol="0" anchor="ctr"/>
+          <a:lstStyle/>
+          <a:p>
+            <a:pPr algn="ctr"/>
+          </a:p>
+        </p:txBody>
+      </p:sp>
+      <p:sp>
+        <p:nvSpPr>
+          <p:cNvPr id="109" name="TextBox 108"/>
+          <p:cNvSpPr txBox="1"/>
+          <p:nvPr/>
+        </p:nvSpPr>
+        <p:spPr>
+          <a:xfrm>
+            <a:off x="777240" y="5897879"/>
+            <a:ext cx="4197096" cy="333756"/>
+          </a:xfrm>
+          <a:prstGeom prst="rect">
+            <a:avLst/>
+          </a:prstGeom>
+          <a:noFill/>
+        </p:spPr>
+        <p:txBody>
+          <a:bodyPr wrap="square">
+            <a:spAutoFit/>
+          </a:bodyPr>
+          <a:lstStyle/>
+          <a:p>
+            <a:pPr algn="l"/>
+            <a:r>
+              <a:rPr sz="900" b="0" i="0">
+                <a:solidFill>
+                  <a:srgbClr val="1A1A1A"/>
+                </a:solidFill>
+              </a:rPr>
+              <a:t>Politique / religion</a:t>
+            </a:r>
+          </a:p>
+        </p:txBody>
+      </p:sp>
+      <p:sp>
+        <p:nvSpPr>
+          <p:cNvPr id="110" name="Rectangle 109"/>
+          <p:cNvSpPr/>
+          <p:nvPr/>
+        </p:nvSpPr>
+        <p:spPr>
+          <a:xfrm>
+            <a:off x="5047488" y="5824727"/>
+            <a:ext cx="1618488" cy="425196"/>
+          </a:xfrm>
+          <a:prstGeom prst="rect">
+            <a:avLst/>
+          </a:prstGeom>
+          <a:solidFill>
+            <a:srgbClr val="884488"/>
+          </a:solidFill>
+          <a:ln>
+            <a:noFill/>
+          </a:ln>
+        </p:spPr>
+        <p:style>
+          <a:lnRef idx="1">
+            <a:schemeClr val="accent1"/>
+          </a:lnRef>
+          <a:fillRef idx="3">
+            <a:schemeClr val="accent1"/>
+          </a:fillRef>
+          <a:effectRef idx="2">
+            <a:schemeClr val="accent1"/>
+          </a:effectRef>
+          <a:fontRef idx="minor">
+            <a:schemeClr val="lt1"/>
+          </a:fontRef>
+        </p:style>
+        <p:txBody>
+          <a:bodyPr rtlCol="0" anchor="ctr"/>
+          <a:lstStyle/>
+          <a:p>
+            <a:pPr algn="ctr"/>
+          </a:p>
+        </p:txBody>
+      </p:sp>
+      <p:sp>
+        <p:nvSpPr>
+          <p:cNvPr id="111" name="TextBox 110"/>
+          <p:cNvSpPr txBox="1"/>
+          <p:nvPr/>
+        </p:nvSpPr>
+        <p:spPr>
+          <a:xfrm>
+            <a:off x="5102351" y="5897879"/>
+            <a:ext cx="1527048" cy="333756"/>
+          </a:xfrm>
+          <a:prstGeom prst="rect">
+            <a:avLst/>
+          </a:prstGeom>
+          <a:noFill/>
+        </p:spPr>
+        <p:txBody>
+          <a:bodyPr wrap="square">
+            <a:spAutoFit/>
+          </a:bodyPr>
+          <a:lstStyle/>
+          <a:p>
+            <a:pPr algn="ctr"/>
+            <a:r>
+              <a:rPr sz="800" b="1" i="0">
+                <a:solidFill>
+                  <a:srgbClr val="FFFFFF"/>
+                </a:solidFill>
+              </a:rPr>
+              <a:t>Valeurs</a:t>
+            </a:r>
+          </a:p>
+        </p:txBody>
+      </p:sp>
+      <p:sp>
+        <p:nvSpPr>
+          <p:cNvPr id="112" name="Rectangle 111"/>
+          <p:cNvSpPr/>
+          <p:nvPr/>
+        </p:nvSpPr>
+        <p:spPr>
+          <a:xfrm>
+            <a:off x="6693408" y="5824727"/>
+            <a:ext cx="5340096" cy="425196"/>
+          </a:xfrm>
+          <a:prstGeom prst="rect">
+            <a:avLst/>
+          </a:prstGeom>
+          <a:solidFill>
+            <a:srgbClr val="F0F7F7"/>
+          </a:solidFill>
+          <a:ln>
+            <a:noFill/>
+          </a:ln>
+        </p:spPr>
+        <p:style>
+          <a:lnRef idx="1">
+            <a:schemeClr val="accent1"/>
+          </a:lnRef>
+          <a:fillRef idx="3">
+            <a:schemeClr val="accent1"/>
+          </a:fillRef>
+          <a:effectRef idx="2">
+            <a:schemeClr val="accent1"/>
+          </a:effectRef>
+          <a:fontRef idx="minor">
+            <a:schemeClr val="lt1"/>
+          </a:fontRef>
+        </p:style>
+        <p:txBody>
+          <a:bodyPr rtlCol="0" anchor="ctr"/>
+          <a:lstStyle/>
+          <a:p>
+            <a:pPr algn="ctr"/>
+          </a:p>
+        </p:txBody>
+      </p:sp>
+      <p:sp>
+        <p:nvSpPr>
+          <p:cNvPr id="113" name="TextBox 112"/>
+          <p:cNvSpPr txBox="1"/>
+          <p:nvPr/>
+        </p:nvSpPr>
+        <p:spPr>
+          <a:xfrm>
+            <a:off x="6784848" y="5879591"/>
+            <a:ext cx="5202936" cy="352044"/>
+          </a:xfrm>
+          <a:prstGeom prst="rect">
+            <a:avLst/>
+          </a:prstGeom>
+          <a:noFill/>
+        </p:spPr>
+        <p:txBody>
+          <a:bodyPr wrap="square">
+            <a:spAutoFit/>
+          </a:bodyPr>
+          <a:lstStyle/>
+          <a:p>
+            <a:pPr algn="l"/>
+            <a:r>
+              <a:rPr sz="900" b="0" i="1">
+                <a:solidFill>
+                  <a:srgbClr val="1A1A1A"/>
+                </a:solidFill>
+              </a:rPr>
+              <a:t>UNICEF est strictement apolitique et aconfessionnel — seuls les droits des enfants comptent.</a:t>
             </a:r>
           </a:p>
         </p:txBody>

--- a/FIM_BookJ4_Objections_V6-01062026SHY-TE.pptx
+++ b/FIM_BookJ4_Objections_V6-01062026SHY-TE.pptx
@@ -3143,7 +3143,7 @@
         <p:spPr>
           <a:xfrm>
             <a:off x="0" y="0"/>
-            <a:ext cx="12188952" cy="2286000"/>
+            <a:ext cx="12188952" cy="2331720"/>
           </a:xfrm>
           <a:prstGeom prst="rect">
             <a:avLst/>
@@ -3185,14 +3185,14 @@
         </p:nvSpPr>
         <p:spPr>
           <a:xfrm>
-            <a:off x="0" y="2267712"/>
-            <a:ext cx="12188952" cy="73152"/>
+            <a:off x="0" y="2313432"/>
+            <a:ext cx="12188952" cy="54864"/>
           </a:xfrm>
           <a:prstGeom prst="rect">
             <a:avLst/>
           </a:prstGeom>
           <a:solidFill>
-            <a:srgbClr val="FF0000"/>
+            <a:srgbClr val="00AAAA"/>
           </a:solidFill>
           <a:ln>
             <a:noFill/>
@@ -3222,57 +3222,14 @@
       </p:sp>
       <p:sp>
         <p:nvSpPr>
-          <p:cNvPr id="5" name="Rectangle 4"/>
-          <p:cNvSpPr/>
-          <p:nvPr/>
-        </p:nvSpPr>
-        <p:spPr>
-          <a:xfrm>
-            <a:off x="274320" y="109728"/>
-            <a:ext cx="2926080" cy="822960"/>
-          </a:xfrm>
-          <a:prstGeom prst="rect">
-            <a:avLst/>
-          </a:prstGeom>
-          <a:solidFill>
-            <a:srgbClr val="008080"/>
-          </a:solidFill>
-          <a:ln>
-            <a:noFill/>
-          </a:ln>
-        </p:spPr>
-        <p:style>
-          <a:lnRef idx="1">
-            <a:schemeClr val="accent1"/>
-          </a:lnRef>
-          <a:fillRef idx="3">
-            <a:schemeClr val="accent1"/>
-          </a:fillRef>
-          <a:effectRef idx="2">
-            <a:schemeClr val="accent1"/>
-          </a:effectRef>
-          <a:fontRef idx="minor">
-            <a:schemeClr val="lt1"/>
-          </a:fontRef>
-        </p:style>
-        <p:txBody>
-          <a:bodyPr rtlCol="0" anchor="ctr"/>
-          <a:lstStyle/>
-          <a:p>
-            <a:pPr algn="ctr"/>
-          </a:p>
-        </p:txBody>
-      </p:sp>
-      <p:sp>
-        <p:nvSpPr>
-          <p:cNvPr id="6" name="TextBox 5"/>
+          <p:cNvPr id="5" name="TextBox 4"/>
           <p:cNvSpPr txBox="1"/>
           <p:nvPr/>
         </p:nvSpPr>
         <p:spPr>
           <a:xfrm>
-            <a:off x="320040" y="118872"/>
-            <a:ext cx="1097280" cy="804672"/>
+            <a:off x="347472" y="91440"/>
+            <a:ext cx="3200400" cy="438912"/>
           </a:xfrm>
           <a:prstGeom prst="rect">
             <a:avLst/>
@@ -3287,26 +3244,26 @@
           <a:p>
             <a:pPr algn="l"/>
             <a:r>
-              <a:rPr sz="3600" b="1" i="0">
+              <a:rPr sz="2200" b="1" i="0">
                 <a:solidFill>
                   <a:srgbClr val="FFFFFF"/>
                 </a:solidFill>
               </a:rPr>
-              <a:t>SHY</a:t>
-            </a:r>
-          </a:p>
-        </p:txBody>
-      </p:sp>
-      <p:sp>
-        <p:nvSpPr>
-          <p:cNvPr id="7" name="TextBox 6"/>
+              <a:t>SHY-Performance</a:t>
+            </a:r>
+          </a:p>
+        </p:txBody>
+      </p:sp>
+      <p:sp>
+        <p:nvSpPr>
+          <p:cNvPr id="6" name="TextBox 5"/>
           <p:cNvSpPr txBox="1"/>
           <p:nvPr/>
         </p:nvSpPr>
         <p:spPr>
           <a:xfrm>
-            <a:off x="1371600" y="347472"/>
-            <a:ext cx="1828800" cy="411480"/>
+            <a:off x="347472" y="530352"/>
+            <a:ext cx="7772400" cy="347472"/>
           </a:xfrm>
           <a:prstGeom prst="rect">
             <a:avLst/>
@@ -3321,103 +3278,60 @@
           <a:p>
             <a:pPr algn="l"/>
             <a:r>
-              <a:rPr sz="1400" b="1" i="0">
-                <a:solidFill>
-                  <a:srgbClr val="FFFFFF"/>
-                </a:solidFill>
-              </a:rPr>
-              <a:t>Performance</a:t>
-            </a:r>
-          </a:p>
-        </p:txBody>
-      </p:sp>
-      <p:sp>
-        <p:nvSpPr>
-          <p:cNvPr id="8" name="Rectangle 7"/>
-          <p:cNvSpPr/>
-          <p:nvPr/>
-        </p:nvSpPr>
-        <p:spPr>
-          <a:xfrm>
-            <a:off x="3337560" y="164592"/>
-            <a:ext cx="36576" cy="658368"/>
-          </a:xfrm>
-          <a:prstGeom prst="rect">
-            <a:avLst/>
-          </a:prstGeom>
-          <a:solidFill>
-            <a:srgbClr val="FF0000"/>
-          </a:solidFill>
-          <a:ln>
-            <a:noFill/>
-          </a:ln>
-        </p:spPr>
-        <p:style>
-          <a:lnRef idx="1">
-            <a:schemeClr val="accent1"/>
-          </a:lnRef>
-          <a:fillRef idx="3">
-            <a:schemeClr val="accent1"/>
-          </a:fillRef>
-          <a:effectRef idx="2">
-            <a:schemeClr val="accent1"/>
-          </a:effectRef>
-          <a:fontRef idx="minor">
-            <a:schemeClr val="lt1"/>
-          </a:fontRef>
-        </p:style>
-        <p:txBody>
-          <a:bodyPr rtlCol="0" anchor="ctr"/>
-          <a:lstStyle/>
-          <a:p>
-            <a:pPr algn="ctr"/>
-          </a:p>
-        </p:txBody>
-      </p:sp>
-      <p:sp>
-        <p:nvSpPr>
-          <p:cNvPr id="9" name="TextBox 8"/>
-          <p:cNvSpPr txBox="1"/>
-          <p:nvPr/>
-        </p:nvSpPr>
-        <p:spPr>
-          <a:xfrm>
-            <a:off x="3474720" y="164592"/>
-            <a:ext cx="8503920" cy="347472"/>
-          </a:xfrm>
-          <a:prstGeom prst="rect">
-            <a:avLst/>
-          </a:prstGeom>
-          <a:noFill/>
-        </p:spPr>
-        <p:txBody>
-          <a:bodyPr wrap="square">
-            <a:spAutoFit/>
-          </a:bodyPr>
-          <a:lstStyle/>
-          <a:p>
-            <a:pPr algn="l"/>
-            <a:r>
-              <a:rPr sz="900" b="1" i="0">
+              <a:rPr sz="1000" b="0" i="1">
                 <a:solidFill>
                   <a:srgbClr val="BBEEEE"/>
                 </a:solidFill>
               </a:rPr>
-              <a:t>BOOK J4  ·  Journée 4  ·  Écoute active &amp; Réponses</a:t>
-            </a:r>
-          </a:p>
-        </p:txBody>
-      </p:sp>
-      <p:sp>
-        <p:nvSpPr>
-          <p:cNvPr id="10" name="TextBox 9"/>
+              <a:t>Formation Initiale Module — Fundraising Téléphonique UNICEF</a:t>
+            </a:r>
+          </a:p>
+        </p:txBody>
+      </p:sp>
+      <p:sp>
+        <p:nvSpPr>
+          <p:cNvPr id="7" name="TextBox 6"/>
           <p:cNvSpPr txBox="1"/>
           <p:nvPr/>
         </p:nvSpPr>
         <p:spPr>
           <a:xfrm>
-            <a:off x="320040" y="960120"/>
-            <a:ext cx="11521440" cy="1143000"/>
+            <a:off x="347472" y="932688"/>
+            <a:ext cx="7772400" cy="292608"/>
+          </a:xfrm>
+          <a:prstGeom prst="rect">
+            <a:avLst/>
+          </a:prstGeom>
+          <a:noFill/>
+        </p:spPr>
+        <p:txBody>
+          <a:bodyPr wrap="square">
+            <a:spAutoFit/>
+          </a:bodyPr>
+          <a:lstStyle/>
+          <a:p>
+            <a:pPr algn="l"/>
+            <a:r>
+              <a:rPr sz="900" b="1" i="0">
+                <a:solidFill>
+                  <a:srgbClr val="88DDDD"/>
+                </a:solidFill>
+              </a:rPr>
+              <a:t>BOOK J4  ·  Journée 4  ·  Objections UNICEF France × FIDELIS</a:t>
+            </a:r>
+          </a:p>
+        </p:txBody>
+      </p:sp>
+      <p:sp>
+        <p:nvSpPr>
+          <p:cNvPr id="8" name="TextBox 7"/>
+          <p:cNvSpPr txBox="1"/>
+          <p:nvPr/>
+        </p:nvSpPr>
+        <p:spPr>
+          <a:xfrm>
+            <a:off x="347472" y="1207008"/>
+            <a:ext cx="10515600" cy="914400"/>
           </a:xfrm>
           <a:prstGeom prst="rect">
             <a:avLst/>
@@ -3437,21 +3351,21 @@
                   <a:srgbClr val="FFFFFF"/>
                 </a:solidFill>
               </a:rPr>
-              <a:t>Gérer les Objections</a:t>
-            </a:r>
-          </a:p>
-        </p:txBody>
-      </p:sp>
-      <p:sp>
-        <p:nvSpPr>
-          <p:cNvPr id="11" name="TextBox 10"/>
+              <a:t>Traitement des Objections</a:t>
+            </a:r>
+          </a:p>
+        </p:txBody>
+      </p:sp>
+      <p:sp>
+        <p:nvSpPr>
+          <p:cNvPr id="9" name="TextBox 8"/>
           <p:cNvSpPr txBox="1"/>
           <p:nvPr/>
         </p:nvSpPr>
         <p:spPr>
           <a:xfrm>
-            <a:off x="320040" y="1920240"/>
-            <a:ext cx="11521440" cy="347472"/>
+            <a:off x="347472" y="1901952"/>
+            <a:ext cx="10515600" cy="402336"/>
           </a:xfrm>
           <a:prstGeom prst="rect">
             <a:avLst/>
@@ -3471,14 +3385,38 @@
                   <a:srgbClr val="CCEEEE"/>
                 </a:solidFill>
               </a:rPr>
-              <a:t>Transformer chaque refus en opportunité d'engagement</a:t>
-            </a:r>
-          </a:p>
-        </p:txBody>
-      </p:sp>
-      <p:sp>
-        <p:nvSpPr>
-          <p:cNvPr id="12" name="Rectangle 11"/>
+              <a:t>15 objections · 5 catégories · Méthode AAR · Jeux de rôle téléphonique</a:t>
+            </a:r>
+          </a:p>
+        </p:txBody>
+      </p:sp>
+      <p:pic>
+        <p:nvPicPr>
+          <p:cNvPr id="10" name="Picture 9" descr="shy_logo_v2.png"/>
+          <p:cNvPicPr>
+            <a:picLocks noChangeAspect="1"/>
+          </p:cNvPicPr>
+          <p:nvPr/>
+        </p:nvPicPr>
+        <p:blipFill>
+          <a:blip r:embed="rId2"/>
+          <a:stretch>
+            <a:fillRect/>
+          </a:stretch>
+        </p:blipFill>
+        <p:spPr>
+          <a:xfrm>
+            <a:off x="11247120" y="45720"/>
+            <a:ext cx="822960" cy="804672"/>
+          </a:xfrm>
+          <a:prstGeom prst="rect">
+            <a:avLst/>
+          </a:prstGeom>
+        </p:spPr>
+      </p:pic>
+      <p:sp>
+        <p:nvSpPr>
+          <p:cNvPr id="11" name="Rectangle 10"/>
           <p:cNvSpPr/>
           <p:nvPr/>
         </p:nvSpPr>
@@ -3521,7 +3459,7 @@
       </p:sp>
       <p:sp>
         <p:nvSpPr>
-          <p:cNvPr id="13" name="TextBox 12"/>
+          <p:cNvPr id="12" name="TextBox 11"/>
           <p:cNvSpPr txBox="1"/>
           <p:nvPr/>
         </p:nvSpPr>
@@ -3543,26 +3481,26 @@
           <a:p>
             <a:pPr algn="ctr"/>
             <a:r>
-              <a:rPr sz="900" b="0" i="0">
+              <a:rPr sz="800" b="0" i="0">
                 <a:solidFill>
                   <a:srgbClr val="FFFFFF"/>
                 </a:solidFill>
               </a:rPr>
-              <a:t>SHY-Performance  ·  Formation FIM  ·  V6-01062026SHY-TE</a:t>
-            </a:r>
-          </a:p>
-        </p:txBody>
-      </p:sp>
-      <p:sp>
-        <p:nvSpPr>
-          <p:cNvPr id="14" name="TextBox 13"/>
+              <a:t>SHY-Performance  ·  Formation FIM  ·  UNICEF France  ·  V6-01062026SHY-TE</a:t>
+            </a:r>
+          </a:p>
+        </p:txBody>
+      </p:sp>
+      <p:sp>
+        <p:nvSpPr>
+          <p:cNvPr id="13" name="TextBox 12"/>
           <p:cNvSpPr txBox="1"/>
           <p:nvPr/>
         </p:nvSpPr>
         <p:spPr>
           <a:xfrm>
             <a:off x="457200" y="2514600"/>
-            <a:ext cx="11247120" cy="1051560"/>
+            <a:ext cx="10789920" cy="1005840"/>
           </a:xfrm>
           <a:prstGeom prst="rect">
             <a:avLst/>
@@ -3582,9 +3520,9 @@
                   <a:srgbClr val="1A1A1A"/>
                 </a:solidFill>
               </a:rPr>
-              <a:t>Aujourd'hui vous allez apprendre à aimer les objections.
-Un donateur qui objecte est un donateur qui dialogue.
-Chaque 'non' cache souvent un 'pas encore' — et c'est là que vous entrez en jeu.</a:t>
+              <a:t>Aujourd'hui vous apprenez à transformer chaque objection en opportunité de dialogue.
+Un prospect qui objecte est un prospect qui est encore là — et ça compte.
+Mantra : « Le refus d'aujourd'hui peut être le don de demain »</a:t>
             </a:r>
           </a:p>
         </p:txBody>
@@ -3659,7 +3597,7 @@
         <p:spPr>
           <a:xfrm>
             <a:off x="0" y="0"/>
-            <a:ext cx="12188952" cy="658368"/>
+            <a:ext cx="12188952" cy="685800"/>
           </a:xfrm>
           <a:prstGeom prst="rect">
             <a:avLst/>
@@ -3701,14 +3639,14 @@
         </p:nvSpPr>
         <p:spPr>
           <a:xfrm>
-            <a:off x="0" y="640080"/>
-            <a:ext cx="12188952" cy="54864"/>
+            <a:off x="0" y="667512"/>
+            <a:ext cx="12188952" cy="45720"/>
           </a:xfrm>
           <a:prstGeom prst="rect">
             <a:avLst/>
           </a:prstGeom>
           <a:solidFill>
-            <a:srgbClr val="FF0000"/>
+            <a:srgbClr val="00AAAA"/>
           </a:solidFill>
           <a:ln>
             <a:noFill/>
@@ -3744,8 +3682,8 @@
         </p:nvSpPr>
         <p:spPr>
           <a:xfrm>
-            <a:off x="164592" y="64008"/>
-            <a:ext cx="685800" cy="530352"/>
+            <a:off x="164592" y="73152"/>
+            <a:ext cx="2011680" cy="347472"/>
           </a:xfrm>
           <a:prstGeom prst="rect">
             <a:avLst/>
@@ -3760,12 +3698,12 @@
           <a:p>
             <a:pPr algn="l"/>
             <a:r>
-              <a:rPr sz="2000" b="1" i="0">
+              <a:rPr sz="1400" b="1" i="0">
                 <a:solidFill>
                   <a:srgbClr val="FFFFFF"/>
                 </a:solidFill>
               </a:rPr>
-              <a:t>SHY</a:t>
+              <a:t>SHY-Performance</a:t>
             </a:r>
           </a:p>
         </p:txBody>
@@ -3778,14 +3716,14 @@
         </p:nvSpPr>
         <p:spPr>
           <a:xfrm>
-            <a:off x="914400" y="91440"/>
-            <a:ext cx="36576" cy="475488"/>
+            <a:off x="2286000" y="91440"/>
+            <a:ext cx="36576" cy="502920"/>
           </a:xfrm>
           <a:prstGeom prst="rect">
             <a:avLst/>
           </a:prstGeom>
           <a:solidFill>
-            <a:srgbClr val="FF0000"/>
+            <a:srgbClr val="00AAAA"/>
           </a:solidFill>
           <a:ln>
             <a:noFill/>
@@ -3821,8 +3759,8 @@
         </p:nvSpPr>
         <p:spPr>
           <a:xfrm>
-            <a:off x="1024128" y="91440"/>
-            <a:ext cx="10881360" cy="475488"/>
+            <a:off x="2423160" y="91440"/>
+            <a:ext cx="9235440" cy="502920"/>
           </a:xfrm>
           <a:prstGeom prst="rect">
             <a:avLst/>
@@ -3837,7 +3775,7 @@
           <a:p>
             <a:pPr algn="l"/>
             <a:r>
-              <a:rPr sz="1700" b="1" i="0">
+              <a:rPr sz="1600" b="1" i="0">
                 <a:solidFill>
                   <a:srgbClr val="FFFFFF"/>
                 </a:solidFill>
@@ -3847,9 +3785,33 @@
           </a:p>
         </p:txBody>
       </p:sp>
-      <p:sp>
-        <p:nvSpPr>
-          <p:cNvPr id="8" name="Rectangle 7"/>
+      <p:pic>
+        <p:nvPicPr>
+          <p:cNvPr id="8" name="Picture 7" descr="shy_logo_v2.png"/>
+          <p:cNvPicPr>
+            <a:picLocks noChangeAspect="1"/>
+          </p:cNvPicPr>
+          <p:nvPr/>
+        </p:nvPicPr>
+        <p:blipFill>
+          <a:blip r:embed="rId2"/>
+          <a:stretch>
+            <a:fillRect/>
+          </a:stretch>
+        </p:blipFill>
+        <p:spPr>
+          <a:xfrm>
+            <a:off x="11247120" y="0"/>
+            <a:ext cx="822960" cy="676656"/>
+          </a:xfrm>
+          <a:prstGeom prst="rect">
+            <a:avLst/>
+          </a:prstGeom>
+        </p:spPr>
+      </p:pic>
+      <p:sp>
+        <p:nvSpPr>
+          <p:cNvPr id="9" name="Rectangle 8"/>
           <p:cNvSpPr/>
           <p:nvPr/>
         </p:nvSpPr>
@@ -3892,7 +3854,7 @@
       </p:sp>
       <p:sp>
         <p:nvSpPr>
-          <p:cNvPr id="9" name="TextBox 8"/>
+          <p:cNvPr id="10" name="TextBox 9"/>
           <p:cNvSpPr txBox="1"/>
           <p:nvPr/>
         </p:nvSpPr>
@@ -3914,26 +3876,26 @@
           <a:p>
             <a:pPr algn="ctr"/>
             <a:r>
-              <a:rPr sz="900" b="0" i="0">
+              <a:rPr sz="800" b="0" i="0">
                 <a:solidFill>
                   <a:srgbClr val="FFFFFF"/>
                 </a:solidFill>
               </a:rPr>
-              <a:t>SHY-Performance  ·  Formation FIM  ·  V6-01062026SHY-TE</a:t>
-            </a:r>
-          </a:p>
-        </p:txBody>
-      </p:sp>
-      <p:sp>
-        <p:nvSpPr>
-          <p:cNvPr id="10" name="Rectangle 9"/>
+              <a:t>SHY-Performance  ·  Formation FIM  ·  UNICEF France  ·  V6-01062026SHY-TE</a:t>
+            </a:r>
+          </a:p>
+        </p:txBody>
+      </p:sp>
+      <p:sp>
+        <p:nvSpPr>
+          <p:cNvPr id="11" name="Rectangle 10"/>
           <p:cNvSpPr/>
           <p:nvPr/>
         </p:nvSpPr>
         <p:spPr>
           <a:xfrm>
             <a:off x="274320" y="804672"/>
-            <a:ext cx="2910078" cy="274320"/>
+            <a:ext cx="2910078" cy="292608"/>
           </a:xfrm>
           <a:prstGeom prst="rect">
             <a:avLst/>
@@ -3969,14 +3931,14 @@
       </p:sp>
       <p:sp>
         <p:nvSpPr>
-          <p:cNvPr id="11" name="TextBox 10"/>
+          <p:cNvPr id="12" name="TextBox 11"/>
           <p:cNvSpPr txBox="1"/>
           <p:nvPr/>
         </p:nvSpPr>
         <p:spPr>
           <a:xfrm>
-            <a:off x="347472" y="841248"/>
-            <a:ext cx="2763774" cy="219456"/>
+            <a:off x="365760" y="841248"/>
+            <a:ext cx="2745486" cy="237744"/>
           </a:xfrm>
           <a:prstGeom prst="rect">
             <a:avLst/>
@@ -3991,26 +3953,26 @@
           <a:p>
             <a:pPr algn="l"/>
             <a:r>
-              <a:rPr sz="800" b="1" i="0">
+              <a:rPr sz="900" b="1" i="0">
                 <a:solidFill>
                   <a:srgbClr val="FFFFFF"/>
                 </a:solidFill>
               </a:rPr>
-              <a:t>OBSERVATION</a:t>
-            </a:r>
-          </a:p>
-        </p:txBody>
-      </p:sp>
-      <p:sp>
-        <p:nvSpPr>
-          <p:cNvPr id="12" name="Rectangle 11"/>
+              <a:t>ÉCOUTE</a:t>
+            </a:r>
+          </a:p>
+        </p:txBody>
+      </p:sp>
+      <p:sp>
+        <p:nvSpPr>
+          <p:cNvPr id="13" name="Rectangle 12"/>
           <p:cNvSpPr/>
           <p:nvPr/>
         </p:nvSpPr>
         <p:spPr>
           <a:xfrm>
-            <a:off x="274320" y="1078992"/>
-            <a:ext cx="2910078" cy="3840480"/>
+            <a:off x="274320" y="1097280"/>
+            <a:ext cx="2910078" cy="4370831"/>
           </a:xfrm>
           <a:prstGeom prst="rect">
             <a:avLst/>
@@ -4018,7 +3980,7 @@
           <a:solidFill>
             <a:srgbClr val="FFFFFF"/>
           </a:solidFill>
-          <a:ln w="12700">
+          <a:ln w="15240">
             <a:solidFill>
               <a:srgbClr val="005555"/>
             </a:solidFill>
@@ -4048,14 +4010,14 @@
       </p:sp>
       <p:sp>
         <p:nvSpPr>
-          <p:cNvPr id="13" name="TextBox 12"/>
+          <p:cNvPr id="14" name="TextBox 13"/>
           <p:cNvSpPr txBox="1"/>
           <p:nvPr/>
         </p:nvSpPr>
         <p:spPr>
           <a:xfrm>
-            <a:off x="384048" y="1124712"/>
-            <a:ext cx="2690622" cy="3657600"/>
+            <a:off x="384048" y="1152144"/>
+            <a:ext cx="2708910" cy="4160520"/>
           </a:xfrm>
           <a:prstGeom prst="rect">
             <a:avLst/>
@@ -4070,28 +4032,28 @@
           <a:p>
             <a:pPr algn="l"/>
             <a:r>
-              <a:rPr sz="900" b="0" i="0">
+              <a:rPr sz="950" b="0" i="0">
                 <a:solidFill>
                   <a:srgbClr val="1A1A1A"/>
                 </a:solidFill>
               </a:rPr>
-              <a:t>Vous analysez 5 extraits
-vidéo : bonne et mauvaise
-gestion d'objection.</a:t>
-            </a:r>
-          </a:p>
-        </p:txBody>
-      </p:sp>
-      <p:sp>
-        <p:nvSpPr>
-          <p:cNvPr id="14" name="Rectangle 13"/>
+              <a:t>Vous écoutez 5 extraits d'appels :
+bonne et mauvaise gestion
+d'une objection.</a:t>
+            </a:r>
+          </a:p>
+        </p:txBody>
+      </p:sp>
+      <p:sp>
+        <p:nvSpPr>
+          <p:cNvPr id="15" name="Rectangle 14"/>
           <p:cNvSpPr/>
           <p:nvPr/>
         </p:nvSpPr>
         <p:spPr>
           <a:xfrm>
             <a:off x="3202686" y="804672"/>
-            <a:ext cx="2910078" cy="274320"/>
+            <a:ext cx="2910078" cy="292608"/>
           </a:xfrm>
           <a:prstGeom prst="rect">
             <a:avLst/>
@@ -4127,14 +4089,488 @@
       </p:sp>
       <p:sp>
         <p:nvSpPr>
-          <p:cNvPr id="15" name="TextBox 14"/>
+          <p:cNvPr id="16" name="TextBox 15"/>
           <p:cNvSpPr txBox="1"/>
           <p:nvPr/>
         </p:nvSpPr>
         <p:spPr>
           <a:xfrm>
-            <a:off x="3275838" y="841248"/>
-            <a:ext cx="2763774" cy="219456"/>
+            <a:off x="3294126" y="841248"/>
+            <a:ext cx="2745486" cy="237744"/>
+          </a:xfrm>
+          <a:prstGeom prst="rect">
+            <a:avLst/>
+          </a:prstGeom>
+          <a:noFill/>
+        </p:spPr>
+        <p:txBody>
+          <a:bodyPr wrap="square">
+            <a:spAutoFit/>
+          </a:bodyPr>
+          <a:lstStyle/>
+          <a:p>
+            <a:pPr algn="l"/>
+            <a:r>
+              <a:rPr sz="900" b="1" i="0">
+                <a:solidFill>
+                  <a:srgbClr val="FFFFFF"/>
+                </a:solidFill>
+              </a:rPr>
+              <a:t>ANALYSE</a:t>
+            </a:r>
+          </a:p>
+        </p:txBody>
+      </p:sp>
+      <p:sp>
+        <p:nvSpPr>
+          <p:cNvPr id="17" name="Rectangle 16"/>
+          <p:cNvSpPr/>
+          <p:nvPr/>
+        </p:nvSpPr>
+        <p:spPr>
+          <a:xfrm>
+            <a:off x="3202686" y="1097280"/>
+            <a:ext cx="2910078" cy="4370831"/>
+          </a:xfrm>
+          <a:prstGeom prst="rect">
+            <a:avLst/>
+          </a:prstGeom>
+          <a:solidFill>
+            <a:srgbClr val="FFFFFF"/>
+          </a:solidFill>
+          <a:ln w="15240">
+            <a:solidFill>
+              <a:srgbClr val="008080"/>
+            </a:solidFill>
+          </a:ln>
+        </p:spPr>
+        <p:style>
+          <a:lnRef idx="1">
+            <a:schemeClr val="accent1"/>
+          </a:lnRef>
+          <a:fillRef idx="3">
+            <a:schemeClr val="accent1"/>
+          </a:fillRef>
+          <a:effectRef idx="2">
+            <a:schemeClr val="accent1"/>
+          </a:effectRef>
+          <a:fontRef idx="minor">
+            <a:schemeClr val="lt1"/>
+          </a:fontRef>
+        </p:style>
+        <p:txBody>
+          <a:bodyPr rtlCol="0" anchor="ctr"/>
+          <a:lstStyle/>
+          <a:p>
+            <a:pPr algn="ctr"/>
+          </a:p>
+        </p:txBody>
+      </p:sp>
+      <p:sp>
+        <p:nvSpPr>
+          <p:cNvPr id="18" name="TextBox 17"/>
+          <p:cNvSpPr txBox="1"/>
+          <p:nvPr/>
+        </p:nvSpPr>
+        <p:spPr>
+          <a:xfrm>
+            <a:off x="3312414" y="1152144"/>
+            <a:ext cx="2708910" cy="4160520"/>
+          </a:xfrm>
+          <a:prstGeom prst="rect">
+            <a:avLst/>
+          </a:prstGeom>
+          <a:noFill/>
+        </p:spPr>
+        <p:txBody>
+          <a:bodyPr wrap="square">
+            <a:spAutoFit/>
+          </a:bodyPr>
+          <a:lstStyle/>
+          <a:p>
+            <a:pPr algn="l"/>
+            <a:r>
+              <a:rPr sz="950" b="0" i="0">
+                <a:solidFill>
+                  <a:srgbClr val="1A1A1A"/>
+                </a:solidFill>
+              </a:rPr>
+              <a:t>'Qu'avez-vous entendu ?
+Qu'est-ce qui a tout changé
+dans la réponse ?'</a:t>
+            </a:r>
+          </a:p>
+        </p:txBody>
+      </p:sp>
+      <p:sp>
+        <p:nvSpPr>
+          <p:cNvPr id="19" name="Rectangle 18"/>
+          <p:cNvSpPr/>
+          <p:nvPr/>
+        </p:nvSpPr>
+        <p:spPr>
+          <a:xfrm>
+            <a:off x="6131052" y="804672"/>
+            <a:ext cx="2910078" cy="292608"/>
+          </a:xfrm>
+          <a:prstGeom prst="rect">
+            <a:avLst/>
+          </a:prstGeom>
+          <a:solidFill>
+            <a:srgbClr val="006A6A"/>
+          </a:solidFill>
+          <a:ln>
+            <a:noFill/>
+          </a:ln>
+        </p:spPr>
+        <p:style>
+          <a:lnRef idx="1">
+            <a:schemeClr val="accent1"/>
+          </a:lnRef>
+          <a:fillRef idx="3">
+            <a:schemeClr val="accent1"/>
+          </a:fillRef>
+          <a:effectRef idx="2">
+            <a:schemeClr val="accent1"/>
+          </a:effectRef>
+          <a:fontRef idx="minor">
+            <a:schemeClr val="lt1"/>
+          </a:fontRef>
+        </p:style>
+        <p:txBody>
+          <a:bodyPr rtlCol="0" anchor="ctr"/>
+          <a:lstStyle/>
+          <a:p>
+            <a:pPr algn="ctr"/>
+          </a:p>
+        </p:txBody>
+      </p:sp>
+      <p:sp>
+        <p:nvSpPr>
+          <p:cNvPr id="20" name="TextBox 19"/>
+          <p:cNvSpPr txBox="1"/>
+          <p:nvPr/>
+        </p:nvSpPr>
+        <p:spPr>
+          <a:xfrm>
+            <a:off x="6222492" y="841248"/>
+            <a:ext cx="2745486" cy="237744"/>
+          </a:xfrm>
+          <a:prstGeom prst="rect">
+            <a:avLst/>
+          </a:prstGeom>
+          <a:noFill/>
+        </p:spPr>
+        <p:txBody>
+          <a:bodyPr wrap="square">
+            <a:spAutoFit/>
+          </a:bodyPr>
+          <a:lstStyle/>
+          <a:p>
+            <a:pPr algn="l"/>
+            <a:r>
+              <a:rPr sz="900" b="1" i="0">
+                <a:solidFill>
+                  <a:srgbClr val="FFFFFF"/>
+                </a:solidFill>
+              </a:rPr>
+              <a:t>APPORT</a:t>
+            </a:r>
+          </a:p>
+        </p:txBody>
+      </p:sp>
+      <p:sp>
+        <p:nvSpPr>
+          <p:cNvPr id="21" name="Rectangle 20"/>
+          <p:cNvSpPr/>
+          <p:nvPr/>
+        </p:nvSpPr>
+        <p:spPr>
+          <a:xfrm>
+            <a:off x="6131052" y="1097280"/>
+            <a:ext cx="2910078" cy="4370831"/>
+          </a:xfrm>
+          <a:prstGeom prst="rect">
+            <a:avLst/>
+          </a:prstGeom>
+          <a:solidFill>
+            <a:srgbClr val="FFFFFF"/>
+          </a:solidFill>
+          <a:ln w="15240">
+            <a:solidFill>
+              <a:srgbClr val="006A6A"/>
+            </a:solidFill>
+          </a:ln>
+        </p:spPr>
+        <p:style>
+          <a:lnRef idx="1">
+            <a:schemeClr val="accent1"/>
+          </a:lnRef>
+          <a:fillRef idx="3">
+            <a:schemeClr val="accent1"/>
+          </a:fillRef>
+          <a:effectRef idx="2">
+            <a:schemeClr val="accent1"/>
+          </a:effectRef>
+          <a:fontRef idx="minor">
+            <a:schemeClr val="lt1"/>
+          </a:fontRef>
+        </p:style>
+        <p:txBody>
+          <a:bodyPr rtlCol="0" anchor="ctr"/>
+          <a:lstStyle/>
+          <a:p>
+            <a:pPr algn="ctr"/>
+          </a:p>
+        </p:txBody>
+      </p:sp>
+      <p:sp>
+        <p:nvSpPr>
+          <p:cNvPr id="22" name="TextBox 21"/>
+          <p:cNvSpPr txBox="1"/>
+          <p:nvPr/>
+        </p:nvSpPr>
+        <p:spPr>
+          <a:xfrm>
+            <a:off x="6240780" y="1152144"/>
+            <a:ext cx="2708910" cy="4160520"/>
+          </a:xfrm>
+          <a:prstGeom prst="rect">
+            <a:avLst/>
+          </a:prstGeom>
+          <a:noFill/>
+        </p:spPr>
+        <p:txBody>
+          <a:bodyPr wrap="square">
+            <a:spAutoFit/>
+          </a:bodyPr>
+          <a:lstStyle/>
+          <a:p>
+            <a:pPr algn="l"/>
+            <a:r>
+              <a:rPr sz="950" b="0" i="0">
+                <a:solidFill>
+                  <a:srgbClr val="1A1A1A"/>
+                </a:solidFill>
+              </a:rPr>
+              <a:t>15 objections · 5 catégories
+Méthode AAR : Accuser réception
+/ Argumenter / Relancer</a:t>
+            </a:r>
+          </a:p>
+        </p:txBody>
+      </p:sp>
+      <p:sp>
+        <p:nvSpPr>
+          <p:cNvPr id="23" name="Rectangle 22"/>
+          <p:cNvSpPr/>
+          <p:nvPr/>
+        </p:nvSpPr>
+        <p:spPr>
+          <a:xfrm>
+            <a:off x="9059418" y="804672"/>
+            <a:ext cx="2910078" cy="292608"/>
+          </a:xfrm>
+          <a:prstGeom prst="rect">
+            <a:avLst/>
+          </a:prstGeom>
+          <a:solidFill>
+            <a:srgbClr val="00AAAA"/>
+          </a:solidFill>
+          <a:ln>
+            <a:noFill/>
+          </a:ln>
+        </p:spPr>
+        <p:style>
+          <a:lnRef idx="1">
+            <a:schemeClr val="accent1"/>
+          </a:lnRef>
+          <a:fillRef idx="3">
+            <a:schemeClr val="accent1"/>
+          </a:fillRef>
+          <a:effectRef idx="2">
+            <a:schemeClr val="accent1"/>
+          </a:effectRef>
+          <a:fontRef idx="minor">
+            <a:schemeClr val="lt1"/>
+          </a:fontRef>
+        </p:style>
+        <p:txBody>
+          <a:bodyPr rtlCol="0" anchor="ctr"/>
+          <a:lstStyle/>
+          <a:p>
+            <a:pPr algn="ctr"/>
+          </a:p>
+        </p:txBody>
+      </p:sp>
+      <p:sp>
+        <p:nvSpPr>
+          <p:cNvPr id="24" name="TextBox 23"/>
+          <p:cNvSpPr txBox="1"/>
+          <p:nvPr/>
+        </p:nvSpPr>
+        <p:spPr>
+          <a:xfrm>
+            <a:off x="9150858" y="841248"/>
+            <a:ext cx="2745486" cy="237744"/>
+          </a:xfrm>
+          <a:prstGeom prst="rect">
+            <a:avLst/>
+          </a:prstGeom>
+          <a:noFill/>
+        </p:spPr>
+        <p:txBody>
+          <a:bodyPr wrap="square">
+            <a:spAutoFit/>
+          </a:bodyPr>
+          <a:lstStyle/>
+          <a:p>
+            <a:pPr algn="l"/>
+            <a:r>
+              <a:rPr sz="900" b="1" i="0">
+                <a:solidFill>
+                  <a:srgbClr val="FFFFFF"/>
+                </a:solidFill>
+              </a:rPr>
+              <a:t>ENTRAÎNEMENT</a:t>
+            </a:r>
+          </a:p>
+        </p:txBody>
+      </p:sp>
+      <p:sp>
+        <p:nvSpPr>
+          <p:cNvPr id="25" name="Rectangle 24"/>
+          <p:cNvSpPr/>
+          <p:nvPr/>
+        </p:nvSpPr>
+        <p:spPr>
+          <a:xfrm>
+            <a:off x="9059418" y="1097280"/>
+            <a:ext cx="2910078" cy="4370831"/>
+          </a:xfrm>
+          <a:prstGeom prst="rect">
+            <a:avLst/>
+          </a:prstGeom>
+          <a:solidFill>
+            <a:srgbClr val="FFFFFF"/>
+          </a:solidFill>
+          <a:ln w="15240">
+            <a:solidFill>
+              <a:srgbClr val="00AAAA"/>
+            </a:solidFill>
+          </a:ln>
+        </p:spPr>
+        <p:style>
+          <a:lnRef idx="1">
+            <a:schemeClr val="accent1"/>
+          </a:lnRef>
+          <a:fillRef idx="3">
+            <a:schemeClr val="accent1"/>
+          </a:fillRef>
+          <a:effectRef idx="2">
+            <a:schemeClr val="accent1"/>
+          </a:effectRef>
+          <a:fontRef idx="minor">
+            <a:schemeClr val="lt1"/>
+          </a:fontRef>
+        </p:style>
+        <p:txBody>
+          <a:bodyPr rtlCol="0" anchor="ctr"/>
+          <a:lstStyle/>
+          <a:p>
+            <a:pPr algn="ctr"/>
+          </a:p>
+        </p:txBody>
+      </p:sp>
+      <p:sp>
+        <p:nvSpPr>
+          <p:cNvPr id="26" name="TextBox 25"/>
+          <p:cNvSpPr txBox="1"/>
+          <p:nvPr/>
+        </p:nvSpPr>
+        <p:spPr>
+          <a:xfrm>
+            <a:off x="9169146" y="1152144"/>
+            <a:ext cx="2708910" cy="4160520"/>
+          </a:xfrm>
+          <a:prstGeom prst="rect">
+            <a:avLst/>
+          </a:prstGeom>
+          <a:noFill/>
+        </p:spPr>
+        <p:txBody>
+          <a:bodyPr wrap="square">
+            <a:spAutoFit/>
+          </a:bodyPr>
+          <a:lstStyle/>
+          <a:p>
+            <a:pPr algn="l"/>
+            <a:r>
+              <a:rPr sz="950" b="0" i="0">
+                <a:solidFill>
+                  <a:srgbClr val="1A1A1A"/>
+                </a:solidFill>
+              </a:rPr>
+              <a:t>Jeux de rôle en binômes
+sur chaque catégorie.
+Grille d'observation formateur.</a:t>
+            </a:r>
+          </a:p>
+        </p:txBody>
+      </p:sp>
+      <p:sp>
+        <p:nvSpPr>
+          <p:cNvPr id="27" name="Rectangle 26"/>
+          <p:cNvSpPr/>
+          <p:nvPr/>
+        </p:nvSpPr>
+        <p:spPr>
+          <a:xfrm>
+            <a:off x="274320" y="5596128"/>
+            <a:ext cx="11640312" cy="256032"/>
+          </a:xfrm>
+          <a:prstGeom prst="rect">
+            <a:avLst/>
+          </a:prstGeom>
+          <a:solidFill>
+            <a:srgbClr val="008080"/>
+          </a:solidFill>
+          <a:ln>
+            <a:noFill/>
+          </a:ln>
+        </p:spPr>
+        <p:style>
+          <a:lnRef idx="1">
+            <a:schemeClr val="accent1"/>
+          </a:lnRef>
+          <a:fillRef idx="3">
+            <a:schemeClr val="accent1"/>
+          </a:fillRef>
+          <a:effectRef idx="2">
+            <a:schemeClr val="accent1"/>
+          </a:effectRef>
+          <a:fontRef idx="minor">
+            <a:schemeClr val="lt1"/>
+          </a:fontRef>
+        </p:style>
+        <p:txBody>
+          <a:bodyPr rtlCol="0" anchor="ctr"/>
+          <a:lstStyle/>
+          <a:p>
+            <a:pPr algn="ctr"/>
+          </a:p>
+        </p:txBody>
+      </p:sp>
+      <p:sp>
+        <p:nvSpPr>
+          <p:cNvPr id="28" name="TextBox 27"/>
+          <p:cNvSpPr txBox="1"/>
+          <p:nvPr/>
+        </p:nvSpPr>
+        <p:spPr>
+          <a:xfrm>
+            <a:off x="384048" y="5632704"/>
+            <a:ext cx="11430000" cy="201168"/>
           </a:xfrm>
           <a:prstGeom prst="rect">
             <a:avLst/>
@@ -4154,21 +4590,21 @@
                   <a:srgbClr val="FFFFFF"/>
                 </a:solidFill>
               </a:rPr>
-              <a:t>ANALYSE</a:t>
-            </a:r>
-          </a:p>
-        </p:txBody>
-      </p:sp>
-      <p:sp>
-        <p:nvSpPr>
-          <p:cNvPr id="16" name="Rectangle 15"/>
+              <a:t>Vos 3 réussites à valider aujourd'hui</a:t>
+            </a:r>
+          </a:p>
+        </p:txBody>
+      </p:sp>
+      <p:sp>
+        <p:nvSpPr>
+          <p:cNvPr id="29" name="Rectangle 28"/>
           <p:cNvSpPr/>
           <p:nvPr/>
         </p:nvSpPr>
         <p:spPr>
           <a:xfrm>
-            <a:off x="3202686" y="1078992"/>
-            <a:ext cx="2910078" cy="3840480"/>
+            <a:off x="274320" y="5870448"/>
+            <a:ext cx="3843528" cy="502920"/>
           </a:xfrm>
           <a:prstGeom prst="rect">
             <a:avLst/>
@@ -4176,7 +4612,7 @@
           <a:solidFill>
             <a:srgbClr val="FFFFFF"/>
           </a:solidFill>
-          <a:ln w="12700">
+          <a:ln w="7620">
             <a:solidFill>
               <a:srgbClr val="008080"/>
             </a:solidFill>
@@ -4206,14 +4642,14 @@
       </p:sp>
       <p:sp>
         <p:nvSpPr>
-          <p:cNvPr id="17" name="TextBox 16"/>
+          <p:cNvPr id="30" name="TextBox 29"/>
           <p:cNvSpPr txBox="1"/>
           <p:nvPr/>
         </p:nvSpPr>
         <p:spPr>
           <a:xfrm>
-            <a:off x="3312414" y="1124712"/>
-            <a:ext cx="2690622" cy="3657600"/>
+            <a:off x="384048" y="5907024"/>
+            <a:ext cx="3715512" cy="420624"/>
           </a:xfrm>
           <a:prstGeom prst="rect">
             <a:avLst/>
@@ -4233,32 +4669,32 @@
                   <a:srgbClr val="1A1A1A"/>
                 </a:solidFill>
               </a:rPr>
-              <a:t>'Qu'avez-vous remarqué ?
-Qu'est-ce qui a tout changé
-dans la réponse ?'</a:t>
-            </a:r>
-          </a:p>
-        </p:txBody>
-      </p:sp>
-      <p:sp>
-        <p:nvSpPr>
-          <p:cNvPr id="18" name="Rectangle 17"/>
+              <a:t>✔ Grille écoute active validée par formateur</a:t>
+            </a:r>
+          </a:p>
+        </p:txBody>
+      </p:sp>
+      <p:sp>
+        <p:nvSpPr>
+          <p:cNvPr id="31" name="Rectangle 30"/>
           <p:cNvSpPr/>
           <p:nvPr/>
         </p:nvSpPr>
         <p:spPr>
           <a:xfrm>
-            <a:off x="6131052" y="804672"/>
-            <a:ext cx="2910078" cy="274320"/>
+            <a:off x="4154423" y="5870448"/>
+            <a:ext cx="3843528" cy="502920"/>
           </a:xfrm>
           <a:prstGeom prst="rect">
             <a:avLst/>
           </a:prstGeom>
           <a:solidFill>
-            <a:srgbClr val="2A7A50"/>
+            <a:srgbClr val="F0F7F7"/>
           </a:solidFill>
-          <a:ln>
-            <a:noFill/>
+          <a:ln w="7620">
+            <a:solidFill>
+              <a:srgbClr val="008080"/>
+            </a:solidFill>
           </a:ln>
         </p:spPr>
         <p:style>
@@ -4285,14 +4721,14 @@
       </p:sp>
       <p:sp>
         <p:nvSpPr>
-          <p:cNvPr id="19" name="TextBox 18"/>
+          <p:cNvPr id="32" name="TextBox 31"/>
           <p:cNvSpPr txBox="1"/>
           <p:nvPr/>
         </p:nvSpPr>
         <p:spPr>
           <a:xfrm>
-            <a:off x="6204204" y="841248"/>
-            <a:ext cx="2763774" cy="219456"/>
+            <a:off x="4264152" y="5907024"/>
+            <a:ext cx="3715512" cy="420624"/>
           </a:xfrm>
           <a:prstGeom prst="rect">
             <a:avLst/>
@@ -4307,26 +4743,26 @@
           <a:p>
             <a:pPr algn="l"/>
             <a:r>
-              <a:rPr sz="800" b="1" i="0">
+              <a:rPr sz="900" b="0" i="0">
                 <a:solidFill>
-                  <a:srgbClr val="FFFFFF"/>
+                  <a:srgbClr val="1A1A1A"/>
                 </a:solidFill>
               </a:rPr>
-              <a:t>APPORT</a:t>
-            </a:r>
-          </a:p>
-        </p:txBody>
-      </p:sp>
-      <p:sp>
-        <p:nvSpPr>
-          <p:cNvPr id="20" name="Rectangle 19"/>
+              <a:t>✔ Réflexion LFI : 'Quelle objection me challenge le plus ?'</a:t>
+            </a:r>
+          </a:p>
+        </p:txBody>
+      </p:sp>
+      <p:sp>
+        <p:nvSpPr>
+          <p:cNvPr id="33" name="Rectangle 32"/>
           <p:cNvSpPr/>
           <p:nvPr/>
         </p:nvSpPr>
         <p:spPr>
           <a:xfrm>
-            <a:off x="6131052" y="1078992"/>
-            <a:ext cx="2910078" cy="3840480"/>
+            <a:off x="8034528" y="5870448"/>
+            <a:ext cx="3843528" cy="502920"/>
           </a:xfrm>
           <a:prstGeom prst="rect">
             <a:avLst/>
@@ -4334,9 +4770,9 @@
           <a:solidFill>
             <a:srgbClr val="FFFFFF"/>
           </a:solidFill>
-          <a:ln w="12700">
+          <a:ln w="7620">
             <a:solidFill>
-              <a:srgbClr val="2A7A50"/>
+              <a:srgbClr val="008080"/>
             </a:solidFill>
           </a:ln>
         </p:spPr>
@@ -4364,14 +4800,14 @@
       </p:sp>
       <p:sp>
         <p:nvSpPr>
-          <p:cNvPr id="21" name="TextBox 20"/>
+          <p:cNvPr id="34" name="TextBox 33"/>
           <p:cNvSpPr txBox="1"/>
           <p:nvPr/>
         </p:nvSpPr>
         <p:spPr>
           <a:xfrm>
-            <a:off x="6240780" y="1124712"/>
-            <a:ext cx="2690622" cy="3657600"/>
+            <a:off x="8144256" y="5907024"/>
+            <a:ext cx="3715512" cy="420624"/>
           </a:xfrm>
           <a:prstGeom prst="rect">
             <a:avLst/>
@@ -4391,481 +4827,7 @@
                   <a:srgbClr val="1A1A1A"/>
                 </a:solidFill>
               </a:rPr>
-              <a:t>Les 12 objections types.
-La réponse en 4 temps.
-Les mots qui ouvrent.</a:t>
-            </a:r>
-          </a:p>
-        </p:txBody>
-      </p:sp>
-      <p:sp>
-        <p:nvSpPr>
-          <p:cNvPr id="22" name="Rectangle 21"/>
-          <p:cNvSpPr/>
-          <p:nvPr/>
-        </p:nvSpPr>
-        <p:spPr>
-          <a:xfrm>
-            <a:off x="9059418" y="804672"/>
-            <a:ext cx="2910078" cy="274320"/>
-          </a:xfrm>
-          <a:prstGeom prst="rect">
-            <a:avLst/>
-          </a:prstGeom>
-          <a:solidFill>
-            <a:srgbClr val="FF0000"/>
-          </a:solidFill>
-          <a:ln>
-            <a:noFill/>
-          </a:ln>
-        </p:spPr>
-        <p:style>
-          <a:lnRef idx="1">
-            <a:schemeClr val="accent1"/>
-          </a:lnRef>
-          <a:fillRef idx="3">
-            <a:schemeClr val="accent1"/>
-          </a:fillRef>
-          <a:effectRef idx="2">
-            <a:schemeClr val="accent1"/>
-          </a:effectRef>
-          <a:fontRef idx="minor">
-            <a:schemeClr val="lt1"/>
-          </a:fontRef>
-        </p:style>
-        <p:txBody>
-          <a:bodyPr rtlCol="0" anchor="ctr"/>
-          <a:lstStyle/>
-          <a:p>
-            <a:pPr algn="ctr"/>
-          </a:p>
-        </p:txBody>
-      </p:sp>
-      <p:sp>
-        <p:nvSpPr>
-          <p:cNvPr id="23" name="TextBox 22"/>
-          <p:cNvSpPr txBox="1"/>
-          <p:nvPr/>
-        </p:nvSpPr>
-        <p:spPr>
-          <a:xfrm>
-            <a:off x="9132570" y="841248"/>
-            <a:ext cx="2763774" cy="219456"/>
-          </a:xfrm>
-          <a:prstGeom prst="rect">
-            <a:avLst/>
-          </a:prstGeom>
-          <a:noFill/>
-        </p:spPr>
-        <p:txBody>
-          <a:bodyPr wrap="square">
-            <a:spAutoFit/>
-          </a:bodyPr>
-          <a:lstStyle/>
-          <a:p>
-            <a:pPr algn="l"/>
-            <a:r>
-              <a:rPr sz="800" b="1" i="0">
-                <a:solidFill>
-                  <a:srgbClr val="FFFFFF"/>
-                </a:solidFill>
-              </a:rPr>
-              <a:t>ENTRAÎNEMENT</a:t>
-            </a:r>
-          </a:p>
-        </p:txBody>
-      </p:sp>
-      <p:sp>
-        <p:nvSpPr>
-          <p:cNvPr id="24" name="Rectangle 23"/>
-          <p:cNvSpPr/>
-          <p:nvPr/>
-        </p:nvSpPr>
-        <p:spPr>
-          <a:xfrm>
-            <a:off x="9059418" y="1078992"/>
-            <a:ext cx="2910078" cy="3840480"/>
-          </a:xfrm>
-          <a:prstGeom prst="rect">
-            <a:avLst/>
-          </a:prstGeom>
-          <a:solidFill>
-            <a:srgbClr val="FFFFFF"/>
-          </a:solidFill>
-          <a:ln w="12700">
-            <a:solidFill>
-              <a:srgbClr val="FF0000"/>
-            </a:solidFill>
-          </a:ln>
-        </p:spPr>
-        <p:style>
-          <a:lnRef idx="1">
-            <a:schemeClr val="accent1"/>
-          </a:lnRef>
-          <a:fillRef idx="3">
-            <a:schemeClr val="accent1"/>
-          </a:fillRef>
-          <a:effectRef idx="2">
-            <a:schemeClr val="accent1"/>
-          </a:effectRef>
-          <a:fontRef idx="minor">
-            <a:schemeClr val="lt1"/>
-          </a:fontRef>
-        </p:style>
-        <p:txBody>
-          <a:bodyPr rtlCol="0" anchor="ctr"/>
-          <a:lstStyle/>
-          <a:p>
-            <a:pPr algn="ctr"/>
-          </a:p>
-        </p:txBody>
-      </p:sp>
-      <p:sp>
-        <p:nvSpPr>
-          <p:cNvPr id="25" name="TextBox 24"/>
-          <p:cNvSpPr txBox="1"/>
-          <p:nvPr/>
-        </p:nvSpPr>
-        <p:spPr>
-          <a:xfrm>
-            <a:off x="9169146" y="1124712"/>
-            <a:ext cx="2690622" cy="3657600"/>
-          </a:xfrm>
-          <a:prstGeom prst="rect">
-            <a:avLst/>
-          </a:prstGeom>
-          <a:noFill/>
-        </p:spPr>
-        <p:txBody>
-          <a:bodyPr wrap="square">
-            <a:spAutoFit/>
-          </a:bodyPr>
-          <a:lstStyle/>
-          <a:p>
-            <a:pPr algn="l"/>
-            <a:r>
-              <a:rPr sz="900" b="0" i="0">
-                <a:solidFill>
-                  <a:srgbClr val="1A1A1A"/>
-                </a:solidFill>
-              </a:rPr>
-              <a:t>Battle : tournoi d'objections
-par équipes. Tirage au sort.
-Le groupe vote la meilleure réponse.</a:t>
-            </a:r>
-          </a:p>
-        </p:txBody>
-      </p:sp>
-      <p:sp>
-        <p:nvSpPr>
-          <p:cNvPr id="26" name="Rectangle 25"/>
-          <p:cNvSpPr/>
-          <p:nvPr/>
-        </p:nvSpPr>
-        <p:spPr>
-          <a:xfrm>
-            <a:off x="274320" y="5074920"/>
-            <a:ext cx="11640312" cy="274320"/>
-          </a:xfrm>
-          <a:prstGeom prst="rect">
-            <a:avLst/>
-          </a:prstGeom>
-          <a:solidFill>
-            <a:srgbClr val="FF0000"/>
-          </a:solidFill>
-          <a:ln>
-            <a:noFill/>
-          </a:ln>
-        </p:spPr>
-        <p:style>
-          <a:lnRef idx="1">
-            <a:schemeClr val="accent1"/>
-          </a:lnRef>
-          <a:fillRef idx="3">
-            <a:schemeClr val="accent1"/>
-          </a:fillRef>
-          <a:effectRef idx="2">
-            <a:schemeClr val="accent1"/>
-          </a:effectRef>
-          <a:fontRef idx="minor">
-            <a:schemeClr val="lt1"/>
-          </a:fontRef>
-        </p:style>
-        <p:txBody>
-          <a:bodyPr rtlCol="0" anchor="ctr"/>
-          <a:lstStyle/>
-          <a:p>
-            <a:pPr algn="ctr"/>
-          </a:p>
-        </p:txBody>
-      </p:sp>
-      <p:sp>
-        <p:nvSpPr>
-          <p:cNvPr id="27" name="TextBox 26"/>
-          <p:cNvSpPr txBox="1"/>
-          <p:nvPr/>
-        </p:nvSpPr>
-        <p:spPr>
-          <a:xfrm>
-            <a:off x="384048" y="5111496"/>
-            <a:ext cx="11430000" cy="219456"/>
-          </a:xfrm>
-          <a:prstGeom prst="rect">
-            <a:avLst/>
-          </a:prstGeom>
-          <a:noFill/>
-        </p:spPr>
-        <p:txBody>
-          <a:bodyPr wrap="square">
-            <a:spAutoFit/>
-          </a:bodyPr>
-          <a:lstStyle/>
-          <a:p>
-            <a:pPr algn="l"/>
-            <a:r>
-              <a:rPr sz="900" b="1" i="0">
-                <a:solidFill>
-                  <a:srgbClr val="FFFFFF"/>
-                </a:solidFill>
-              </a:rPr>
-              <a:t>Vos 3 réussites à valider aujourd'hui</a:t>
-            </a:r>
-          </a:p>
-        </p:txBody>
-      </p:sp>
-      <p:sp>
-        <p:nvSpPr>
-          <p:cNvPr id="28" name="Rectangle 27"/>
-          <p:cNvSpPr/>
-          <p:nvPr/>
-        </p:nvSpPr>
-        <p:spPr>
-          <a:xfrm>
-            <a:off x="274320" y="5367528"/>
-            <a:ext cx="3843528" cy="502920"/>
-          </a:xfrm>
-          <a:prstGeom prst="rect">
-            <a:avLst/>
-          </a:prstGeom>
-          <a:solidFill>
-            <a:srgbClr val="FFFFFF"/>
-          </a:solidFill>
-          <a:ln w="10160">
-            <a:solidFill>
-              <a:srgbClr val="FF0000"/>
-            </a:solidFill>
-          </a:ln>
-        </p:spPr>
-        <p:style>
-          <a:lnRef idx="1">
-            <a:schemeClr val="accent1"/>
-          </a:lnRef>
-          <a:fillRef idx="3">
-            <a:schemeClr val="accent1"/>
-          </a:fillRef>
-          <a:effectRef idx="2">
-            <a:schemeClr val="accent1"/>
-          </a:effectRef>
-          <a:fontRef idx="minor">
-            <a:schemeClr val="lt1"/>
-          </a:fontRef>
-        </p:style>
-        <p:txBody>
-          <a:bodyPr rtlCol="0" anchor="ctr"/>
-          <a:lstStyle/>
-          <a:p>
-            <a:pPr algn="ctr"/>
-          </a:p>
-        </p:txBody>
-      </p:sp>
-      <p:sp>
-        <p:nvSpPr>
-          <p:cNvPr id="29" name="TextBox 28"/>
-          <p:cNvSpPr txBox="1"/>
-          <p:nvPr/>
-        </p:nvSpPr>
-        <p:spPr>
-          <a:xfrm>
-            <a:off x="365760" y="5404104"/>
-            <a:ext cx="3715512" cy="420624"/>
-          </a:xfrm>
-          <a:prstGeom prst="rect">
-            <a:avLst/>
-          </a:prstGeom>
-          <a:noFill/>
-        </p:spPr>
-        <p:txBody>
-          <a:bodyPr wrap="square">
-            <a:spAutoFit/>
-          </a:bodyPr>
-          <a:lstStyle/>
-          <a:p>
-            <a:pPr algn="l"/>
-            <a:r>
-              <a:rPr sz="900" b="0" i="0">
-                <a:solidFill>
-                  <a:srgbClr val="1A1A1A"/>
-                </a:solidFill>
-              </a:rPr>
-              <a:t>✔ Grille écoute active + objections validée</a:t>
-            </a:r>
-          </a:p>
-        </p:txBody>
-      </p:sp>
-      <p:sp>
-        <p:nvSpPr>
-          <p:cNvPr id="30" name="Rectangle 29"/>
-          <p:cNvSpPr/>
-          <p:nvPr/>
-        </p:nvSpPr>
-        <p:spPr>
-          <a:xfrm>
-            <a:off x="4154423" y="5367528"/>
-            <a:ext cx="3843528" cy="502920"/>
-          </a:xfrm>
-          <a:prstGeom prst="rect">
-            <a:avLst/>
-          </a:prstGeom>
-          <a:solidFill>
-            <a:srgbClr val="FFFFFF"/>
-          </a:solidFill>
-          <a:ln w="10160">
-            <a:solidFill>
-              <a:srgbClr val="FF0000"/>
-            </a:solidFill>
-          </a:ln>
-        </p:spPr>
-        <p:style>
-          <a:lnRef idx="1">
-            <a:schemeClr val="accent1"/>
-          </a:lnRef>
-          <a:fillRef idx="3">
-            <a:schemeClr val="accent1"/>
-          </a:fillRef>
-          <a:effectRef idx="2">
-            <a:schemeClr val="accent1"/>
-          </a:effectRef>
-          <a:fontRef idx="minor">
-            <a:schemeClr val="lt1"/>
-          </a:fontRef>
-        </p:style>
-        <p:txBody>
-          <a:bodyPr rtlCol="0" anchor="ctr"/>
-          <a:lstStyle/>
-          <a:p>
-            <a:pPr algn="ctr"/>
-          </a:p>
-        </p:txBody>
-      </p:sp>
-      <p:sp>
-        <p:nvSpPr>
-          <p:cNvPr id="31" name="TextBox 30"/>
-          <p:cNvSpPr txBox="1"/>
-          <p:nvPr/>
-        </p:nvSpPr>
-        <p:spPr>
-          <a:xfrm>
-            <a:off x="4245863" y="5404104"/>
-            <a:ext cx="3715512" cy="420624"/>
-          </a:xfrm>
-          <a:prstGeom prst="rect">
-            <a:avLst/>
-          </a:prstGeom>
-          <a:noFill/>
-        </p:spPr>
-        <p:txBody>
-          <a:bodyPr wrap="square">
-            <a:spAutoFit/>
-          </a:bodyPr>
-          <a:lstStyle/>
-          <a:p>
-            <a:pPr algn="l"/>
-            <a:r>
-              <a:rPr sz="900" b="0" i="0">
-                <a:solidFill>
-                  <a:srgbClr val="1A1A1A"/>
-                </a:solidFill>
-              </a:rPr>
-              <a:t>✔ Réflexion dans votre livret : 'Quelle objection me challenge le plus ?'</a:t>
-            </a:r>
-          </a:p>
-        </p:txBody>
-      </p:sp>
-      <p:sp>
-        <p:nvSpPr>
-          <p:cNvPr id="32" name="Rectangle 31"/>
-          <p:cNvSpPr/>
-          <p:nvPr/>
-        </p:nvSpPr>
-        <p:spPr>
-          <a:xfrm>
-            <a:off x="8034527" y="5367528"/>
-            <a:ext cx="3843528" cy="502920"/>
-          </a:xfrm>
-          <a:prstGeom prst="rect">
-            <a:avLst/>
-          </a:prstGeom>
-          <a:solidFill>
-            <a:srgbClr val="FFFFFF"/>
-          </a:solidFill>
-          <a:ln w="10160">
-            <a:solidFill>
-              <a:srgbClr val="FF0000"/>
-            </a:solidFill>
-          </a:ln>
-        </p:spPr>
-        <p:style>
-          <a:lnRef idx="1">
-            <a:schemeClr val="accent1"/>
-          </a:lnRef>
-          <a:fillRef idx="3">
-            <a:schemeClr val="accent1"/>
-          </a:fillRef>
-          <a:effectRef idx="2">
-            <a:schemeClr val="accent1"/>
-          </a:effectRef>
-          <a:fontRef idx="minor">
-            <a:schemeClr val="lt1"/>
-          </a:fontRef>
-        </p:style>
-        <p:txBody>
-          <a:bodyPr rtlCol="0" anchor="ctr"/>
-          <a:lstStyle/>
-          <a:p>
-            <a:pPr algn="ctr"/>
-          </a:p>
-        </p:txBody>
-      </p:sp>
-      <p:sp>
-        <p:nvSpPr>
-          <p:cNvPr id="33" name="TextBox 32"/>
-          <p:cNvSpPr txBox="1"/>
-          <p:nvPr/>
-        </p:nvSpPr>
-        <p:spPr>
-          <a:xfrm>
-            <a:off x="8125967" y="5404104"/>
-            <a:ext cx="3715512" cy="420624"/>
-          </a:xfrm>
-          <a:prstGeom prst="rect">
-            <a:avLst/>
-          </a:prstGeom>
-          <a:noFill/>
-        </p:spPr>
-        <p:txBody>
-          <a:bodyPr wrap="square">
-            <a:spAutoFit/>
-          </a:bodyPr>
-          <a:lstStyle/>
-          <a:p>
-            <a:pPr algn="l"/>
-            <a:r>
-              <a:rPr sz="900" b="0" i="0">
-                <a:solidFill>
-                  <a:srgbClr val="1A1A1A"/>
-                </a:solidFill>
-              </a:rPr>
-              <a:t>✔ Score ≥ 14/20 pour validation J4</a:t>
+              <a:t>✔ Score seuil : 14/20 pour validation J4</a:t>
             </a:r>
           </a:p>
         </p:txBody>
@@ -4940,7 +4902,7 @@
         <p:spPr>
           <a:xfrm>
             <a:off x="0" y="0"/>
-            <a:ext cx="12188952" cy="658368"/>
+            <a:ext cx="12188952" cy="685800"/>
           </a:xfrm>
           <a:prstGeom prst="rect">
             <a:avLst/>
@@ -4982,14 +4944,14 @@
         </p:nvSpPr>
         <p:spPr>
           <a:xfrm>
-            <a:off x="0" y="640080"/>
-            <a:ext cx="12188952" cy="54864"/>
+            <a:off x="0" y="667512"/>
+            <a:ext cx="12188952" cy="45720"/>
           </a:xfrm>
           <a:prstGeom prst="rect">
             <a:avLst/>
           </a:prstGeom>
           <a:solidFill>
-            <a:srgbClr val="FF0000"/>
+            <a:srgbClr val="00AAAA"/>
           </a:solidFill>
           <a:ln>
             <a:noFill/>
@@ -5025,8 +4987,8 @@
         </p:nvSpPr>
         <p:spPr>
           <a:xfrm>
-            <a:off x="164592" y="64008"/>
-            <a:ext cx="685800" cy="530352"/>
+            <a:off x="164592" y="73152"/>
+            <a:ext cx="2011680" cy="347472"/>
           </a:xfrm>
           <a:prstGeom prst="rect">
             <a:avLst/>
@@ -5041,12 +5003,12 @@
           <a:p>
             <a:pPr algn="l"/>
             <a:r>
-              <a:rPr sz="2000" b="1" i="0">
+              <a:rPr sz="1400" b="1" i="0">
                 <a:solidFill>
                   <a:srgbClr val="FFFFFF"/>
                 </a:solidFill>
               </a:rPr>
-              <a:t>SHY</a:t>
+              <a:t>SHY-Performance</a:t>
             </a:r>
           </a:p>
         </p:txBody>
@@ -5059,14 +5021,14 @@
         </p:nvSpPr>
         <p:spPr>
           <a:xfrm>
-            <a:off x="914400" y="91440"/>
-            <a:ext cx="36576" cy="475488"/>
+            <a:off x="2286000" y="91440"/>
+            <a:ext cx="36576" cy="502920"/>
           </a:xfrm>
           <a:prstGeom prst="rect">
             <a:avLst/>
           </a:prstGeom>
           <a:solidFill>
-            <a:srgbClr val="FF0000"/>
+            <a:srgbClr val="00AAAA"/>
           </a:solidFill>
           <a:ln>
             <a:noFill/>
@@ -5102,8 +5064,8 @@
         </p:nvSpPr>
         <p:spPr>
           <a:xfrm>
-            <a:off x="1024128" y="91440"/>
-            <a:ext cx="10881360" cy="475488"/>
+            <a:off x="2423160" y="91440"/>
+            <a:ext cx="9235440" cy="502920"/>
           </a:xfrm>
           <a:prstGeom prst="rect">
             <a:avLst/>
@@ -5118,19 +5080,43 @@
           <a:p>
             <a:pPr algn="l"/>
             <a:r>
-              <a:rPr sz="1700" b="1" i="0">
+              <a:rPr sz="1600" b="1" i="0">
                 <a:solidFill>
                   <a:srgbClr val="FFFFFF"/>
                 </a:solidFill>
               </a:rPr>
-              <a:t>Répondre à une Objection — Votre Méthode en 4 Temps</a:t>
-            </a:r>
-          </a:p>
-        </p:txBody>
-      </p:sp>
-      <p:sp>
-        <p:nvSpPr>
-          <p:cNvPr id="8" name="Rectangle 7"/>
+              <a:t>Votre Méthode en 3 Temps — AAR</a:t>
+            </a:r>
+          </a:p>
+        </p:txBody>
+      </p:sp>
+      <p:pic>
+        <p:nvPicPr>
+          <p:cNvPr id="8" name="Picture 7" descr="shy_logo_v2.png"/>
+          <p:cNvPicPr>
+            <a:picLocks noChangeAspect="1"/>
+          </p:cNvPicPr>
+          <p:nvPr/>
+        </p:nvPicPr>
+        <p:blipFill>
+          <a:blip r:embed="rId2"/>
+          <a:stretch>
+            <a:fillRect/>
+          </a:stretch>
+        </p:blipFill>
+        <p:spPr>
+          <a:xfrm>
+            <a:off x="11247120" y="0"/>
+            <a:ext cx="822960" cy="676656"/>
+          </a:xfrm>
+          <a:prstGeom prst="rect">
+            <a:avLst/>
+          </a:prstGeom>
+        </p:spPr>
+      </p:pic>
+      <p:sp>
+        <p:nvSpPr>
+          <p:cNvPr id="9" name="Rectangle 8"/>
           <p:cNvSpPr/>
           <p:nvPr/>
         </p:nvSpPr>
@@ -5173,7 +5159,7 @@
       </p:sp>
       <p:sp>
         <p:nvSpPr>
-          <p:cNvPr id="9" name="TextBox 8"/>
+          <p:cNvPr id="10" name="TextBox 9"/>
           <p:cNvSpPr txBox="1"/>
           <p:nvPr/>
         </p:nvSpPr>
@@ -5195,26 +5181,26 @@
           <a:p>
             <a:pPr algn="ctr"/>
             <a:r>
-              <a:rPr sz="900" b="0" i="0">
+              <a:rPr sz="800" b="0" i="0">
                 <a:solidFill>
                   <a:srgbClr val="FFFFFF"/>
                 </a:solidFill>
               </a:rPr>
-              <a:t>SHY-Performance  ·  Formation FIM  ·  V6-01062026SHY-TE</a:t>
-            </a:r>
-          </a:p>
-        </p:txBody>
-      </p:sp>
-      <p:sp>
-        <p:nvSpPr>
-          <p:cNvPr id="10" name="Rectangle 9"/>
+              <a:t>SHY-Performance  ·  Formation FIM  ·  UNICEF France  ·  V6-01062026SHY-TE</a:t>
+            </a:r>
+          </a:p>
+        </p:txBody>
+      </p:sp>
+      <p:sp>
+        <p:nvSpPr>
+          <p:cNvPr id="11" name="Rectangle 10"/>
           <p:cNvSpPr/>
           <p:nvPr/>
         </p:nvSpPr>
         <p:spPr>
           <a:xfrm>
             <a:off x="274320" y="804672"/>
-            <a:ext cx="2816352" cy="640080"/>
+            <a:ext cx="3813048" cy="640080"/>
           </a:xfrm>
           <a:prstGeom prst="rect">
             <a:avLst/>
@@ -5250,14 +5236,14 @@
       </p:sp>
       <p:sp>
         <p:nvSpPr>
-          <p:cNvPr id="11" name="TextBox 10"/>
+          <p:cNvPr id="12" name="TextBox 11"/>
           <p:cNvSpPr txBox="1"/>
           <p:nvPr/>
         </p:nvSpPr>
         <p:spPr>
           <a:xfrm>
-            <a:off x="384048" y="841248"/>
-            <a:ext cx="2596896" cy="566928"/>
+            <a:off x="402336" y="822960"/>
+            <a:ext cx="3611879" cy="603504"/>
           </a:xfrm>
           <a:prstGeom prst="rect">
             <a:avLst/>
@@ -5272,27 +5258,28 @@
           <a:p>
             <a:pPr algn="ctr"/>
             <a:r>
-              <a:rPr sz="1200" b="1" i="0">
+              <a:rPr sz="1600" b="1" i="0">
                 <a:solidFill>
                   <a:srgbClr val="FFFFFF"/>
                 </a:solidFill>
               </a:rPr>
-              <a:t>1
-ACCUSEZ RÉCEPTION</a:t>
-            </a:r>
-          </a:p>
-        </p:txBody>
-      </p:sp>
-      <p:sp>
-        <p:nvSpPr>
-          <p:cNvPr id="12" name="Rectangle 11"/>
+              <a:t>A
+ACCUSER
+RÉCEPTION</a:t>
+            </a:r>
+          </a:p>
+        </p:txBody>
+      </p:sp>
+      <p:sp>
+        <p:nvSpPr>
+          <p:cNvPr id="13" name="Rectangle 12"/>
           <p:cNvSpPr/>
           <p:nvPr/>
         </p:nvSpPr>
         <p:spPr>
           <a:xfrm>
             <a:off x="274320" y="1444752"/>
-            <a:ext cx="2816352" cy="3383280"/>
+            <a:ext cx="3813048" cy="4251960"/>
           </a:xfrm>
           <a:prstGeom prst="rect">
             <a:avLst/>
@@ -5300,7 +5287,7 @@
           <a:solidFill>
             <a:srgbClr val="FFFFFF"/>
           </a:solidFill>
-          <a:ln w="19050">
+          <a:ln w="22860">
             <a:solidFill>
               <a:srgbClr val="005555"/>
             </a:solidFill>
@@ -5330,14 +5317,14 @@
       </p:sp>
       <p:sp>
         <p:nvSpPr>
-          <p:cNvPr id="13" name="TextBox 12"/>
+          <p:cNvPr id="14" name="TextBox 13"/>
           <p:cNvSpPr txBox="1"/>
           <p:nvPr/>
         </p:nvSpPr>
         <p:spPr>
           <a:xfrm>
-            <a:off x="402336" y="1517904"/>
-            <a:ext cx="2560320" cy="3200400"/>
+            <a:off x="420623" y="1517904"/>
+            <a:ext cx="3557015" cy="4069080"/>
           </a:xfrm>
           <a:prstGeom prst="rect">
             <a:avLst/>
@@ -5357,25 +5344,30 @@
                   <a:srgbClr val="1A1A1A"/>
                 </a:solidFill>
               </a:rPr>
-              <a:t>Ne justifiez pas immédiatement.
-Montrez que vous avez entendu.
-'Je comprends tout à fait…'
-'C'est une question que beaucoup
-de personnes se posent…'</a:t>
-            </a:r>
-          </a:p>
-        </p:txBody>
-      </p:sp>
-      <p:sp>
-        <p:nvSpPr>
-          <p:cNvPr id="14" name="Rectangle 13"/>
+              <a:t>Montrez que vous avez entendu.
+Ne justifiez pas immédiatement.
+Ne contre-attaquez pas.
+Exemples :
+'Je comprends tout à fait votre réserve…'
+'C'est une question que beaucoup de personnes
+se posent et c'est tout à fait légitime…'
+'Je vous entends…'
+⚠ Ce que vous ne faites pas :
+'Oui mais…' ou 'Non, vous avez tort…'</a:t>
+            </a:r>
+          </a:p>
+        </p:txBody>
+      </p:sp>
+      <p:sp>
+        <p:nvSpPr>
+          <p:cNvPr id="15" name="Rectangle 14"/>
           <p:cNvSpPr/>
           <p:nvPr/>
         </p:nvSpPr>
         <p:spPr>
           <a:xfrm>
-            <a:off x="3200400" y="804672"/>
-            <a:ext cx="2816352" cy="640080"/>
+            <a:off x="4224528" y="804672"/>
+            <a:ext cx="3813048" cy="640080"/>
           </a:xfrm>
           <a:prstGeom prst="rect">
             <a:avLst/>
@@ -5411,14 +5403,14 @@
       </p:sp>
       <p:sp>
         <p:nvSpPr>
-          <p:cNvPr id="15" name="TextBox 14"/>
+          <p:cNvPr id="16" name="TextBox 15"/>
           <p:cNvSpPr txBox="1"/>
           <p:nvPr/>
         </p:nvSpPr>
         <p:spPr>
           <a:xfrm>
-            <a:off x="3310128" y="841248"/>
-            <a:ext cx="2596896" cy="566928"/>
+            <a:off x="4352544" y="822960"/>
+            <a:ext cx="3611879" cy="603504"/>
           </a:xfrm>
           <a:prstGeom prst="rect">
             <a:avLst/>
@@ -5433,27 +5425,27 @@
           <a:p>
             <a:pPr algn="ctr"/>
             <a:r>
-              <a:rPr sz="1200" b="1" i="0">
+              <a:rPr sz="1600" b="1" i="0">
                 <a:solidFill>
                   <a:srgbClr val="FFFFFF"/>
                 </a:solidFill>
               </a:rPr>
-              <a:t>2
-REFORMULEZ</a:t>
-            </a:r>
-          </a:p>
-        </p:txBody>
-      </p:sp>
-      <p:sp>
-        <p:nvSpPr>
-          <p:cNvPr id="16" name="Rectangle 15"/>
+              <a:t>A
+ARGUMENTER</a:t>
+            </a:r>
+          </a:p>
+        </p:txBody>
+      </p:sp>
+      <p:sp>
+        <p:nvSpPr>
+          <p:cNvPr id="17" name="Rectangle 16"/>
           <p:cNvSpPr/>
           <p:nvPr/>
         </p:nvSpPr>
         <p:spPr>
           <a:xfrm>
-            <a:off x="3200400" y="1444752"/>
-            <a:ext cx="2816352" cy="3383280"/>
+            <a:off x="4224528" y="1444752"/>
+            <a:ext cx="3813048" cy="4251960"/>
           </a:xfrm>
           <a:prstGeom prst="rect">
             <a:avLst/>
@@ -5461,7 +5453,7 @@
           <a:solidFill>
             <a:srgbClr val="FFFFFF"/>
           </a:solidFill>
-          <a:ln w="19050">
+          <a:ln w="22860">
             <a:solidFill>
               <a:srgbClr val="008080"/>
             </a:solidFill>
@@ -5491,14 +5483,14 @@
       </p:sp>
       <p:sp>
         <p:nvSpPr>
-          <p:cNvPr id="17" name="TextBox 16"/>
+          <p:cNvPr id="18" name="TextBox 17"/>
           <p:cNvSpPr txBox="1"/>
           <p:nvPr/>
         </p:nvSpPr>
         <p:spPr>
           <a:xfrm>
-            <a:off x="3328416" y="1517904"/>
-            <a:ext cx="2560320" cy="3200400"/>
+            <a:off x="4370832" y="1517904"/>
+            <a:ext cx="3557015" cy="4069080"/>
           </a:xfrm>
           <a:prstGeom prst="rect">
             <a:avLst/>
@@ -5518,31 +5510,36 @@
                   <a:srgbClr val="1A1A1A"/>
                 </a:solidFill>
               </a:rPr>
-              <a:t>Assurez-vous d'avoir compris
-le vrai frein, pas la surface.
-'Si je comprends bien, vous voulez
-dire que… c'est bien ça ?'
-'Ce qui vous préoccupe c'est…'</a:t>
-            </a:r>
-          </a:p>
-        </p:txBody>
-      </p:sp>
-      <p:sp>
-        <p:nvSpPr>
-          <p:cNvPr id="18" name="Rectangle 17"/>
+              <a:t>1 argument précis + 1 preuve concrète
++ 1 chiffre si possible.
+Règles d'or :
+→ 1 seul argument par réponse (pas de liste)
+→ Preuve vérifiable (rapport annuel, audit)
+→ Chiffre simple et mémorisable
+Exemple objection financière :
+'10€/mois c'est 33 centimes par jour — moins
+qu'un café. Et cela traite 1 enfant sévèrement
+malnutri en 6 semaines.'</a:t>
+            </a:r>
+          </a:p>
+        </p:txBody>
+      </p:sp>
+      <p:sp>
+        <p:nvSpPr>
+          <p:cNvPr id="19" name="Rectangle 18"/>
           <p:cNvSpPr/>
           <p:nvPr/>
         </p:nvSpPr>
         <p:spPr>
           <a:xfrm>
-            <a:off x="6126480" y="804672"/>
-            <a:ext cx="2816352" cy="640080"/>
+            <a:off x="8174736" y="804672"/>
+            <a:ext cx="3813048" cy="640080"/>
           </a:xfrm>
           <a:prstGeom prst="rect">
             <a:avLst/>
           </a:prstGeom>
           <a:solidFill>
-            <a:srgbClr val="2A7A50"/>
+            <a:srgbClr val="006A6A"/>
           </a:solidFill>
           <a:ln>
             <a:noFill/>
@@ -5572,14 +5569,14 @@
       </p:sp>
       <p:sp>
         <p:nvSpPr>
-          <p:cNvPr id="19" name="TextBox 18"/>
+          <p:cNvPr id="20" name="TextBox 19"/>
           <p:cNvSpPr txBox="1"/>
           <p:nvPr/>
         </p:nvSpPr>
         <p:spPr>
           <a:xfrm>
-            <a:off x="6236208" y="841248"/>
-            <a:ext cx="2596896" cy="566928"/>
+            <a:off x="8302752" y="822960"/>
+            <a:ext cx="3611879" cy="603504"/>
           </a:xfrm>
           <a:prstGeom prst="rect">
             <a:avLst/>
@@ -5594,27 +5591,27 @@
           <a:p>
             <a:pPr algn="ctr"/>
             <a:r>
-              <a:rPr sz="1200" b="1" i="0">
+              <a:rPr sz="1600" b="1" i="0">
                 <a:solidFill>
                   <a:srgbClr val="FFFFFF"/>
                 </a:solidFill>
               </a:rPr>
-              <a:t>3
-RÉPONDEZ AVEC PREUVE</a:t>
-            </a:r>
-          </a:p>
-        </p:txBody>
-      </p:sp>
-      <p:sp>
-        <p:nvSpPr>
-          <p:cNvPr id="20" name="Rectangle 19"/>
+              <a:t>R
+RELANCER</a:t>
+            </a:r>
+          </a:p>
+        </p:txBody>
+      </p:sp>
+      <p:sp>
+        <p:nvSpPr>
+          <p:cNvPr id="21" name="Rectangle 20"/>
           <p:cNvSpPr/>
           <p:nvPr/>
         </p:nvSpPr>
         <p:spPr>
           <a:xfrm>
-            <a:off x="6126480" y="1444752"/>
-            <a:ext cx="2816352" cy="3383280"/>
+            <a:off x="8174736" y="1444752"/>
+            <a:ext cx="3813048" cy="4251960"/>
           </a:xfrm>
           <a:prstGeom prst="rect">
             <a:avLst/>
@@ -5622,9 +5619,9 @@
           <a:solidFill>
             <a:srgbClr val="FFFFFF"/>
           </a:solidFill>
-          <a:ln w="19050">
+          <a:ln w="22860">
             <a:solidFill>
-              <a:srgbClr val="2A7A50"/>
+              <a:srgbClr val="006A6A"/>
             </a:solidFill>
           </a:ln>
         </p:spPr>
@@ -5652,14 +5649,14 @@
       </p:sp>
       <p:sp>
         <p:nvSpPr>
-          <p:cNvPr id="21" name="TextBox 20"/>
+          <p:cNvPr id="22" name="TextBox 21"/>
           <p:cNvSpPr txBox="1"/>
           <p:nvPr/>
         </p:nvSpPr>
         <p:spPr>
           <a:xfrm>
-            <a:off x="6254496" y="1517904"/>
-            <a:ext cx="2560320" cy="3200400"/>
+            <a:off x="8321040" y="1517904"/>
+            <a:ext cx="3557015" cy="4069080"/>
           </a:xfrm>
           <a:prstGeom prst="rect">
             <a:avLst/>
@@ -5679,31 +5676,36 @@
                   <a:srgbClr val="1A1A1A"/>
                 </a:solidFill>
               </a:rPr>
-              <a:t>1 preuve concrète +
-1 chiffre + 1 exemple réel.
-Rapport annuel UNICEF public.
-Audit Comité de la Charte.
-Témoignage donateur.</a:t>
-            </a:r>
-          </a:p>
-        </p:txBody>
-      </p:sp>
-      <p:sp>
-        <p:nvSpPr>
-          <p:cNvPr id="22" name="Rectangle 21"/>
+              <a:t>Revenez à la proposition avec naturel.
+Pas de pression. Pas d'insistance agressive.
+Exemples :
+'Est-ce que cela répond à votre question ?'
+'On peut aller plus loin ensemble ?'
+'Qu'est-ce qui vous permettrait de vous sentir
+à l'aise avec cet engagement ?'
+⚠ Ce que vous ne faites pas :
+Relancer avant que le prospect ait eu
+le temps de traiter votre réponse.</a:t>
+            </a:r>
+          </a:p>
+        </p:txBody>
+      </p:sp>
+      <p:sp>
+        <p:nvSpPr>
+          <p:cNvPr id="23" name="Rectangle 22"/>
           <p:cNvSpPr/>
           <p:nvPr/>
         </p:nvSpPr>
         <p:spPr>
           <a:xfrm>
-            <a:off x="9052560" y="804672"/>
-            <a:ext cx="2816352" cy="640080"/>
+            <a:off x="274320" y="5806440"/>
+            <a:ext cx="11640312" cy="402336"/>
           </a:xfrm>
           <a:prstGeom prst="rect">
             <a:avLst/>
           </a:prstGeom>
           <a:solidFill>
-            <a:srgbClr val="FF0000"/>
+            <a:srgbClr val="008080"/>
           </a:solidFill>
           <a:ln>
             <a:noFill/>
@@ -5733,174 +5735,13 @@
       </p:sp>
       <p:sp>
         <p:nvSpPr>
-          <p:cNvPr id="23" name="TextBox 22"/>
+          <p:cNvPr id="24" name="TextBox 23"/>
           <p:cNvSpPr txBox="1"/>
           <p:nvPr/>
         </p:nvSpPr>
         <p:spPr>
           <a:xfrm>
-            <a:off x="9162288" y="841248"/>
-            <a:ext cx="2596896" cy="566928"/>
-          </a:xfrm>
-          <a:prstGeom prst="rect">
-            <a:avLst/>
-          </a:prstGeom>
-          <a:noFill/>
-        </p:spPr>
-        <p:txBody>
-          <a:bodyPr wrap="square">
-            <a:spAutoFit/>
-          </a:bodyPr>
-          <a:lstStyle/>
-          <a:p>
-            <a:pPr algn="ctr"/>
-            <a:r>
-              <a:rPr sz="1200" b="1" i="0">
-                <a:solidFill>
-                  <a:srgbClr val="FFFFFF"/>
-                </a:solidFill>
-              </a:rPr>
-              <a:t>4
-RELANCEZ</a:t>
-            </a:r>
-          </a:p>
-        </p:txBody>
-      </p:sp>
-      <p:sp>
-        <p:nvSpPr>
-          <p:cNvPr id="24" name="Rectangle 23"/>
-          <p:cNvSpPr/>
-          <p:nvPr/>
-        </p:nvSpPr>
-        <p:spPr>
-          <a:xfrm>
-            <a:off x="9052560" y="1444752"/>
-            <a:ext cx="2816352" cy="3383280"/>
-          </a:xfrm>
-          <a:prstGeom prst="rect">
-            <a:avLst/>
-          </a:prstGeom>
-          <a:solidFill>
-            <a:srgbClr val="FFFFFF"/>
-          </a:solidFill>
-          <a:ln w="19050">
-            <a:solidFill>
-              <a:srgbClr val="FF0000"/>
-            </a:solidFill>
-          </a:ln>
-        </p:spPr>
-        <p:style>
-          <a:lnRef idx="1">
-            <a:schemeClr val="accent1"/>
-          </a:lnRef>
-          <a:fillRef idx="3">
-            <a:schemeClr val="accent1"/>
-          </a:fillRef>
-          <a:effectRef idx="2">
-            <a:schemeClr val="accent1"/>
-          </a:effectRef>
-          <a:fontRef idx="minor">
-            <a:schemeClr val="lt1"/>
-          </a:fontRef>
-        </p:style>
-        <p:txBody>
-          <a:bodyPr rtlCol="0" anchor="ctr"/>
-          <a:lstStyle/>
-          <a:p>
-            <a:pPr algn="ctr"/>
-          </a:p>
-        </p:txBody>
-      </p:sp>
-      <p:sp>
-        <p:nvSpPr>
-          <p:cNvPr id="25" name="TextBox 24"/>
-          <p:cNvSpPr txBox="1"/>
-          <p:nvPr/>
-        </p:nvSpPr>
-        <p:spPr>
-          <a:xfrm>
-            <a:off x="9180576" y="1517904"/>
-            <a:ext cx="2560320" cy="3200400"/>
-          </a:xfrm>
-          <a:prstGeom prst="rect">
-            <a:avLst/>
-          </a:prstGeom>
-          <a:noFill/>
-        </p:spPr>
-        <p:txBody>
-          <a:bodyPr wrap="square">
-            <a:spAutoFit/>
-          </a:bodyPr>
-          <a:lstStyle/>
-          <a:p>
-            <a:pPr algn="l"/>
-            <a:r>
-              <a:rPr sz="1000" b="0" i="0">
-                <a:solidFill>
-                  <a:srgbClr val="1A1A1A"/>
-                </a:solidFill>
-              </a:rPr>
-              <a:t>Revenez à la proposition
-avec naturel. Pas de pression.
-'Est-ce que cela répond à
-votre question ?
-On peut aller plus loin ?'</a:t>
-            </a:r>
-          </a:p>
-        </p:txBody>
-      </p:sp>
-      <p:sp>
-        <p:nvSpPr>
-          <p:cNvPr id="26" name="Rectangle 25"/>
-          <p:cNvSpPr/>
-          <p:nvPr/>
-        </p:nvSpPr>
-        <p:spPr>
-          <a:xfrm>
-            <a:off x="274320" y="4983480"/>
-            <a:ext cx="11640312" cy="402336"/>
-          </a:xfrm>
-          <a:prstGeom prst="rect">
-            <a:avLst/>
-          </a:prstGeom>
-          <a:solidFill>
-            <a:srgbClr val="005555"/>
-          </a:solidFill>
-          <a:ln>
-            <a:noFill/>
-          </a:ln>
-        </p:spPr>
-        <p:style>
-          <a:lnRef idx="1">
-            <a:schemeClr val="accent1"/>
-          </a:lnRef>
-          <a:fillRef idx="3">
-            <a:schemeClr val="accent1"/>
-          </a:fillRef>
-          <a:effectRef idx="2">
-            <a:schemeClr val="accent1"/>
-          </a:effectRef>
-          <a:fontRef idx="minor">
-            <a:schemeClr val="lt1"/>
-          </a:fontRef>
-        </p:style>
-        <p:txBody>
-          <a:bodyPr rtlCol="0" anchor="ctr"/>
-          <a:lstStyle/>
-          <a:p>
-            <a:pPr algn="ctr"/>
-          </a:p>
-        </p:txBody>
-      </p:sp>
-      <p:sp>
-        <p:nvSpPr>
-          <p:cNvPr id="27" name="TextBox 26"/>
-          <p:cNvSpPr txBox="1"/>
-          <p:nvPr/>
-        </p:nvSpPr>
-        <p:spPr>
-          <a:xfrm>
-            <a:off x="411479" y="5056632"/>
+            <a:off x="411479" y="5879592"/>
             <a:ext cx="11365992" cy="256032"/>
           </a:xfrm>
           <a:prstGeom prst="rect">
@@ -5921,7 +5762,7 @@
                   <a:srgbClr val="FFFFFF"/>
                 </a:solidFill>
               </a:rPr>
-              <a:t>Le silence après votre réponse est normal. Laissez le donateur traiter l'information. Comptez 3 secondes avant de relancer.</a:t>
+              <a:t>Le silence après votre argument est votre allié. Comptez mentalement 1–2–3 avant de relancer. Ce silence donne au prospect le temps de traiter — et souvent de se convaincre lui-même.</a:t>
             </a:r>
           </a:p>
         </p:txBody>
@@ -5996,7 +5837,7 @@
         <p:spPr>
           <a:xfrm>
             <a:off x="0" y="0"/>
-            <a:ext cx="12188952" cy="658368"/>
+            <a:ext cx="12188952" cy="685800"/>
           </a:xfrm>
           <a:prstGeom prst="rect">
             <a:avLst/>
@@ -6038,14 +5879,14 @@
         </p:nvSpPr>
         <p:spPr>
           <a:xfrm>
-            <a:off x="0" y="640080"/>
-            <a:ext cx="12188952" cy="54864"/>
+            <a:off x="0" y="667512"/>
+            <a:ext cx="12188952" cy="45720"/>
           </a:xfrm>
           <a:prstGeom prst="rect">
             <a:avLst/>
           </a:prstGeom>
           <a:solidFill>
-            <a:srgbClr val="FF0000"/>
+            <a:srgbClr val="00AAAA"/>
           </a:solidFill>
           <a:ln>
             <a:noFill/>
@@ -6081,8 +5922,8 @@
         </p:nvSpPr>
         <p:spPr>
           <a:xfrm>
-            <a:off x="164592" y="64008"/>
-            <a:ext cx="685800" cy="530352"/>
+            <a:off x="164592" y="73152"/>
+            <a:ext cx="2011680" cy="347472"/>
           </a:xfrm>
           <a:prstGeom prst="rect">
             <a:avLst/>
@@ -6097,12 +5938,12 @@
           <a:p>
             <a:pPr algn="l"/>
             <a:r>
-              <a:rPr sz="2000" b="1" i="0">
+              <a:rPr sz="1400" b="1" i="0">
                 <a:solidFill>
                   <a:srgbClr val="FFFFFF"/>
                 </a:solidFill>
               </a:rPr>
-              <a:t>SHY</a:t>
+              <a:t>SHY-Performance</a:t>
             </a:r>
           </a:p>
         </p:txBody>
@@ -6115,14 +5956,14 @@
         </p:nvSpPr>
         <p:spPr>
           <a:xfrm>
-            <a:off x="914400" y="91440"/>
-            <a:ext cx="36576" cy="475488"/>
+            <a:off x="2286000" y="91440"/>
+            <a:ext cx="36576" cy="502920"/>
           </a:xfrm>
           <a:prstGeom prst="rect">
             <a:avLst/>
           </a:prstGeom>
           <a:solidFill>
-            <a:srgbClr val="FF0000"/>
+            <a:srgbClr val="00AAAA"/>
           </a:solidFill>
           <a:ln>
             <a:noFill/>
@@ -6158,8 +5999,8 @@
         </p:nvSpPr>
         <p:spPr>
           <a:xfrm>
-            <a:off x="1024128" y="91440"/>
-            <a:ext cx="10881360" cy="475488"/>
+            <a:off x="2423160" y="91440"/>
+            <a:ext cx="9235440" cy="502920"/>
           </a:xfrm>
           <a:prstGeom prst="rect">
             <a:avLst/>
@@ -6174,19 +6015,43 @@
           <a:p>
             <a:pPr algn="l"/>
             <a:r>
-              <a:rPr sz="1700" b="1" i="0">
+              <a:rPr sz="1600" b="1" i="0">
                 <a:solidFill>
                   <a:srgbClr val="FFFFFF"/>
                 </a:solidFill>
               </a:rPr>
-              <a:t>Les 12 Objections Types — Vos Réponses Prêtes à l'Emploi</a:t>
-            </a:r>
-          </a:p>
-        </p:txBody>
-      </p:sp>
-      <p:sp>
-        <p:nvSpPr>
-          <p:cNvPr id="8" name="Rectangle 7"/>
+              <a:t>Les 5 Catégories d'Objections — 15 Situations à Maîtriser</a:t>
+            </a:r>
+          </a:p>
+        </p:txBody>
+      </p:sp>
+      <p:pic>
+        <p:nvPicPr>
+          <p:cNvPr id="8" name="Picture 7" descr="shy_logo_v2.png"/>
+          <p:cNvPicPr>
+            <a:picLocks noChangeAspect="1"/>
+          </p:cNvPicPr>
+          <p:nvPr/>
+        </p:nvPicPr>
+        <p:blipFill>
+          <a:blip r:embed="rId2"/>
+          <a:stretch>
+            <a:fillRect/>
+          </a:stretch>
+        </p:blipFill>
+        <p:spPr>
+          <a:xfrm>
+            <a:off x="11247120" y="0"/>
+            <a:ext cx="822960" cy="676656"/>
+          </a:xfrm>
+          <a:prstGeom prst="rect">
+            <a:avLst/>
+          </a:prstGeom>
+        </p:spPr>
+      </p:pic>
+      <p:sp>
+        <p:nvSpPr>
+          <p:cNvPr id="9" name="Rectangle 8"/>
           <p:cNvSpPr/>
           <p:nvPr/>
         </p:nvSpPr>
@@ -6229,7 +6094,7 @@
       </p:sp>
       <p:sp>
         <p:nvSpPr>
-          <p:cNvPr id="9" name="TextBox 8"/>
+          <p:cNvPr id="10" name="TextBox 9"/>
           <p:cNvSpPr txBox="1"/>
           <p:nvPr/>
         </p:nvSpPr>
@@ -6251,26 +6116,26 @@
           <a:p>
             <a:pPr algn="ctr"/>
             <a:r>
-              <a:rPr sz="900" b="0" i="0">
+              <a:rPr sz="800" b="0" i="0">
                 <a:solidFill>
                   <a:srgbClr val="FFFFFF"/>
                 </a:solidFill>
               </a:rPr>
-              <a:t>SHY-Performance  ·  Formation FIM  ·  V6-01062026SHY-TE</a:t>
-            </a:r>
-          </a:p>
-        </p:txBody>
-      </p:sp>
-      <p:sp>
-        <p:nvSpPr>
-          <p:cNvPr id="10" name="Rectangle 9"/>
+              <a:t>SHY-Performance  ·  Formation FIM  ·  UNICEF France  ·  V6-01062026SHY-TE</a:t>
+            </a:r>
+          </a:p>
+        </p:txBody>
+      </p:sp>
+      <p:sp>
+        <p:nvSpPr>
+          <p:cNvPr id="11" name="Rectangle 10"/>
           <p:cNvSpPr/>
           <p:nvPr/>
         </p:nvSpPr>
         <p:spPr>
           <a:xfrm>
             <a:off x="274320" y="804672"/>
-            <a:ext cx="384048" cy="274320"/>
+            <a:ext cx="2328062" cy="502920"/>
           </a:xfrm>
           <a:prstGeom prst="rect">
             <a:avLst/>
@@ -6306,14 +6171,14 @@
       </p:sp>
       <p:sp>
         <p:nvSpPr>
-          <p:cNvPr id="11" name="TextBox 10"/>
+          <p:cNvPr id="12" name="TextBox 11"/>
           <p:cNvSpPr txBox="1"/>
           <p:nvPr/>
         </p:nvSpPr>
         <p:spPr>
           <a:xfrm>
-            <a:off x="329184" y="841248"/>
-            <a:ext cx="292607" cy="219456"/>
+            <a:off x="365760" y="822960"/>
+            <a:ext cx="2181758" cy="466344"/>
           </a:xfrm>
           <a:prstGeom prst="rect">
             <a:avLst/>
@@ -6326,37 +6191,40 @@
           </a:bodyPr>
           <a:lstStyle/>
           <a:p>
-            <a:pPr algn="l"/>
-            <a:r>
-              <a:rPr sz="900" b="1" i="0">
+            <a:pPr algn="ctr"/>
+            <a:r>
+              <a:rPr sz="800" b="1" i="0">
                 <a:solidFill>
                   <a:srgbClr val="FFFFFF"/>
                 </a:solidFill>
               </a:rPr>
-              <a:t>#</a:t>
-            </a:r>
-          </a:p>
-        </p:txBody>
-      </p:sp>
-      <p:sp>
-        <p:nvSpPr>
-          <p:cNvPr id="12" name="Rectangle 11"/>
+              <a:t>CAT. 1
+OBJECTIONS INITIALES</a:t>
+            </a:r>
+          </a:p>
+        </p:txBody>
+      </p:sp>
+      <p:sp>
+        <p:nvSpPr>
+          <p:cNvPr id="13" name="Rectangle 12"/>
           <p:cNvSpPr/>
           <p:nvPr/>
         </p:nvSpPr>
         <p:spPr>
           <a:xfrm>
-            <a:off x="685800" y="804672"/>
-            <a:ext cx="4334256" cy="274320"/>
+            <a:off x="274320" y="1307592"/>
+            <a:ext cx="2328062" cy="4370832"/>
           </a:xfrm>
           <a:prstGeom prst="rect">
             <a:avLst/>
           </a:prstGeom>
           <a:solidFill>
-            <a:srgbClr val="005555"/>
+            <a:srgbClr val="FFFFFF"/>
           </a:solidFill>
-          <a:ln>
-            <a:noFill/>
+          <a:ln w="15240">
+            <a:solidFill>
+              <a:srgbClr val="005555"/>
+            </a:solidFill>
           </a:ln>
         </p:spPr>
         <p:style>
@@ -6383,322 +6251,14 @@
       </p:sp>
       <p:sp>
         <p:nvSpPr>
-          <p:cNvPr id="13" name="TextBox 12"/>
+          <p:cNvPr id="14" name="TextBox 13"/>
           <p:cNvSpPr txBox="1"/>
           <p:nvPr/>
         </p:nvSpPr>
         <p:spPr>
           <a:xfrm>
-            <a:off x="740664" y="841248"/>
-            <a:ext cx="4242816" cy="219456"/>
-          </a:xfrm>
-          <a:prstGeom prst="rect">
-            <a:avLst/>
-          </a:prstGeom>
-          <a:noFill/>
-        </p:spPr>
-        <p:txBody>
-          <a:bodyPr wrap="square">
-            <a:spAutoFit/>
-          </a:bodyPr>
-          <a:lstStyle/>
-          <a:p>
-            <a:pPr algn="l"/>
-            <a:r>
-              <a:rPr sz="900" b="1" i="0">
-                <a:solidFill>
-                  <a:srgbClr val="FFFFFF"/>
-                </a:solidFill>
-              </a:rPr>
-              <a:t>L'objection que vous entendez</a:t>
-            </a:r>
-          </a:p>
-        </p:txBody>
-      </p:sp>
-      <p:sp>
-        <p:nvSpPr>
-          <p:cNvPr id="14" name="Rectangle 13"/>
-          <p:cNvSpPr/>
-          <p:nvPr/>
-        </p:nvSpPr>
-        <p:spPr>
-          <a:xfrm>
-            <a:off x="5047488" y="804672"/>
-            <a:ext cx="1618488" cy="274320"/>
-          </a:xfrm>
-          <a:prstGeom prst="rect">
-            <a:avLst/>
-          </a:prstGeom>
-          <a:solidFill>
-            <a:srgbClr val="005555"/>
-          </a:solidFill>
-          <a:ln>
-            <a:noFill/>
-          </a:ln>
-        </p:spPr>
-        <p:style>
-          <a:lnRef idx="1">
-            <a:schemeClr val="accent1"/>
-          </a:lnRef>
-          <a:fillRef idx="3">
-            <a:schemeClr val="accent1"/>
-          </a:fillRef>
-          <a:effectRef idx="2">
-            <a:schemeClr val="accent1"/>
-          </a:effectRef>
-          <a:fontRef idx="minor">
-            <a:schemeClr val="lt1"/>
-          </a:fontRef>
-        </p:style>
-        <p:txBody>
-          <a:bodyPr rtlCol="0" anchor="ctr"/>
-          <a:lstStyle/>
-          <a:p>
-            <a:pPr algn="ctr"/>
-          </a:p>
-        </p:txBody>
-      </p:sp>
-      <p:sp>
-        <p:nvSpPr>
-          <p:cNvPr id="15" name="TextBox 14"/>
-          <p:cNvSpPr txBox="1"/>
-          <p:nvPr/>
-        </p:nvSpPr>
-        <p:spPr>
-          <a:xfrm>
-            <a:off x="5102351" y="841248"/>
-            <a:ext cx="1527048" cy="219456"/>
-          </a:xfrm>
-          <a:prstGeom prst="rect">
-            <a:avLst/>
-          </a:prstGeom>
-          <a:noFill/>
-        </p:spPr>
-        <p:txBody>
-          <a:bodyPr wrap="square">
-            <a:spAutoFit/>
-          </a:bodyPr>
-          <a:lstStyle/>
-          <a:p>
-            <a:pPr algn="l"/>
-            <a:r>
-              <a:rPr sz="900" b="1" i="0">
-                <a:solidFill>
-                  <a:srgbClr val="FFFFFF"/>
-                </a:solidFill>
-              </a:rPr>
-              <a:t>Type</a:t>
-            </a:r>
-          </a:p>
-        </p:txBody>
-      </p:sp>
-      <p:sp>
-        <p:nvSpPr>
-          <p:cNvPr id="16" name="Rectangle 15"/>
-          <p:cNvSpPr/>
-          <p:nvPr/>
-        </p:nvSpPr>
-        <p:spPr>
-          <a:xfrm>
-            <a:off x="6693408" y="804672"/>
-            <a:ext cx="5340096" cy="274320"/>
-          </a:xfrm>
-          <a:prstGeom prst="rect">
-            <a:avLst/>
-          </a:prstGeom>
-          <a:solidFill>
-            <a:srgbClr val="005555"/>
-          </a:solidFill>
-          <a:ln>
-            <a:noFill/>
-          </a:ln>
-        </p:spPr>
-        <p:style>
-          <a:lnRef idx="1">
-            <a:schemeClr val="accent1"/>
-          </a:lnRef>
-          <a:fillRef idx="3">
-            <a:schemeClr val="accent1"/>
-          </a:fillRef>
-          <a:effectRef idx="2">
-            <a:schemeClr val="accent1"/>
-          </a:effectRef>
-          <a:fontRef idx="minor">
-            <a:schemeClr val="lt1"/>
-          </a:fontRef>
-        </p:style>
-        <p:txBody>
-          <a:bodyPr rtlCol="0" anchor="ctr"/>
-          <a:lstStyle/>
-          <a:p>
-            <a:pPr algn="ctr"/>
-          </a:p>
-        </p:txBody>
-      </p:sp>
-      <p:sp>
-        <p:nvSpPr>
-          <p:cNvPr id="17" name="TextBox 16"/>
-          <p:cNvSpPr txBox="1"/>
-          <p:nvPr/>
-        </p:nvSpPr>
-        <p:spPr>
-          <a:xfrm>
-            <a:off x="6748272" y="841248"/>
-            <a:ext cx="5248656" cy="219456"/>
-          </a:xfrm>
-          <a:prstGeom prst="rect">
-            <a:avLst/>
-          </a:prstGeom>
-          <a:noFill/>
-        </p:spPr>
-        <p:txBody>
-          <a:bodyPr wrap="square">
-            <a:spAutoFit/>
-          </a:bodyPr>
-          <a:lstStyle/>
-          <a:p>
-            <a:pPr algn="l"/>
-            <a:r>
-              <a:rPr sz="900" b="1" i="0">
-                <a:solidFill>
-                  <a:srgbClr val="FFFFFF"/>
-                </a:solidFill>
-              </a:rPr>
-              <a:t>Ce que vous répondez</a:t>
-            </a:r>
-          </a:p>
-        </p:txBody>
-      </p:sp>
-      <p:sp>
-        <p:nvSpPr>
-          <p:cNvPr id="18" name="Rectangle 17"/>
-          <p:cNvSpPr/>
-          <p:nvPr/>
-        </p:nvSpPr>
-        <p:spPr>
-          <a:xfrm>
-            <a:off x="274320" y="1097280"/>
-            <a:ext cx="384048" cy="425196"/>
-          </a:xfrm>
-          <a:prstGeom prst="rect">
-            <a:avLst/>
-          </a:prstGeom>
-          <a:solidFill>
-            <a:srgbClr val="005555"/>
-          </a:solidFill>
-          <a:ln>
-            <a:noFill/>
-          </a:ln>
-        </p:spPr>
-        <p:style>
-          <a:lnRef idx="1">
-            <a:schemeClr val="accent1"/>
-          </a:lnRef>
-          <a:fillRef idx="3">
-            <a:schemeClr val="accent1"/>
-          </a:fillRef>
-          <a:effectRef idx="2">
-            <a:schemeClr val="accent1"/>
-          </a:effectRef>
-          <a:fontRef idx="minor">
-            <a:schemeClr val="lt1"/>
-          </a:fontRef>
-        </p:style>
-        <p:txBody>
-          <a:bodyPr rtlCol="0" anchor="ctr"/>
-          <a:lstStyle/>
-          <a:p>
-            <a:pPr algn="ctr"/>
-          </a:p>
-        </p:txBody>
-      </p:sp>
-      <p:sp>
-        <p:nvSpPr>
-          <p:cNvPr id="19" name="TextBox 18"/>
-          <p:cNvSpPr txBox="1"/>
-          <p:nvPr/>
-        </p:nvSpPr>
-        <p:spPr>
-          <a:xfrm>
-            <a:off x="310896" y="1188720"/>
-            <a:ext cx="329184" cy="288036"/>
-          </a:xfrm>
-          <a:prstGeom prst="rect">
-            <a:avLst/>
-          </a:prstGeom>
-          <a:noFill/>
-        </p:spPr>
-        <p:txBody>
-          <a:bodyPr wrap="square">
-            <a:spAutoFit/>
-          </a:bodyPr>
-          <a:lstStyle/>
-          <a:p>
-            <a:pPr algn="ctr"/>
-            <a:r>
-              <a:rPr sz="800" b="1" i="0">
-                <a:solidFill>
-                  <a:srgbClr val="FFFFFF"/>
-                </a:solidFill>
-              </a:rPr>
-              <a:t>O1</a:t>
-            </a:r>
-          </a:p>
-        </p:txBody>
-      </p:sp>
-      <p:sp>
-        <p:nvSpPr>
-          <p:cNvPr id="20" name="Rectangle 19"/>
-          <p:cNvSpPr/>
-          <p:nvPr/>
-        </p:nvSpPr>
-        <p:spPr>
-          <a:xfrm>
-            <a:off x="685800" y="1097280"/>
-            <a:ext cx="4334256" cy="425196"/>
-          </a:xfrm>
-          <a:prstGeom prst="rect">
-            <a:avLst/>
-          </a:prstGeom>
-          <a:solidFill>
-            <a:srgbClr val="FFFFFF"/>
-          </a:solidFill>
-          <a:ln>
-            <a:noFill/>
-          </a:ln>
-        </p:spPr>
-        <p:style>
-          <a:lnRef idx="1">
-            <a:schemeClr val="accent1"/>
-          </a:lnRef>
-          <a:fillRef idx="3">
-            <a:schemeClr val="accent1"/>
-          </a:fillRef>
-          <a:effectRef idx="2">
-            <a:schemeClr val="accent1"/>
-          </a:effectRef>
-          <a:fontRef idx="minor">
-            <a:schemeClr val="lt1"/>
-          </a:fontRef>
-        </p:style>
-        <p:txBody>
-          <a:bodyPr rtlCol="0" anchor="ctr"/>
-          <a:lstStyle/>
-          <a:p>
-            <a:pPr algn="ctr"/>
-          </a:p>
-        </p:txBody>
-      </p:sp>
-      <p:sp>
-        <p:nvSpPr>
-          <p:cNvPr id="21" name="TextBox 20"/>
-          <p:cNvSpPr txBox="1"/>
-          <p:nvPr/>
-        </p:nvSpPr>
-        <p:spPr>
-          <a:xfrm>
-            <a:off x="777240" y="1170432"/>
-            <a:ext cx="4197096" cy="333756"/>
+            <a:off x="365760" y="1371600"/>
+            <a:ext cx="2181758" cy="4187952"/>
           </a:xfrm>
           <a:prstGeom prst="rect">
             <a:avLst/>
@@ -6718,637 +6278,29 @@
                   <a:srgbClr val="1A1A1A"/>
                 </a:solidFill>
               </a:rPr>
-              <a:t>Je n'ai pas les moyens</a:t>
-            </a:r>
-          </a:p>
-        </p:txBody>
-      </p:sp>
-      <p:sp>
-        <p:nvSpPr>
-          <p:cNvPr id="22" name="Rectangle 21"/>
+              <a:t>Phase d'accroche — 8 objections :
+• Pas intéressé
+• Faux numéro
+• Appel pour un don
+• Je donne déjà
+• Arnaque
+• Je ne donne pas par téléphone
+• Pas confiance aux associations
+• N'aime pas être contacté</a:t>
+            </a:r>
+          </a:p>
+        </p:txBody>
+      </p:sp>
+      <p:sp>
+        <p:nvSpPr>
+          <p:cNvPr id="15" name="Rectangle 14"/>
           <p:cNvSpPr/>
           <p:nvPr/>
         </p:nvSpPr>
         <p:spPr>
           <a:xfrm>
-            <a:off x="5047488" y="1097280"/>
-            <a:ext cx="1618488" cy="425196"/>
-          </a:xfrm>
-          <a:prstGeom prst="rect">
-            <a:avLst/>
-          </a:prstGeom>
-          <a:solidFill>
-            <a:srgbClr val="2A7A50"/>
-          </a:solidFill>
-          <a:ln>
-            <a:noFill/>
-          </a:ln>
-        </p:spPr>
-        <p:style>
-          <a:lnRef idx="1">
-            <a:schemeClr val="accent1"/>
-          </a:lnRef>
-          <a:fillRef idx="3">
-            <a:schemeClr val="accent1"/>
-          </a:fillRef>
-          <a:effectRef idx="2">
-            <a:schemeClr val="accent1"/>
-          </a:effectRef>
-          <a:fontRef idx="minor">
-            <a:schemeClr val="lt1"/>
-          </a:fontRef>
-        </p:style>
-        <p:txBody>
-          <a:bodyPr rtlCol="0" anchor="ctr"/>
-          <a:lstStyle/>
-          <a:p>
-            <a:pPr algn="ctr"/>
-          </a:p>
-        </p:txBody>
-      </p:sp>
-      <p:sp>
-        <p:nvSpPr>
-          <p:cNvPr id="23" name="TextBox 22"/>
-          <p:cNvSpPr txBox="1"/>
-          <p:nvPr/>
-        </p:nvSpPr>
-        <p:spPr>
-          <a:xfrm>
-            <a:off x="5102351" y="1170432"/>
-            <a:ext cx="1527048" cy="333756"/>
-          </a:xfrm>
-          <a:prstGeom prst="rect">
-            <a:avLst/>
-          </a:prstGeom>
-          <a:noFill/>
-        </p:spPr>
-        <p:txBody>
-          <a:bodyPr wrap="square">
-            <a:spAutoFit/>
-          </a:bodyPr>
-          <a:lstStyle/>
-          <a:p>
-            <a:pPr algn="ctr"/>
-            <a:r>
-              <a:rPr sz="800" b="1" i="0">
-                <a:solidFill>
-                  <a:srgbClr val="FFFFFF"/>
-                </a:solidFill>
-              </a:rPr>
-              <a:t>Financière</a:t>
-            </a:r>
-          </a:p>
-        </p:txBody>
-      </p:sp>
-      <p:sp>
-        <p:nvSpPr>
-          <p:cNvPr id="24" name="Rectangle 23"/>
-          <p:cNvSpPr/>
-          <p:nvPr/>
-        </p:nvSpPr>
-        <p:spPr>
-          <a:xfrm>
-            <a:off x="6693408" y="1097280"/>
-            <a:ext cx="5340096" cy="425196"/>
-          </a:xfrm>
-          <a:prstGeom prst="rect">
-            <a:avLst/>
-          </a:prstGeom>
-          <a:solidFill>
-            <a:srgbClr val="FFFFFF"/>
-          </a:solidFill>
-          <a:ln>
-            <a:noFill/>
-          </a:ln>
-        </p:spPr>
-        <p:style>
-          <a:lnRef idx="1">
-            <a:schemeClr val="accent1"/>
-          </a:lnRef>
-          <a:fillRef idx="3">
-            <a:schemeClr val="accent1"/>
-          </a:fillRef>
-          <a:effectRef idx="2">
-            <a:schemeClr val="accent1"/>
-          </a:effectRef>
-          <a:fontRef idx="minor">
-            <a:schemeClr val="lt1"/>
-          </a:fontRef>
-        </p:style>
-        <p:txBody>
-          <a:bodyPr rtlCol="0" anchor="ctr"/>
-          <a:lstStyle/>
-          <a:p>
-            <a:pPr algn="ctr"/>
-          </a:p>
-        </p:txBody>
-      </p:sp>
-      <p:sp>
-        <p:nvSpPr>
-          <p:cNvPr id="25" name="TextBox 24"/>
-          <p:cNvSpPr txBox="1"/>
-          <p:nvPr/>
-        </p:nvSpPr>
-        <p:spPr>
-          <a:xfrm>
-            <a:off x="6784848" y="1152144"/>
-            <a:ext cx="5202936" cy="352044"/>
-          </a:xfrm>
-          <a:prstGeom prst="rect">
-            <a:avLst/>
-          </a:prstGeom>
-          <a:noFill/>
-        </p:spPr>
-        <p:txBody>
-          <a:bodyPr wrap="square">
-            <a:spAutoFit/>
-          </a:bodyPr>
-          <a:lstStyle/>
-          <a:p>
-            <a:pPr algn="l"/>
-            <a:r>
-              <a:rPr sz="900" b="0" i="1">
-                <a:solidFill>
-                  <a:srgbClr val="1A1A1A"/>
-                </a:solidFill>
-              </a:rPr>
-              <a:t>30 centimes par jour — moins qu'un café. Impact : 6 enfants par an.</a:t>
-            </a:r>
-          </a:p>
-        </p:txBody>
-      </p:sp>
-      <p:sp>
-        <p:nvSpPr>
-          <p:cNvPr id="26" name="Rectangle 25"/>
-          <p:cNvSpPr/>
-          <p:nvPr/>
-        </p:nvSpPr>
-        <p:spPr>
-          <a:xfrm>
-            <a:off x="274320" y="1527048"/>
-            <a:ext cx="384048" cy="425196"/>
-          </a:xfrm>
-          <a:prstGeom prst="rect">
-            <a:avLst/>
-          </a:prstGeom>
-          <a:solidFill>
-            <a:srgbClr val="005555"/>
-          </a:solidFill>
-          <a:ln>
-            <a:noFill/>
-          </a:ln>
-        </p:spPr>
-        <p:style>
-          <a:lnRef idx="1">
-            <a:schemeClr val="accent1"/>
-          </a:lnRef>
-          <a:fillRef idx="3">
-            <a:schemeClr val="accent1"/>
-          </a:fillRef>
-          <a:effectRef idx="2">
-            <a:schemeClr val="accent1"/>
-          </a:effectRef>
-          <a:fontRef idx="minor">
-            <a:schemeClr val="lt1"/>
-          </a:fontRef>
-        </p:style>
-        <p:txBody>
-          <a:bodyPr rtlCol="0" anchor="ctr"/>
-          <a:lstStyle/>
-          <a:p>
-            <a:pPr algn="ctr"/>
-          </a:p>
-        </p:txBody>
-      </p:sp>
-      <p:sp>
-        <p:nvSpPr>
-          <p:cNvPr id="27" name="TextBox 26"/>
-          <p:cNvSpPr txBox="1"/>
-          <p:nvPr/>
-        </p:nvSpPr>
-        <p:spPr>
-          <a:xfrm>
-            <a:off x="310896" y="1618488"/>
-            <a:ext cx="329184" cy="288036"/>
-          </a:xfrm>
-          <a:prstGeom prst="rect">
-            <a:avLst/>
-          </a:prstGeom>
-          <a:noFill/>
-        </p:spPr>
-        <p:txBody>
-          <a:bodyPr wrap="square">
-            <a:spAutoFit/>
-          </a:bodyPr>
-          <a:lstStyle/>
-          <a:p>
-            <a:pPr algn="ctr"/>
-            <a:r>
-              <a:rPr sz="800" b="1" i="0">
-                <a:solidFill>
-                  <a:srgbClr val="FFFFFF"/>
-                </a:solidFill>
-              </a:rPr>
-              <a:t>O2</a:t>
-            </a:r>
-          </a:p>
-        </p:txBody>
-      </p:sp>
-      <p:sp>
-        <p:nvSpPr>
-          <p:cNvPr id="28" name="Rectangle 27"/>
-          <p:cNvSpPr/>
-          <p:nvPr/>
-        </p:nvSpPr>
-        <p:spPr>
-          <a:xfrm>
-            <a:off x="685800" y="1527048"/>
-            <a:ext cx="4334256" cy="425196"/>
-          </a:xfrm>
-          <a:prstGeom prst="rect">
-            <a:avLst/>
-          </a:prstGeom>
-          <a:solidFill>
-            <a:srgbClr val="F0F7F7"/>
-          </a:solidFill>
-          <a:ln>
-            <a:noFill/>
-          </a:ln>
-        </p:spPr>
-        <p:style>
-          <a:lnRef idx="1">
-            <a:schemeClr val="accent1"/>
-          </a:lnRef>
-          <a:fillRef idx="3">
-            <a:schemeClr val="accent1"/>
-          </a:fillRef>
-          <a:effectRef idx="2">
-            <a:schemeClr val="accent1"/>
-          </a:effectRef>
-          <a:fontRef idx="minor">
-            <a:schemeClr val="lt1"/>
-          </a:fontRef>
-        </p:style>
-        <p:txBody>
-          <a:bodyPr rtlCol="0" anchor="ctr"/>
-          <a:lstStyle/>
-          <a:p>
-            <a:pPr algn="ctr"/>
-          </a:p>
-        </p:txBody>
-      </p:sp>
-      <p:sp>
-        <p:nvSpPr>
-          <p:cNvPr id="29" name="TextBox 28"/>
-          <p:cNvSpPr txBox="1"/>
-          <p:nvPr/>
-        </p:nvSpPr>
-        <p:spPr>
-          <a:xfrm>
-            <a:off x="777240" y="1600200"/>
-            <a:ext cx="4197096" cy="333756"/>
-          </a:xfrm>
-          <a:prstGeom prst="rect">
-            <a:avLst/>
-          </a:prstGeom>
-          <a:noFill/>
-        </p:spPr>
-        <p:txBody>
-          <a:bodyPr wrap="square">
-            <a:spAutoFit/>
-          </a:bodyPr>
-          <a:lstStyle/>
-          <a:p>
-            <a:pPr algn="l"/>
-            <a:r>
-              <a:rPr sz="900" b="0" i="0">
-                <a:solidFill>
-                  <a:srgbClr val="1A1A1A"/>
-                </a:solidFill>
-              </a:rPr>
-              <a:t>Je ne fais pas confiance aux ONG</a:t>
-            </a:r>
-          </a:p>
-        </p:txBody>
-      </p:sp>
-      <p:sp>
-        <p:nvSpPr>
-          <p:cNvPr id="30" name="Rectangle 29"/>
-          <p:cNvSpPr/>
-          <p:nvPr/>
-        </p:nvSpPr>
-        <p:spPr>
-          <a:xfrm>
-            <a:off x="5047488" y="1527048"/>
-            <a:ext cx="1618488" cy="425196"/>
-          </a:xfrm>
-          <a:prstGeom prst="rect">
-            <a:avLst/>
-          </a:prstGeom>
-          <a:solidFill>
-            <a:srgbClr val="FF0000"/>
-          </a:solidFill>
-          <a:ln>
-            <a:noFill/>
-          </a:ln>
-        </p:spPr>
-        <p:style>
-          <a:lnRef idx="1">
-            <a:schemeClr val="accent1"/>
-          </a:lnRef>
-          <a:fillRef idx="3">
-            <a:schemeClr val="accent1"/>
-          </a:fillRef>
-          <a:effectRef idx="2">
-            <a:schemeClr val="accent1"/>
-          </a:effectRef>
-          <a:fontRef idx="minor">
-            <a:schemeClr val="lt1"/>
-          </a:fontRef>
-        </p:style>
-        <p:txBody>
-          <a:bodyPr rtlCol="0" anchor="ctr"/>
-          <a:lstStyle/>
-          <a:p>
-            <a:pPr algn="ctr"/>
-          </a:p>
-        </p:txBody>
-      </p:sp>
-      <p:sp>
-        <p:nvSpPr>
-          <p:cNvPr id="31" name="TextBox 30"/>
-          <p:cNvSpPr txBox="1"/>
-          <p:nvPr/>
-        </p:nvSpPr>
-        <p:spPr>
-          <a:xfrm>
-            <a:off x="5102351" y="1600200"/>
-            <a:ext cx="1527048" cy="333756"/>
-          </a:xfrm>
-          <a:prstGeom prst="rect">
-            <a:avLst/>
-          </a:prstGeom>
-          <a:noFill/>
-        </p:spPr>
-        <p:txBody>
-          <a:bodyPr wrap="square">
-            <a:spAutoFit/>
-          </a:bodyPr>
-          <a:lstStyle/>
-          <a:p>
-            <a:pPr algn="ctr"/>
-            <a:r>
-              <a:rPr sz="800" b="1" i="0">
-                <a:solidFill>
-                  <a:srgbClr val="FFFFFF"/>
-                </a:solidFill>
-              </a:rPr>
-              <a:t>Méfiance</a:t>
-            </a:r>
-          </a:p>
-        </p:txBody>
-      </p:sp>
-      <p:sp>
-        <p:nvSpPr>
-          <p:cNvPr id="32" name="Rectangle 31"/>
-          <p:cNvSpPr/>
-          <p:nvPr/>
-        </p:nvSpPr>
-        <p:spPr>
-          <a:xfrm>
-            <a:off x="6693408" y="1527048"/>
-            <a:ext cx="5340096" cy="425196"/>
-          </a:xfrm>
-          <a:prstGeom prst="rect">
-            <a:avLst/>
-          </a:prstGeom>
-          <a:solidFill>
-            <a:srgbClr val="F0F7F7"/>
-          </a:solidFill>
-          <a:ln>
-            <a:noFill/>
-          </a:ln>
-        </p:spPr>
-        <p:style>
-          <a:lnRef idx="1">
-            <a:schemeClr val="accent1"/>
-          </a:lnRef>
-          <a:fillRef idx="3">
-            <a:schemeClr val="accent1"/>
-          </a:fillRef>
-          <a:effectRef idx="2">
-            <a:schemeClr val="accent1"/>
-          </a:effectRef>
-          <a:fontRef idx="minor">
-            <a:schemeClr val="lt1"/>
-          </a:fontRef>
-        </p:style>
-        <p:txBody>
-          <a:bodyPr rtlCol="0" anchor="ctr"/>
-          <a:lstStyle/>
-          <a:p>
-            <a:pPr algn="ctr"/>
-          </a:p>
-        </p:txBody>
-      </p:sp>
-      <p:sp>
-        <p:nvSpPr>
-          <p:cNvPr id="33" name="TextBox 32"/>
-          <p:cNvSpPr txBox="1"/>
-          <p:nvPr/>
-        </p:nvSpPr>
-        <p:spPr>
-          <a:xfrm>
-            <a:off x="6784848" y="1581912"/>
-            <a:ext cx="5202936" cy="352044"/>
-          </a:xfrm>
-          <a:prstGeom prst="rect">
-            <a:avLst/>
-          </a:prstGeom>
-          <a:noFill/>
-        </p:spPr>
-        <p:txBody>
-          <a:bodyPr wrap="square">
-            <a:spAutoFit/>
-          </a:bodyPr>
-          <a:lstStyle/>
-          <a:p>
-            <a:pPr algn="l"/>
-            <a:r>
-              <a:rPr sz="900" b="0" i="1">
-                <a:solidFill>
-                  <a:srgbClr val="1A1A1A"/>
-                </a:solidFill>
-              </a:rPr>
-              <a:t>Rapport public, audit Comité de la Charte, 82% fonds aux programmes.</a:t>
-            </a:r>
-          </a:p>
-        </p:txBody>
-      </p:sp>
-      <p:sp>
-        <p:nvSpPr>
-          <p:cNvPr id="34" name="Rectangle 33"/>
-          <p:cNvSpPr/>
-          <p:nvPr/>
-        </p:nvSpPr>
-        <p:spPr>
-          <a:xfrm>
-            <a:off x="274320" y="1956816"/>
-            <a:ext cx="384048" cy="425196"/>
-          </a:xfrm>
-          <a:prstGeom prst="rect">
-            <a:avLst/>
-          </a:prstGeom>
-          <a:solidFill>
-            <a:srgbClr val="005555"/>
-          </a:solidFill>
-          <a:ln>
-            <a:noFill/>
-          </a:ln>
-        </p:spPr>
-        <p:style>
-          <a:lnRef idx="1">
-            <a:schemeClr val="accent1"/>
-          </a:lnRef>
-          <a:fillRef idx="3">
-            <a:schemeClr val="accent1"/>
-          </a:fillRef>
-          <a:effectRef idx="2">
-            <a:schemeClr val="accent1"/>
-          </a:effectRef>
-          <a:fontRef idx="minor">
-            <a:schemeClr val="lt1"/>
-          </a:fontRef>
-        </p:style>
-        <p:txBody>
-          <a:bodyPr rtlCol="0" anchor="ctr"/>
-          <a:lstStyle/>
-          <a:p>
-            <a:pPr algn="ctr"/>
-          </a:p>
-        </p:txBody>
-      </p:sp>
-      <p:sp>
-        <p:nvSpPr>
-          <p:cNvPr id="35" name="TextBox 34"/>
-          <p:cNvSpPr txBox="1"/>
-          <p:nvPr/>
-        </p:nvSpPr>
-        <p:spPr>
-          <a:xfrm>
-            <a:off x="310896" y="2048256"/>
-            <a:ext cx="329184" cy="288036"/>
-          </a:xfrm>
-          <a:prstGeom prst="rect">
-            <a:avLst/>
-          </a:prstGeom>
-          <a:noFill/>
-        </p:spPr>
-        <p:txBody>
-          <a:bodyPr wrap="square">
-            <a:spAutoFit/>
-          </a:bodyPr>
-          <a:lstStyle/>
-          <a:p>
-            <a:pPr algn="ctr"/>
-            <a:r>
-              <a:rPr sz="800" b="1" i="0">
-                <a:solidFill>
-                  <a:srgbClr val="FFFFFF"/>
-                </a:solidFill>
-              </a:rPr>
-              <a:t>O3</a:t>
-            </a:r>
-          </a:p>
-        </p:txBody>
-      </p:sp>
-      <p:sp>
-        <p:nvSpPr>
-          <p:cNvPr id="36" name="Rectangle 35"/>
-          <p:cNvSpPr/>
-          <p:nvPr/>
-        </p:nvSpPr>
-        <p:spPr>
-          <a:xfrm>
-            <a:off x="685800" y="1956816"/>
-            <a:ext cx="4334256" cy="425196"/>
-          </a:xfrm>
-          <a:prstGeom prst="rect">
-            <a:avLst/>
-          </a:prstGeom>
-          <a:solidFill>
-            <a:srgbClr val="FFFFFF"/>
-          </a:solidFill>
-          <a:ln>
-            <a:noFill/>
-          </a:ln>
-        </p:spPr>
-        <p:style>
-          <a:lnRef idx="1">
-            <a:schemeClr val="accent1"/>
-          </a:lnRef>
-          <a:fillRef idx="3">
-            <a:schemeClr val="accent1"/>
-          </a:fillRef>
-          <a:effectRef idx="2">
-            <a:schemeClr val="accent1"/>
-          </a:effectRef>
-          <a:fontRef idx="minor">
-            <a:schemeClr val="lt1"/>
-          </a:fontRef>
-        </p:style>
-        <p:txBody>
-          <a:bodyPr rtlCol="0" anchor="ctr"/>
-          <a:lstStyle/>
-          <a:p>
-            <a:pPr algn="ctr"/>
-          </a:p>
-        </p:txBody>
-      </p:sp>
-      <p:sp>
-        <p:nvSpPr>
-          <p:cNvPr id="37" name="TextBox 36"/>
-          <p:cNvSpPr txBox="1"/>
-          <p:nvPr/>
-        </p:nvSpPr>
-        <p:spPr>
-          <a:xfrm>
-            <a:off x="777240" y="2029968"/>
-            <a:ext cx="4197096" cy="333756"/>
-          </a:xfrm>
-          <a:prstGeom prst="rect">
-            <a:avLst/>
-          </a:prstGeom>
-          <a:noFill/>
-        </p:spPr>
-        <p:txBody>
-          <a:bodyPr wrap="square">
-            <a:spAutoFit/>
-          </a:bodyPr>
-          <a:lstStyle/>
-          <a:p>
-            <a:pPr algn="l"/>
-            <a:r>
-              <a:rPr sz="900" b="0" i="0">
-                <a:solidFill>
-                  <a:srgbClr val="1A1A1A"/>
-                </a:solidFill>
-              </a:rPr>
-              <a:t>J'ai déjà fait un don</a:t>
-            </a:r>
-          </a:p>
-        </p:txBody>
-      </p:sp>
-      <p:sp>
-        <p:nvSpPr>
-          <p:cNvPr id="38" name="Rectangle 37"/>
-          <p:cNvSpPr/>
-          <p:nvPr/>
-        </p:nvSpPr>
-        <p:spPr>
-          <a:xfrm>
-            <a:off x="5047488" y="1956816"/>
-            <a:ext cx="1618488" cy="425196"/>
+            <a:off x="2620670" y="804672"/>
+            <a:ext cx="2328062" cy="502920"/>
           </a:xfrm>
           <a:prstGeom prst="rect">
             <a:avLst/>
@@ -7384,14 +6336,14 @@
       </p:sp>
       <p:sp>
         <p:nvSpPr>
-          <p:cNvPr id="39" name="TextBox 38"/>
+          <p:cNvPr id="16" name="TextBox 15"/>
           <p:cNvSpPr txBox="1"/>
           <p:nvPr/>
         </p:nvSpPr>
         <p:spPr>
           <a:xfrm>
-            <a:off x="5102351" y="2029968"/>
-            <a:ext cx="1527048" cy="333756"/>
+            <a:off x="2712110" y="822960"/>
+            <a:ext cx="2181758" cy="466344"/>
           </a:xfrm>
           <a:prstGeom prst="rect">
             <a:avLst/>
@@ -7411,21 +6363,22 @@
                   <a:srgbClr val="FFFFFF"/>
                 </a:solidFill>
               </a:rPr>
-              <a:t>Déjà engagé</a:t>
-            </a:r>
-          </a:p>
-        </p:txBody>
-      </p:sp>
-      <p:sp>
-        <p:nvSpPr>
-          <p:cNvPr id="40" name="Rectangle 39"/>
+              <a:t>CAT. 2
+OBJECTIONS FINANCIÈRES</a:t>
+            </a:r>
+          </a:p>
+        </p:txBody>
+      </p:sp>
+      <p:sp>
+        <p:nvSpPr>
+          <p:cNvPr id="17" name="Rectangle 16"/>
           <p:cNvSpPr/>
           <p:nvPr/>
         </p:nvSpPr>
         <p:spPr>
           <a:xfrm>
-            <a:off x="6693408" y="1956816"/>
-            <a:ext cx="5340096" cy="425196"/>
+            <a:off x="2620670" y="1307592"/>
+            <a:ext cx="2328062" cy="4370832"/>
           </a:xfrm>
           <a:prstGeom prst="rect">
             <a:avLst/>
@@ -7433,8 +6386,10 @@
           <a:solidFill>
             <a:srgbClr val="FFFFFF"/>
           </a:solidFill>
-          <a:ln>
-            <a:noFill/>
+          <a:ln w="15240">
+            <a:solidFill>
+              <a:srgbClr val="008080"/>
+            </a:solidFill>
           </a:ln>
         </p:spPr>
         <p:style>
@@ -7461,14 +6416,14 @@
       </p:sp>
       <p:sp>
         <p:nvSpPr>
-          <p:cNvPr id="41" name="TextBox 40"/>
+          <p:cNvPr id="18" name="TextBox 17"/>
           <p:cNvSpPr txBox="1"/>
           <p:nvPr/>
         </p:nvSpPr>
         <p:spPr>
           <a:xfrm>
-            <a:off x="6784848" y="2011680"/>
-            <a:ext cx="5202936" cy="352044"/>
+            <a:off x="2712110" y="1371600"/>
+            <a:ext cx="2181758" cy="4187952"/>
           </a:xfrm>
           <a:prstGeom prst="rect">
             <a:avLst/>
@@ -7483,32 +6438,35 @@
           <a:p>
             <a:pPr algn="l"/>
             <a:r>
-              <a:rPr sz="900" b="0" i="1">
+              <a:rPr sz="900" b="0" i="0">
                 <a:solidFill>
                   <a:srgbClr val="1A1A1A"/>
                 </a:solidFill>
               </a:rPr>
-              <a:t>Super — et si on transformait ce geste en impact mensuel continu ?</a:t>
-            </a:r>
-          </a:p>
-        </p:txBody>
-      </p:sp>
-      <p:sp>
-        <p:nvSpPr>
-          <p:cNvPr id="42" name="Rectangle 41"/>
+              <a:t>Après l'appel au don — 3 objections :
+• Je donne déjà ailleurs
+• Je n'ai pas les moyens
+• Dernier positionnement financier</a:t>
+            </a:r>
+          </a:p>
+        </p:txBody>
+      </p:sp>
+      <p:sp>
+        <p:nvSpPr>
+          <p:cNvPr id="19" name="Rectangle 18"/>
           <p:cNvSpPr/>
           <p:nvPr/>
         </p:nvSpPr>
         <p:spPr>
           <a:xfrm>
-            <a:off x="274320" y="2386584"/>
-            <a:ext cx="384048" cy="425196"/>
+            <a:off x="4967020" y="804672"/>
+            <a:ext cx="2328062" cy="502920"/>
           </a:xfrm>
           <a:prstGeom prst="rect">
             <a:avLst/>
           </a:prstGeom>
           <a:solidFill>
-            <a:srgbClr val="005555"/>
+            <a:srgbClr val="006A6A"/>
           </a:solidFill>
           <a:ln>
             <a:noFill/>
@@ -7538,14 +6496,14 @@
       </p:sp>
       <p:sp>
         <p:nvSpPr>
-          <p:cNvPr id="43" name="TextBox 42"/>
+          <p:cNvPr id="20" name="TextBox 19"/>
           <p:cNvSpPr txBox="1"/>
           <p:nvPr/>
         </p:nvSpPr>
         <p:spPr>
           <a:xfrm>
-            <a:off x="310896" y="2478024"/>
-            <a:ext cx="329184" cy="288036"/>
+            <a:off x="5058460" y="822960"/>
+            <a:ext cx="2181758" cy="466344"/>
           </a:xfrm>
           <a:prstGeom prst="rect">
             <a:avLst/>
@@ -7565,30 +6523,33 @@
                   <a:srgbClr val="FFFFFF"/>
                 </a:solidFill>
               </a:rPr>
-              <a:t>O4</a:t>
-            </a:r>
-          </a:p>
-        </p:txBody>
-      </p:sp>
-      <p:sp>
-        <p:nvSpPr>
-          <p:cNvPr id="44" name="Rectangle 43"/>
+              <a:t>CAT. 3
+CONTRE LE DON RÉGULIER (PA)</a:t>
+            </a:r>
+          </a:p>
+        </p:txBody>
+      </p:sp>
+      <p:sp>
+        <p:nvSpPr>
+          <p:cNvPr id="21" name="Rectangle 20"/>
           <p:cNvSpPr/>
           <p:nvPr/>
         </p:nvSpPr>
         <p:spPr>
           <a:xfrm>
-            <a:off x="685800" y="2386584"/>
-            <a:ext cx="4334256" cy="425196"/>
+            <a:off x="4967020" y="1307592"/>
+            <a:ext cx="2328062" cy="4370832"/>
           </a:xfrm>
           <a:prstGeom prst="rect">
             <a:avLst/>
           </a:prstGeom>
           <a:solidFill>
-            <a:srgbClr val="F0F7F7"/>
+            <a:srgbClr val="FFFFFF"/>
           </a:solidFill>
-          <a:ln>
-            <a:noFill/>
+          <a:ln w="15240">
+            <a:solidFill>
+              <a:srgbClr val="006A6A"/>
+            </a:solidFill>
           </a:ln>
         </p:spPr>
         <p:style>
@@ -7615,14 +6576,14 @@
       </p:sp>
       <p:sp>
         <p:nvSpPr>
-          <p:cNvPr id="45" name="TextBox 44"/>
+          <p:cNvPr id="22" name="TextBox 21"/>
           <p:cNvSpPr txBox="1"/>
           <p:nvPr/>
         </p:nvSpPr>
         <p:spPr>
           <a:xfrm>
-            <a:off x="777240" y="2459736"/>
-            <a:ext cx="4197096" cy="333756"/>
+            <a:off x="5058460" y="1371600"/>
+            <a:ext cx="2181758" cy="4187952"/>
           </a:xfrm>
           <a:prstGeom prst="rect">
             <a:avLst/>
@@ -7642,27 +6603,30 @@
                   <a:srgbClr val="1A1A1A"/>
                 </a:solidFill>
               </a:rPr>
-              <a:t>Je dois réfléchir</a:t>
-            </a:r>
-          </a:p>
-        </p:txBody>
-      </p:sp>
-      <p:sp>
-        <p:nvSpPr>
-          <p:cNvPr id="46" name="Rectangle 45"/>
+              <a:t>Sur le prélèvement automatique — 3 objections :
+• Préfère le don ponctuel
+• N'aime pas l'engagement mensuel
+• Dernier positionnement PA</a:t>
+            </a:r>
+          </a:p>
+        </p:txBody>
+      </p:sp>
+      <p:sp>
+        <p:nvSpPr>
+          <p:cNvPr id="23" name="Rectangle 22"/>
           <p:cNvSpPr/>
           <p:nvPr/>
         </p:nvSpPr>
         <p:spPr>
           <a:xfrm>
-            <a:off x="5047488" y="2386584"/>
-            <a:ext cx="1618488" cy="425196"/>
+            <a:off x="7313371" y="804672"/>
+            <a:ext cx="2328062" cy="502920"/>
           </a:xfrm>
           <a:prstGeom prst="rect">
             <a:avLst/>
           </a:prstGeom>
           <a:solidFill>
-            <a:srgbClr val="C08010"/>
+            <a:srgbClr val="00AAAA"/>
           </a:solidFill>
           <a:ln>
             <a:noFill/>
@@ -7692,14 +6656,14 @@
       </p:sp>
       <p:sp>
         <p:nvSpPr>
-          <p:cNvPr id="47" name="TextBox 46"/>
+          <p:cNvPr id="24" name="TextBox 23"/>
           <p:cNvSpPr txBox="1"/>
           <p:nvPr/>
         </p:nvSpPr>
         <p:spPr>
           <a:xfrm>
-            <a:off x="5102351" y="2459736"/>
-            <a:ext cx="1527048" cy="333756"/>
+            <a:off x="7404811" y="822960"/>
+            <a:ext cx="2181758" cy="466344"/>
           </a:xfrm>
           <a:prstGeom prst="rect">
             <a:avLst/>
@@ -7719,30 +6683,33 @@
                   <a:srgbClr val="FFFFFF"/>
                 </a:solidFill>
               </a:rPr>
-              <a:t>Report</a:t>
-            </a:r>
-          </a:p>
-        </p:txBody>
-      </p:sp>
-      <p:sp>
-        <p:nvSpPr>
-          <p:cNvPr id="48" name="Rectangle 47"/>
+              <a:t>CAT. 4
+MÉFIANCE IBAN</a:t>
+            </a:r>
+          </a:p>
+        </p:txBody>
+      </p:sp>
+      <p:sp>
+        <p:nvSpPr>
+          <p:cNvPr id="25" name="Rectangle 24"/>
           <p:cNvSpPr/>
           <p:nvPr/>
         </p:nvSpPr>
         <p:spPr>
           <a:xfrm>
-            <a:off x="6693408" y="2386584"/>
-            <a:ext cx="5340096" cy="425196"/>
+            <a:off x="7313371" y="1307592"/>
+            <a:ext cx="2328062" cy="4370832"/>
           </a:xfrm>
           <a:prstGeom prst="rect">
             <a:avLst/>
           </a:prstGeom>
           <a:solidFill>
-            <a:srgbClr val="F0F7F7"/>
+            <a:srgbClr val="FFFFFF"/>
           </a:solidFill>
-          <a:ln>
-            <a:noFill/>
+          <a:ln w="15240">
+            <a:solidFill>
+              <a:srgbClr val="00AAAA"/>
+            </a:solidFill>
           </a:ln>
         </p:spPr>
         <p:style>
@@ -7769,14 +6736,14 @@
       </p:sp>
       <p:sp>
         <p:nvSpPr>
-          <p:cNvPr id="49" name="TextBox 48"/>
+          <p:cNvPr id="26" name="TextBox 25"/>
           <p:cNvSpPr txBox="1"/>
           <p:nvPr/>
         </p:nvSpPr>
         <p:spPr>
           <a:xfrm>
-            <a:off x="6784848" y="2441448"/>
-            <a:ext cx="5202936" cy="352044"/>
+            <a:off x="7404811" y="1371600"/>
+            <a:ext cx="2181758" cy="4187952"/>
           </a:xfrm>
           <a:prstGeom prst="rect">
             <a:avLst/>
@@ -7791,32 +6758,36 @@
           <a:p>
             <a:pPr algn="l"/>
             <a:r>
-              <a:rPr sz="900" b="0" i="1">
+              <a:rPr sz="900" b="0" i="0">
                 <a:solidFill>
                   <a:srgbClr val="1A1A1A"/>
                 </a:solidFill>
               </a:rPr>
-              <a:t>Qu'est-ce qui vous retient ? (identifier le vrai frein, puis ancrer l'urgence)</a:t>
-            </a:r>
-          </a:p>
-        </p:txBody>
-      </p:sp>
-      <p:sp>
-        <p:nvSpPr>
-          <p:cNvPr id="50" name="Rectangle 49"/>
+              <a:t>Sur la sécurité bancaire :
+• Réassurance sur le protocole SEPA
+• Sécurité des données bancaires
+• Mandat SEPA : droits du donateur
+• Arrêt / modification possible à tout moment</a:t>
+            </a:r>
+          </a:p>
+        </p:txBody>
+      </p:sp>
+      <p:sp>
+        <p:nvSpPr>
+          <p:cNvPr id="27" name="Rectangle 26"/>
           <p:cNvSpPr/>
           <p:nvPr/>
         </p:nvSpPr>
         <p:spPr>
           <a:xfrm>
-            <a:off x="274320" y="2816352"/>
-            <a:ext cx="384048" cy="425196"/>
+            <a:off x="9659721" y="804672"/>
+            <a:ext cx="2328062" cy="502920"/>
           </a:xfrm>
           <a:prstGeom prst="rect">
             <a:avLst/>
           </a:prstGeom>
           <a:solidFill>
-            <a:srgbClr val="005555"/>
+            <a:srgbClr val="337777"/>
           </a:solidFill>
           <a:ln>
             <a:noFill/>
@@ -7846,14 +6817,14 @@
       </p:sp>
       <p:sp>
         <p:nvSpPr>
-          <p:cNvPr id="51" name="TextBox 50"/>
+          <p:cNvPr id="28" name="TextBox 27"/>
           <p:cNvSpPr txBox="1"/>
           <p:nvPr/>
         </p:nvSpPr>
         <p:spPr>
           <a:xfrm>
-            <a:off x="310896" y="2907792"/>
-            <a:ext cx="329184" cy="288036"/>
+            <a:off x="9751161" y="822960"/>
+            <a:ext cx="2181758" cy="466344"/>
           </a:xfrm>
           <a:prstGeom prst="rect">
             <a:avLst/>
@@ -7873,21 +6844,22 @@
                   <a:srgbClr val="FFFFFF"/>
                 </a:solidFill>
               </a:rPr>
-              <a:t>O5</a:t>
-            </a:r>
-          </a:p>
-        </p:txBody>
-      </p:sp>
-      <p:sp>
-        <p:nvSpPr>
-          <p:cNvPr id="52" name="Rectangle 51"/>
+              <a:t>CAT. 5
+OBJECTIONS CONFLICTUELLES</a:t>
+            </a:r>
+          </a:p>
+        </p:txBody>
+      </p:sp>
+      <p:sp>
+        <p:nvSpPr>
+          <p:cNvPr id="29" name="Rectangle 28"/>
           <p:cNvSpPr/>
           <p:nvPr/>
         </p:nvSpPr>
         <p:spPr>
           <a:xfrm>
-            <a:off x="685800" y="2816352"/>
-            <a:ext cx="4334256" cy="425196"/>
+            <a:off x="9659721" y="1307592"/>
+            <a:ext cx="2328062" cy="4370832"/>
           </a:xfrm>
           <a:prstGeom prst="rect">
             <a:avLst/>
@@ -7895,8 +6867,10 @@
           <a:solidFill>
             <a:srgbClr val="FFFFFF"/>
           </a:solidFill>
-          <a:ln>
-            <a:noFill/>
+          <a:ln w="15240">
+            <a:solidFill>
+              <a:srgbClr val="337777"/>
+            </a:solidFill>
           </a:ln>
         </p:spPr>
         <p:style>
@@ -7923,14 +6897,14 @@
       </p:sp>
       <p:sp>
         <p:nvSpPr>
-          <p:cNvPr id="53" name="TextBox 52"/>
+          <p:cNvPr id="30" name="TextBox 29"/>
           <p:cNvSpPr txBox="1"/>
           <p:nvPr/>
         </p:nvSpPr>
         <p:spPr>
           <a:xfrm>
-            <a:off x="777240" y="2889504"/>
-            <a:ext cx="4197096" cy="333756"/>
+            <a:off x="9751161" y="1371600"/>
+            <a:ext cx="2181758" cy="4187952"/>
           </a:xfrm>
           <a:prstGeom prst="rect">
             <a:avLst/>
@@ -7950,27 +6924,34 @@
                   <a:srgbClr val="1A1A1A"/>
                 </a:solidFill>
               </a:rPr>
-              <a:t>Combien vous gagnez ?</a:t>
-            </a:r>
-          </a:p>
-        </p:txBody>
-      </p:sp>
-      <p:sp>
-        <p:nvSpPr>
-          <p:cNvPr id="54" name="Rectangle 53"/>
+              <a:t>Objections sensibles :
+• Origine de l'appel
+• Source du numéro
+• Droits légaux RGPD
+• Bloctel / liste rouge
+• Accent de l'appelant
+• Connaissance d'un membre
+• Identité de l'appelant</a:t>
+            </a:r>
+          </a:p>
+        </p:txBody>
+      </p:sp>
+      <p:sp>
+        <p:nvSpPr>
+          <p:cNvPr id="31" name="Rectangle 30"/>
           <p:cNvSpPr/>
           <p:nvPr/>
         </p:nvSpPr>
         <p:spPr>
           <a:xfrm>
-            <a:off x="5047488" y="2816352"/>
-            <a:ext cx="1618488" cy="425196"/>
+            <a:off x="274320" y="5797296"/>
+            <a:ext cx="11640312" cy="402336"/>
           </a:xfrm>
           <a:prstGeom prst="rect">
             <a:avLst/>
           </a:prstGeom>
           <a:solidFill>
-            <a:srgbClr val="FF0000"/>
+            <a:srgbClr val="008080"/>
           </a:solidFill>
           <a:ln>
             <a:noFill/>
@@ -8000,14 +6981,14 @@
       </p:sp>
       <p:sp>
         <p:nvSpPr>
-          <p:cNvPr id="55" name="TextBox 54"/>
+          <p:cNvPr id="32" name="TextBox 31"/>
           <p:cNvSpPr txBox="1"/>
           <p:nvPr/>
         </p:nvSpPr>
         <p:spPr>
           <a:xfrm>
-            <a:off x="5102351" y="2889504"/>
-            <a:ext cx="1527048" cy="333756"/>
+            <a:off x="411479" y="5870448"/>
+            <a:ext cx="11365992" cy="256032"/>
           </a:xfrm>
           <a:prstGeom prst="rect">
             <a:avLst/>
@@ -8020,2247 +7001,14 @@
           </a:bodyPr>
           <a:lstStyle/>
           <a:p>
-            <a:pPr algn="ctr"/>
-            <a:r>
-              <a:rPr sz="800" b="1" i="0">
+            <a:pPr algn="l"/>
+            <a:r>
+              <a:rPr sz="1000" b="0" i="0">
                 <a:solidFill>
                   <a:srgbClr val="FFFFFF"/>
                 </a:solidFill>
               </a:rPr>
-              <a:t>Méfiance</a:t>
-            </a:r>
-          </a:p>
-        </p:txBody>
-      </p:sp>
-      <p:sp>
-        <p:nvSpPr>
-          <p:cNvPr id="56" name="Rectangle 55"/>
-          <p:cNvSpPr/>
-          <p:nvPr/>
-        </p:nvSpPr>
-        <p:spPr>
-          <a:xfrm>
-            <a:off x="6693408" y="2816352"/>
-            <a:ext cx="5340096" cy="425196"/>
-          </a:xfrm>
-          <a:prstGeom prst="rect">
-            <a:avLst/>
-          </a:prstGeom>
-          <a:solidFill>
-            <a:srgbClr val="FFFFFF"/>
-          </a:solidFill>
-          <a:ln>
-            <a:noFill/>
-          </a:ln>
-        </p:spPr>
-        <p:style>
-          <a:lnRef idx="1">
-            <a:schemeClr val="accent1"/>
-          </a:lnRef>
-          <a:fillRef idx="3">
-            <a:schemeClr val="accent1"/>
-          </a:fillRef>
-          <a:effectRef idx="2">
-            <a:schemeClr val="accent1"/>
-          </a:effectRef>
-          <a:fontRef idx="minor">
-            <a:schemeClr val="lt1"/>
-          </a:fontRef>
-        </p:style>
-        <p:txBody>
-          <a:bodyPr rtlCol="0" anchor="ctr"/>
-          <a:lstStyle/>
-          <a:p>
-            <a:pPr algn="ctr"/>
-          </a:p>
-        </p:txBody>
-      </p:sp>
-      <p:sp>
-        <p:nvSpPr>
-          <p:cNvPr id="57" name="TextBox 56"/>
-          <p:cNvSpPr txBox="1"/>
-          <p:nvPr/>
-        </p:nvSpPr>
-        <p:spPr>
-          <a:xfrm>
-            <a:off x="6784848" y="2871216"/>
-            <a:ext cx="5202936" cy="352044"/>
-          </a:xfrm>
-          <a:prstGeom prst="rect">
-            <a:avLst/>
-          </a:prstGeom>
-          <a:noFill/>
-        </p:spPr>
-        <p:txBody>
-          <a:bodyPr wrap="square">
-            <a:spAutoFit/>
-          </a:bodyPr>
-          <a:lstStyle/>
-          <a:p>
-            <a:pPr algn="l"/>
-            <a:r>
-              <a:rPr sz="900" b="0" i="1">
-                <a:solidFill>
-                  <a:srgbClr val="1A1A1A"/>
-                </a:solidFill>
-              </a:rPr>
-              <a:t>Transparence totale : emploi déclaré, encadrement légal, mission noble.</a:t>
-            </a:r>
-          </a:p>
-        </p:txBody>
-      </p:sp>
-      <p:sp>
-        <p:nvSpPr>
-          <p:cNvPr id="58" name="Rectangle 57"/>
-          <p:cNvSpPr/>
-          <p:nvPr/>
-        </p:nvSpPr>
-        <p:spPr>
-          <a:xfrm>
-            <a:off x="274320" y="3246120"/>
-            <a:ext cx="384048" cy="425196"/>
-          </a:xfrm>
-          <a:prstGeom prst="rect">
-            <a:avLst/>
-          </a:prstGeom>
-          <a:solidFill>
-            <a:srgbClr val="005555"/>
-          </a:solidFill>
-          <a:ln>
-            <a:noFill/>
-          </a:ln>
-        </p:spPr>
-        <p:style>
-          <a:lnRef idx="1">
-            <a:schemeClr val="accent1"/>
-          </a:lnRef>
-          <a:fillRef idx="3">
-            <a:schemeClr val="accent1"/>
-          </a:fillRef>
-          <a:effectRef idx="2">
-            <a:schemeClr val="accent1"/>
-          </a:effectRef>
-          <a:fontRef idx="minor">
-            <a:schemeClr val="lt1"/>
-          </a:fontRef>
-        </p:style>
-        <p:txBody>
-          <a:bodyPr rtlCol="0" anchor="ctr"/>
-          <a:lstStyle/>
-          <a:p>
-            <a:pPr algn="ctr"/>
-          </a:p>
-        </p:txBody>
-      </p:sp>
-      <p:sp>
-        <p:nvSpPr>
-          <p:cNvPr id="59" name="TextBox 58"/>
-          <p:cNvSpPr txBox="1"/>
-          <p:nvPr/>
-        </p:nvSpPr>
-        <p:spPr>
-          <a:xfrm>
-            <a:off x="310896" y="3337560"/>
-            <a:ext cx="329184" cy="288036"/>
-          </a:xfrm>
-          <a:prstGeom prst="rect">
-            <a:avLst/>
-          </a:prstGeom>
-          <a:noFill/>
-        </p:spPr>
-        <p:txBody>
-          <a:bodyPr wrap="square">
-            <a:spAutoFit/>
-          </a:bodyPr>
-          <a:lstStyle/>
-          <a:p>
-            <a:pPr algn="ctr"/>
-            <a:r>
-              <a:rPr sz="800" b="1" i="0">
-                <a:solidFill>
-                  <a:srgbClr val="FFFFFF"/>
-                </a:solidFill>
-              </a:rPr>
-              <a:t>O6</a:t>
-            </a:r>
-          </a:p>
-        </p:txBody>
-      </p:sp>
-      <p:sp>
-        <p:nvSpPr>
-          <p:cNvPr id="60" name="Rectangle 59"/>
-          <p:cNvSpPr/>
-          <p:nvPr/>
-        </p:nvSpPr>
-        <p:spPr>
-          <a:xfrm>
-            <a:off x="685800" y="3246120"/>
-            <a:ext cx="4334256" cy="425196"/>
-          </a:xfrm>
-          <a:prstGeom prst="rect">
-            <a:avLst/>
-          </a:prstGeom>
-          <a:solidFill>
-            <a:srgbClr val="F0F7F7"/>
-          </a:solidFill>
-          <a:ln>
-            <a:noFill/>
-          </a:ln>
-        </p:spPr>
-        <p:style>
-          <a:lnRef idx="1">
-            <a:schemeClr val="accent1"/>
-          </a:lnRef>
-          <a:fillRef idx="3">
-            <a:schemeClr val="accent1"/>
-          </a:fillRef>
-          <a:effectRef idx="2">
-            <a:schemeClr val="accent1"/>
-          </a:effectRef>
-          <a:fontRef idx="minor">
-            <a:schemeClr val="lt1"/>
-          </a:fontRef>
-        </p:style>
-        <p:txBody>
-          <a:bodyPr rtlCol="0" anchor="ctr"/>
-          <a:lstStyle/>
-          <a:p>
-            <a:pPr algn="ctr"/>
-          </a:p>
-        </p:txBody>
-      </p:sp>
-      <p:sp>
-        <p:nvSpPr>
-          <p:cNvPr id="61" name="TextBox 60"/>
-          <p:cNvSpPr txBox="1"/>
-          <p:nvPr/>
-        </p:nvSpPr>
-        <p:spPr>
-          <a:xfrm>
-            <a:off x="777240" y="3319272"/>
-            <a:ext cx="4197096" cy="333756"/>
-          </a:xfrm>
-          <a:prstGeom prst="rect">
-            <a:avLst/>
-          </a:prstGeom>
-          <a:noFill/>
-        </p:spPr>
-        <p:txBody>
-          <a:bodyPr wrap="square">
-            <a:spAutoFit/>
-          </a:bodyPr>
-          <a:lstStyle/>
-          <a:p>
-            <a:pPr algn="l"/>
-            <a:r>
-              <a:rPr sz="900" b="0" i="0">
-                <a:solidFill>
-                  <a:srgbClr val="1A1A1A"/>
-                </a:solidFill>
-              </a:rPr>
-              <a:t>Je donne à d'autres causes</a:t>
-            </a:r>
-          </a:p>
-        </p:txBody>
-      </p:sp>
-      <p:sp>
-        <p:nvSpPr>
-          <p:cNvPr id="62" name="Rectangle 61"/>
-          <p:cNvSpPr/>
-          <p:nvPr/>
-        </p:nvSpPr>
-        <p:spPr>
-          <a:xfrm>
-            <a:off x="5047488" y="3246120"/>
-            <a:ext cx="1618488" cy="425196"/>
-          </a:xfrm>
-          <a:prstGeom prst="rect">
-            <a:avLst/>
-          </a:prstGeom>
-          <a:solidFill>
-            <a:srgbClr val="6644AA"/>
-          </a:solidFill>
-          <a:ln>
-            <a:noFill/>
-          </a:ln>
-        </p:spPr>
-        <p:style>
-          <a:lnRef idx="1">
-            <a:schemeClr val="accent1"/>
-          </a:lnRef>
-          <a:fillRef idx="3">
-            <a:schemeClr val="accent1"/>
-          </a:fillRef>
-          <a:effectRef idx="2">
-            <a:schemeClr val="accent1"/>
-          </a:effectRef>
-          <a:fontRef idx="minor">
-            <a:schemeClr val="lt1"/>
-          </a:fontRef>
-        </p:style>
-        <p:txBody>
-          <a:bodyPr rtlCol="0" anchor="ctr"/>
-          <a:lstStyle/>
-          <a:p>
-            <a:pPr algn="ctr"/>
-          </a:p>
-        </p:txBody>
-      </p:sp>
-      <p:sp>
-        <p:nvSpPr>
-          <p:cNvPr id="63" name="TextBox 62"/>
-          <p:cNvSpPr txBox="1"/>
-          <p:nvPr/>
-        </p:nvSpPr>
-        <p:spPr>
-          <a:xfrm>
-            <a:off x="5102351" y="3319272"/>
-            <a:ext cx="1527048" cy="333756"/>
-          </a:xfrm>
-          <a:prstGeom prst="rect">
-            <a:avLst/>
-          </a:prstGeom>
-          <a:noFill/>
-        </p:spPr>
-        <p:txBody>
-          <a:bodyPr wrap="square">
-            <a:spAutoFit/>
-          </a:bodyPr>
-          <a:lstStyle/>
-          <a:p>
-            <a:pPr algn="ctr"/>
-            <a:r>
-              <a:rPr sz="800" b="1" i="0">
-                <a:solidFill>
-                  <a:srgbClr val="FFFFFF"/>
-                </a:solidFill>
-              </a:rPr>
-              <a:t>Concurrent</a:t>
-            </a:r>
-          </a:p>
-        </p:txBody>
-      </p:sp>
-      <p:sp>
-        <p:nvSpPr>
-          <p:cNvPr id="64" name="Rectangle 63"/>
-          <p:cNvSpPr/>
-          <p:nvPr/>
-        </p:nvSpPr>
-        <p:spPr>
-          <a:xfrm>
-            <a:off x="6693408" y="3246120"/>
-            <a:ext cx="5340096" cy="425196"/>
-          </a:xfrm>
-          <a:prstGeom prst="rect">
-            <a:avLst/>
-          </a:prstGeom>
-          <a:solidFill>
-            <a:srgbClr val="F0F7F7"/>
-          </a:solidFill>
-          <a:ln>
-            <a:noFill/>
-          </a:ln>
-        </p:spPr>
-        <p:style>
-          <a:lnRef idx="1">
-            <a:schemeClr val="accent1"/>
-          </a:lnRef>
-          <a:fillRef idx="3">
-            <a:schemeClr val="accent1"/>
-          </a:fillRef>
-          <a:effectRef idx="2">
-            <a:schemeClr val="accent1"/>
-          </a:effectRef>
-          <a:fontRef idx="minor">
-            <a:schemeClr val="lt1"/>
-          </a:fontRef>
-        </p:style>
-        <p:txBody>
-          <a:bodyPr rtlCol="0" anchor="ctr"/>
-          <a:lstStyle/>
-          <a:p>
-            <a:pPr algn="ctr"/>
-          </a:p>
-        </p:txBody>
-      </p:sp>
-      <p:sp>
-        <p:nvSpPr>
-          <p:cNvPr id="65" name="TextBox 64"/>
-          <p:cNvSpPr txBox="1"/>
-          <p:nvPr/>
-        </p:nvSpPr>
-        <p:spPr>
-          <a:xfrm>
-            <a:off x="6784848" y="3300984"/>
-            <a:ext cx="5202936" cy="352044"/>
-          </a:xfrm>
-          <a:prstGeom prst="rect">
-            <a:avLst/>
-          </a:prstGeom>
-          <a:noFill/>
-        </p:spPr>
-        <p:txBody>
-          <a:bodyPr wrap="square">
-            <a:spAutoFit/>
-          </a:bodyPr>
-          <a:lstStyle/>
-          <a:p>
-            <a:pPr algn="l"/>
-            <a:r>
-              <a:rPr sz="900" b="0" i="1">
-                <a:solidFill>
-                  <a:srgbClr val="1A1A1A"/>
-                </a:solidFill>
-              </a:rPr>
-              <a:t>Chaque cause est unique — les droits des enfants ne concurrencent rien.</a:t>
-            </a:r>
-          </a:p>
-        </p:txBody>
-      </p:sp>
-      <p:sp>
-        <p:nvSpPr>
-          <p:cNvPr id="66" name="Rectangle 65"/>
-          <p:cNvSpPr/>
-          <p:nvPr/>
-        </p:nvSpPr>
-        <p:spPr>
-          <a:xfrm>
-            <a:off x="274320" y="3675888"/>
-            <a:ext cx="384048" cy="425196"/>
-          </a:xfrm>
-          <a:prstGeom prst="rect">
-            <a:avLst/>
-          </a:prstGeom>
-          <a:solidFill>
-            <a:srgbClr val="005555"/>
-          </a:solidFill>
-          <a:ln>
-            <a:noFill/>
-          </a:ln>
-        </p:spPr>
-        <p:style>
-          <a:lnRef idx="1">
-            <a:schemeClr val="accent1"/>
-          </a:lnRef>
-          <a:fillRef idx="3">
-            <a:schemeClr val="accent1"/>
-          </a:fillRef>
-          <a:effectRef idx="2">
-            <a:schemeClr val="accent1"/>
-          </a:effectRef>
-          <a:fontRef idx="minor">
-            <a:schemeClr val="lt1"/>
-          </a:fontRef>
-        </p:style>
-        <p:txBody>
-          <a:bodyPr rtlCol="0" anchor="ctr"/>
-          <a:lstStyle/>
-          <a:p>
-            <a:pPr algn="ctr"/>
-          </a:p>
-        </p:txBody>
-      </p:sp>
-      <p:sp>
-        <p:nvSpPr>
-          <p:cNvPr id="67" name="TextBox 66"/>
-          <p:cNvSpPr txBox="1"/>
-          <p:nvPr/>
-        </p:nvSpPr>
-        <p:spPr>
-          <a:xfrm>
-            <a:off x="310896" y="3767328"/>
-            <a:ext cx="329184" cy="288036"/>
-          </a:xfrm>
-          <a:prstGeom prst="rect">
-            <a:avLst/>
-          </a:prstGeom>
-          <a:noFill/>
-        </p:spPr>
-        <p:txBody>
-          <a:bodyPr wrap="square">
-            <a:spAutoFit/>
-          </a:bodyPr>
-          <a:lstStyle/>
-          <a:p>
-            <a:pPr algn="ctr"/>
-            <a:r>
-              <a:rPr sz="800" b="1" i="0">
-                <a:solidFill>
-                  <a:srgbClr val="FFFFFF"/>
-                </a:solidFill>
-              </a:rPr>
-              <a:t>O7</a:t>
-            </a:r>
-          </a:p>
-        </p:txBody>
-      </p:sp>
-      <p:sp>
-        <p:nvSpPr>
-          <p:cNvPr id="68" name="Rectangle 67"/>
-          <p:cNvSpPr/>
-          <p:nvPr/>
-        </p:nvSpPr>
-        <p:spPr>
-          <a:xfrm>
-            <a:off x="685800" y="3675888"/>
-            <a:ext cx="4334256" cy="425196"/>
-          </a:xfrm>
-          <a:prstGeom prst="rect">
-            <a:avLst/>
-          </a:prstGeom>
-          <a:solidFill>
-            <a:srgbClr val="FFFFFF"/>
-          </a:solidFill>
-          <a:ln>
-            <a:noFill/>
-          </a:ln>
-        </p:spPr>
-        <p:style>
-          <a:lnRef idx="1">
-            <a:schemeClr val="accent1"/>
-          </a:lnRef>
-          <a:fillRef idx="3">
-            <a:schemeClr val="accent1"/>
-          </a:fillRef>
-          <a:effectRef idx="2">
-            <a:schemeClr val="accent1"/>
-          </a:effectRef>
-          <a:fontRef idx="minor">
-            <a:schemeClr val="lt1"/>
-          </a:fontRef>
-        </p:style>
-        <p:txBody>
-          <a:bodyPr rtlCol="0" anchor="ctr"/>
-          <a:lstStyle/>
-          <a:p>
-            <a:pPr algn="ctr"/>
-          </a:p>
-        </p:txBody>
-      </p:sp>
-      <p:sp>
-        <p:nvSpPr>
-          <p:cNvPr id="69" name="TextBox 68"/>
-          <p:cNvSpPr txBox="1"/>
-          <p:nvPr/>
-        </p:nvSpPr>
-        <p:spPr>
-          <a:xfrm>
-            <a:off x="777240" y="3749040"/>
-            <a:ext cx="4197096" cy="333756"/>
-          </a:xfrm>
-          <a:prstGeom prst="rect">
-            <a:avLst/>
-          </a:prstGeom>
-          <a:noFill/>
-        </p:spPr>
-        <p:txBody>
-          <a:bodyPr wrap="square">
-            <a:spAutoFit/>
-          </a:bodyPr>
-          <a:lstStyle/>
-          <a:p>
-            <a:pPr algn="l"/>
-            <a:r>
-              <a:rPr sz="900" b="0" i="0">
-                <a:solidFill>
-                  <a:srgbClr val="1A1A1A"/>
-                </a:solidFill>
-              </a:rPr>
-              <a:t>Ce n'est pas le bon moment</a:t>
-            </a:r>
-          </a:p>
-        </p:txBody>
-      </p:sp>
-      <p:sp>
-        <p:nvSpPr>
-          <p:cNvPr id="70" name="Rectangle 69"/>
-          <p:cNvSpPr/>
-          <p:nvPr/>
-        </p:nvSpPr>
-        <p:spPr>
-          <a:xfrm>
-            <a:off x="5047488" y="3675888"/>
-            <a:ext cx="1618488" cy="425196"/>
-          </a:xfrm>
-          <a:prstGeom prst="rect">
-            <a:avLst/>
-          </a:prstGeom>
-          <a:solidFill>
-            <a:srgbClr val="005555"/>
-          </a:solidFill>
-          <a:ln>
-            <a:noFill/>
-          </a:ln>
-        </p:spPr>
-        <p:style>
-          <a:lnRef idx="1">
-            <a:schemeClr val="accent1"/>
-          </a:lnRef>
-          <a:fillRef idx="3">
-            <a:schemeClr val="accent1"/>
-          </a:fillRef>
-          <a:effectRef idx="2">
-            <a:schemeClr val="accent1"/>
-          </a:effectRef>
-          <a:fontRef idx="minor">
-            <a:schemeClr val="lt1"/>
-          </a:fontRef>
-        </p:style>
-        <p:txBody>
-          <a:bodyPr rtlCol="0" anchor="ctr"/>
-          <a:lstStyle/>
-          <a:p>
-            <a:pPr algn="ctr"/>
-          </a:p>
-        </p:txBody>
-      </p:sp>
-      <p:sp>
-        <p:nvSpPr>
-          <p:cNvPr id="71" name="TextBox 70"/>
-          <p:cNvSpPr txBox="1"/>
-          <p:nvPr/>
-        </p:nvSpPr>
-        <p:spPr>
-          <a:xfrm>
-            <a:off x="5102351" y="3749040"/>
-            <a:ext cx="1527048" cy="333756"/>
-          </a:xfrm>
-          <a:prstGeom prst="rect">
-            <a:avLst/>
-          </a:prstGeom>
-          <a:noFill/>
-        </p:spPr>
-        <p:txBody>
-          <a:bodyPr wrap="square">
-            <a:spAutoFit/>
-          </a:bodyPr>
-          <a:lstStyle/>
-          <a:p>
-            <a:pPr algn="ctr"/>
-            <a:r>
-              <a:rPr sz="800" b="1" i="0">
-                <a:solidFill>
-                  <a:srgbClr val="FFFFFF"/>
-                </a:solidFill>
-              </a:rPr>
-              <a:t>Temporel</a:t>
-            </a:r>
-          </a:p>
-        </p:txBody>
-      </p:sp>
-      <p:sp>
-        <p:nvSpPr>
-          <p:cNvPr id="72" name="Rectangle 71"/>
-          <p:cNvSpPr/>
-          <p:nvPr/>
-        </p:nvSpPr>
-        <p:spPr>
-          <a:xfrm>
-            <a:off x="6693408" y="3675888"/>
-            <a:ext cx="5340096" cy="425196"/>
-          </a:xfrm>
-          <a:prstGeom prst="rect">
-            <a:avLst/>
-          </a:prstGeom>
-          <a:solidFill>
-            <a:srgbClr val="FFFFFF"/>
-          </a:solidFill>
-          <a:ln>
-            <a:noFill/>
-          </a:ln>
-        </p:spPr>
-        <p:style>
-          <a:lnRef idx="1">
-            <a:schemeClr val="accent1"/>
-          </a:lnRef>
-          <a:fillRef idx="3">
-            <a:schemeClr val="accent1"/>
-          </a:fillRef>
-          <a:effectRef idx="2">
-            <a:schemeClr val="accent1"/>
-          </a:effectRef>
-          <a:fontRef idx="minor">
-            <a:schemeClr val="lt1"/>
-          </a:fontRef>
-        </p:style>
-        <p:txBody>
-          <a:bodyPr rtlCol="0" anchor="ctr"/>
-          <a:lstStyle/>
-          <a:p>
-            <a:pPr algn="ctr"/>
-          </a:p>
-        </p:txBody>
-      </p:sp>
-      <p:sp>
-        <p:nvSpPr>
-          <p:cNvPr id="73" name="TextBox 72"/>
-          <p:cNvSpPr txBox="1"/>
-          <p:nvPr/>
-        </p:nvSpPr>
-        <p:spPr>
-          <a:xfrm>
-            <a:off x="6784848" y="3730752"/>
-            <a:ext cx="5202936" cy="352044"/>
-          </a:xfrm>
-          <a:prstGeom prst="rect">
-            <a:avLst/>
-          </a:prstGeom>
-          <a:noFill/>
-        </p:spPr>
-        <p:txBody>
-          <a:bodyPr wrap="square">
-            <a:spAutoFit/>
-          </a:bodyPr>
-          <a:lstStyle/>
-          <a:p>
-            <a:pPr algn="l"/>
-            <a:r>
-              <a:rPr sz="900" b="0" i="1">
-                <a:solidFill>
-                  <a:srgbClr val="1A1A1A"/>
-                </a:solidFill>
-              </a:rPr>
-              <a:t>Le premier prélèvement est dans 30 jours — vous avez le temps de confirmer.</a:t>
-            </a:r>
-          </a:p>
-        </p:txBody>
-      </p:sp>
-      <p:sp>
-        <p:nvSpPr>
-          <p:cNvPr id="74" name="Rectangle 73"/>
-          <p:cNvSpPr/>
-          <p:nvPr/>
-        </p:nvSpPr>
-        <p:spPr>
-          <a:xfrm>
-            <a:off x="274320" y="4105656"/>
-            <a:ext cx="384048" cy="425196"/>
-          </a:xfrm>
-          <a:prstGeom prst="rect">
-            <a:avLst/>
-          </a:prstGeom>
-          <a:solidFill>
-            <a:srgbClr val="005555"/>
-          </a:solidFill>
-          <a:ln>
-            <a:noFill/>
-          </a:ln>
-        </p:spPr>
-        <p:style>
-          <a:lnRef idx="1">
-            <a:schemeClr val="accent1"/>
-          </a:lnRef>
-          <a:fillRef idx="3">
-            <a:schemeClr val="accent1"/>
-          </a:fillRef>
-          <a:effectRef idx="2">
-            <a:schemeClr val="accent1"/>
-          </a:effectRef>
-          <a:fontRef idx="minor">
-            <a:schemeClr val="lt1"/>
-          </a:fontRef>
-        </p:style>
-        <p:txBody>
-          <a:bodyPr rtlCol="0" anchor="ctr"/>
-          <a:lstStyle/>
-          <a:p>
-            <a:pPr algn="ctr"/>
-          </a:p>
-        </p:txBody>
-      </p:sp>
-      <p:sp>
-        <p:nvSpPr>
-          <p:cNvPr id="75" name="TextBox 74"/>
-          <p:cNvSpPr txBox="1"/>
-          <p:nvPr/>
-        </p:nvSpPr>
-        <p:spPr>
-          <a:xfrm>
-            <a:off x="310896" y="4197096"/>
-            <a:ext cx="329184" cy="288036"/>
-          </a:xfrm>
-          <a:prstGeom prst="rect">
-            <a:avLst/>
-          </a:prstGeom>
-          <a:noFill/>
-        </p:spPr>
-        <p:txBody>
-          <a:bodyPr wrap="square">
-            <a:spAutoFit/>
-          </a:bodyPr>
-          <a:lstStyle/>
-          <a:p>
-            <a:pPr algn="ctr"/>
-            <a:r>
-              <a:rPr sz="800" b="1" i="0">
-                <a:solidFill>
-                  <a:srgbClr val="FFFFFF"/>
-                </a:solidFill>
-              </a:rPr>
-              <a:t>O8</a:t>
-            </a:r>
-          </a:p>
-        </p:txBody>
-      </p:sp>
-      <p:sp>
-        <p:nvSpPr>
-          <p:cNvPr id="76" name="Rectangle 75"/>
-          <p:cNvSpPr/>
-          <p:nvPr/>
-        </p:nvSpPr>
-        <p:spPr>
-          <a:xfrm>
-            <a:off x="685800" y="4105656"/>
-            <a:ext cx="4334256" cy="425196"/>
-          </a:xfrm>
-          <a:prstGeom prst="rect">
-            <a:avLst/>
-          </a:prstGeom>
-          <a:solidFill>
-            <a:srgbClr val="F0F7F7"/>
-          </a:solidFill>
-          <a:ln>
-            <a:noFill/>
-          </a:ln>
-        </p:spPr>
-        <p:style>
-          <a:lnRef idx="1">
-            <a:schemeClr val="accent1"/>
-          </a:lnRef>
-          <a:fillRef idx="3">
-            <a:schemeClr val="accent1"/>
-          </a:fillRef>
-          <a:effectRef idx="2">
-            <a:schemeClr val="accent1"/>
-          </a:effectRef>
-          <a:fontRef idx="minor">
-            <a:schemeClr val="lt1"/>
-          </a:fontRef>
-        </p:style>
-        <p:txBody>
-          <a:bodyPr rtlCol="0" anchor="ctr"/>
-          <a:lstStyle/>
-          <a:p>
-            <a:pPr algn="ctr"/>
-          </a:p>
-        </p:txBody>
-      </p:sp>
-      <p:sp>
-        <p:nvSpPr>
-          <p:cNvPr id="77" name="TextBox 76"/>
-          <p:cNvSpPr txBox="1"/>
-          <p:nvPr/>
-        </p:nvSpPr>
-        <p:spPr>
-          <a:xfrm>
-            <a:off x="777240" y="4178808"/>
-            <a:ext cx="4197096" cy="333756"/>
-          </a:xfrm>
-          <a:prstGeom prst="rect">
-            <a:avLst/>
-          </a:prstGeom>
-          <a:noFill/>
-        </p:spPr>
-        <p:txBody>
-          <a:bodyPr wrap="square">
-            <a:spAutoFit/>
-          </a:bodyPr>
-          <a:lstStyle/>
-          <a:p>
-            <a:pPr algn="l"/>
-            <a:r>
-              <a:rPr sz="900" b="0" i="0">
-                <a:solidFill>
-                  <a:srgbClr val="1A1A1A"/>
-                </a:solidFill>
-              </a:rPr>
-              <a:t>L'argent ne parvient pas</a:t>
-            </a:r>
-          </a:p>
-        </p:txBody>
-      </p:sp>
-      <p:sp>
-        <p:nvSpPr>
-          <p:cNvPr id="78" name="Rectangle 77"/>
-          <p:cNvSpPr/>
-          <p:nvPr/>
-        </p:nvSpPr>
-        <p:spPr>
-          <a:xfrm>
-            <a:off x="5047488" y="4105656"/>
-            <a:ext cx="1618488" cy="425196"/>
-          </a:xfrm>
-          <a:prstGeom prst="rect">
-            <a:avLst/>
-          </a:prstGeom>
-          <a:solidFill>
-            <a:srgbClr val="FF0000"/>
-          </a:solidFill>
-          <a:ln>
-            <a:noFill/>
-          </a:ln>
-        </p:spPr>
-        <p:style>
-          <a:lnRef idx="1">
-            <a:schemeClr val="accent1"/>
-          </a:lnRef>
-          <a:fillRef idx="3">
-            <a:schemeClr val="accent1"/>
-          </a:fillRef>
-          <a:effectRef idx="2">
-            <a:schemeClr val="accent1"/>
-          </a:effectRef>
-          <a:fontRef idx="minor">
-            <a:schemeClr val="lt1"/>
-          </a:fontRef>
-        </p:style>
-        <p:txBody>
-          <a:bodyPr rtlCol="0" anchor="ctr"/>
-          <a:lstStyle/>
-          <a:p>
-            <a:pPr algn="ctr"/>
-          </a:p>
-        </p:txBody>
-      </p:sp>
-      <p:sp>
-        <p:nvSpPr>
-          <p:cNvPr id="79" name="TextBox 78"/>
-          <p:cNvSpPr txBox="1"/>
-          <p:nvPr/>
-        </p:nvSpPr>
-        <p:spPr>
-          <a:xfrm>
-            <a:off x="5102351" y="4178808"/>
-            <a:ext cx="1527048" cy="333756"/>
-          </a:xfrm>
-          <a:prstGeom prst="rect">
-            <a:avLst/>
-          </a:prstGeom>
-          <a:noFill/>
-        </p:spPr>
-        <p:txBody>
-          <a:bodyPr wrap="square">
-            <a:spAutoFit/>
-          </a:bodyPr>
-          <a:lstStyle/>
-          <a:p>
-            <a:pPr algn="ctr"/>
-            <a:r>
-              <a:rPr sz="800" b="1" i="0">
-                <a:solidFill>
-                  <a:srgbClr val="FFFFFF"/>
-                </a:solidFill>
-              </a:rPr>
-              <a:t>Méfiance</a:t>
-            </a:r>
-          </a:p>
-        </p:txBody>
-      </p:sp>
-      <p:sp>
-        <p:nvSpPr>
-          <p:cNvPr id="80" name="Rectangle 79"/>
-          <p:cNvSpPr/>
-          <p:nvPr/>
-        </p:nvSpPr>
-        <p:spPr>
-          <a:xfrm>
-            <a:off x="6693408" y="4105656"/>
-            <a:ext cx="5340096" cy="425196"/>
-          </a:xfrm>
-          <a:prstGeom prst="rect">
-            <a:avLst/>
-          </a:prstGeom>
-          <a:solidFill>
-            <a:srgbClr val="F0F7F7"/>
-          </a:solidFill>
-          <a:ln>
-            <a:noFill/>
-          </a:ln>
-        </p:spPr>
-        <p:style>
-          <a:lnRef idx="1">
-            <a:schemeClr val="accent1"/>
-          </a:lnRef>
-          <a:fillRef idx="3">
-            <a:schemeClr val="accent1"/>
-          </a:fillRef>
-          <a:effectRef idx="2">
-            <a:schemeClr val="accent1"/>
-          </a:effectRef>
-          <a:fontRef idx="minor">
-            <a:schemeClr val="lt1"/>
-          </a:fontRef>
-        </p:style>
-        <p:txBody>
-          <a:bodyPr rtlCol="0" anchor="ctr"/>
-          <a:lstStyle/>
-          <a:p>
-            <a:pPr algn="ctr"/>
-          </a:p>
-        </p:txBody>
-      </p:sp>
-      <p:sp>
-        <p:nvSpPr>
-          <p:cNvPr id="81" name="TextBox 80"/>
-          <p:cNvSpPr txBox="1"/>
-          <p:nvPr/>
-        </p:nvSpPr>
-        <p:spPr>
-          <a:xfrm>
-            <a:off x="6784848" y="4160520"/>
-            <a:ext cx="5202936" cy="352044"/>
-          </a:xfrm>
-          <a:prstGeom prst="rect">
-            <a:avLst/>
-          </a:prstGeom>
-          <a:noFill/>
-        </p:spPr>
-        <p:txBody>
-          <a:bodyPr wrap="square">
-            <a:spAutoFit/>
-          </a:bodyPr>
-          <a:lstStyle/>
-          <a:p>
-            <a:pPr algn="l"/>
-            <a:r>
-              <a:rPr sz="900" b="0" i="1">
-                <a:solidFill>
-                  <a:srgbClr val="1A1A1A"/>
-                </a:solidFill>
-              </a:rPr>
-              <a:t>82% des dons aux programmes — rapport annuel en ligne, auditeurs indépendants.</a:t>
-            </a:r>
-          </a:p>
-        </p:txBody>
-      </p:sp>
-      <p:sp>
-        <p:nvSpPr>
-          <p:cNvPr id="82" name="Rectangle 81"/>
-          <p:cNvSpPr/>
-          <p:nvPr/>
-        </p:nvSpPr>
-        <p:spPr>
-          <a:xfrm>
-            <a:off x="274320" y="4535424"/>
-            <a:ext cx="384048" cy="425196"/>
-          </a:xfrm>
-          <a:prstGeom prst="rect">
-            <a:avLst/>
-          </a:prstGeom>
-          <a:solidFill>
-            <a:srgbClr val="005555"/>
-          </a:solidFill>
-          <a:ln>
-            <a:noFill/>
-          </a:ln>
-        </p:spPr>
-        <p:style>
-          <a:lnRef idx="1">
-            <a:schemeClr val="accent1"/>
-          </a:lnRef>
-          <a:fillRef idx="3">
-            <a:schemeClr val="accent1"/>
-          </a:fillRef>
-          <a:effectRef idx="2">
-            <a:schemeClr val="accent1"/>
-          </a:effectRef>
-          <a:fontRef idx="minor">
-            <a:schemeClr val="lt1"/>
-          </a:fontRef>
-        </p:style>
-        <p:txBody>
-          <a:bodyPr rtlCol="0" anchor="ctr"/>
-          <a:lstStyle/>
-          <a:p>
-            <a:pPr algn="ctr"/>
-          </a:p>
-        </p:txBody>
-      </p:sp>
-      <p:sp>
-        <p:nvSpPr>
-          <p:cNvPr id="83" name="TextBox 82"/>
-          <p:cNvSpPr txBox="1"/>
-          <p:nvPr/>
-        </p:nvSpPr>
-        <p:spPr>
-          <a:xfrm>
-            <a:off x="310896" y="4626864"/>
-            <a:ext cx="329184" cy="288036"/>
-          </a:xfrm>
-          <a:prstGeom prst="rect">
-            <a:avLst/>
-          </a:prstGeom>
-          <a:noFill/>
-        </p:spPr>
-        <p:txBody>
-          <a:bodyPr wrap="square">
-            <a:spAutoFit/>
-          </a:bodyPr>
-          <a:lstStyle/>
-          <a:p>
-            <a:pPr algn="ctr"/>
-            <a:r>
-              <a:rPr sz="800" b="1" i="0">
-                <a:solidFill>
-                  <a:srgbClr val="FFFFFF"/>
-                </a:solidFill>
-              </a:rPr>
-              <a:t>O9</a:t>
-            </a:r>
-          </a:p>
-        </p:txBody>
-      </p:sp>
-      <p:sp>
-        <p:nvSpPr>
-          <p:cNvPr id="84" name="Rectangle 83"/>
-          <p:cNvSpPr/>
-          <p:nvPr/>
-        </p:nvSpPr>
-        <p:spPr>
-          <a:xfrm>
-            <a:off x="685800" y="4535424"/>
-            <a:ext cx="4334256" cy="425196"/>
-          </a:xfrm>
-          <a:prstGeom prst="rect">
-            <a:avLst/>
-          </a:prstGeom>
-          <a:solidFill>
-            <a:srgbClr val="FFFFFF"/>
-          </a:solidFill>
-          <a:ln>
-            <a:noFill/>
-          </a:ln>
-        </p:spPr>
-        <p:style>
-          <a:lnRef idx="1">
-            <a:schemeClr val="accent1"/>
-          </a:lnRef>
-          <a:fillRef idx="3">
-            <a:schemeClr val="accent1"/>
-          </a:fillRef>
-          <a:effectRef idx="2">
-            <a:schemeClr val="accent1"/>
-          </a:effectRef>
-          <a:fontRef idx="minor">
-            <a:schemeClr val="lt1"/>
-          </a:fontRef>
-        </p:style>
-        <p:txBody>
-          <a:bodyPr rtlCol="0" anchor="ctr"/>
-          <a:lstStyle/>
-          <a:p>
-            <a:pPr algn="ctr"/>
-          </a:p>
-        </p:txBody>
-      </p:sp>
-      <p:sp>
-        <p:nvSpPr>
-          <p:cNvPr id="85" name="TextBox 84"/>
-          <p:cNvSpPr txBox="1"/>
-          <p:nvPr/>
-        </p:nvSpPr>
-        <p:spPr>
-          <a:xfrm>
-            <a:off x="777240" y="4608576"/>
-            <a:ext cx="4197096" cy="333756"/>
-          </a:xfrm>
-          <a:prstGeom prst="rect">
-            <a:avLst/>
-          </a:prstGeom>
-          <a:noFill/>
-        </p:spPr>
-        <p:txBody>
-          <a:bodyPr wrap="square">
-            <a:spAutoFit/>
-          </a:bodyPr>
-          <a:lstStyle/>
-          <a:p>
-            <a:pPr algn="l"/>
-            <a:r>
-              <a:rPr sz="900" b="0" i="0">
-                <a:solidFill>
-                  <a:srgbClr val="1A1A1A"/>
-                </a:solidFill>
-              </a:rPr>
-              <a:t>Je suis pressé</a:t>
-            </a:r>
-          </a:p>
-        </p:txBody>
-      </p:sp>
-      <p:sp>
-        <p:nvSpPr>
-          <p:cNvPr id="86" name="Rectangle 85"/>
-          <p:cNvSpPr/>
-          <p:nvPr/>
-        </p:nvSpPr>
-        <p:spPr>
-          <a:xfrm>
-            <a:off x="5047488" y="4535424"/>
-            <a:ext cx="1618488" cy="425196"/>
-          </a:xfrm>
-          <a:prstGeom prst="rect">
-            <a:avLst/>
-          </a:prstGeom>
-          <a:solidFill>
-            <a:srgbClr val="005555"/>
-          </a:solidFill>
-          <a:ln>
-            <a:noFill/>
-          </a:ln>
-        </p:spPr>
-        <p:style>
-          <a:lnRef idx="1">
-            <a:schemeClr val="accent1"/>
-          </a:lnRef>
-          <a:fillRef idx="3">
-            <a:schemeClr val="accent1"/>
-          </a:fillRef>
-          <a:effectRef idx="2">
-            <a:schemeClr val="accent1"/>
-          </a:effectRef>
-          <a:fontRef idx="minor">
-            <a:schemeClr val="lt1"/>
-          </a:fontRef>
-        </p:style>
-        <p:txBody>
-          <a:bodyPr rtlCol="0" anchor="ctr"/>
-          <a:lstStyle/>
-          <a:p>
-            <a:pPr algn="ctr"/>
-          </a:p>
-        </p:txBody>
-      </p:sp>
-      <p:sp>
-        <p:nvSpPr>
-          <p:cNvPr id="87" name="TextBox 86"/>
-          <p:cNvSpPr txBox="1"/>
-          <p:nvPr/>
-        </p:nvSpPr>
-        <p:spPr>
-          <a:xfrm>
-            <a:off x="5102351" y="4608576"/>
-            <a:ext cx="1527048" cy="333756"/>
-          </a:xfrm>
-          <a:prstGeom prst="rect">
-            <a:avLst/>
-          </a:prstGeom>
-          <a:noFill/>
-        </p:spPr>
-        <p:txBody>
-          <a:bodyPr wrap="square">
-            <a:spAutoFit/>
-          </a:bodyPr>
-          <a:lstStyle/>
-          <a:p>
-            <a:pPr algn="ctr"/>
-            <a:r>
-              <a:rPr sz="800" b="1" i="0">
-                <a:solidFill>
-                  <a:srgbClr val="FFFFFF"/>
-                </a:solidFill>
-              </a:rPr>
-              <a:t>Temporel</a:t>
-            </a:r>
-          </a:p>
-        </p:txBody>
-      </p:sp>
-      <p:sp>
-        <p:nvSpPr>
-          <p:cNvPr id="88" name="Rectangle 87"/>
-          <p:cNvSpPr/>
-          <p:nvPr/>
-        </p:nvSpPr>
-        <p:spPr>
-          <a:xfrm>
-            <a:off x="6693408" y="4535424"/>
-            <a:ext cx="5340096" cy="425196"/>
-          </a:xfrm>
-          <a:prstGeom prst="rect">
-            <a:avLst/>
-          </a:prstGeom>
-          <a:solidFill>
-            <a:srgbClr val="FFFFFF"/>
-          </a:solidFill>
-          <a:ln>
-            <a:noFill/>
-          </a:ln>
-        </p:spPr>
-        <p:style>
-          <a:lnRef idx="1">
-            <a:schemeClr val="accent1"/>
-          </a:lnRef>
-          <a:fillRef idx="3">
-            <a:schemeClr val="accent1"/>
-          </a:fillRef>
-          <a:effectRef idx="2">
-            <a:schemeClr val="accent1"/>
-          </a:effectRef>
-          <a:fontRef idx="minor">
-            <a:schemeClr val="lt1"/>
-          </a:fontRef>
-        </p:style>
-        <p:txBody>
-          <a:bodyPr rtlCol="0" anchor="ctr"/>
-          <a:lstStyle/>
-          <a:p>
-            <a:pPr algn="ctr"/>
-          </a:p>
-        </p:txBody>
-      </p:sp>
-      <p:sp>
-        <p:nvSpPr>
-          <p:cNvPr id="89" name="TextBox 88"/>
-          <p:cNvSpPr txBox="1"/>
-          <p:nvPr/>
-        </p:nvSpPr>
-        <p:spPr>
-          <a:xfrm>
-            <a:off x="6784848" y="4590288"/>
-            <a:ext cx="5202936" cy="352044"/>
-          </a:xfrm>
-          <a:prstGeom prst="rect">
-            <a:avLst/>
-          </a:prstGeom>
-          <a:noFill/>
-        </p:spPr>
-        <p:txBody>
-          <a:bodyPr wrap="square">
-            <a:spAutoFit/>
-          </a:bodyPr>
-          <a:lstStyle/>
-          <a:p>
-            <a:pPr algn="l"/>
-            <a:r>
-              <a:rPr sz="900" b="0" i="1">
-                <a:solidFill>
-                  <a:srgbClr val="1A1A1A"/>
-                </a:solidFill>
-              </a:rPr>
-              <a:t>45 secondes suffit : 10€/mois = 6 enfants aidés par an. C'est tout.</a:t>
-            </a:r>
-          </a:p>
-        </p:txBody>
-      </p:sp>
-      <p:sp>
-        <p:nvSpPr>
-          <p:cNvPr id="90" name="Rectangle 89"/>
-          <p:cNvSpPr/>
-          <p:nvPr/>
-        </p:nvSpPr>
-        <p:spPr>
-          <a:xfrm>
-            <a:off x="274320" y="4965192"/>
-            <a:ext cx="384048" cy="425196"/>
-          </a:xfrm>
-          <a:prstGeom prst="rect">
-            <a:avLst/>
-          </a:prstGeom>
-          <a:solidFill>
-            <a:srgbClr val="005555"/>
-          </a:solidFill>
-          <a:ln>
-            <a:noFill/>
-          </a:ln>
-        </p:spPr>
-        <p:style>
-          <a:lnRef idx="1">
-            <a:schemeClr val="accent1"/>
-          </a:lnRef>
-          <a:fillRef idx="3">
-            <a:schemeClr val="accent1"/>
-          </a:fillRef>
-          <a:effectRef idx="2">
-            <a:schemeClr val="accent1"/>
-          </a:effectRef>
-          <a:fontRef idx="minor">
-            <a:schemeClr val="lt1"/>
-          </a:fontRef>
-        </p:style>
-        <p:txBody>
-          <a:bodyPr rtlCol="0" anchor="ctr"/>
-          <a:lstStyle/>
-          <a:p>
-            <a:pPr algn="ctr"/>
-          </a:p>
-        </p:txBody>
-      </p:sp>
-      <p:sp>
-        <p:nvSpPr>
-          <p:cNvPr id="91" name="TextBox 90"/>
-          <p:cNvSpPr txBox="1"/>
-          <p:nvPr/>
-        </p:nvSpPr>
-        <p:spPr>
-          <a:xfrm>
-            <a:off x="310896" y="5056631"/>
-            <a:ext cx="329184" cy="288036"/>
-          </a:xfrm>
-          <a:prstGeom prst="rect">
-            <a:avLst/>
-          </a:prstGeom>
-          <a:noFill/>
-        </p:spPr>
-        <p:txBody>
-          <a:bodyPr wrap="square">
-            <a:spAutoFit/>
-          </a:bodyPr>
-          <a:lstStyle/>
-          <a:p>
-            <a:pPr algn="ctr"/>
-            <a:r>
-              <a:rPr sz="800" b="1" i="0">
-                <a:solidFill>
-                  <a:srgbClr val="FFFFFF"/>
-                </a:solidFill>
-              </a:rPr>
-              <a:t>O10</a:t>
-            </a:r>
-          </a:p>
-        </p:txBody>
-      </p:sp>
-      <p:sp>
-        <p:nvSpPr>
-          <p:cNvPr id="92" name="Rectangle 91"/>
-          <p:cNvSpPr/>
-          <p:nvPr/>
-        </p:nvSpPr>
-        <p:spPr>
-          <a:xfrm>
-            <a:off x="685800" y="4965192"/>
-            <a:ext cx="4334256" cy="425196"/>
-          </a:xfrm>
-          <a:prstGeom prst="rect">
-            <a:avLst/>
-          </a:prstGeom>
-          <a:solidFill>
-            <a:srgbClr val="F0F7F7"/>
-          </a:solidFill>
-          <a:ln>
-            <a:noFill/>
-          </a:ln>
-        </p:spPr>
-        <p:style>
-          <a:lnRef idx="1">
-            <a:schemeClr val="accent1"/>
-          </a:lnRef>
-          <a:fillRef idx="3">
-            <a:schemeClr val="accent1"/>
-          </a:fillRef>
-          <a:effectRef idx="2">
-            <a:schemeClr val="accent1"/>
-          </a:effectRef>
-          <a:fontRef idx="minor">
-            <a:schemeClr val="lt1"/>
-          </a:fontRef>
-        </p:style>
-        <p:txBody>
-          <a:bodyPr rtlCol="0" anchor="ctr"/>
-          <a:lstStyle/>
-          <a:p>
-            <a:pPr algn="ctr"/>
-          </a:p>
-        </p:txBody>
-      </p:sp>
-      <p:sp>
-        <p:nvSpPr>
-          <p:cNvPr id="93" name="TextBox 92"/>
-          <p:cNvSpPr txBox="1"/>
-          <p:nvPr/>
-        </p:nvSpPr>
-        <p:spPr>
-          <a:xfrm>
-            <a:off x="777240" y="5038344"/>
-            <a:ext cx="4197096" cy="333756"/>
-          </a:xfrm>
-          <a:prstGeom prst="rect">
-            <a:avLst/>
-          </a:prstGeom>
-          <a:noFill/>
-        </p:spPr>
-        <p:txBody>
-          <a:bodyPr wrap="square">
-            <a:spAutoFit/>
-          </a:bodyPr>
-          <a:lstStyle/>
-          <a:p>
-            <a:pPr algn="l"/>
-            <a:r>
-              <a:rPr sz="900" b="0" i="0">
-                <a:solidFill>
-                  <a:srgbClr val="1A1A1A"/>
-                </a:solidFill>
-              </a:rPr>
-              <a:t>Mon conjoint(e) décide</a:t>
-            </a:r>
-          </a:p>
-        </p:txBody>
-      </p:sp>
-      <p:sp>
-        <p:nvSpPr>
-          <p:cNvPr id="94" name="Rectangle 93"/>
-          <p:cNvSpPr/>
-          <p:nvPr/>
-        </p:nvSpPr>
-        <p:spPr>
-          <a:xfrm>
-            <a:off x="5047488" y="4965192"/>
-            <a:ext cx="1618488" cy="425196"/>
-          </a:xfrm>
-          <a:prstGeom prst="rect">
-            <a:avLst/>
-          </a:prstGeom>
-          <a:solidFill>
-            <a:srgbClr val="884444"/>
-          </a:solidFill>
-          <a:ln>
-            <a:noFill/>
-          </a:ln>
-        </p:spPr>
-        <p:style>
-          <a:lnRef idx="1">
-            <a:schemeClr val="accent1"/>
-          </a:lnRef>
-          <a:fillRef idx="3">
-            <a:schemeClr val="accent1"/>
-          </a:fillRef>
-          <a:effectRef idx="2">
-            <a:schemeClr val="accent1"/>
-          </a:effectRef>
-          <a:fontRef idx="minor">
-            <a:schemeClr val="lt1"/>
-          </a:fontRef>
-        </p:style>
-        <p:txBody>
-          <a:bodyPr rtlCol="0" anchor="ctr"/>
-          <a:lstStyle/>
-          <a:p>
-            <a:pPr algn="ctr"/>
-          </a:p>
-        </p:txBody>
-      </p:sp>
-      <p:sp>
-        <p:nvSpPr>
-          <p:cNvPr id="95" name="TextBox 94"/>
-          <p:cNvSpPr txBox="1"/>
-          <p:nvPr/>
-        </p:nvSpPr>
-        <p:spPr>
-          <a:xfrm>
-            <a:off x="5102351" y="5038344"/>
-            <a:ext cx="1527048" cy="333756"/>
-          </a:xfrm>
-          <a:prstGeom prst="rect">
-            <a:avLst/>
-          </a:prstGeom>
-          <a:noFill/>
-        </p:spPr>
-        <p:txBody>
-          <a:bodyPr wrap="square">
-            <a:spAutoFit/>
-          </a:bodyPr>
-          <a:lstStyle/>
-          <a:p>
-            <a:pPr algn="ctr"/>
-            <a:r>
-              <a:rPr sz="800" b="1" i="0">
-                <a:solidFill>
-                  <a:srgbClr val="FFFFFF"/>
-                </a:solidFill>
-              </a:rPr>
-              <a:t>Autorité</a:t>
-            </a:r>
-          </a:p>
-        </p:txBody>
-      </p:sp>
-      <p:sp>
-        <p:nvSpPr>
-          <p:cNvPr id="96" name="Rectangle 95"/>
-          <p:cNvSpPr/>
-          <p:nvPr/>
-        </p:nvSpPr>
-        <p:spPr>
-          <a:xfrm>
-            <a:off x="6693408" y="4965192"/>
-            <a:ext cx="5340096" cy="425196"/>
-          </a:xfrm>
-          <a:prstGeom prst="rect">
-            <a:avLst/>
-          </a:prstGeom>
-          <a:solidFill>
-            <a:srgbClr val="F0F7F7"/>
-          </a:solidFill>
-          <a:ln>
-            <a:noFill/>
-          </a:ln>
-        </p:spPr>
-        <p:style>
-          <a:lnRef idx="1">
-            <a:schemeClr val="accent1"/>
-          </a:lnRef>
-          <a:fillRef idx="3">
-            <a:schemeClr val="accent1"/>
-          </a:fillRef>
-          <a:effectRef idx="2">
-            <a:schemeClr val="accent1"/>
-          </a:effectRef>
-          <a:fontRef idx="minor">
-            <a:schemeClr val="lt1"/>
-          </a:fontRef>
-        </p:style>
-        <p:txBody>
-          <a:bodyPr rtlCol="0" anchor="ctr"/>
-          <a:lstStyle/>
-          <a:p>
-            <a:pPr algn="ctr"/>
-          </a:p>
-        </p:txBody>
-      </p:sp>
-      <p:sp>
-        <p:nvSpPr>
-          <p:cNvPr id="97" name="TextBox 96"/>
-          <p:cNvSpPr txBox="1"/>
-          <p:nvPr/>
-        </p:nvSpPr>
-        <p:spPr>
-          <a:xfrm>
-            <a:off x="6784848" y="5020055"/>
-            <a:ext cx="5202936" cy="352044"/>
-          </a:xfrm>
-          <a:prstGeom prst="rect">
-            <a:avLst/>
-          </a:prstGeom>
-          <a:noFill/>
-        </p:spPr>
-        <p:txBody>
-          <a:bodyPr wrap="square">
-            <a:spAutoFit/>
-          </a:bodyPr>
-          <a:lstStyle/>
-          <a:p>
-            <a:pPr algn="l"/>
-            <a:r>
-              <a:rPr sz="900" b="0" i="1">
-                <a:solidFill>
-                  <a:srgbClr val="1A1A1A"/>
-                </a:solidFill>
-              </a:rPr>
-              <a:t>Je vous envoie la brochure par SMS. Vous en parlez ce soir et je peux vous rappeler ?</a:t>
-            </a:r>
-          </a:p>
-        </p:txBody>
-      </p:sp>
-      <p:sp>
-        <p:nvSpPr>
-          <p:cNvPr id="98" name="Rectangle 97"/>
-          <p:cNvSpPr/>
-          <p:nvPr/>
-        </p:nvSpPr>
-        <p:spPr>
-          <a:xfrm>
-            <a:off x="274320" y="5394959"/>
-            <a:ext cx="384048" cy="425196"/>
-          </a:xfrm>
-          <a:prstGeom prst="rect">
-            <a:avLst/>
-          </a:prstGeom>
-          <a:solidFill>
-            <a:srgbClr val="005555"/>
-          </a:solidFill>
-          <a:ln>
-            <a:noFill/>
-          </a:ln>
-        </p:spPr>
-        <p:style>
-          <a:lnRef idx="1">
-            <a:schemeClr val="accent1"/>
-          </a:lnRef>
-          <a:fillRef idx="3">
-            <a:schemeClr val="accent1"/>
-          </a:fillRef>
-          <a:effectRef idx="2">
-            <a:schemeClr val="accent1"/>
-          </a:effectRef>
-          <a:fontRef idx="minor">
-            <a:schemeClr val="lt1"/>
-          </a:fontRef>
-        </p:style>
-        <p:txBody>
-          <a:bodyPr rtlCol="0" anchor="ctr"/>
-          <a:lstStyle/>
-          <a:p>
-            <a:pPr algn="ctr"/>
-          </a:p>
-        </p:txBody>
-      </p:sp>
-      <p:sp>
-        <p:nvSpPr>
-          <p:cNvPr id="99" name="TextBox 98"/>
-          <p:cNvSpPr txBox="1"/>
-          <p:nvPr/>
-        </p:nvSpPr>
-        <p:spPr>
-          <a:xfrm>
-            <a:off x="310896" y="5486399"/>
-            <a:ext cx="329184" cy="288036"/>
-          </a:xfrm>
-          <a:prstGeom prst="rect">
-            <a:avLst/>
-          </a:prstGeom>
-          <a:noFill/>
-        </p:spPr>
-        <p:txBody>
-          <a:bodyPr wrap="square">
-            <a:spAutoFit/>
-          </a:bodyPr>
-          <a:lstStyle/>
-          <a:p>
-            <a:pPr algn="ctr"/>
-            <a:r>
-              <a:rPr sz="800" b="1" i="0">
-                <a:solidFill>
-                  <a:srgbClr val="FFFFFF"/>
-                </a:solidFill>
-              </a:rPr>
-              <a:t>O11</a:t>
-            </a:r>
-          </a:p>
-        </p:txBody>
-      </p:sp>
-      <p:sp>
-        <p:nvSpPr>
-          <p:cNvPr id="100" name="Rectangle 99"/>
-          <p:cNvSpPr/>
-          <p:nvPr/>
-        </p:nvSpPr>
-        <p:spPr>
-          <a:xfrm>
-            <a:off x="685800" y="5394959"/>
-            <a:ext cx="4334256" cy="425196"/>
-          </a:xfrm>
-          <a:prstGeom prst="rect">
-            <a:avLst/>
-          </a:prstGeom>
-          <a:solidFill>
-            <a:srgbClr val="FFFFFF"/>
-          </a:solidFill>
-          <a:ln>
-            <a:noFill/>
-          </a:ln>
-        </p:spPr>
-        <p:style>
-          <a:lnRef idx="1">
-            <a:schemeClr val="accent1"/>
-          </a:lnRef>
-          <a:fillRef idx="3">
-            <a:schemeClr val="accent1"/>
-          </a:fillRef>
-          <a:effectRef idx="2">
-            <a:schemeClr val="accent1"/>
-          </a:effectRef>
-          <a:fontRef idx="minor">
-            <a:schemeClr val="lt1"/>
-          </a:fontRef>
-        </p:style>
-        <p:txBody>
-          <a:bodyPr rtlCol="0" anchor="ctr"/>
-          <a:lstStyle/>
-          <a:p>
-            <a:pPr algn="ctr"/>
-          </a:p>
-        </p:txBody>
-      </p:sp>
-      <p:sp>
-        <p:nvSpPr>
-          <p:cNvPr id="101" name="TextBox 100"/>
-          <p:cNvSpPr txBox="1"/>
-          <p:nvPr/>
-        </p:nvSpPr>
-        <p:spPr>
-          <a:xfrm>
-            <a:off x="777240" y="5468112"/>
-            <a:ext cx="4197096" cy="333756"/>
-          </a:xfrm>
-          <a:prstGeom prst="rect">
-            <a:avLst/>
-          </a:prstGeom>
-          <a:noFill/>
-        </p:spPr>
-        <p:txBody>
-          <a:bodyPr wrap="square">
-            <a:spAutoFit/>
-          </a:bodyPr>
-          <a:lstStyle/>
-          <a:p>
-            <a:pPr algn="l"/>
-            <a:r>
-              <a:rPr sz="900" b="0" i="0">
-                <a:solidFill>
-                  <a:srgbClr val="1A1A1A"/>
-                </a:solidFill>
-              </a:rPr>
-              <a:t>Je n'aime pas les prélèvements</a:t>
-            </a:r>
-          </a:p>
-        </p:txBody>
-      </p:sp>
-      <p:sp>
-        <p:nvSpPr>
-          <p:cNvPr id="102" name="Rectangle 101"/>
-          <p:cNvSpPr/>
-          <p:nvPr/>
-        </p:nvSpPr>
-        <p:spPr>
-          <a:xfrm>
-            <a:off x="5047488" y="5394959"/>
-            <a:ext cx="1618488" cy="425196"/>
-          </a:xfrm>
-          <a:prstGeom prst="rect">
-            <a:avLst/>
-          </a:prstGeom>
-          <a:solidFill>
-            <a:srgbClr val="4477AA"/>
-          </a:solidFill>
-          <a:ln>
-            <a:noFill/>
-          </a:ln>
-        </p:spPr>
-        <p:style>
-          <a:lnRef idx="1">
-            <a:schemeClr val="accent1"/>
-          </a:lnRef>
-          <a:fillRef idx="3">
-            <a:schemeClr val="accent1"/>
-          </a:fillRef>
-          <a:effectRef idx="2">
-            <a:schemeClr val="accent1"/>
-          </a:effectRef>
-          <a:fontRef idx="minor">
-            <a:schemeClr val="lt1"/>
-          </a:fontRef>
-        </p:style>
-        <p:txBody>
-          <a:bodyPr rtlCol="0" anchor="ctr"/>
-          <a:lstStyle/>
-          <a:p>
-            <a:pPr algn="ctr"/>
-          </a:p>
-        </p:txBody>
-      </p:sp>
-      <p:sp>
-        <p:nvSpPr>
-          <p:cNvPr id="103" name="TextBox 102"/>
-          <p:cNvSpPr txBox="1"/>
-          <p:nvPr/>
-        </p:nvSpPr>
-        <p:spPr>
-          <a:xfrm>
-            <a:off x="5102351" y="5468112"/>
-            <a:ext cx="1527048" cy="333756"/>
-          </a:xfrm>
-          <a:prstGeom prst="rect">
-            <a:avLst/>
-          </a:prstGeom>
-          <a:noFill/>
-        </p:spPr>
-        <p:txBody>
-          <a:bodyPr wrap="square">
-            <a:spAutoFit/>
-          </a:bodyPr>
-          <a:lstStyle/>
-          <a:p>
-            <a:pPr algn="ctr"/>
-            <a:r>
-              <a:rPr sz="800" b="1" i="0">
-                <a:solidFill>
-                  <a:srgbClr val="FFFFFF"/>
-                </a:solidFill>
-              </a:rPr>
-              <a:t>Processus</a:t>
-            </a:r>
-          </a:p>
-        </p:txBody>
-      </p:sp>
-      <p:sp>
-        <p:nvSpPr>
-          <p:cNvPr id="104" name="Rectangle 103"/>
-          <p:cNvSpPr/>
-          <p:nvPr/>
-        </p:nvSpPr>
-        <p:spPr>
-          <a:xfrm>
-            <a:off x="6693408" y="5394959"/>
-            <a:ext cx="5340096" cy="425196"/>
-          </a:xfrm>
-          <a:prstGeom prst="rect">
-            <a:avLst/>
-          </a:prstGeom>
-          <a:solidFill>
-            <a:srgbClr val="FFFFFF"/>
-          </a:solidFill>
-          <a:ln>
-            <a:noFill/>
-          </a:ln>
-        </p:spPr>
-        <p:style>
-          <a:lnRef idx="1">
-            <a:schemeClr val="accent1"/>
-          </a:lnRef>
-          <a:fillRef idx="3">
-            <a:schemeClr val="accent1"/>
-          </a:fillRef>
-          <a:effectRef idx="2">
-            <a:schemeClr val="accent1"/>
-          </a:effectRef>
-          <a:fontRef idx="minor">
-            <a:schemeClr val="lt1"/>
-          </a:fontRef>
-        </p:style>
-        <p:txBody>
-          <a:bodyPr rtlCol="0" anchor="ctr"/>
-          <a:lstStyle/>
-          <a:p>
-            <a:pPr algn="ctr"/>
-          </a:p>
-        </p:txBody>
-      </p:sp>
-      <p:sp>
-        <p:nvSpPr>
-          <p:cNvPr id="105" name="TextBox 104"/>
-          <p:cNvSpPr txBox="1"/>
-          <p:nvPr/>
-        </p:nvSpPr>
-        <p:spPr>
-          <a:xfrm>
-            <a:off x="6784848" y="5449823"/>
-            <a:ext cx="5202936" cy="352044"/>
-          </a:xfrm>
-          <a:prstGeom prst="rect">
-            <a:avLst/>
-          </a:prstGeom>
-          <a:noFill/>
-        </p:spPr>
-        <p:txBody>
-          <a:bodyPr wrap="square">
-            <a:spAutoFit/>
-          </a:bodyPr>
-          <a:lstStyle/>
-          <a:p>
-            <a:pPr algn="l"/>
-            <a:r>
-              <a:rPr sz="900" b="0" i="1">
-                <a:solidFill>
-                  <a:srgbClr val="1A1A1A"/>
-                </a:solidFill>
-              </a:rPr>
-              <a:t>Arrêt en 1 clic, sans engagement minimum, modification à tout moment.</a:t>
-            </a:r>
-          </a:p>
-        </p:txBody>
-      </p:sp>
-      <p:sp>
-        <p:nvSpPr>
-          <p:cNvPr id="106" name="Rectangle 105"/>
-          <p:cNvSpPr/>
-          <p:nvPr/>
-        </p:nvSpPr>
-        <p:spPr>
-          <a:xfrm>
-            <a:off x="274320" y="5824727"/>
-            <a:ext cx="384048" cy="425196"/>
-          </a:xfrm>
-          <a:prstGeom prst="rect">
-            <a:avLst/>
-          </a:prstGeom>
-          <a:solidFill>
-            <a:srgbClr val="005555"/>
-          </a:solidFill>
-          <a:ln>
-            <a:noFill/>
-          </a:ln>
-        </p:spPr>
-        <p:style>
-          <a:lnRef idx="1">
-            <a:schemeClr val="accent1"/>
-          </a:lnRef>
-          <a:fillRef idx="3">
-            <a:schemeClr val="accent1"/>
-          </a:fillRef>
-          <a:effectRef idx="2">
-            <a:schemeClr val="accent1"/>
-          </a:effectRef>
-          <a:fontRef idx="minor">
-            <a:schemeClr val="lt1"/>
-          </a:fontRef>
-        </p:style>
-        <p:txBody>
-          <a:bodyPr rtlCol="0" anchor="ctr"/>
-          <a:lstStyle/>
-          <a:p>
-            <a:pPr algn="ctr"/>
-          </a:p>
-        </p:txBody>
-      </p:sp>
-      <p:sp>
-        <p:nvSpPr>
-          <p:cNvPr id="107" name="TextBox 106"/>
-          <p:cNvSpPr txBox="1"/>
-          <p:nvPr/>
-        </p:nvSpPr>
-        <p:spPr>
-          <a:xfrm>
-            <a:off x="310896" y="5916167"/>
-            <a:ext cx="329184" cy="288036"/>
-          </a:xfrm>
-          <a:prstGeom prst="rect">
-            <a:avLst/>
-          </a:prstGeom>
-          <a:noFill/>
-        </p:spPr>
-        <p:txBody>
-          <a:bodyPr wrap="square">
-            <a:spAutoFit/>
-          </a:bodyPr>
-          <a:lstStyle/>
-          <a:p>
-            <a:pPr algn="ctr"/>
-            <a:r>
-              <a:rPr sz="800" b="1" i="0">
-                <a:solidFill>
-                  <a:srgbClr val="FFFFFF"/>
-                </a:solidFill>
-              </a:rPr>
-              <a:t>O12</a:t>
-            </a:r>
-          </a:p>
-        </p:txBody>
-      </p:sp>
-      <p:sp>
-        <p:nvSpPr>
-          <p:cNvPr id="108" name="Rectangle 107"/>
-          <p:cNvSpPr/>
-          <p:nvPr/>
-        </p:nvSpPr>
-        <p:spPr>
-          <a:xfrm>
-            <a:off x="685800" y="5824727"/>
-            <a:ext cx="4334256" cy="425196"/>
-          </a:xfrm>
-          <a:prstGeom prst="rect">
-            <a:avLst/>
-          </a:prstGeom>
-          <a:solidFill>
-            <a:srgbClr val="F0F7F7"/>
-          </a:solidFill>
-          <a:ln>
-            <a:noFill/>
-          </a:ln>
-        </p:spPr>
-        <p:style>
-          <a:lnRef idx="1">
-            <a:schemeClr val="accent1"/>
-          </a:lnRef>
-          <a:fillRef idx="3">
-            <a:schemeClr val="accent1"/>
-          </a:fillRef>
-          <a:effectRef idx="2">
-            <a:schemeClr val="accent1"/>
-          </a:effectRef>
-          <a:fontRef idx="minor">
-            <a:schemeClr val="lt1"/>
-          </a:fontRef>
-        </p:style>
-        <p:txBody>
-          <a:bodyPr rtlCol="0" anchor="ctr"/>
-          <a:lstStyle/>
-          <a:p>
-            <a:pPr algn="ctr"/>
-          </a:p>
-        </p:txBody>
-      </p:sp>
-      <p:sp>
-        <p:nvSpPr>
-          <p:cNvPr id="109" name="TextBox 108"/>
-          <p:cNvSpPr txBox="1"/>
-          <p:nvPr/>
-        </p:nvSpPr>
-        <p:spPr>
-          <a:xfrm>
-            <a:off x="777240" y="5897879"/>
-            <a:ext cx="4197096" cy="333756"/>
-          </a:xfrm>
-          <a:prstGeom prst="rect">
-            <a:avLst/>
-          </a:prstGeom>
-          <a:noFill/>
-        </p:spPr>
-        <p:txBody>
-          <a:bodyPr wrap="square">
-            <a:spAutoFit/>
-          </a:bodyPr>
-          <a:lstStyle/>
-          <a:p>
-            <a:pPr algn="l"/>
-            <a:r>
-              <a:rPr sz="900" b="0" i="0">
-                <a:solidFill>
-                  <a:srgbClr val="1A1A1A"/>
-                </a:solidFill>
-              </a:rPr>
-              <a:t>Politique / religion</a:t>
-            </a:r>
-          </a:p>
-        </p:txBody>
-      </p:sp>
-      <p:sp>
-        <p:nvSpPr>
-          <p:cNvPr id="110" name="Rectangle 109"/>
-          <p:cNvSpPr/>
-          <p:nvPr/>
-        </p:nvSpPr>
-        <p:spPr>
-          <a:xfrm>
-            <a:off x="5047488" y="5824727"/>
-            <a:ext cx="1618488" cy="425196"/>
-          </a:xfrm>
-          <a:prstGeom prst="rect">
-            <a:avLst/>
-          </a:prstGeom>
-          <a:solidFill>
-            <a:srgbClr val="884488"/>
-          </a:solidFill>
-          <a:ln>
-            <a:noFill/>
-          </a:ln>
-        </p:spPr>
-        <p:style>
-          <a:lnRef idx="1">
-            <a:schemeClr val="accent1"/>
-          </a:lnRef>
-          <a:fillRef idx="3">
-            <a:schemeClr val="accent1"/>
-          </a:fillRef>
-          <a:effectRef idx="2">
-            <a:schemeClr val="accent1"/>
-          </a:effectRef>
-          <a:fontRef idx="minor">
-            <a:schemeClr val="lt1"/>
-          </a:fontRef>
-        </p:style>
-        <p:txBody>
-          <a:bodyPr rtlCol="0" anchor="ctr"/>
-          <a:lstStyle/>
-          <a:p>
-            <a:pPr algn="ctr"/>
-          </a:p>
-        </p:txBody>
-      </p:sp>
-      <p:sp>
-        <p:nvSpPr>
-          <p:cNvPr id="111" name="TextBox 110"/>
-          <p:cNvSpPr txBox="1"/>
-          <p:nvPr/>
-        </p:nvSpPr>
-        <p:spPr>
-          <a:xfrm>
-            <a:off x="5102351" y="5897879"/>
-            <a:ext cx="1527048" cy="333756"/>
-          </a:xfrm>
-          <a:prstGeom prst="rect">
-            <a:avLst/>
-          </a:prstGeom>
-          <a:noFill/>
-        </p:spPr>
-        <p:txBody>
-          <a:bodyPr wrap="square">
-            <a:spAutoFit/>
-          </a:bodyPr>
-          <a:lstStyle/>
-          <a:p>
-            <a:pPr algn="ctr"/>
-            <a:r>
-              <a:rPr sz="800" b="1" i="0">
-                <a:solidFill>
-                  <a:srgbClr val="FFFFFF"/>
-                </a:solidFill>
-              </a:rPr>
-              <a:t>Valeurs</a:t>
-            </a:r>
-          </a:p>
-        </p:txBody>
-      </p:sp>
-      <p:sp>
-        <p:nvSpPr>
-          <p:cNvPr id="112" name="Rectangle 111"/>
-          <p:cNvSpPr/>
-          <p:nvPr/>
-        </p:nvSpPr>
-        <p:spPr>
-          <a:xfrm>
-            <a:off x="6693408" y="5824727"/>
-            <a:ext cx="5340096" cy="425196"/>
-          </a:xfrm>
-          <a:prstGeom prst="rect">
-            <a:avLst/>
-          </a:prstGeom>
-          <a:solidFill>
-            <a:srgbClr val="F0F7F7"/>
-          </a:solidFill>
-          <a:ln>
-            <a:noFill/>
-          </a:ln>
-        </p:spPr>
-        <p:style>
-          <a:lnRef idx="1">
-            <a:schemeClr val="accent1"/>
-          </a:lnRef>
-          <a:fillRef idx="3">
-            <a:schemeClr val="accent1"/>
-          </a:fillRef>
-          <a:effectRef idx="2">
-            <a:schemeClr val="accent1"/>
-          </a:effectRef>
-          <a:fontRef idx="minor">
-            <a:schemeClr val="lt1"/>
-          </a:fontRef>
-        </p:style>
-        <p:txBody>
-          <a:bodyPr rtlCol="0" anchor="ctr"/>
-          <a:lstStyle/>
-          <a:p>
-            <a:pPr algn="ctr"/>
-          </a:p>
-        </p:txBody>
-      </p:sp>
-      <p:sp>
-        <p:nvSpPr>
-          <p:cNvPr id="113" name="TextBox 112"/>
-          <p:cNvSpPr txBox="1"/>
-          <p:nvPr/>
-        </p:nvSpPr>
-        <p:spPr>
-          <a:xfrm>
-            <a:off x="6784848" y="5879591"/>
-            <a:ext cx="5202936" cy="352044"/>
-          </a:xfrm>
-          <a:prstGeom prst="rect">
-            <a:avLst/>
-          </a:prstGeom>
-          <a:noFill/>
-        </p:spPr>
-        <p:txBody>
-          <a:bodyPr wrap="square">
-            <a:spAutoFit/>
-          </a:bodyPr>
-          <a:lstStyle/>
-          <a:p>
-            <a:pPr algn="l"/>
-            <a:r>
-              <a:rPr sz="900" b="0" i="1">
-                <a:solidFill>
-                  <a:srgbClr val="1A1A1A"/>
-                </a:solidFill>
-              </a:rPr>
-              <a:t>UNICEF est strictement apolitique et aconfessionnel — seuls les droits des enfants comptent.</a:t>
+              <a:t>En production, la majorité des appels se terminent à la Catégorie 1. Maîtriser ces 8 objections initiales est la clé pour atteindre vos 9 CU/H.</a:t>
             </a:r>
           </a:p>
         </p:txBody>

--- a/FIM_BookJ4_Objections_V6-01062026SHY-TE.pptx
+++ b/FIM_BookJ4_Objections_V6-01062026SHY-TE.pptx
@@ -9,6 +9,7 @@
     <p:sldId id="257" r:id="rId8"/>
     <p:sldId id="258" r:id="rId9"/>
     <p:sldId id="259" r:id="rId10"/>
+    <p:sldId id="260" r:id="rId11"/>
   </p:sldIdLst>
   <p:sldSz cx="12188952" cy="6858000" type="screen4x3"/>
   <p:notesSz cx="6858000" cy="9144000"/>
@@ -3149,7 +3150,7 @@
             <a:avLst/>
           </a:prstGeom>
           <a:solidFill>
-            <a:srgbClr val="005555"/>
+            <a:srgbClr val="005050"/>
           </a:solidFill>
           <a:ln>
             <a:noFill/>
@@ -3229,7 +3230,7 @@
         <p:spPr>
           <a:xfrm>
             <a:off x="347472" y="91440"/>
-            <a:ext cx="3200400" cy="438912"/>
+            <a:ext cx="4572000" cy="402336"/>
           </a:xfrm>
           <a:prstGeom prst="rect">
             <a:avLst/>
@@ -3262,8 +3263,8 @@
         </p:nvSpPr>
         <p:spPr>
           <a:xfrm>
-            <a:off x="347472" y="530352"/>
-            <a:ext cx="7772400" cy="347472"/>
+            <a:off x="347472" y="493776"/>
+            <a:ext cx="8229600" cy="329184"/>
           </a:xfrm>
           <a:prstGeom prst="rect">
             <a:avLst/>
@@ -3296,8 +3297,8 @@
         </p:nvSpPr>
         <p:spPr>
           <a:xfrm>
-            <a:off x="347472" y="932688"/>
-            <a:ext cx="7772400" cy="292608"/>
+            <a:off x="347472" y="877824"/>
+            <a:ext cx="8229600" cy="274320"/>
           </a:xfrm>
           <a:prstGeom prst="rect">
             <a:avLst/>
@@ -3330,8 +3331,8 @@
         </p:nvSpPr>
         <p:spPr>
           <a:xfrm>
-            <a:off x="347472" y="1207008"/>
-            <a:ext cx="10515600" cy="914400"/>
+            <a:off x="347472" y="1188720"/>
+            <a:ext cx="10515600" cy="960120"/>
           </a:xfrm>
           <a:prstGeom prst="rect">
             <a:avLst/>
@@ -3346,7 +3347,7 @@
           <a:p>
             <a:pPr algn="l"/>
             <a:r>
-              <a:rPr sz="3000" b="1" i="0">
+              <a:rPr sz="2900" b="1" i="0">
                 <a:solidFill>
                   <a:srgbClr val="FFFFFF"/>
                 </a:solidFill>
@@ -3364,8 +3365,8 @@
         </p:nvSpPr>
         <p:spPr>
           <a:xfrm>
-            <a:off x="347472" y="1901952"/>
-            <a:ext cx="10515600" cy="402336"/>
+            <a:off x="347472" y="1920240"/>
+            <a:ext cx="10515600" cy="384048"/>
           </a:xfrm>
           <a:prstGeom prst="rect">
             <a:avLst/>
@@ -3406,8 +3407,8 @@
         </p:blipFill>
         <p:spPr>
           <a:xfrm>
-            <a:off x="11247120" y="45720"/>
-            <a:ext cx="822960" cy="804672"/>
+            <a:off x="11228832" y="0"/>
+            <a:ext cx="841248" cy="676656"/>
           </a:xfrm>
           <a:prstGeom prst="rect">
             <a:avLst/>
@@ -3429,7 +3430,7 @@
             <a:avLst/>
           </a:prstGeom>
           <a:solidFill>
-            <a:srgbClr val="005555"/>
+            <a:srgbClr val="005050"/>
           </a:solidFill>
           <a:ln>
             <a:noFill/>
@@ -3487,42 +3488,6 @@
                 </a:solidFill>
               </a:rPr>
               <a:t>SHY-Performance  ·  Formation FIM  ·  UNICEF France  ·  V6-01062026SHY-TE</a:t>
-            </a:r>
-          </a:p>
-        </p:txBody>
-      </p:sp>
-      <p:sp>
-        <p:nvSpPr>
-          <p:cNvPr id="13" name="TextBox 12"/>
-          <p:cNvSpPr txBox="1"/>
-          <p:nvPr/>
-        </p:nvSpPr>
-        <p:spPr>
-          <a:xfrm>
-            <a:off x="457200" y="2514600"/>
-            <a:ext cx="10789920" cy="1005840"/>
-          </a:xfrm>
-          <a:prstGeom prst="rect">
-            <a:avLst/>
-          </a:prstGeom>
-          <a:noFill/>
-        </p:spPr>
-        <p:txBody>
-          <a:bodyPr wrap="square">
-            <a:spAutoFit/>
-          </a:bodyPr>
-          <a:lstStyle/>
-          <a:p>
-            <a:pPr algn="l"/>
-            <a:r>
-              <a:rPr sz="1400" b="0" i="0">
-                <a:solidFill>
-                  <a:srgbClr val="1A1A1A"/>
-                </a:solidFill>
-              </a:rPr>
-              <a:t>Aujourd'hui vous apprenez à transformer chaque objection en opportunité de dialogue.
-Un prospect qui objecte est un prospect qui est encore là — et ça compte.
-Mantra : « Le refus d'aujourd'hui peut être le don de demain »</a:t>
             </a:r>
           </a:p>
         </p:txBody>
@@ -3603,7 +3568,7 @@
             <a:avLst/>
           </a:prstGeom>
           <a:solidFill>
-            <a:srgbClr val="005555"/>
+            <a:srgbClr val="005050"/>
           </a:solidFill>
           <a:ln>
             <a:noFill/>
@@ -3682,8 +3647,8 @@
         </p:nvSpPr>
         <p:spPr>
           <a:xfrm>
-            <a:off x="164592" y="73152"/>
-            <a:ext cx="2011680" cy="347472"/>
+            <a:off x="164592" y="91440"/>
+            <a:ext cx="1920240" cy="329184"/>
           </a:xfrm>
           <a:prstGeom prst="rect">
             <a:avLst/>
@@ -3716,8 +3681,8 @@
         </p:nvSpPr>
         <p:spPr>
           <a:xfrm>
-            <a:off x="2286000" y="91440"/>
-            <a:ext cx="36576" cy="502920"/>
+            <a:off x="2212848" y="109728"/>
+            <a:ext cx="36576" cy="475488"/>
           </a:xfrm>
           <a:prstGeom prst="rect">
             <a:avLst/>
@@ -3759,8 +3724,8 @@
         </p:nvSpPr>
         <p:spPr>
           <a:xfrm>
-            <a:off x="2423160" y="91440"/>
-            <a:ext cx="9235440" cy="502920"/>
+            <a:off x="2350008" y="91440"/>
+            <a:ext cx="8823960" cy="502920"/>
           </a:xfrm>
           <a:prstGeom prst="rect">
             <a:avLst/>
@@ -3801,8 +3766,8 @@
         </p:blipFill>
         <p:spPr>
           <a:xfrm>
-            <a:off x="11247120" y="0"/>
-            <a:ext cx="822960" cy="676656"/>
+            <a:off x="11228832" y="0"/>
+            <a:ext cx="841248" cy="676656"/>
           </a:xfrm>
           <a:prstGeom prst="rect">
             <a:avLst/>
@@ -3824,7 +3789,7 @@
             <a:avLst/>
           </a:prstGeom>
           <a:solidFill>
-            <a:srgbClr val="005555"/>
+            <a:srgbClr val="005050"/>
           </a:solidFill>
           <a:ln>
             <a:noFill/>
@@ -3901,7 +3866,7 @@
             <a:avLst/>
           </a:prstGeom>
           <a:solidFill>
-            <a:srgbClr val="005555"/>
+            <a:srgbClr val="005050"/>
           </a:solidFill>
           <a:ln>
             <a:noFill/>
@@ -3982,7 +3947,7 @@
           </a:solidFill>
           <a:ln w="15240">
             <a:solidFill>
-              <a:srgbClr val="005555"/>
+              <a:srgbClr val="005050"/>
             </a:solidFill>
           </a:ln>
         </p:spPr>
@@ -4037,7 +4002,7 @@
                   <a:srgbClr val="1A1A1A"/>
                 </a:solidFill>
               </a:rPr>
-              <a:t>Vous écoutez 5 extraits d'appels :
+              <a:t>Écoute de 5 extraits d'appels :
 bonne et mauvaise gestion
 d'une objection.</a:t>
             </a:r>
@@ -4354,8 +4319,8 @@
                 </a:solidFill>
               </a:rPr>
               <a:t>15 objections · 5 catégories
-Méthode AAR : Accuser réception
-/ Argumenter / Relancer</a:t>
+Méthode AAR
+Accuser réception/Argumenter/Relancer</a:t>
             </a:r>
           </a:p>
         </p:txBody>
@@ -4590,7 +4555,7 @@
                   <a:srgbClr val="FFFFFF"/>
                 </a:solidFill>
               </a:rPr>
-              <a:t>Vos 3 réussites à valider aujourd'hui</a:t>
+              <a:t>À retenir</a:t>
             </a:r>
           </a:p>
         </p:txBody>
@@ -4669,7 +4634,7 @@
                   <a:srgbClr val="1A1A1A"/>
                 </a:solidFill>
               </a:rPr>
-              <a:t>✔ Grille écoute active validée par formateur</a:t>
+              <a:t>✔ Grille écoute active validée formateur</a:t>
             </a:r>
           </a:p>
         </p:txBody>
@@ -4748,7 +4713,7 @@
                   <a:srgbClr val="1A1A1A"/>
                 </a:solidFill>
               </a:rPr>
-              <a:t>✔ Réflexion LFI : 'Quelle objection me challenge le plus ?'</a:t>
+              <a:t>✔ LFI : 'Quelle objection me challenge le plus ?'</a:t>
             </a:r>
           </a:p>
         </p:txBody>
@@ -4827,7 +4792,7 @@
                   <a:srgbClr val="1A1A1A"/>
                 </a:solidFill>
               </a:rPr>
-              <a:t>✔ Score seuil : 14/20 pour validation J4</a:t>
+              <a:t>✔ Score seuil 14/20 pour validation J4</a:t>
             </a:r>
           </a:p>
         </p:txBody>
@@ -4908,7 +4873,7 @@
             <a:avLst/>
           </a:prstGeom>
           <a:solidFill>
-            <a:srgbClr val="005555"/>
+            <a:srgbClr val="005050"/>
           </a:solidFill>
           <a:ln>
             <a:noFill/>
@@ -4987,8 +4952,8 @@
         </p:nvSpPr>
         <p:spPr>
           <a:xfrm>
-            <a:off x="164592" y="73152"/>
-            <a:ext cx="2011680" cy="347472"/>
+            <a:off x="164592" y="91440"/>
+            <a:ext cx="1920240" cy="329184"/>
           </a:xfrm>
           <a:prstGeom prst="rect">
             <a:avLst/>
@@ -5021,8 +4986,8 @@
         </p:nvSpPr>
         <p:spPr>
           <a:xfrm>
-            <a:off x="2286000" y="91440"/>
-            <a:ext cx="36576" cy="502920"/>
+            <a:off x="2212848" y="109728"/>
+            <a:ext cx="36576" cy="475488"/>
           </a:xfrm>
           <a:prstGeom prst="rect">
             <a:avLst/>
@@ -5064,8 +5029,8 @@
         </p:nvSpPr>
         <p:spPr>
           <a:xfrm>
-            <a:off x="2423160" y="91440"/>
-            <a:ext cx="9235440" cy="502920"/>
+            <a:off x="2350008" y="91440"/>
+            <a:ext cx="8823960" cy="502920"/>
           </a:xfrm>
           <a:prstGeom prst="rect">
             <a:avLst/>
@@ -5085,7 +5050,7 @@
                   <a:srgbClr val="FFFFFF"/>
                 </a:solidFill>
               </a:rPr>
-              <a:t>Votre Méthode en 3 Temps — AAR</a:t>
+              <a:t>Votre Méthode AAR — Accuser Réception · Argumenter · Relancer</a:t>
             </a:r>
           </a:p>
         </p:txBody>
@@ -5106,8 +5071,8 @@
         </p:blipFill>
         <p:spPr>
           <a:xfrm>
-            <a:off x="11247120" y="0"/>
-            <a:ext cx="822960" cy="676656"/>
+            <a:off x="11228832" y="0"/>
+            <a:ext cx="841248" cy="676656"/>
           </a:xfrm>
           <a:prstGeom prst="rect">
             <a:avLst/>
@@ -5129,7 +5094,7 @@
             <a:avLst/>
           </a:prstGeom>
           <a:solidFill>
-            <a:srgbClr val="005555"/>
+            <a:srgbClr val="005050"/>
           </a:solidFill>
           <a:ln>
             <a:noFill/>
@@ -5200,13 +5165,13 @@
         <p:spPr>
           <a:xfrm>
             <a:off x="274320" y="804672"/>
-            <a:ext cx="3813048" cy="640080"/>
+            <a:ext cx="3813048" cy="621792"/>
           </a:xfrm>
           <a:prstGeom prst="rect">
             <a:avLst/>
           </a:prstGeom>
           <a:solidFill>
-            <a:srgbClr val="005555"/>
+            <a:srgbClr val="005050"/>
           </a:solidFill>
           <a:ln>
             <a:noFill/>
@@ -5243,7 +5208,7 @@
         <p:spPr>
           <a:xfrm>
             <a:off x="402336" y="822960"/>
-            <a:ext cx="3611879" cy="603504"/>
+            <a:ext cx="3593592" cy="585216"/>
           </a:xfrm>
           <a:prstGeom prst="rect">
             <a:avLst/>
@@ -5258,7 +5223,7 @@
           <a:p>
             <a:pPr algn="ctr"/>
             <a:r>
-              <a:rPr sz="1600" b="1" i="0">
+              <a:rPr sz="1500" b="1" i="0">
                 <a:solidFill>
                   <a:srgbClr val="FFFFFF"/>
                 </a:solidFill>
@@ -5278,8 +5243,8 @@
         </p:nvSpPr>
         <p:spPr>
           <a:xfrm>
-            <a:off x="274320" y="1444752"/>
-            <a:ext cx="3813048" cy="4251960"/>
+            <a:off x="274320" y="1426464"/>
+            <a:ext cx="3813048" cy="4279392"/>
           </a:xfrm>
           <a:prstGeom prst="rect">
             <a:avLst/>
@@ -5289,7 +5254,7 @@
           </a:solidFill>
           <a:ln w="22860">
             <a:solidFill>
-              <a:srgbClr val="005555"/>
+              <a:srgbClr val="005050"/>
             </a:solidFill>
           </a:ln>
         </p:spPr>
@@ -5323,8 +5288,8 @@
         </p:nvSpPr>
         <p:spPr>
           <a:xfrm>
-            <a:off x="420623" y="1517904"/>
-            <a:ext cx="3557015" cy="4069080"/>
+            <a:off x="420623" y="1499616"/>
+            <a:ext cx="3520440" cy="4078224"/>
           </a:xfrm>
           <a:prstGeom prst="rect">
             <a:avLst/>
@@ -5346,14 +5311,11 @@
               </a:rPr>
               <a:t>Montrez que vous avez entendu.
 Ne justifiez pas immédiatement.
-Ne contre-attaquez pas.
-Exemples :
-'Je comprends tout à fait votre réserve…'
-'C'est une question que beaucoup de personnes
-se posent et c'est tout à fait légitime…'
-'Je vous entends…'
-⚠ Ce que vous ne faites pas :
-'Oui mais…' ou 'Non, vous avez tort…'</a:t>
+'Je comprends tout à fait…'
+'C'est une question que beaucoup
+se posent et c'est légitime…'
+⚠ Pas de 'Oui mais…' ou
+'Non vous avez tort…'</a:t>
             </a:r>
           </a:p>
         </p:txBody>
@@ -5366,8 +5328,8 @@
         </p:nvSpPr>
         <p:spPr>
           <a:xfrm>
-            <a:off x="4224528" y="804672"/>
-            <a:ext cx="3813048" cy="640080"/>
+            <a:off x="4206240" y="804672"/>
+            <a:ext cx="3813048" cy="621792"/>
           </a:xfrm>
           <a:prstGeom prst="rect">
             <a:avLst/>
@@ -5409,8 +5371,8 @@
         </p:nvSpPr>
         <p:spPr>
           <a:xfrm>
-            <a:off x="4352544" y="822960"/>
-            <a:ext cx="3611879" cy="603504"/>
+            <a:off x="4334255" y="822960"/>
+            <a:ext cx="3593592" cy="585216"/>
           </a:xfrm>
           <a:prstGeom prst="rect">
             <a:avLst/>
@@ -5425,7 +5387,7 @@
           <a:p>
             <a:pPr algn="ctr"/>
             <a:r>
-              <a:rPr sz="1600" b="1" i="0">
+              <a:rPr sz="1500" b="1" i="0">
                 <a:solidFill>
                   <a:srgbClr val="FFFFFF"/>
                 </a:solidFill>
@@ -5444,8 +5406,8 @@
         </p:nvSpPr>
         <p:spPr>
           <a:xfrm>
-            <a:off x="4224528" y="1444752"/>
-            <a:ext cx="3813048" cy="4251960"/>
+            <a:off x="4206240" y="1426464"/>
+            <a:ext cx="3813048" cy="4279392"/>
           </a:xfrm>
           <a:prstGeom prst="rect">
             <a:avLst/>
@@ -5489,8 +5451,8 @@
         </p:nvSpPr>
         <p:spPr>
           <a:xfrm>
-            <a:off x="4370832" y="1517904"/>
-            <a:ext cx="3557015" cy="4069080"/>
+            <a:off x="4352544" y="1499616"/>
+            <a:ext cx="3520440" cy="4078224"/>
           </a:xfrm>
           <a:prstGeom prst="rect">
             <a:avLst/>
@@ -5510,16 +5472,13 @@
                   <a:srgbClr val="1A1A1A"/>
                 </a:solidFill>
               </a:rPr>
-              <a:t>1 argument précis + 1 preuve concrète
-+ 1 chiffre si possible.
+              <a:t>1 argument + 1 preuve + 1 chiffre.
 Règles d'or :
-→ 1 seul argument par réponse (pas de liste)
-→ Preuve vérifiable (rapport annuel, audit)
+→ 1 seul argument par réponse
+→ Preuve vérifiable (rapport annuel)
 → Chiffre simple et mémorisable
-Exemple objection financière :
-'10€/mois c'est 33 centimes par jour — moins
-qu'un café. Et cela traite 1 enfant sévèrement
-malnutri en 6 semaines.'</a:t>
+Ex : '10€/mois = 33 centimes/jour
+= 1 enfant traité en 6 semaines'</a:t>
             </a:r>
           </a:p>
         </p:txBody>
@@ -5532,8 +5491,8 @@
         </p:nvSpPr>
         <p:spPr>
           <a:xfrm>
-            <a:off x="8174736" y="804672"/>
-            <a:ext cx="3813048" cy="640080"/>
+            <a:off x="8138159" y="804672"/>
+            <a:ext cx="3813048" cy="621792"/>
           </a:xfrm>
           <a:prstGeom prst="rect">
             <a:avLst/>
@@ -5575,8 +5534,8 @@
         </p:nvSpPr>
         <p:spPr>
           <a:xfrm>
-            <a:off x="8302752" y="822960"/>
-            <a:ext cx="3611879" cy="603504"/>
+            <a:off x="8266175" y="822960"/>
+            <a:ext cx="3593592" cy="585216"/>
           </a:xfrm>
           <a:prstGeom prst="rect">
             <a:avLst/>
@@ -5591,7 +5550,7 @@
           <a:p>
             <a:pPr algn="ctr"/>
             <a:r>
-              <a:rPr sz="1600" b="1" i="0">
+              <a:rPr sz="1500" b="1" i="0">
                 <a:solidFill>
                   <a:srgbClr val="FFFFFF"/>
                 </a:solidFill>
@@ -5610,8 +5569,8 @@
         </p:nvSpPr>
         <p:spPr>
           <a:xfrm>
-            <a:off x="8174736" y="1444752"/>
-            <a:ext cx="3813048" cy="4251960"/>
+            <a:off x="8138159" y="1426464"/>
+            <a:ext cx="3813048" cy="4279392"/>
           </a:xfrm>
           <a:prstGeom prst="rect">
             <a:avLst/>
@@ -5655,8 +5614,8 @@
         </p:nvSpPr>
         <p:spPr>
           <a:xfrm>
-            <a:off x="8321040" y="1517904"/>
-            <a:ext cx="3557015" cy="4069080"/>
+            <a:off x="8284463" y="1499616"/>
+            <a:ext cx="3520440" cy="4078224"/>
           </a:xfrm>
           <a:prstGeom prst="rect">
             <a:avLst/>
@@ -5676,16 +5635,15 @@
                   <a:srgbClr val="1A1A1A"/>
                 </a:solidFill>
               </a:rPr>
-              <a:t>Revenez à la proposition avec naturel.
-Pas de pression. Pas d'insistance agressive.
-Exemples :
-'Est-ce que cela répond à votre question ?'
-'On peut aller plus loin ensemble ?'
-'Qu'est-ce qui vous permettrait de vous sentir
-à l'aise avec cet engagement ?'
-⚠ Ce que vous ne faites pas :
-Relancer avant que le prospect ait eu
-le temps de traiter votre réponse.</a:t>
+              <a:t>Revenez à la proposition.
+Pas de pression.
+'Est-ce que cela répond à
+votre question ?'
+'On peut aller plus loin ?'
+'Qu'est-ce qui vous permettrait
+de vous sentir à l'aise ?'
+⚠ Laissez 3 secondes de silence
+avant de relancer.</a:t>
             </a:r>
           </a:p>
         </p:txBody>
@@ -5698,7 +5656,7 @@
         </p:nvSpPr>
         <p:spPr>
           <a:xfrm>
-            <a:off x="274320" y="5806440"/>
+            <a:off x="274320" y="5797296"/>
             <a:ext cx="11640312" cy="402336"/>
           </a:xfrm>
           <a:prstGeom prst="rect">
@@ -5741,7 +5699,7 @@
         </p:nvSpPr>
         <p:spPr>
           <a:xfrm>
-            <a:off x="411479" y="5879592"/>
+            <a:off x="411479" y="5870448"/>
             <a:ext cx="11365992" cy="256032"/>
           </a:xfrm>
           <a:prstGeom prst="rect">
@@ -5762,7 +5720,7 @@
                   <a:srgbClr val="FFFFFF"/>
                 </a:solidFill>
               </a:rPr>
-              <a:t>Le silence après votre argument est votre allié. Comptez mentalement 1–2–3 avant de relancer. Ce silence donne au prospect le temps de traiter — et souvent de se convaincre lui-même.</a:t>
+              <a:t>Le silence après votre argument est votre allié. Comptez 1–2–3 mentalement avant de relancer.</a:t>
             </a:r>
           </a:p>
         </p:txBody>
@@ -5843,7 +5801,7 @@
             <a:avLst/>
           </a:prstGeom>
           <a:solidFill>
-            <a:srgbClr val="005555"/>
+            <a:srgbClr val="005050"/>
           </a:solidFill>
           <a:ln>
             <a:noFill/>
@@ -5922,8 +5880,8 @@
         </p:nvSpPr>
         <p:spPr>
           <a:xfrm>
-            <a:off x="164592" y="73152"/>
-            <a:ext cx="2011680" cy="347472"/>
+            <a:off x="164592" y="91440"/>
+            <a:ext cx="1920240" cy="329184"/>
           </a:xfrm>
           <a:prstGeom prst="rect">
             <a:avLst/>
@@ -5956,8 +5914,8 @@
         </p:nvSpPr>
         <p:spPr>
           <a:xfrm>
-            <a:off x="2286000" y="91440"/>
-            <a:ext cx="36576" cy="502920"/>
+            <a:off x="2212848" y="109728"/>
+            <a:ext cx="36576" cy="475488"/>
           </a:xfrm>
           <a:prstGeom prst="rect">
             <a:avLst/>
@@ -5999,8 +5957,8 @@
         </p:nvSpPr>
         <p:spPr>
           <a:xfrm>
-            <a:off x="2423160" y="91440"/>
-            <a:ext cx="9235440" cy="502920"/>
+            <a:off x="2350008" y="91440"/>
+            <a:ext cx="8823960" cy="502920"/>
           </a:xfrm>
           <a:prstGeom prst="rect">
             <a:avLst/>
@@ -6041,8 +5999,8 @@
         </p:blipFill>
         <p:spPr>
           <a:xfrm>
-            <a:off x="11247120" y="0"/>
-            <a:ext cx="822960" cy="676656"/>
+            <a:off x="11228832" y="0"/>
+            <a:ext cx="841248" cy="676656"/>
           </a:xfrm>
           <a:prstGeom prst="rect">
             <a:avLst/>
@@ -6064,7 +6022,7 @@
             <a:avLst/>
           </a:prstGeom>
           <a:solidFill>
-            <a:srgbClr val="005555"/>
+            <a:srgbClr val="005050"/>
           </a:solidFill>
           <a:ln>
             <a:noFill/>
@@ -6135,13 +6093,13 @@
         <p:spPr>
           <a:xfrm>
             <a:off x="274320" y="804672"/>
-            <a:ext cx="2328062" cy="502920"/>
+            <a:ext cx="2328062" cy="475488"/>
           </a:xfrm>
           <a:prstGeom prst="rect">
             <a:avLst/>
           </a:prstGeom>
           <a:solidFill>
-            <a:srgbClr val="005555"/>
+            <a:srgbClr val="005050"/>
           </a:solidFill>
           <a:ln>
             <a:noFill/>
@@ -6178,7 +6136,7 @@
         <p:spPr>
           <a:xfrm>
             <a:off x="365760" y="822960"/>
-            <a:ext cx="2181758" cy="466344"/>
+            <a:ext cx="2181758" cy="438912"/>
           </a:xfrm>
           <a:prstGeom prst="rect">
             <a:avLst/>
@@ -6212,8 +6170,8 @@
         </p:nvSpPr>
         <p:spPr>
           <a:xfrm>
-            <a:off x="274320" y="1307592"/>
-            <a:ext cx="2328062" cy="4370832"/>
+            <a:off x="274320" y="1280160"/>
+            <a:ext cx="2328062" cy="4434840"/>
           </a:xfrm>
           <a:prstGeom prst="rect">
             <a:avLst/>
@@ -6223,7 +6181,7 @@
           </a:solidFill>
           <a:ln w="15240">
             <a:solidFill>
-              <a:srgbClr val="005555"/>
+              <a:srgbClr val="005050"/>
             </a:solidFill>
           </a:ln>
         </p:spPr>
@@ -6257,8 +6215,8 @@
         </p:nvSpPr>
         <p:spPr>
           <a:xfrm>
-            <a:off x="365760" y="1371600"/>
-            <a:ext cx="2181758" cy="4187952"/>
+            <a:off x="365760" y="1344168"/>
+            <a:ext cx="2181758" cy="4251960"/>
           </a:xfrm>
           <a:prstGeom prst="rect">
             <a:avLst/>
@@ -6300,7 +6258,7 @@
         <p:spPr>
           <a:xfrm>
             <a:off x="2620670" y="804672"/>
-            <a:ext cx="2328062" cy="502920"/>
+            <a:ext cx="2328062" cy="475488"/>
           </a:xfrm>
           <a:prstGeom prst="rect">
             <a:avLst/>
@@ -6343,7 +6301,7 @@
         <p:spPr>
           <a:xfrm>
             <a:off x="2712110" y="822960"/>
-            <a:ext cx="2181758" cy="466344"/>
+            <a:ext cx="2181758" cy="438912"/>
           </a:xfrm>
           <a:prstGeom prst="rect">
             <a:avLst/>
@@ -6364,7 +6322,7 @@
                 </a:solidFill>
               </a:rPr>
               <a:t>CAT. 2
-OBJECTIONS FINANCIÈRES</a:t>
+FINANCIÈRES</a:t>
             </a:r>
           </a:p>
         </p:txBody>
@@ -6377,8 +6335,8 @@
         </p:nvSpPr>
         <p:spPr>
           <a:xfrm>
-            <a:off x="2620670" y="1307592"/>
-            <a:ext cx="2328062" cy="4370832"/>
+            <a:off x="2620670" y="1280160"/>
+            <a:ext cx="2328062" cy="4434840"/>
           </a:xfrm>
           <a:prstGeom prst="rect">
             <a:avLst/>
@@ -6422,8 +6380,8 @@
         </p:nvSpPr>
         <p:spPr>
           <a:xfrm>
-            <a:off x="2712110" y="1371600"/>
-            <a:ext cx="2181758" cy="4187952"/>
+            <a:off x="2712110" y="1344168"/>
+            <a:ext cx="2181758" cy="4251960"/>
           </a:xfrm>
           <a:prstGeom prst="rect">
             <a:avLst/>
@@ -6460,7 +6418,7 @@
         <p:spPr>
           <a:xfrm>
             <a:off x="4967020" y="804672"/>
-            <a:ext cx="2328062" cy="502920"/>
+            <a:ext cx="2328062" cy="475488"/>
           </a:xfrm>
           <a:prstGeom prst="rect">
             <a:avLst/>
@@ -6503,7 +6461,7 @@
         <p:spPr>
           <a:xfrm>
             <a:off x="5058460" y="822960"/>
-            <a:ext cx="2181758" cy="466344"/>
+            <a:ext cx="2181758" cy="438912"/>
           </a:xfrm>
           <a:prstGeom prst="rect">
             <a:avLst/>
@@ -6524,7 +6482,7 @@
                 </a:solidFill>
               </a:rPr>
               <a:t>CAT. 3
-CONTRE LE DON RÉGULIER (PA)</a:t>
+CONTRE LE PA</a:t>
             </a:r>
           </a:p>
         </p:txBody>
@@ -6537,8 +6495,8 @@
         </p:nvSpPr>
         <p:spPr>
           <a:xfrm>
-            <a:off x="4967020" y="1307592"/>
-            <a:ext cx="2328062" cy="4370832"/>
+            <a:off x="4967020" y="1280160"/>
+            <a:ext cx="2328062" cy="4434840"/>
           </a:xfrm>
           <a:prstGeom prst="rect">
             <a:avLst/>
@@ -6582,8 +6540,8 @@
         </p:nvSpPr>
         <p:spPr>
           <a:xfrm>
-            <a:off x="5058460" y="1371600"/>
-            <a:ext cx="2181758" cy="4187952"/>
+            <a:off x="5058460" y="1344168"/>
+            <a:ext cx="2181758" cy="4251960"/>
           </a:xfrm>
           <a:prstGeom prst="rect">
             <a:avLst/>
@@ -6603,7 +6561,7 @@
                   <a:srgbClr val="1A1A1A"/>
                 </a:solidFill>
               </a:rPr>
-              <a:t>Sur le prélèvement automatique — 3 objections :
+              <a:t>Sur le prélèvement — 3 objections :
 • Préfère le don ponctuel
 • N'aime pas l'engagement mensuel
 • Dernier positionnement PA</a:t>
@@ -6620,7 +6578,7 @@
         <p:spPr>
           <a:xfrm>
             <a:off x="7313371" y="804672"/>
-            <a:ext cx="2328062" cy="502920"/>
+            <a:ext cx="2328062" cy="475488"/>
           </a:xfrm>
           <a:prstGeom prst="rect">
             <a:avLst/>
@@ -6663,7 +6621,7 @@
         <p:spPr>
           <a:xfrm>
             <a:off x="7404811" y="822960"/>
-            <a:ext cx="2181758" cy="466344"/>
+            <a:ext cx="2181758" cy="438912"/>
           </a:xfrm>
           <a:prstGeom prst="rect">
             <a:avLst/>
@@ -6697,8 +6655,8 @@
         </p:nvSpPr>
         <p:spPr>
           <a:xfrm>
-            <a:off x="7313371" y="1307592"/>
-            <a:ext cx="2328062" cy="4370832"/>
+            <a:off x="7313371" y="1280160"/>
+            <a:ext cx="2328062" cy="4434840"/>
           </a:xfrm>
           <a:prstGeom prst="rect">
             <a:avLst/>
@@ -6742,8 +6700,8 @@
         </p:nvSpPr>
         <p:spPr>
           <a:xfrm>
-            <a:off x="7404811" y="1371600"/>
-            <a:ext cx="2181758" cy="4187952"/>
+            <a:off x="7404811" y="1344168"/>
+            <a:ext cx="2181758" cy="4251960"/>
           </a:xfrm>
           <a:prstGeom prst="rect">
             <a:avLst/>
@@ -6764,10 +6722,9 @@
                 </a:solidFill>
               </a:rPr>
               <a:t>Sur la sécurité bancaire :
-• Réassurance sur le protocole SEPA
-• Sécurité des données bancaires
-• Mandat SEPA : droits du donateur
-• Arrêt / modification possible à tout moment</a:t>
+• Protocole SEPA expliqué
+• Droits du donateur (arrêt 1 clic)
+• Réassurance données bancaires</a:t>
             </a:r>
           </a:p>
         </p:txBody>
@@ -6781,7 +6738,7 @@
         <p:spPr>
           <a:xfrm>
             <a:off x="9659721" y="804672"/>
-            <a:ext cx="2328062" cy="502920"/>
+            <a:ext cx="2328062" cy="475488"/>
           </a:xfrm>
           <a:prstGeom prst="rect">
             <a:avLst/>
@@ -6824,7 +6781,7 @@
         <p:spPr>
           <a:xfrm>
             <a:off x="9751161" y="822960"/>
-            <a:ext cx="2181758" cy="466344"/>
+            <a:ext cx="2181758" cy="438912"/>
           </a:xfrm>
           <a:prstGeom prst="rect">
             <a:avLst/>
@@ -6845,7 +6802,7 @@
                 </a:solidFill>
               </a:rPr>
               <a:t>CAT. 5
-OBJECTIONS CONFLICTUELLES</a:t>
+CONFLICTUELLES</a:t>
             </a:r>
           </a:p>
         </p:txBody>
@@ -6858,8 +6815,8 @@
         </p:nvSpPr>
         <p:spPr>
           <a:xfrm>
-            <a:off x="9659721" y="1307592"/>
-            <a:ext cx="2328062" cy="4370832"/>
+            <a:off x="9659721" y="1280160"/>
+            <a:ext cx="2328062" cy="4434840"/>
           </a:xfrm>
           <a:prstGeom prst="rect">
             <a:avLst/>
@@ -6903,8 +6860,8 @@
         </p:nvSpPr>
         <p:spPr>
           <a:xfrm>
-            <a:off x="9751161" y="1371600"/>
-            <a:ext cx="2181758" cy="4187952"/>
+            <a:off x="9751161" y="1344168"/>
+            <a:ext cx="2181758" cy="4251960"/>
           </a:xfrm>
           <a:prstGeom prst="rect">
             <a:avLst/>
@@ -6927,11 +6884,9 @@
               <a:t>Objections sensibles :
 • Origine de l'appel
 • Source du numéro
-• Droits légaux RGPD
+• RGPD / Droits légaux
 • Bloctel / liste rouge
-• Accent de l'appelant
-• Connaissance d'un membre
-• Identité de l'appelant</a:t>
+• Accent · Identité de l'appelant</a:t>
             </a:r>
           </a:p>
         </p:txBody>
@@ -7008,7 +6963,459 @@
                   <a:srgbClr val="FFFFFF"/>
                 </a:solidFill>
               </a:rPr>
-              <a:t>En production, la majorité des appels se terminent à la Catégorie 1. Maîtriser ces 8 objections initiales est la clé pour atteindre vos 9 CU/H.</a:t>
+              <a:t>La majorité des appels se termine à Cat.1. Maîtriser ces 8 objections = atteindre vos 9 CU/H.</a:t>
+            </a:r>
+          </a:p>
+        </p:txBody>
+      </p:sp>
+    </p:spTree>
+  </p:cSld>
+  <p:clrMapOvr>
+    <a:masterClrMapping/>
+  </p:clrMapOvr>
+</p:sld>
+</file>
+
+<file path=ppt/slides/slide5.xml><?xml version="1.0" encoding="utf-8"?>
+<p:sld xmlns:a="http://schemas.openxmlformats.org/drawingml/2006/main" xmlns:p="http://schemas.openxmlformats.org/presentationml/2006/main" xmlns:r="http://schemas.openxmlformats.org/officeDocument/2006/relationships">
+  <p:cSld>
+    <p:spTree>
+      <p:nvGrpSpPr>
+        <p:cNvPr id="1" name=""/>
+        <p:cNvGrpSpPr/>
+        <p:nvPr/>
+      </p:nvGrpSpPr>
+      <p:grpSpPr/>
+      <p:sp>
+        <p:nvSpPr>
+          <p:cNvPr id="2" name="Rectangle 1"/>
+          <p:cNvSpPr/>
+          <p:nvPr/>
+        </p:nvSpPr>
+        <p:spPr>
+          <a:xfrm>
+            <a:off x="0" y="0"/>
+            <a:ext cx="12188952" cy="6858000"/>
+          </a:xfrm>
+          <a:prstGeom prst="rect">
+            <a:avLst/>
+          </a:prstGeom>
+          <a:solidFill>
+            <a:srgbClr val="005050"/>
+          </a:solidFill>
+          <a:ln>
+            <a:noFill/>
+          </a:ln>
+        </p:spPr>
+        <p:style>
+          <a:lnRef idx="1">
+            <a:schemeClr val="accent1"/>
+          </a:lnRef>
+          <a:fillRef idx="3">
+            <a:schemeClr val="accent1"/>
+          </a:fillRef>
+          <a:effectRef idx="2">
+            <a:schemeClr val="accent1"/>
+          </a:effectRef>
+          <a:fontRef idx="minor">
+            <a:schemeClr val="lt1"/>
+          </a:fontRef>
+        </p:style>
+        <p:txBody>
+          <a:bodyPr rtlCol="0" anchor="ctr"/>
+          <a:lstStyle/>
+          <a:p>
+            <a:pPr algn="ctr"/>
+          </a:p>
+        </p:txBody>
+      </p:sp>
+      <p:sp>
+        <p:nvSpPr>
+          <p:cNvPr id="3" name="Rectangle 2"/>
+          <p:cNvSpPr/>
+          <p:nvPr/>
+        </p:nvSpPr>
+        <p:spPr>
+          <a:xfrm>
+            <a:off x="0" y="0"/>
+            <a:ext cx="12188952" cy="73152"/>
+          </a:xfrm>
+          <a:prstGeom prst="rect">
+            <a:avLst/>
+          </a:prstGeom>
+          <a:solidFill>
+            <a:srgbClr val="00AAAA"/>
+          </a:solidFill>
+          <a:ln>
+            <a:noFill/>
+          </a:ln>
+        </p:spPr>
+        <p:style>
+          <a:lnRef idx="1">
+            <a:schemeClr val="accent1"/>
+          </a:lnRef>
+          <a:fillRef idx="3">
+            <a:schemeClr val="accent1"/>
+          </a:fillRef>
+          <a:effectRef idx="2">
+            <a:schemeClr val="accent1"/>
+          </a:effectRef>
+          <a:fontRef idx="minor">
+            <a:schemeClr val="lt1"/>
+          </a:fontRef>
+        </p:style>
+        <p:txBody>
+          <a:bodyPr rtlCol="0" anchor="ctr"/>
+          <a:lstStyle/>
+          <a:p>
+            <a:pPr algn="ctr"/>
+          </a:p>
+        </p:txBody>
+      </p:sp>
+      <p:sp>
+        <p:nvSpPr>
+          <p:cNvPr id="4" name="Rectangle 3"/>
+          <p:cNvSpPr/>
+          <p:nvPr/>
+        </p:nvSpPr>
+        <p:spPr>
+          <a:xfrm>
+            <a:off x="0" y="6784848"/>
+            <a:ext cx="12188952" cy="73152"/>
+          </a:xfrm>
+          <a:prstGeom prst="rect">
+            <a:avLst/>
+          </a:prstGeom>
+          <a:solidFill>
+            <a:srgbClr val="00AAAA"/>
+          </a:solidFill>
+          <a:ln>
+            <a:noFill/>
+          </a:ln>
+        </p:spPr>
+        <p:style>
+          <a:lnRef idx="1">
+            <a:schemeClr val="accent1"/>
+          </a:lnRef>
+          <a:fillRef idx="3">
+            <a:schemeClr val="accent1"/>
+          </a:fillRef>
+          <a:effectRef idx="2">
+            <a:schemeClr val="accent1"/>
+          </a:effectRef>
+          <a:fontRef idx="minor">
+            <a:schemeClr val="lt1"/>
+          </a:fontRef>
+        </p:style>
+        <p:txBody>
+          <a:bodyPr rtlCol="0" anchor="ctr"/>
+          <a:lstStyle/>
+          <a:p>
+            <a:pPr algn="ctr"/>
+          </a:p>
+        </p:txBody>
+      </p:sp>
+      <p:sp>
+        <p:nvSpPr>
+          <p:cNvPr id="5" name="Oval 4"/>
+          <p:cNvSpPr/>
+          <p:nvPr/>
+        </p:nvSpPr>
+        <p:spPr>
+          <a:xfrm>
+            <a:off x="4114800" y="1097280"/>
+            <a:ext cx="3931920" cy="3931920"/>
+          </a:xfrm>
+          <a:prstGeom prst="ellipse">
+            <a:avLst/>
+          </a:prstGeom>
+          <a:solidFill>
+            <a:srgbClr val="006A6A"/>
+          </a:solidFill>
+          <a:ln>
+            <a:noFill/>
+          </a:ln>
+        </p:spPr>
+        <p:style>
+          <a:lnRef idx="1">
+            <a:schemeClr val="accent1"/>
+          </a:lnRef>
+          <a:fillRef idx="3">
+            <a:schemeClr val="accent1"/>
+          </a:fillRef>
+          <a:effectRef idx="2">
+            <a:schemeClr val="accent1"/>
+          </a:effectRef>
+          <a:fontRef idx="minor">
+            <a:schemeClr val="lt1"/>
+          </a:fontRef>
+        </p:style>
+        <p:txBody>
+          <a:bodyPr rtlCol="0" anchor="ctr"/>
+          <a:lstStyle/>
+          <a:p>
+            <a:pPr algn="ctr"/>
+          </a:p>
+        </p:txBody>
+      </p:sp>
+      <p:sp>
+        <p:nvSpPr>
+          <p:cNvPr id="6" name="TextBox 5"/>
+          <p:cNvSpPr txBox="1"/>
+          <p:nvPr/>
+        </p:nvSpPr>
+        <p:spPr>
+          <a:xfrm>
+            <a:off x="5029200" y="2011680"/>
+            <a:ext cx="2103120" cy="1371600"/>
+          </a:xfrm>
+          <a:prstGeom prst="rect">
+            <a:avLst/>
+          </a:prstGeom>
+          <a:noFill/>
+        </p:spPr>
+        <p:txBody>
+          <a:bodyPr wrap="square">
+            <a:spAutoFit/>
+          </a:bodyPr>
+          <a:lstStyle/>
+          <a:p>
+            <a:pPr algn="ctr"/>
+            <a:r>
+              <a:rPr sz="4800" b="0" i="0">
+                <a:solidFill>
+                  <a:srgbClr val="FFFFFF"/>
+                </a:solidFill>
+              </a:rPr>
+              <a:t>🙏</a:t>
+            </a:r>
+          </a:p>
+        </p:txBody>
+      </p:sp>
+      <p:sp>
+        <p:nvSpPr>
+          <p:cNvPr id="7" name="TextBox 6"/>
+          <p:cNvSpPr txBox="1"/>
+          <p:nvPr/>
+        </p:nvSpPr>
+        <p:spPr>
+          <a:xfrm>
+            <a:off x="1371600" y="1280160"/>
+            <a:ext cx="9418320" cy="1097280"/>
+          </a:xfrm>
+          <a:prstGeom prst="rect">
+            <a:avLst/>
+          </a:prstGeom>
+          <a:noFill/>
+        </p:spPr>
+        <p:txBody>
+          <a:bodyPr wrap="square">
+            <a:spAutoFit/>
+          </a:bodyPr>
+          <a:lstStyle/>
+          <a:p>
+            <a:pPr algn="ctr"/>
+            <a:r>
+              <a:rPr sz="4600" b="1" i="0">
+                <a:solidFill>
+                  <a:srgbClr val="FFFFFF"/>
+                </a:solidFill>
+              </a:rPr>
+              <a:t>Merci à Tous !</a:t>
+            </a:r>
+          </a:p>
+        </p:txBody>
+      </p:sp>
+      <p:sp>
+        <p:nvSpPr>
+          <p:cNvPr id="8" name="TextBox 7"/>
+          <p:cNvSpPr txBox="1"/>
+          <p:nvPr/>
+        </p:nvSpPr>
+        <p:spPr>
+          <a:xfrm>
+            <a:off x="1371600" y="2606040"/>
+            <a:ext cx="9418320" cy="548640"/>
+          </a:xfrm>
+          <a:prstGeom prst="rect">
+            <a:avLst/>
+          </a:prstGeom>
+          <a:noFill/>
+        </p:spPr>
+        <p:txBody>
+          <a:bodyPr wrap="square">
+            <a:spAutoFit/>
+          </a:bodyPr>
+          <a:lstStyle/>
+          <a:p>
+            <a:pPr algn="ctr"/>
+            <a:r>
+              <a:rPr sz="1800" b="0" i="1">
+                <a:solidFill>
+                  <a:srgbClr val="CCEEEE"/>
+                </a:solidFill>
+              </a:rPr>
+              <a:t>Votre engagement fait la différence pour les enfants du monde entier.</a:t>
+            </a:r>
+          </a:p>
+        </p:txBody>
+      </p:sp>
+      <p:sp>
+        <p:nvSpPr>
+          <p:cNvPr id="9" name="TextBox 8"/>
+          <p:cNvSpPr txBox="1"/>
+          <p:nvPr/>
+        </p:nvSpPr>
+        <p:spPr>
+          <a:xfrm>
+            <a:off x="1371600" y="3246120"/>
+            <a:ext cx="9418320" cy="347472"/>
+          </a:xfrm>
+          <a:prstGeom prst="rect">
+            <a:avLst/>
+          </a:prstGeom>
+          <a:noFill/>
+        </p:spPr>
+        <p:txBody>
+          <a:bodyPr wrap="square">
+            <a:spAutoFit/>
+          </a:bodyPr>
+          <a:lstStyle/>
+          <a:p>
+            <a:pPr algn="ctr"/>
+            <a:r>
+              <a:rPr sz="1200" b="0" i="0">
+                <a:solidFill>
+                  <a:srgbClr val="88DDDD"/>
+                </a:solidFill>
+              </a:rPr>
+              <a:t>BOOK J4  ·  Journée 4  ·  Objections UNICEF France × FIDELIS</a:t>
+            </a:r>
+          </a:p>
+        </p:txBody>
+      </p:sp>
+      <p:sp>
+        <p:nvSpPr>
+          <p:cNvPr id="10" name="TextBox 9"/>
+          <p:cNvSpPr txBox="1"/>
+          <p:nvPr/>
+        </p:nvSpPr>
+        <p:spPr>
+          <a:xfrm>
+            <a:off x="1828800" y="3749039"/>
+            <a:ext cx="8531352" cy="457200"/>
+          </a:xfrm>
+          <a:prstGeom prst="rect">
+            <a:avLst/>
+          </a:prstGeom>
+          <a:noFill/>
+        </p:spPr>
+        <p:txBody>
+          <a:bodyPr wrap="square">
+            <a:spAutoFit/>
+          </a:bodyPr>
+          <a:lstStyle/>
+          <a:p>
+            <a:pPr algn="ctr"/>
+            <a:r>
+              <a:rPr sz="1400" b="0" i="1">
+                <a:solidFill>
+                  <a:srgbClr val="AADDDD"/>
+                </a:solidFill>
+              </a:rPr>
+              <a:t>« Le refus d'aujourd'hui peut être le don de demain »</a:t>
+            </a:r>
+          </a:p>
+        </p:txBody>
+      </p:sp>
+      <p:sp>
+        <p:nvSpPr>
+          <p:cNvPr id="11" name="TextBox 10"/>
+          <p:cNvSpPr txBox="1"/>
+          <p:nvPr/>
+        </p:nvSpPr>
+        <p:spPr>
+          <a:xfrm>
+            <a:off x="0" y="4572000"/>
+            <a:ext cx="12188952" cy="329184"/>
+          </a:xfrm>
+          <a:prstGeom prst="rect">
+            <a:avLst/>
+          </a:prstGeom>
+          <a:noFill/>
+        </p:spPr>
+        <p:txBody>
+          <a:bodyPr wrap="square">
+            <a:spAutoFit/>
+          </a:bodyPr>
+          <a:lstStyle/>
+          <a:p>
+            <a:pPr algn="ctr"/>
+            <a:r>
+              <a:rPr sz="1000" b="0" i="0">
+                <a:solidFill>
+                  <a:srgbClr val="88DDDD"/>
+                </a:solidFill>
+              </a:rPr>
+              <a:t>SHY-Performance  ·  Formation FIM  ·  UNICEF France  ·  V6-01062026SHY-TE</a:t>
+            </a:r>
+          </a:p>
+        </p:txBody>
+      </p:sp>
+      <p:pic>
+        <p:nvPicPr>
+          <p:cNvPr id="12" name="Picture 11" descr="shy_logo_v2.png"/>
+          <p:cNvPicPr>
+            <a:picLocks noChangeAspect="1"/>
+          </p:cNvPicPr>
+          <p:nvPr/>
+        </p:nvPicPr>
+        <p:blipFill>
+          <a:blip r:embed="rId2"/>
+          <a:stretch>
+            <a:fillRect/>
+          </a:stretch>
+        </p:blipFill>
+        <p:spPr>
+          <a:xfrm>
+            <a:off x="5669280" y="5120640"/>
+            <a:ext cx="914400" cy="896112"/>
+          </a:xfrm>
+          <a:prstGeom prst="rect">
+            <a:avLst/>
+          </a:prstGeom>
+        </p:spPr>
+      </p:pic>
+      <p:sp>
+        <p:nvSpPr>
+          <p:cNvPr id="13" name="TextBox 12"/>
+          <p:cNvSpPr txBox="1"/>
+          <p:nvPr/>
+        </p:nvSpPr>
+        <p:spPr>
+          <a:xfrm>
+            <a:off x="0" y="6035040"/>
+            <a:ext cx="12188952" cy="329184"/>
+          </a:xfrm>
+          <a:prstGeom prst="rect">
+            <a:avLst/>
+          </a:prstGeom>
+          <a:noFill/>
+        </p:spPr>
+        <p:txBody>
+          <a:bodyPr wrap="square">
+            <a:spAutoFit/>
+          </a:bodyPr>
+          <a:lstStyle/>
+          <a:p>
+            <a:pPr algn="ctr"/>
+            <a:r>
+              <a:rPr sz="1000" b="1" i="0">
+                <a:solidFill>
+                  <a:srgbClr val="FFFFFF"/>
+                </a:solidFill>
+              </a:rPr>
+              <a:t>SHY-Performance  ×  FIDELIS  ×  UNICEF France</a:t>
             </a:r>
           </a:p>
         </p:txBody>
